--- a/downloads/presentations/modules/lesson-22-agentic-workflow-design-and-orchestration.pptx
+++ b/downloads/presentations/modules/lesson-22-agentic-workflow-design-and-orchestration.pptx
@@ -25,9 +25,11 @@
     <p:sldId id="273" r:id="rId19"/>
     <p:sldId id="274" r:id="rId20"/>
     <p:sldId id="275" r:id="rId21"/>
+    <p:sldId id="276" r:id="rId22"/>
+    <p:sldId id="277" r:id="rId23"/>
   </p:sldIdLst>
   <p:notesMasterIdLst>
-    <p:notesMasterId r:id="rId22"/>
+    <p:notesMasterId r:id="rId24"/>
   </p:notesMasterIdLst>
   <p:sldSz cx="12192000" cy="6858000"/>
   <p:notesSz cx="6858000" cy="12192000"/>
@@ -610,10 +612,10 @@
           <a:p>
             <a:r>
               <a:rPr lang="en-US" dirty="0"/>
-              <a:t>Risks, Failure Modes, and Guardrails
-Excessive agency. An agent may take actions beyond intended scope. Guardrails include narrow goals, allowed-action lists, prohibited actions, and approval gates.
-Unauthorized system access. Tool access may expose sensitive data or functions. Guardrails include least privilege, scoped credentials, role-based access, and audit logs.
-Error propagation. One wrong step may trigger downstream errors. Guardrails include checkpoints, validation, rollback, and staged deployment.</a:t>
+              <a:t>Technical Deep Dive
+Agentic workflow design begins with the goal. The goal should be narrow and operationally defined. “Help with surveillance” is too broad. “Draft a summary of new records and create a review task for a supervisor when defined criteria are met” is more suitable. Narrow goals make it easier to define tools, permissions, validation, and monitoring.
+Tool access is a central design decision. An agent may be allowed to search documents, query a database, create a task, send a draft message, or update a record. Each tool should be reviewed for sensitivity, consequence, and reversibility. Read-only access is generally lower risk than write access. External communication and system-of-record updates usually require human approval.
+Memory should be handled carefully. Some agents retain context across interactions or workflows. Persistent memory may improve continuity but can create privacy, accuracy, and records risks. Agencies should define what may be stored, for how long, who can access it, and how it can be corrected or deleted.</a:t>
             </a:r>
             <a:endParaRPr lang="en-US" dirty="0"/>
           </a:p>
@@ -701,8 +703,9 @@
           <a:p>
             <a:r>
               <a:rPr lang="en-US" dirty="0"/>
-              <a:t>Risks, Failure Modes, and Guardrails
-Unclear accountability. Staff may not know who is responsible for agent actions. Guardrails include role definitions, review records, and governance ownership.</a:t>
+              <a:t>Technical Deep Dive
+Human oversight should match risk. Human-in-the-loop approval is appropriate for actions that affect records, services, public communication, legal obligations, or partners. Human-on-the-loop monitoring may be appropriate for lower-risk background tasks if users can intervene quickly. Fully automated action should be limited to low-risk, well-tested, reversible tasks.
+Agentic workflows require incident response planning. Agencies should define what counts as an agentic incident, such as unauthorized action, data exposure, repeated error, misrouting, unsafe recommendation, or failure to escalate. Logs should support reconstruction of prompts, retrieved sources, tool calls, actions, approvals, and outcomes.</a:t>
             </a:r>
             <a:endParaRPr lang="en-US" dirty="0"/>
           </a:p>
@@ -790,9 +793,10 @@
           <a:p>
             <a:r>
               <a:rPr lang="en-US" dirty="0"/>
-              <a:t>Application to AI-Supported Workflows
-Agentic workflows may combine RAG, APIs, prompts, classification models, workflow rules, and messaging systems. They are most appropriate when tasks are repetitive, bounded, reviewable, and supported by reliable data. They are least appropriate when the task requires complex judgment, legal interpretation, community sensitivity, or irreversible action without review.
-Public health agencies should pilot agentic workflows in limited, low-risk settings before expanding. Monitoring should include tool calls, failed actions, overrides, user feedback, time saved, error types, and unintended consequences.</a:t>
+              <a:t>Risks, Failure Modes, and Guardrails
+Excessive agency. An agent may take actions beyond intended scope. Guardrails include narrow goals, allowed-action lists, prohibited actions, and approval gates.
+Unauthorized system access. Tool access may expose sensitive data or functions. Guardrails include least privilege, scoped credentials, role-based access, and audit logs.
+Error propagation. One wrong step may trigger downstream errors. Guardrails include checkpoints, validation, rollback, and staged deployment.</a:t>
             </a:r>
             <a:endParaRPr lang="en-US" dirty="0"/>
           </a:p>
@@ -880,10 +884,8 @@
           <a:p>
             <a:r>
               <a:rPr lang="en-US" dirty="0"/>
-              <a:t>Reflection Questions
-What goal would the agent pursue, and how narrowly can it be defined?
-Which tools or systems would the agent access?
-Which actions are allowed, prohibited, or require human approval?</a:t>
+              <a:t>Risks, Failure Modes, and Guardrails
+Unclear accountability. Staff may not know who is responsible for agent actions. Guardrails include role definitions, review records, and governance ownership.</a:t>
             </a:r>
             <a:endParaRPr lang="en-US" dirty="0"/>
           </a:p>
@@ -971,9 +973,9 @@
           <a:p>
             <a:r>
               <a:rPr lang="en-US" dirty="0"/>
-              <a:t>Reflection Questions
-What logs are needed to reconstruct agent behavior?
-What rollback or correction process is needed if the agent makes an error?</a:t>
+              <a:t>Application to AI-Supported Workflows
+Agentic workflows may combine RAG, APIs, prompts, classification models, workflow rules, and messaging systems. They are most appropriate when tasks are repetitive, bounded, reviewable, and supported by reliable data. They are least appropriate when the task requires complex judgment, legal interpretation, community sensitivity, or irreversible action without review.
+Public health agencies should pilot agentic workflows in limited, low-risk settings before expanding. Monitoring should include tool calls, failed actions, overrides, user feedback, time saved, error types, and unintended consequences.</a:t>
             </a:r>
             <a:endParaRPr lang="en-US" dirty="0"/>
           </a:p>
@@ -1061,9 +1063,10 @@
           <a:p>
             <a:r>
               <a:rPr lang="en-US" dirty="0"/>
-              <a:t>Practical Exercise
-Create an agentic workflow control plan. Include the goal, trigger, data sources, tools, allowed actions, prohibited actions, approval points, memory rules, logs, monitoring indicators, rollback process, incident triggers, and responsible owner.
-The plan should identify at least one low-risk pilot boundary and one condition that would require pausing the workflow.</a:t>
+              <a:t>Reflection Questions
+What goal would the agent pursue, and how narrowly can it be defined?
+Which tools or systems would the agent access?
+Which actions are allowed, prohibited, or require human approval?</a:t>
             </a:r>
             <a:endParaRPr lang="en-US" dirty="0"/>
           </a:p>
@@ -1151,10 +1154,9 @@
           <a:p>
             <a:r>
               <a:rPr lang="en-US" dirty="0"/>
-              <a:t>Expected Artifact or Evidence
-Agentic workflow control plan
-Allowed/prohibited action list
-Human approval and escalation map</a:t>
+              <a:t>Reflection Questions
+What logs are needed to reconstruct agent behavior?
+What rollback or correction process is needed if the agent makes an error?</a:t>
             </a:r>
             <a:endParaRPr lang="en-US" dirty="0"/>
           </a:p>
@@ -1242,8 +1244,9 @@
           <a:p>
             <a:r>
               <a:rPr lang="en-US" dirty="0"/>
-              <a:t>Expected Artifact or Evidence
-Tool-call logging requirements</a:t>
+              <a:t>Practical Exercise
+Create an agentic workflow control plan. Include the goal, trigger, data sources, tools, allowed actions, prohibited actions, approval points, memory rules, logs, monitoring indicators, rollback process, incident triggers, and responsible owner.
+The plan should identify at least one low-risk pilot boundary and one condition that would require pausing the workflow.</a:t>
             </a:r>
             <a:endParaRPr lang="en-US" dirty="0"/>
           </a:p>
@@ -1331,11 +1334,10 @@
           <a:p>
             <a:r>
               <a:rPr lang="en-US" dirty="0"/>
-              <a:t>Expected Assignment
+              <a:t>Expected Artifact or Evidence
 Agentic workflow control plan
 Allowed/prohibited action list
-Human approval and escalation map
-Tool-call logging requirements</a:t>
+Human approval and escalation map</a:t>
             </a:r>
             <a:endParaRPr lang="en-US" dirty="0"/>
           </a:p>
@@ -1423,12 +1425,8 @@
           <a:p>
             <a:r>
               <a:rPr lang="en-US" dirty="0"/>
-              <a:t>Knowledge Check
-1. What makes agentic AI different from simple drafting support?
-2. Which action usually requires stronger oversight?
-3. What is orchestration?
-4. What should happen when an agent encounters an out-of-scope request?
-5. What is strong completion evidence for this module?</a:t>
+              <a:t>Expected Artifact or Evidence
+Tool-call logging requirements</a:t>
             </a:r>
             <a:endParaRPr lang="en-US" dirty="0"/>
           </a:p>
@@ -1608,11 +1606,11 @@
           <a:p>
             <a:r>
               <a:rPr lang="en-US" dirty="0"/>
-              <a:t>References and Resources
-OWASP Top 10 for Large Language Model Applications: https://owasp.org/www-project-top-10-for-large-language-model-applications/
-NIST AI RMF Generative AI Profile: https://www.nist.gov/publications/artificial-intelligence-risk-management-framework-generative-artificial-intelligence
-NIST Artificial Intelligence Risk Management Framework: https://www.nist.gov/itl/ai-risk-management-framework
-NIST Privacy Framework: https://www.nist.gov/privacy-framework</a:t>
+              <a:t>Expected Assignment
+Agentic workflow control plan
+Allowed/prohibited action list
+Human approval and escalation map
+Tool-call logging requirements</a:t>
             </a:r>
             <a:endParaRPr lang="en-US" dirty="0"/>
           </a:p>
@@ -1636,6 +1634,191 @@
             <a:fld id="{F7021451-1387-4CA6-816F-3879F97B5CBC}" type="slidenum">
               <a:rPr lang="en-US"/>
               <a:t>20</a:t>
+            </a:fld>
+            <a:endParaRPr lang="en-US"/>
+          </a:p>
+        </p:txBody>
+      </p:sp>
+    </p:spTree>
+    <p:extLst>
+      <p:ext uri="{BB962C8B-B14F-4D97-AF65-F5344CB8AC3E}">
+        <p14:creationId xmlns:p14="http://schemas.microsoft.com/office/powerpoint/2010/main" val="1024086991"/>
+      </p:ext>
+    </p:extLst>
+  </p:cSld>
+  <p:clrMapOvr>
+    <a:masterClrMapping/>
+  </p:clrMapOvr>
+</p:notes>
+</file>
+
+<file path=ppt/notesSlides/notesSlide21.xml><?xml version="1.0" encoding="utf-8"?>
+<p:notes xmlns:a="http://schemas.openxmlformats.org/drawingml/2006/main" xmlns:r="http://schemas.openxmlformats.org/officeDocument/2006/relationships" xmlns:p="http://schemas.openxmlformats.org/presentationml/2006/main">
+  <p:cSld>
+    <p:spTree>
+      <p:nvGrpSpPr>
+        <p:cNvPr id="1" name=""/>
+        <p:cNvGrpSpPr/>
+        <p:nvPr/>
+      </p:nvGrpSpPr>
+      <p:grpSpPr>
+        <a:xfrm>
+          <a:off x="0" y="0"/>
+          <a:ext cx="0" cy="0"/>
+          <a:chOff x="0" y="0"/>
+          <a:chExt cx="0" cy="0"/>
+        </a:xfrm>
+      </p:grpSpPr>
+      <p:sp>
+        <p:nvSpPr>
+          <p:cNvPr id="2" name="Slide Image Placeholder 1"/>
+          <p:cNvSpPr>
+            <a:spLocks noGrp="1" noRot="1" noChangeAspect="1"/>
+          </p:cNvSpPr>
+          <p:nvPr>
+            <p:ph type="sldImg"/>
+          </p:nvPr>
+        </p:nvSpPr>
+        <p:spPr/>
+      </p:sp>
+      <p:sp>
+        <p:nvSpPr>
+          <p:cNvPr id="3" name="Notes Placeholder 2"/>
+          <p:cNvSpPr>
+            <a:spLocks noGrp="1"/>
+          </p:cNvSpPr>
+          <p:nvPr>
+            <p:ph type="body" idx="1"/>
+          </p:nvPr>
+        </p:nvSpPr>
+        <p:spPr/>
+        <p:txBody>
+          <a:bodyPr/>
+          <a:lstStyle/>
+          <a:p>
+            <a:r>
+              <a:rPr lang="en-US" dirty="0"/>
+              <a:t>Knowledge Check
+1. What makes agentic AI different from simple drafting support?
+2. Which action usually requires stronger oversight?
+3. What is orchestration?
+4. What should happen when an agent encounters an out-of-scope request?
+5. What is strong completion evidence for this module?</a:t>
+            </a:r>
+            <a:endParaRPr lang="en-US" dirty="0"/>
+          </a:p>
+        </p:txBody>
+      </p:sp>
+      <p:sp>
+        <p:nvSpPr>
+          <p:cNvPr id="4" name="Slide Number Placeholder 3"/>
+          <p:cNvSpPr>
+            <a:spLocks noGrp="1"/>
+          </p:cNvSpPr>
+          <p:nvPr>
+            <p:ph type="sldNum" sz="quarter" idx="10"/>
+          </p:nvPr>
+        </p:nvSpPr>
+        <p:spPr/>
+        <p:txBody>
+          <a:bodyPr/>
+          <a:lstStyle/>
+          <a:p>
+            <a:fld id="{F7021451-1387-4CA6-816F-3879F97B5CBC}" type="slidenum">
+              <a:rPr lang="en-US"/>
+              <a:t>21</a:t>
+            </a:fld>
+            <a:endParaRPr lang="en-US"/>
+          </a:p>
+        </p:txBody>
+      </p:sp>
+    </p:spTree>
+    <p:extLst>
+      <p:ext uri="{BB962C8B-B14F-4D97-AF65-F5344CB8AC3E}">
+        <p14:creationId xmlns:p14="http://schemas.microsoft.com/office/powerpoint/2010/main" val="1024086991"/>
+      </p:ext>
+    </p:extLst>
+  </p:cSld>
+  <p:clrMapOvr>
+    <a:masterClrMapping/>
+  </p:clrMapOvr>
+</p:notes>
+</file>
+
+<file path=ppt/notesSlides/notesSlide22.xml><?xml version="1.0" encoding="utf-8"?>
+<p:notes xmlns:a="http://schemas.openxmlformats.org/drawingml/2006/main" xmlns:r="http://schemas.openxmlformats.org/officeDocument/2006/relationships" xmlns:p="http://schemas.openxmlformats.org/presentationml/2006/main">
+  <p:cSld>
+    <p:spTree>
+      <p:nvGrpSpPr>
+        <p:cNvPr id="1" name=""/>
+        <p:cNvGrpSpPr/>
+        <p:nvPr/>
+      </p:nvGrpSpPr>
+      <p:grpSpPr>
+        <a:xfrm>
+          <a:off x="0" y="0"/>
+          <a:ext cx="0" cy="0"/>
+          <a:chOff x="0" y="0"/>
+          <a:chExt cx="0" cy="0"/>
+        </a:xfrm>
+      </p:grpSpPr>
+      <p:sp>
+        <p:nvSpPr>
+          <p:cNvPr id="2" name="Slide Image Placeholder 1"/>
+          <p:cNvSpPr>
+            <a:spLocks noGrp="1" noRot="1" noChangeAspect="1"/>
+          </p:cNvSpPr>
+          <p:nvPr>
+            <p:ph type="sldImg"/>
+          </p:nvPr>
+        </p:nvSpPr>
+        <p:spPr/>
+      </p:sp>
+      <p:sp>
+        <p:nvSpPr>
+          <p:cNvPr id="3" name="Notes Placeholder 2"/>
+          <p:cNvSpPr>
+            <a:spLocks noGrp="1"/>
+          </p:cNvSpPr>
+          <p:nvPr>
+            <p:ph type="body" idx="1"/>
+          </p:nvPr>
+        </p:nvSpPr>
+        <p:spPr/>
+        <p:txBody>
+          <a:bodyPr/>
+          <a:lstStyle/>
+          <a:p>
+            <a:r>
+              <a:rPr lang="en-US" dirty="0"/>
+              <a:t>References and Resources
+OWASP Top 10 for Large Language Model Applications: https://owasp.org/www-project-top-10-for-large-language-model-applications/
+NIST AI RMF Generative AI Profile: https://www.nist.gov/publications/artificial-intelligence-risk-management-framework-generative-artificial-intelligence
+NIST Artificial Intelligence Risk Management Framework: https://www.nist.gov/itl/ai-risk-management-framework
+NIST Privacy Framework: https://www.nist.gov/privacy-framework</a:t>
+            </a:r>
+            <a:endParaRPr lang="en-US" dirty="0"/>
+          </a:p>
+        </p:txBody>
+      </p:sp>
+      <p:sp>
+        <p:nvSpPr>
+          <p:cNvPr id="4" name="Slide Number Placeholder 3"/>
+          <p:cNvSpPr>
+            <a:spLocks noGrp="1"/>
+          </p:cNvSpPr>
+          <p:nvPr>
+            <p:ph type="sldNum" sz="quarter" idx="10"/>
+          </p:nvPr>
+        </p:nvSpPr>
+        <p:spPr/>
+        <p:txBody>
+          <a:bodyPr/>
+          <a:lstStyle/>
+          <a:p>
+            <a:fld id="{F7021451-1387-4CA6-816F-3879F97B5CBC}" type="slidenum">
+              <a:rPr lang="en-US"/>
+              <a:t>22</a:t>
             </a:fld>
             <a:endParaRPr lang="en-US"/>
           </a:p>
@@ -1700,12 +1883,11 @@
           <a:p>
             <a:r>
               <a:rPr lang="en-US" dirty="0"/>
-              <a:t>Learning Objectives
-Define agentic AI and orchestration in public health terms.
-Distinguish advisory outputs from tool-using or action-taking AI workflows.
-Identify the components of an agentic workflow, including goals, tools, permissions, memory, planning, human approval, logs, and rollback.
-Assess risks from excessive agency, unauthorized actions, error propagation, prompt injection, and unclear accountability.
-Design human-in-the-loop and human-on-the-loop controls for public health workflows.</a:t>
+              <a:t>Related Playbook Plays
+Play 11: Build and Deploy AI Solutions - This lesson informs Play 11 by helping learners connect the lesson topic to build and deploy ai solutions work in the AI Playbook.
+Play 3: Establish AI Governance - This lesson informs Play 3 by helping learners connect the lesson topic to establish ai governance work in the AI Playbook sequence.
+Play 12: Execute Governance and Oversight - This lesson informs Play 12 by helping learners connect the lesson topic to execute governance and oversight work in the AI Playbook.
+Play 4: Engage Stakeholders - This lesson informs Play 4 by helping learners connect the lesson topic to engage stakeholders work in the AI Playbook sequence.</a:t>
             </a:r>
             <a:endParaRPr lang="en-US" dirty="0"/>
           </a:p>
@@ -1793,8 +1975,13 @@
           <a:p>
             <a:r>
               <a:rPr lang="en-US" dirty="0"/>
-              <a:t>Learning Objectives
-Produce an agentic workflow control plan.</a:t>
+              <a:t>Related Toolkit Resources
+Tool 16: Incident Response Checklist (Checklist) - Use Incident Response Checklist to translate this lesson into a documented public health AI planning, governance,.
+Tool 17: Compliance Audit Checklist (Checklist) - Use Compliance Audit Checklist to translate this lesson into a documented public health AI planning, governance, implementation,.
+Tool 18: Policy Update &amp; Version Control Log (Log) - Use this tool to complete or strengthen the practical exercise for the module using fictional, de-identified, or generalized.
+Tool 19: Plain-Language AI Public Notice Template (Template) - Use Plain-Language AI Public Notice Template to translate this lesson into a documented public health AI planning, governance,.
+Tool 32: Vendor Evaluation Checklist (Checklist) - Use this tool to complete or strengthen the practical exercise for the module using fictional, de-identified, or generalized.
+Tool 34: STLT AI Procurement and Vendor Addendum (Checklist) - Use this tool to complete or strengthen the practical exercise for the module using fictional, de-identified, or generalized.</a:t>
             </a:r>
             <a:endParaRPr lang="en-US" dirty="0"/>
           </a:p>
@@ -1882,10 +2069,12 @@
           <a:p>
             <a:r>
               <a:rPr lang="en-US" dirty="0"/>
-              <a:t>Module Overview
-Agentic AI refers to AI systems configured to pursue a goal through multiple steps, often by using tools, calling APIs, retrieving information, creating tasks, or taking actions. In public health, agentic workflows may eventually support intake triage, document routing, surveillance review, resource referral, emergency operations, procurement review, or administrative automation. These uses require stronger controls than simple drafting or summarization.
-This module teaches learners how to design agentic workflows with clear boundaries. An AI agent should not be understood as an independent decision-maker. It is a software component operating within a governed workflow. Public health agencies must define the goal, permitted tools, data access, action limits, human approval points, logs, failure handling, and rollback procedures.
-Learners will create an agentic workflow control plan that identifies allowed actions, prohibited actions, oversight requirements, and incident triggers.</a:t>
+              <a:t>Learning Objectives
+Define agentic AI and orchestration in public health terms.
+Distinguish advisory outputs from tool-using or action-taking AI workflows.
+Identify the components of an agentic workflow, including goals, tools, permissions, memory, planning, human approval, logs, and rollback.
+Assess risks from excessive agency, unauthorized actions, error propagation, prompt injection, and unclear accountability.
+Design human-in-the-loop and human-on-the-loop controls for public health workflows.</a:t>
             </a:r>
             <a:endParaRPr lang="en-US" dirty="0"/>
           </a:p>
@@ -1973,10 +2162,8 @@
           <a:p>
             <a:r>
               <a:rPr lang="en-US" dirty="0"/>
-              <a:t>Why This Topic Matters for Public Health AI
-Agentic AI matters because it shifts AI from generating outputs to participating in workflows. A chatbot that drafts a message is one level of risk. An agent that sends the message, updates a case record, creates a task, or notifies a partner is a different level of risk. Action-taking systems require explicit governance because errors can propagate quickly.
-Public health workflows often involve legal authority, sensitive data, vulnerable communities, and time-sensitive decisions. An agentic workflow could be valuable if it helps route records, gather relevant documents, prepare draft summaries, or create follow-up tasks. It could be harmful if it acts outside scope, updates records incorrectly, exposes information, or creates alerts without appropriate review.
-Responsible agentic design begins with constraint. Agencies should define what the agent is allowed to know, allowed to do, required to ask, required to log, and prohibited from doing. The system should fail safely when it encounters uncertainty, missing data, conflicting guidance, or requests outside approved scope.</a:t>
+              <a:t>Learning Objectives
+Produce an agentic workflow control plan.</a:t>
             </a:r>
             <a:endParaRPr lang="en-US" dirty="0"/>
           </a:p>
@@ -2064,9 +2251,10 @@
           <a:p>
             <a:r>
               <a:rPr lang="en-US" dirty="0"/>
-              <a:t>Public Health Example
-A health department may consider an agentic workflow for incoming public health inquiries. The agent could classify the inquiry, retrieve relevant approved guidance, draft a response, create a ticket, and route the item to the appropriate program. For low-risk general information, the agent might prepare a draft for staff review. For sensitive complaints, reportable disease concerns, media inquiries, or legal issues, the agent should escalate rather than respond.
-This design requires orchestration rules. The agent needs classification criteria, approved guidance sources, limits on data access, prohibited response categories, human approval before sending messages, audit logs, and procedures for correcting misrouted items. The value comes from workflow support, not from removing accountability.</a:t>
+              <a:t>Module Overview
+Agentic AI refers to AI systems configured to pursue a goal through multiple steps, often by using tools, calling APIs, retrieving information, creating tasks, or taking actions. In public health, agentic workflows may eventually support intake triage, document routing, surveillance review, resource referral, emergency operations, procurement review, or administrative automation. These uses require stronger controls than simple drafting or summarization.
+This module teaches learners how to design agentic workflows with clear boundaries. An AI agent should not be understood as an independent decision-maker. It is a software component operating within a governed workflow. Public health agencies must define the goal, permitted tools, data access, action limits, human approval points, logs, failure handling, and rollback procedures.
+Learners will create an agentic workflow control plan that identifies allowed actions, prohibited actions, oversight requirements, and incident triggers.</a:t>
             </a:r>
             <a:endParaRPr lang="en-US" dirty="0"/>
           </a:p>
@@ -2154,10 +2342,10 @@
           <a:p>
             <a:r>
               <a:rPr lang="en-US" dirty="0"/>
-              <a:t>Technical Deep Dive
-Agentic workflow design begins with the goal. The goal should be narrow and operationally defined. “Help with surveillance” is too broad. “Draft a summary of new records and create a review task for a supervisor when defined criteria are met” is more suitable. Narrow goals make it easier to define tools, permissions, validation, and monitoring.
-Tool access is a central design decision. An agent may be allowed to search documents, query a database, create a task, send a draft message, or update a record. Each tool should be reviewed for sensitivity, consequence, and reversibility. Read-only access is generally lower risk than write access. External communication and system-of-record updates usually require human approval.
-Memory should be handled carefully. Some agents retain context across interactions or workflows. Persistent memory may improve continuity but can create privacy, accuracy, and records risks. Agencies should define what may be stored, for how long, who can access it, and how it can be corrected or deleted.</a:t>
+              <a:t>Why This Topic Matters for Public Health AI
+Agentic AI matters because it shifts AI from generating outputs to participating in workflows. A chatbot that drafts a message is one level of risk. An agent that sends the message, updates a case record, creates a task, or notifies a partner is a different level of risk. Action-taking systems require explicit governance because errors can propagate quickly.
+Public health workflows often involve legal authority, sensitive data, vulnerable communities, and time-sensitive decisions. An agentic workflow could be valuable if it helps route records, gather relevant documents, prepare draft summaries, or create follow-up tasks. It could be harmful if it acts outside scope, updates records incorrectly, exposes information, or creates alerts without appropriate review.
+Responsible agentic design begins with constraint. Agencies should define what the agent is allowed to know, allowed to do, required to ask, required to log, and prohibited from doing. The system should fail safely when it encounters uncertainty, missing data, conflicting guidance, or requests outside approved scope.</a:t>
             </a:r>
             <a:endParaRPr lang="en-US" dirty="0"/>
           </a:p>
@@ -2245,9 +2433,9 @@
           <a:p>
             <a:r>
               <a:rPr lang="en-US" dirty="0"/>
-              <a:t>Technical Deep Dive
-Human oversight should match risk. Human-in-the-loop approval is appropriate for actions that affect records, services, public communication, legal obligations, or partners. Human-on-the-loop monitoring may be appropriate for lower-risk background tasks if users can intervene quickly. Fully automated action should be limited to low-risk, well-tested, reversible tasks.
-Agentic workflows require incident response planning. Agencies should define what counts as an agentic incident, such as unauthorized action, data exposure, repeated error, misrouting, unsafe recommendation, or failure to escalate. Logs should support reconstruction of prompts, retrieved sources, tool calls, actions, approvals, and outcomes.</a:t>
+              <a:t>Public Health Example
+A health department may consider an agentic workflow for incoming public health inquiries. The agent could classify the inquiry, retrieve relevant approved guidance, draft a response, create a ticket, and route the item to the appropriate program. For low-risk general information, the agent might prepare a draft for staff review. For sensitive complaints, reportable disease concerns, media inquiries, or legal issues, the agent should escalate rather than respond.
+This design requires orchestration rules. The agent needs classification criteria, approved guidance sources, limits on data access, prohibited response categories, human approval before sending messages, audit logs, and procedures for correcting misrouted items. The value comes from workflow support, not from removing accountability.</a:t>
             </a:r>
             <a:endParaRPr lang="en-US" dirty="0"/>
           </a:p>
@@ -2870,7 +3058,32 @@
       </p:sp>
       <p:sp>
         <p:nvSpPr>
-          <p:cNvPr id="3" name="Text 1"/>
+          <p:cNvPr id="3" name="Shape 1"/>
+          <p:cNvSpPr/>
+          <p:nvPr/>
+        </p:nvSpPr>
+        <p:spPr>
+          <a:xfrm>
+            <a:off x="0" y="164592"/>
+            <a:ext cx="146304" cy="6693408"/>
+          </a:xfrm>
+          <a:prstGeom prst="rect">
+            <a:avLst/>
+          </a:prstGeom>
+          <a:solidFill>
+            <a:srgbClr val="2F8A28"/>
+          </a:solidFill>
+          <a:ln w="12700">
+            <a:solidFill>
+              <a:srgbClr val="2F8A28"/>
+            </a:solidFill>
+            <a:prstDash val="solid"/>
+          </a:ln>
+        </p:spPr>
+      </p:sp>
+      <p:sp>
+        <p:nvSpPr>
+          <p:cNvPr id="4" name="Text 2"/>
           <p:cNvSpPr/>
           <p:nvPr/>
         </p:nvSpPr>
@@ -2909,7 +3122,7 @@
       </p:sp>
       <p:sp>
         <p:nvSpPr>
-          <p:cNvPr id="4" name="Text 2"/>
+          <p:cNvPr id="5" name="Text 3"/>
           <p:cNvSpPr/>
           <p:nvPr/>
         </p:nvSpPr>
@@ -2948,7 +3161,7 @@
       </p:sp>
       <p:sp>
         <p:nvSpPr>
-          <p:cNvPr id="5" name="Text 3"/>
+          <p:cNvPr id="6" name="Text 4"/>
           <p:cNvSpPr/>
           <p:nvPr/>
         </p:nvSpPr>
@@ -2987,13 +3200,77 @@
       </p:sp>
       <p:sp>
         <p:nvSpPr>
-          <p:cNvPr id="6" name="Text 4"/>
+          <p:cNvPr id="7" name="Shape 5"/>
           <p:cNvSpPr/>
           <p:nvPr/>
         </p:nvSpPr>
         <p:spPr>
           <a:xfrm>
             <a:off x="640080" y="658368"/>
+            <a:ext cx="420624" cy="420624"/>
+          </a:xfrm>
+          <a:prstGeom prst="ellipse">
+            <a:avLst/>
+          </a:prstGeom>
+          <a:solidFill>
+            <a:srgbClr val="0068B7"/>
+          </a:solidFill>
+          <a:ln w="12700">
+            <a:solidFill>
+              <a:srgbClr val="0068B7"/>
+            </a:solidFill>
+            <a:prstDash val="solid"/>
+          </a:ln>
+        </p:spPr>
+      </p:sp>
+      <p:sp>
+        <p:nvSpPr>
+          <p:cNvPr id="8" name="Text 6"/>
+          <p:cNvSpPr/>
+          <p:nvPr/>
+        </p:nvSpPr>
+        <p:spPr>
+          <a:xfrm>
+            <a:off x="640080" y="731520"/>
+            <a:ext cx="420624" cy="164592"/>
+          </a:xfrm>
+          <a:prstGeom prst="rect">
+            <a:avLst/>
+          </a:prstGeom>
+          <a:noFill/>
+          <a:ln/>
+        </p:spPr>
+        <p:txBody>
+          <a:bodyPr wrap="square" lIns="0" tIns="0" rIns="0" bIns="0" rtlCol="0" anchor="ctr"/>
+          <a:lstStyle/>
+          <a:p>
+            <a:pPr algn="ctr" indent="0" marL="0">
+              <a:buNone/>
+            </a:pPr>
+            <a:r>
+              <a:rPr lang="en-US" sz="1100" b="1" dirty="0">
+                <a:solidFill>
+                  <a:srgbClr val="FFFFFF"/>
+                </a:solidFill>
+                <a:latin typeface="Aptos" pitchFamily="34" charset="0"/>
+                <a:ea typeface="Aptos" pitchFamily="34" charset="-122"/>
+                <a:cs typeface="Aptos" pitchFamily="34" charset="-120"/>
+              </a:rPr>
+              <a:t>5</a:t>
+            </a:r>
+            <a:endParaRPr lang="en-US" sz="1100" dirty="0"/>
+          </a:p>
+        </p:txBody>
+      </p:sp>
+      <p:sp>
+        <p:nvSpPr>
+          <p:cNvPr id="9" name="Text 7"/>
+          <p:cNvSpPr/>
+          <p:nvPr/>
+        </p:nvSpPr>
+        <p:spPr>
+          <a:xfrm>
+            <a:off x="640080" y="621792"/>
             <a:ext cx="10881360" cy="566928"/>
           </a:xfrm>
           <a:prstGeom prst="rect">
@@ -3020,7 +3297,7 @@
                 <a:ea typeface="Aptos Display" pitchFamily="34" charset="-122"/>
                 <a:cs typeface="Aptos Display" pitchFamily="34" charset="-120"/>
               </a:rPr>
-              <a:t>Risks, Failure Modes, and Guardrails</a:t>
+              <a:t>Technical Deep Dive</a:t>
             </a:r>
             <a:endParaRPr lang="en-US" sz="2700" dirty="0"/>
           </a:p>
@@ -3028,32 +3305,178 @@
       </p:sp>
       <p:sp>
         <p:nvSpPr>
-          <p:cNvPr id="7" name="Text 5"/>
-          <p:cNvSpPr/>
-          <p:nvPr/>
-        </p:nvSpPr>
-        <p:spPr>
-          <a:xfrm>
-            <a:off x="822960" y="1325880"/>
-            <a:ext cx="10378440" cy="4800600"/>
-          </a:xfrm>
-          <a:prstGeom prst="rect">
-            <a:avLst/>
-          </a:prstGeom>
-          <a:noFill/>
-          <a:ln/>
-        </p:spPr>
-        <p:txBody>
-          <a:bodyPr wrap="square" lIns="1016" tIns="1016" rIns="1016" bIns="1016" rtlCol="0" anchor="t">
+          <p:cNvPr id="10" name="Text 8"/>
+          <p:cNvSpPr/>
+          <p:nvPr/>
+        </p:nvSpPr>
+        <p:spPr>
+          <a:xfrm>
+            <a:off x="868680" y="1417320"/>
+            <a:ext cx="6675120" cy="4434840"/>
+          </a:xfrm>
+          <a:prstGeom prst="rect">
+            <a:avLst/>
+          </a:prstGeom>
+          <a:noFill/>
+          <a:ln/>
+        </p:spPr>
+        <p:txBody>
+          <a:bodyPr wrap="square" lIns="635" tIns="635" rIns="635" bIns="635" rtlCol="0" anchor="t">
             <a:normAutofit/>
           </a:bodyPr>
           <a:lstStyle/>
           <a:p>
+            <a:r>
+              <a:rPr lang="en-US" sz="1700" dirty="0">
+                <a:solidFill>
+                  <a:srgbClr val="17364A"/>
+                </a:solidFill>
+                <a:latin typeface="Aptos" pitchFamily="34" charset="0"/>
+                <a:ea typeface="Aptos" pitchFamily="34" charset="-122"/>
+                <a:cs typeface="Aptos" pitchFamily="34" charset="-120"/>
+              </a:rPr>
+              <a:t>Agentic workflow design begins with the goal.</a:t>
+            </a:r>
+            <a:endParaRPr lang="en-US" sz="1700" dirty="0"/>
+          </a:p>
+          <a:p>
+            <a:r>
+              <a:rPr lang="en-US" sz="1700" dirty="0">
+                <a:solidFill>
+                  <a:srgbClr val="17364A"/>
+                </a:solidFill>
+                <a:latin typeface="Aptos" pitchFamily="34" charset="0"/>
+                <a:ea typeface="Aptos" pitchFamily="34" charset="-122"/>
+                <a:cs typeface="Aptos" pitchFamily="34" charset="-120"/>
+              </a:rPr>
+              <a:t>The goal should be narrow and operationally defined. “Help with surveillance” is too broad. “Draft a summary of new records.</a:t>
+            </a:r>
+            <a:endParaRPr lang="en-US" sz="1700" dirty="0"/>
+          </a:p>
+          <a:p>
+            <a:r>
+              <a:rPr lang="en-US" sz="1700" dirty="0">
+                <a:solidFill>
+                  <a:srgbClr val="17364A"/>
+                </a:solidFill>
+                <a:latin typeface="Aptos" pitchFamily="34" charset="0"/>
+                <a:ea typeface="Aptos" pitchFamily="34" charset="-122"/>
+                <a:cs typeface="Aptos" pitchFamily="34" charset="-120"/>
+              </a:rPr>
+              <a:t>Narrow goals make it easier to define tools, permissions, validation, and monitoring.</a:t>
+            </a:r>
+            <a:endParaRPr lang="en-US" sz="1700" dirty="0"/>
+          </a:p>
+          <a:p>
+            <a:r>
+              <a:rPr lang="en-US" sz="1700" dirty="0">
+                <a:solidFill>
+                  <a:srgbClr val="17364A"/>
+                </a:solidFill>
+                <a:latin typeface="Aptos" pitchFamily="34" charset="0"/>
+                <a:ea typeface="Aptos" pitchFamily="34" charset="-122"/>
+                <a:cs typeface="Aptos" pitchFamily="34" charset="-120"/>
+              </a:rPr>
+              <a:t>Tool access is a central design decision.</a:t>
+            </a:r>
+            <a:endParaRPr lang="en-US" sz="1700" dirty="0"/>
+          </a:p>
+        </p:txBody>
+      </p:sp>
+      <p:sp>
+        <p:nvSpPr>
+          <p:cNvPr id="11" name="Shape 9"/>
+          <p:cNvSpPr/>
+          <p:nvPr/>
+        </p:nvSpPr>
+        <p:spPr>
+          <a:xfrm>
+            <a:off x="7909560" y="1417320"/>
+            <a:ext cx="3154680" cy="1828800"/>
+          </a:xfrm>
+          <a:prstGeom prst="roundRect">
+            <a:avLst>
+              <a:gd name="adj" fmla="val 6000"/>
+            </a:avLst>
+          </a:prstGeom>
+          <a:solidFill>
+            <a:srgbClr val="EEF8ED"/>
+          </a:solidFill>
+          <a:ln w="12700">
+            <a:solidFill>
+              <a:srgbClr val="B9D7E6"/>
+            </a:solidFill>
+            <a:prstDash val="solid"/>
+          </a:ln>
+        </p:spPr>
+      </p:sp>
+      <p:sp>
+        <p:nvSpPr>
+          <p:cNvPr id="12" name="Text 10"/>
+          <p:cNvSpPr/>
+          <p:nvPr/>
+        </p:nvSpPr>
+        <p:spPr>
+          <a:xfrm>
+            <a:off x="8074152" y="1563624"/>
+            <a:ext cx="2825496" cy="201168"/>
+          </a:xfrm>
+          <a:prstGeom prst="rect">
+            <a:avLst/>
+          </a:prstGeom>
+          <a:noFill/>
+          <a:ln/>
+        </p:spPr>
+        <p:txBody>
+          <a:bodyPr wrap="square" lIns="0" tIns="0" rIns="0" bIns="0" rtlCol="0" anchor="ctr"/>
+          <a:lstStyle/>
+          <a:p>
             <a:pPr indent="0" marL="0">
               <a:buNone/>
             </a:pPr>
             <a:r>
-              <a:rPr lang="en-US" sz="1420" dirty="0">
+              <a:rPr lang="en-US" sz="950" b="1" dirty="0">
+                <a:solidFill>
+                  <a:srgbClr val="0068B7"/>
+                </a:solidFill>
+                <a:latin typeface="Aptos" pitchFamily="34" charset="0"/>
+                <a:ea typeface="Aptos" pitchFamily="34" charset="-122"/>
+                <a:cs typeface="Aptos" pitchFamily="34" charset="-120"/>
+              </a:rPr>
+              <a:t>Key idea</a:t>
+            </a:r>
+            <a:endParaRPr lang="en-US" sz="950" dirty="0"/>
+          </a:p>
+        </p:txBody>
+      </p:sp>
+      <p:sp>
+        <p:nvSpPr>
+          <p:cNvPr id="13" name="Text 11"/>
+          <p:cNvSpPr/>
+          <p:nvPr/>
+        </p:nvSpPr>
+        <p:spPr>
+          <a:xfrm>
+            <a:off x="8074152" y="1856232"/>
+            <a:ext cx="2825496" cy="1261872"/>
+          </a:xfrm>
+          <a:prstGeom prst="rect">
+            <a:avLst/>
+          </a:prstGeom>
+          <a:noFill/>
+          <a:ln/>
+        </p:spPr>
+        <p:txBody>
+          <a:bodyPr wrap="square" lIns="0" tIns="0" rIns="0" bIns="0" rtlCol="0" anchor="t">
+            <a:normAutofit/>
+          </a:bodyPr>
+          <a:lstStyle/>
+          <a:p>
+            <a:pPr indent="0" marL="0">
+              <a:buNone/>
+            </a:pPr>
+            <a:r>
+              <a:rPr lang="en-US" sz="1250" dirty="0">
                 <a:solidFill>
                   <a:srgbClr val="17364A"/>
                 </a:solidFill>
@@ -3061,9 +3484,116 @@
                 <a:ea typeface="Aptos" pitchFamily="34" charset="-122"/>
                 <a:cs typeface="Aptos" pitchFamily="34" charset="-120"/>
               </a:rPr>
-              <a:t>Excessive agency. An agent may take actions beyond intended scope. Guardrails include narrow goals, allowed-action lists, prohibited actions, and approval gates. Unauthorized system access. Tool access may expose sensitive data or functions. Guardrails include least privilege, scoped credentials, role-based access, and audit logs. Error propagation. One wrong step may trigger downstream errors. Guardrails include checkpoints, validation, rollback, and staged deployment.</a:t>
-            </a:r>
-            <a:endParaRPr lang="en-US" sz="1420" dirty="0"/>
+              <a:t>Agentic workflow design begins with the goal.</a:t>
+            </a:r>
+            <a:endParaRPr lang="en-US" sz="1250" dirty="0"/>
+          </a:p>
+        </p:txBody>
+      </p:sp>
+      <p:sp>
+        <p:nvSpPr>
+          <p:cNvPr id="14" name="Shape 12"/>
+          <p:cNvSpPr/>
+          <p:nvPr/>
+        </p:nvSpPr>
+        <p:spPr>
+          <a:xfrm>
+            <a:off x="7909560" y="3520440"/>
+            <a:ext cx="3154680" cy="1737360"/>
+          </a:xfrm>
+          <a:prstGeom prst="roundRect">
+            <a:avLst>
+              <a:gd name="adj" fmla="val 6316"/>
+            </a:avLst>
+          </a:prstGeom>
+          <a:solidFill>
+            <a:srgbClr val="EAF6F8"/>
+          </a:solidFill>
+          <a:ln w="12700">
+            <a:solidFill>
+              <a:srgbClr val="B9D7E6"/>
+            </a:solidFill>
+            <a:prstDash val="solid"/>
+          </a:ln>
+        </p:spPr>
+      </p:sp>
+      <p:sp>
+        <p:nvSpPr>
+          <p:cNvPr id="15" name="Text 13"/>
+          <p:cNvSpPr/>
+          <p:nvPr/>
+        </p:nvSpPr>
+        <p:spPr>
+          <a:xfrm>
+            <a:off x="8074152" y="3666744"/>
+            <a:ext cx="2825496" cy="201168"/>
+          </a:xfrm>
+          <a:prstGeom prst="rect">
+            <a:avLst/>
+          </a:prstGeom>
+          <a:noFill/>
+          <a:ln/>
+        </p:spPr>
+        <p:txBody>
+          <a:bodyPr wrap="square" lIns="0" tIns="0" rIns="0" bIns="0" rtlCol="0" anchor="ctr"/>
+          <a:lstStyle/>
+          <a:p>
+            <a:pPr indent="0" marL="0">
+              <a:buNone/>
+            </a:pPr>
+            <a:r>
+              <a:rPr lang="en-US" sz="950" b="1" dirty="0">
+                <a:solidFill>
+                  <a:srgbClr val="0068B7"/>
+                </a:solidFill>
+                <a:latin typeface="Aptos" pitchFamily="34" charset="0"/>
+                <a:ea typeface="Aptos" pitchFamily="34" charset="-122"/>
+                <a:cs typeface="Aptos" pitchFamily="34" charset="-120"/>
+              </a:rPr>
+              <a:t>Use this for</a:t>
+            </a:r>
+            <a:endParaRPr lang="en-US" sz="950" dirty="0"/>
+          </a:p>
+        </p:txBody>
+      </p:sp>
+      <p:sp>
+        <p:nvSpPr>
+          <p:cNvPr id="16" name="Text 14"/>
+          <p:cNvSpPr/>
+          <p:nvPr/>
+        </p:nvSpPr>
+        <p:spPr>
+          <a:xfrm>
+            <a:off x="8074152" y="3959352"/>
+            <a:ext cx="2825496" cy="1170432"/>
+          </a:xfrm>
+          <a:prstGeom prst="rect">
+            <a:avLst/>
+          </a:prstGeom>
+          <a:noFill/>
+          <a:ln/>
+        </p:spPr>
+        <p:txBody>
+          <a:bodyPr wrap="square" lIns="0" tIns="0" rIns="0" bIns="0" rtlCol="0" anchor="t">
+            <a:normAutofit/>
+          </a:bodyPr>
+          <a:lstStyle/>
+          <a:p>
+            <a:pPr indent="0" marL="0">
+              <a:buNone/>
+            </a:pPr>
+            <a:r>
+              <a:rPr lang="en-US" sz="1250" dirty="0">
+                <a:solidFill>
+                  <a:srgbClr val="17364A"/>
+                </a:solidFill>
+                <a:latin typeface="Aptos" pitchFamily="34" charset="0"/>
+                <a:ea typeface="Aptos" pitchFamily="34" charset="-122"/>
+                <a:cs typeface="Aptos" pitchFamily="34" charset="-120"/>
+              </a:rPr>
+              <a:t>Connect the concept to public health decisions, safeguards, documentation, or implementation work.</a:t>
+            </a:r>
+            <a:endParaRPr lang="en-US" sz="1250" dirty="0"/>
           </a:p>
         </p:txBody>
       </p:sp>
@@ -3126,7 +3656,32 @@
       </p:sp>
       <p:sp>
         <p:nvSpPr>
-          <p:cNvPr id="3" name="Text 1"/>
+          <p:cNvPr id="3" name="Shape 1"/>
+          <p:cNvSpPr/>
+          <p:nvPr/>
+        </p:nvSpPr>
+        <p:spPr>
+          <a:xfrm>
+            <a:off x="0" y="164592"/>
+            <a:ext cx="146304" cy="6693408"/>
+          </a:xfrm>
+          <a:prstGeom prst="rect">
+            <a:avLst/>
+          </a:prstGeom>
+          <a:solidFill>
+            <a:srgbClr val="2F8A28"/>
+          </a:solidFill>
+          <a:ln w="12700">
+            <a:solidFill>
+              <a:srgbClr val="2F8A28"/>
+            </a:solidFill>
+            <a:prstDash val="solid"/>
+          </a:ln>
+        </p:spPr>
+      </p:sp>
+      <p:sp>
+        <p:nvSpPr>
+          <p:cNvPr id="4" name="Text 2"/>
           <p:cNvSpPr/>
           <p:nvPr/>
         </p:nvSpPr>
@@ -3165,7 +3720,7 @@
       </p:sp>
       <p:sp>
         <p:nvSpPr>
-          <p:cNvPr id="4" name="Text 2"/>
+          <p:cNvPr id="5" name="Text 3"/>
           <p:cNvSpPr/>
           <p:nvPr/>
         </p:nvSpPr>
@@ -3204,7 +3759,7 @@
       </p:sp>
       <p:sp>
         <p:nvSpPr>
-          <p:cNvPr id="5" name="Text 3"/>
+          <p:cNvPr id="6" name="Text 4"/>
           <p:cNvSpPr/>
           <p:nvPr/>
         </p:nvSpPr>
@@ -3243,7 +3798,7 @@
       </p:sp>
       <p:sp>
         <p:nvSpPr>
-          <p:cNvPr id="6" name="Text 4"/>
+          <p:cNvPr id="7" name="Text 5"/>
           <p:cNvSpPr/>
           <p:nvPr/>
         </p:nvSpPr>
@@ -3276,7 +3831,7 @@
                 <a:ea typeface="Aptos Display" pitchFamily="34" charset="-122"/>
                 <a:cs typeface="Aptos Display" pitchFamily="34" charset="-120"/>
               </a:rPr>
-              <a:t>Risks, Failure Modes, and Guardrails Continued</a:t>
+              <a:t>Technical Deep Dive Continued</a:t>
             </a:r>
             <a:endParaRPr lang="en-US" sz="2700" dirty="0"/>
           </a:p>
@@ -3284,32 +3839,178 @@
       </p:sp>
       <p:sp>
         <p:nvSpPr>
-          <p:cNvPr id="7" name="Text 5"/>
-          <p:cNvSpPr/>
-          <p:nvPr/>
-        </p:nvSpPr>
-        <p:spPr>
-          <a:xfrm>
-            <a:off x="822960" y="1325880"/>
-            <a:ext cx="10378440" cy="4800600"/>
-          </a:xfrm>
-          <a:prstGeom prst="rect">
-            <a:avLst/>
-          </a:prstGeom>
-          <a:noFill/>
-          <a:ln/>
-        </p:spPr>
-        <p:txBody>
-          <a:bodyPr wrap="square" lIns="1016" tIns="1016" rIns="1016" bIns="1016" rtlCol="0" anchor="t">
+          <p:cNvPr id="8" name="Text 6"/>
+          <p:cNvSpPr/>
+          <p:nvPr/>
+        </p:nvSpPr>
+        <p:spPr>
+          <a:xfrm>
+            <a:off x="868680" y="1417320"/>
+            <a:ext cx="6675120" cy="4434840"/>
+          </a:xfrm>
+          <a:prstGeom prst="rect">
+            <a:avLst/>
+          </a:prstGeom>
+          <a:noFill/>
+          <a:ln/>
+        </p:spPr>
+        <p:txBody>
+          <a:bodyPr wrap="square" lIns="635" tIns="635" rIns="635" bIns="635" rtlCol="0" anchor="t">
             <a:normAutofit/>
           </a:bodyPr>
           <a:lstStyle/>
           <a:p>
+            <a:r>
+              <a:rPr lang="en-US" sz="1700" dirty="0">
+                <a:solidFill>
+                  <a:srgbClr val="17364A"/>
+                </a:solidFill>
+                <a:latin typeface="Aptos" pitchFamily="34" charset="0"/>
+                <a:ea typeface="Aptos" pitchFamily="34" charset="-122"/>
+                <a:cs typeface="Aptos" pitchFamily="34" charset="-120"/>
+              </a:rPr>
+              <a:t>Human oversight should match risk.</a:t>
+            </a:r>
+            <a:endParaRPr lang="en-US" sz="1700" dirty="0"/>
+          </a:p>
+          <a:p>
+            <a:r>
+              <a:rPr lang="en-US" sz="1700" dirty="0">
+                <a:solidFill>
+                  <a:srgbClr val="17364A"/>
+                </a:solidFill>
+                <a:latin typeface="Aptos" pitchFamily="34" charset="0"/>
+                <a:ea typeface="Aptos" pitchFamily="34" charset="-122"/>
+                <a:cs typeface="Aptos" pitchFamily="34" charset="-120"/>
+              </a:rPr>
+              <a:t>Human-in-the-loop approval is appropriate for actions that affect records, services, public communication, legal.</a:t>
+            </a:r>
+            <a:endParaRPr lang="en-US" sz="1700" dirty="0"/>
+          </a:p>
+          <a:p>
+            <a:r>
+              <a:rPr lang="en-US" sz="1700" dirty="0">
+                <a:solidFill>
+                  <a:srgbClr val="17364A"/>
+                </a:solidFill>
+                <a:latin typeface="Aptos" pitchFamily="34" charset="0"/>
+                <a:ea typeface="Aptos" pitchFamily="34" charset="-122"/>
+                <a:cs typeface="Aptos" pitchFamily="34" charset="-120"/>
+              </a:rPr>
+              <a:t>Human-on-the-loop monitoring may be appropriate for lower-risk background tasks if users can intervene quickly.</a:t>
+            </a:r>
+            <a:endParaRPr lang="en-US" sz="1700" dirty="0"/>
+          </a:p>
+          <a:p>
+            <a:r>
+              <a:rPr lang="en-US" sz="1700" dirty="0">
+                <a:solidFill>
+                  <a:srgbClr val="17364A"/>
+                </a:solidFill>
+                <a:latin typeface="Aptos" pitchFamily="34" charset="0"/>
+                <a:ea typeface="Aptos" pitchFamily="34" charset="-122"/>
+                <a:cs typeface="Aptos" pitchFamily="34" charset="-120"/>
+              </a:rPr>
+              <a:t>Fully automated action should be limited to low-risk, well-tested, reversible tasks.</a:t>
+            </a:r>
+            <a:endParaRPr lang="en-US" sz="1700" dirty="0"/>
+          </a:p>
+        </p:txBody>
+      </p:sp>
+      <p:sp>
+        <p:nvSpPr>
+          <p:cNvPr id="9" name="Shape 7"/>
+          <p:cNvSpPr/>
+          <p:nvPr/>
+        </p:nvSpPr>
+        <p:spPr>
+          <a:xfrm>
+            <a:off x="7909560" y="1417320"/>
+            <a:ext cx="3154680" cy="1828800"/>
+          </a:xfrm>
+          <a:prstGeom prst="roundRect">
+            <a:avLst>
+              <a:gd name="adj" fmla="val 6000"/>
+            </a:avLst>
+          </a:prstGeom>
+          <a:solidFill>
+            <a:srgbClr val="EEF8ED"/>
+          </a:solidFill>
+          <a:ln w="12700">
+            <a:solidFill>
+              <a:srgbClr val="B9D7E6"/>
+            </a:solidFill>
+            <a:prstDash val="solid"/>
+          </a:ln>
+        </p:spPr>
+      </p:sp>
+      <p:sp>
+        <p:nvSpPr>
+          <p:cNvPr id="10" name="Text 8"/>
+          <p:cNvSpPr/>
+          <p:nvPr/>
+        </p:nvSpPr>
+        <p:spPr>
+          <a:xfrm>
+            <a:off x="8074152" y="1563624"/>
+            <a:ext cx="2825496" cy="201168"/>
+          </a:xfrm>
+          <a:prstGeom prst="rect">
+            <a:avLst/>
+          </a:prstGeom>
+          <a:noFill/>
+          <a:ln/>
+        </p:spPr>
+        <p:txBody>
+          <a:bodyPr wrap="square" lIns="0" tIns="0" rIns="0" bIns="0" rtlCol="0" anchor="ctr"/>
+          <a:lstStyle/>
+          <a:p>
             <a:pPr indent="0" marL="0">
               <a:buNone/>
             </a:pPr>
             <a:r>
-              <a:rPr lang="en-US" sz="1420" dirty="0">
+              <a:rPr lang="en-US" sz="950" b="1" dirty="0">
+                <a:solidFill>
+                  <a:srgbClr val="0068B7"/>
+                </a:solidFill>
+                <a:latin typeface="Aptos" pitchFamily="34" charset="0"/>
+                <a:ea typeface="Aptos" pitchFamily="34" charset="-122"/>
+                <a:cs typeface="Aptos" pitchFamily="34" charset="-120"/>
+              </a:rPr>
+              <a:t>Key idea</a:t>
+            </a:r>
+            <a:endParaRPr lang="en-US" sz="950" dirty="0"/>
+          </a:p>
+        </p:txBody>
+      </p:sp>
+      <p:sp>
+        <p:nvSpPr>
+          <p:cNvPr id="11" name="Text 9"/>
+          <p:cNvSpPr/>
+          <p:nvPr/>
+        </p:nvSpPr>
+        <p:spPr>
+          <a:xfrm>
+            <a:off x="8074152" y="1856232"/>
+            <a:ext cx="2825496" cy="1261872"/>
+          </a:xfrm>
+          <a:prstGeom prst="rect">
+            <a:avLst/>
+          </a:prstGeom>
+          <a:noFill/>
+          <a:ln/>
+        </p:spPr>
+        <p:txBody>
+          <a:bodyPr wrap="square" lIns="0" tIns="0" rIns="0" bIns="0" rtlCol="0" anchor="t">
+            <a:normAutofit/>
+          </a:bodyPr>
+          <a:lstStyle/>
+          <a:p>
+            <a:pPr indent="0" marL="0">
+              <a:buNone/>
+            </a:pPr>
+            <a:r>
+              <a:rPr lang="en-US" sz="1250" dirty="0">
                 <a:solidFill>
                   <a:srgbClr val="17364A"/>
                 </a:solidFill>
@@ -3317,9 +4018,116 @@
                 <a:ea typeface="Aptos" pitchFamily="34" charset="-122"/>
                 <a:cs typeface="Aptos" pitchFamily="34" charset="-120"/>
               </a:rPr>
-              <a:t>Unclear accountability. Staff may not know who is responsible for agent actions. Guardrails include role definitions, review records, and governance ownership.</a:t>
-            </a:r>
-            <a:endParaRPr lang="en-US" sz="1420" dirty="0"/>
+              <a:t>Human oversight should match risk.</a:t>
+            </a:r>
+            <a:endParaRPr lang="en-US" sz="1250" dirty="0"/>
+          </a:p>
+        </p:txBody>
+      </p:sp>
+      <p:sp>
+        <p:nvSpPr>
+          <p:cNvPr id="12" name="Shape 10"/>
+          <p:cNvSpPr/>
+          <p:nvPr/>
+        </p:nvSpPr>
+        <p:spPr>
+          <a:xfrm>
+            <a:off x="7909560" y="3520440"/>
+            <a:ext cx="3154680" cy="1737360"/>
+          </a:xfrm>
+          <a:prstGeom prst="roundRect">
+            <a:avLst>
+              <a:gd name="adj" fmla="val 6316"/>
+            </a:avLst>
+          </a:prstGeom>
+          <a:solidFill>
+            <a:srgbClr val="EAF6F8"/>
+          </a:solidFill>
+          <a:ln w="12700">
+            <a:solidFill>
+              <a:srgbClr val="B9D7E6"/>
+            </a:solidFill>
+            <a:prstDash val="solid"/>
+          </a:ln>
+        </p:spPr>
+      </p:sp>
+      <p:sp>
+        <p:nvSpPr>
+          <p:cNvPr id="13" name="Text 11"/>
+          <p:cNvSpPr/>
+          <p:nvPr/>
+        </p:nvSpPr>
+        <p:spPr>
+          <a:xfrm>
+            <a:off x="8074152" y="3666744"/>
+            <a:ext cx="2825496" cy="201168"/>
+          </a:xfrm>
+          <a:prstGeom prst="rect">
+            <a:avLst/>
+          </a:prstGeom>
+          <a:noFill/>
+          <a:ln/>
+        </p:spPr>
+        <p:txBody>
+          <a:bodyPr wrap="square" lIns="0" tIns="0" rIns="0" bIns="0" rtlCol="0" anchor="ctr"/>
+          <a:lstStyle/>
+          <a:p>
+            <a:pPr indent="0" marL="0">
+              <a:buNone/>
+            </a:pPr>
+            <a:r>
+              <a:rPr lang="en-US" sz="950" b="1" dirty="0">
+                <a:solidFill>
+                  <a:srgbClr val="0068B7"/>
+                </a:solidFill>
+                <a:latin typeface="Aptos" pitchFamily="34" charset="0"/>
+                <a:ea typeface="Aptos" pitchFamily="34" charset="-122"/>
+                <a:cs typeface="Aptos" pitchFamily="34" charset="-120"/>
+              </a:rPr>
+              <a:t>Use this for</a:t>
+            </a:r>
+            <a:endParaRPr lang="en-US" sz="950" dirty="0"/>
+          </a:p>
+        </p:txBody>
+      </p:sp>
+      <p:sp>
+        <p:nvSpPr>
+          <p:cNvPr id="14" name="Text 12"/>
+          <p:cNvSpPr/>
+          <p:nvPr/>
+        </p:nvSpPr>
+        <p:spPr>
+          <a:xfrm>
+            <a:off x="8074152" y="3959352"/>
+            <a:ext cx="2825496" cy="1170432"/>
+          </a:xfrm>
+          <a:prstGeom prst="rect">
+            <a:avLst/>
+          </a:prstGeom>
+          <a:noFill/>
+          <a:ln/>
+        </p:spPr>
+        <p:txBody>
+          <a:bodyPr wrap="square" lIns="0" tIns="0" rIns="0" bIns="0" rtlCol="0" anchor="t">
+            <a:normAutofit/>
+          </a:bodyPr>
+          <a:lstStyle/>
+          <a:p>
+            <a:pPr indent="0" marL="0">
+              <a:buNone/>
+            </a:pPr>
+            <a:r>
+              <a:rPr lang="en-US" sz="1250" dirty="0">
+                <a:solidFill>
+                  <a:srgbClr val="17364A"/>
+                </a:solidFill>
+                <a:latin typeface="Aptos" pitchFamily="34" charset="0"/>
+                <a:ea typeface="Aptos" pitchFamily="34" charset="-122"/>
+                <a:cs typeface="Aptos" pitchFamily="34" charset="-120"/>
+              </a:rPr>
+              <a:t>Connect the concept to public health decisions, safeguards, documentation, or implementation work.</a:t>
+            </a:r>
+            <a:endParaRPr lang="en-US" sz="1250" dirty="0"/>
           </a:p>
         </p:txBody>
       </p:sp>
@@ -3382,7 +4190,32 @@
       </p:sp>
       <p:sp>
         <p:nvSpPr>
-          <p:cNvPr id="3" name="Text 1"/>
+          <p:cNvPr id="3" name="Shape 1"/>
+          <p:cNvSpPr/>
+          <p:nvPr/>
+        </p:nvSpPr>
+        <p:spPr>
+          <a:xfrm>
+            <a:off x="0" y="164592"/>
+            <a:ext cx="146304" cy="6693408"/>
+          </a:xfrm>
+          <a:prstGeom prst="rect">
+            <a:avLst/>
+          </a:prstGeom>
+          <a:solidFill>
+            <a:srgbClr val="2F8A28"/>
+          </a:solidFill>
+          <a:ln w="12700">
+            <a:solidFill>
+              <a:srgbClr val="2F8A28"/>
+            </a:solidFill>
+            <a:prstDash val="solid"/>
+          </a:ln>
+        </p:spPr>
+      </p:sp>
+      <p:sp>
+        <p:nvSpPr>
+          <p:cNvPr id="4" name="Text 2"/>
           <p:cNvSpPr/>
           <p:nvPr/>
         </p:nvSpPr>
@@ -3421,7 +4254,7 @@
       </p:sp>
       <p:sp>
         <p:nvSpPr>
-          <p:cNvPr id="4" name="Text 2"/>
+          <p:cNvPr id="5" name="Text 3"/>
           <p:cNvSpPr/>
           <p:nvPr/>
         </p:nvSpPr>
@@ -3460,7 +4293,7 @@
       </p:sp>
       <p:sp>
         <p:nvSpPr>
-          <p:cNvPr id="5" name="Text 3"/>
+          <p:cNvPr id="6" name="Text 4"/>
           <p:cNvSpPr/>
           <p:nvPr/>
         </p:nvSpPr>
@@ -3499,13 +4332,77 @@
       </p:sp>
       <p:sp>
         <p:nvSpPr>
-          <p:cNvPr id="6" name="Text 4"/>
+          <p:cNvPr id="7" name="Shape 5"/>
           <p:cNvSpPr/>
           <p:nvPr/>
         </p:nvSpPr>
         <p:spPr>
           <a:xfrm>
             <a:off x="640080" y="658368"/>
+            <a:ext cx="420624" cy="420624"/>
+          </a:xfrm>
+          <a:prstGeom prst="ellipse">
+            <a:avLst/>
+          </a:prstGeom>
+          <a:solidFill>
+            <a:srgbClr val="0068B7"/>
+          </a:solidFill>
+          <a:ln w="12700">
+            <a:solidFill>
+              <a:srgbClr val="0068B7"/>
+            </a:solidFill>
+            <a:prstDash val="solid"/>
+          </a:ln>
+        </p:spPr>
+      </p:sp>
+      <p:sp>
+        <p:nvSpPr>
+          <p:cNvPr id="8" name="Text 6"/>
+          <p:cNvSpPr/>
+          <p:nvPr/>
+        </p:nvSpPr>
+        <p:spPr>
+          <a:xfrm>
+            <a:off x="640080" y="731520"/>
+            <a:ext cx="420624" cy="164592"/>
+          </a:xfrm>
+          <a:prstGeom prst="rect">
+            <a:avLst/>
+          </a:prstGeom>
+          <a:noFill/>
+          <a:ln/>
+        </p:spPr>
+        <p:txBody>
+          <a:bodyPr wrap="square" lIns="0" tIns="0" rIns="0" bIns="0" rtlCol="0" anchor="ctr"/>
+          <a:lstStyle/>
+          <a:p>
+            <a:pPr algn="ctr" indent="0" marL="0">
+              <a:buNone/>
+            </a:pPr>
+            <a:r>
+              <a:rPr lang="en-US" sz="1100" b="1" dirty="0">
+                <a:solidFill>
+                  <a:srgbClr val="FFFFFF"/>
+                </a:solidFill>
+                <a:latin typeface="Aptos" pitchFamily="34" charset="0"/>
+                <a:ea typeface="Aptos" pitchFamily="34" charset="-122"/>
+                <a:cs typeface="Aptos" pitchFamily="34" charset="-120"/>
+              </a:rPr>
+              <a:t>6</a:t>
+            </a:r>
+            <a:endParaRPr lang="en-US" sz="1100" dirty="0"/>
+          </a:p>
+        </p:txBody>
+      </p:sp>
+      <p:sp>
+        <p:nvSpPr>
+          <p:cNvPr id="9" name="Text 7"/>
+          <p:cNvSpPr/>
+          <p:nvPr/>
+        </p:nvSpPr>
+        <p:spPr>
+          <a:xfrm>
+            <a:off x="640080" y="621792"/>
             <a:ext cx="10881360" cy="566928"/>
           </a:xfrm>
           <a:prstGeom prst="rect">
@@ -3532,7 +4429,7 @@
                 <a:ea typeface="Aptos Display" pitchFamily="34" charset="-122"/>
                 <a:cs typeface="Aptos Display" pitchFamily="34" charset="-120"/>
               </a:rPr>
-              <a:t>Application to AI-Supported Workflows</a:t>
+              <a:t>Risks, Failure Modes, and Guardrails</a:t>
             </a:r>
             <a:endParaRPr lang="en-US" sz="2700" dirty="0"/>
           </a:p>
@@ -3540,32 +4437,178 @@
       </p:sp>
       <p:sp>
         <p:nvSpPr>
-          <p:cNvPr id="7" name="Text 5"/>
-          <p:cNvSpPr/>
-          <p:nvPr/>
-        </p:nvSpPr>
-        <p:spPr>
-          <a:xfrm>
-            <a:off x="822960" y="1325880"/>
-            <a:ext cx="10378440" cy="4800600"/>
-          </a:xfrm>
-          <a:prstGeom prst="rect">
-            <a:avLst/>
-          </a:prstGeom>
-          <a:noFill/>
-          <a:ln/>
-        </p:spPr>
-        <p:txBody>
-          <a:bodyPr wrap="square" lIns="1016" tIns="1016" rIns="1016" bIns="1016" rtlCol="0" anchor="t">
+          <p:cNvPr id="10" name="Text 8"/>
+          <p:cNvSpPr/>
+          <p:nvPr/>
+        </p:nvSpPr>
+        <p:spPr>
+          <a:xfrm>
+            <a:off x="868680" y="1417320"/>
+            <a:ext cx="6675120" cy="4434840"/>
+          </a:xfrm>
+          <a:prstGeom prst="rect">
+            <a:avLst/>
+          </a:prstGeom>
+          <a:noFill/>
+          <a:ln/>
+        </p:spPr>
+        <p:txBody>
+          <a:bodyPr wrap="square" lIns="635" tIns="635" rIns="635" bIns="635" rtlCol="0" anchor="t">
             <a:normAutofit/>
           </a:bodyPr>
           <a:lstStyle/>
           <a:p>
+            <a:r>
+              <a:rPr lang="en-US" sz="1700" dirty="0">
+                <a:solidFill>
+                  <a:srgbClr val="17364A"/>
+                </a:solidFill>
+                <a:latin typeface="Aptos" pitchFamily="34" charset="0"/>
+                <a:ea typeface="Aptos" pitchFamily="34" charset="-122"/>
+                <a:cs typeface="Aptos" pitchFamily="34" charset="-120"/>
+              </a:rPr>
+              <a:t>Excessive agency.</a:t>
+            </a:r>
+            <a:endParaRPr lang="en-US" sz="1700" dirty="0"/>
+          </a:p>
+          <a:p>
+            <a:r>
+              <a:rPr lang="en-US" sz="1700" dirty="0">
+                <a:solidFill>
+                  <a:srgbClr val="17364A"/>
+                </a:solidFill>
+                <a:latin typeface="Aptos" pitchFamily="34" charset="0"/>
+                <a:ea typeface="Aptos" pitchFamily="34" charset="-122"/>
+                <a:cs typeface="Aptos" pitchFamily="34" charset="-120"/>
+              </a:rPr>
+              <a:t>An agent may take actions beyond intended scope.</a:t>
+            </a:r>
+            <a:endParaRPr lang="en-US" sz="1700" dirty="0"/>
+          </a:p>
+          <a:p>
+            <a:r>
+              <a:rPr lang="en-US" sz="1700" dirty="0">
+                <a:solidFill>
+                  <a:srgbClr val="17364A"/>
+                </a:solidFill>
+                <a:latin typeface="Aptos" pitchFamily="34" charset="0"/>
+                <a:ea typeface="Aptos" pitchFamily="34" charset="-122"/>
+                <a:cs typeface="Aptos" pitchFamily="34" charset="-120"/>
+              </a:rPr>
+              <a:t>Guardrails include narrow goals, allowed-action lists, prohibited actions, and approval gates.</a:t>
+            </a:r>
+            <a:endParaRPr lang="en-US" sz="1700" dirty="0"/>
+          </a:p>
+          <a:p>
+            <a:r>
+              <a:rPr lang="en-US" sz="1700" dirty="0">
+                <a:solidFill>
+                  <a:srgbClr val="17364A"/>
+                </a:solidFill>
+                <a:latin typeface="Aptos" pitchFamily="34" charset="0"/>
+                <a:ea typeface="Aptos" pitchFamily="34" charset="-122"/>
+                <a:cs typeface="Aptos" pitchFamily="34" charset="-120"/>
+              </a:rPr>
+              <a:t>Unauthorized system access.</a:t>
+            </a:r>
+            <a:endParaRPr lang="en-US" sz="1700" dirty="0"/>
+          </a:p>
+        </p:txBody>
+      </p:sp>
+      <p:sp>
+        <p:nvSpPr>
+          <p:cNvPr id="11" name="Shape 9"/>
+          <p:cNvSpPr/>
+          <p:nvPr/>
+        </p:nvSpPr>
+        <p:spPr>
+          <a:xfrm>
+            <a:off x="7909560" y="1417320"/>
+            <a:ext cx="3154680" cy="1828800"/>
+          </a:xfrm>
+          <a:prstGeom prst="roundRect">
+            <a:avLst>
+              <a:gd name="adj" fmla="val 6000"/>
+            </a:avLst>
+          </a:prstGeom>
+          <a:solidFill>
+            <a:srgbClr val="EEF8ED"/>
+          </a:solidFill>
+          <a:ln w="12700">
+            <a:solidFill>
+              <a:srgbClr val="B9D7E6"/>
+            </a:solidFill>
+            <a:prstDash val="solid"/>
+          </a:ln>
+        </p:spPr>
+      </p:sp>
+      <p:sp>
+        <p:nvSpPr>
+          <p:cNvPr id="12" name="Text 10"/>
+          <p:cNvSpPr/>
+          <p:nvPr/>
+        </p:nvSpPr>
+        <p:spPr>
+          <a:xfrm>
+            <a:off x="8074152" y="1563624"/>
+            <a:ext cx="2825496" cy="201168"/>
+          </a:xfrm>
+          <a:prstGeom prst="rect">
+            <a:avLst/>
+          </a:prstGeom>
+          <a:noFill/>
+          <a:ln/>
+        </p:spPr>
+        <p:txBody>
+          <a:bodyPr wrap="square" lIns="0" tIns="0" rIns="0" bIns="0" rtlCol="0" anchor="ctr"/>
+          <a:lstStyle/>
+          <a:p>
             <a:pPr indent="0" marL="0">
               <a:buNone/>
             </a:pPr>
             <a:r>
-              <a:rPr lang="en-US" sz="1420" dirty="0">
+              <a:rPr lang="en-US" sz="950" b="1" dirty="0">
+                <a:solidFill>
+                  <a:srgbClr val="0068B7"/>
+                </a:solidFill>
+                <a:latin typeface="Aptos" pitchFamily="34" charset="0"/>
+                <a:ea typeface="Aptos" pitchFamily="34" charset="-122"/>
+                <a:cs typeface="Aptos" pitchFamily="34" charset="-120"/>
+              </a:rPr>
+              <a:t>Key idea</a:t>
+            </a:r>
+            <a:endParaRPr lang="en-US" sz="950" dirty="0"/>
+          </a:p>
+        </p:txBody>
+      </p:sp>
+      <p:sp>
+        <p:nvSpPr>
+          <p:cNvPr id="13" name="Text 11"/>
+          <p:cNvSpPr/>
+          <p:nvPr/>
+        </p:nvSpPr>
+        <p:spPr>
+          <a:xfrm>
+            <a:off x="8074152" y="1856232"/>
+            <a:ext cx="2825496" cy="1261872"/>
+          </a:xfrm>
+          <a:prstGeom prst="rect">
+            <a:avLst/>
+          </a:prstGeom>
+          <a:noFill/>
+          <a:ln/>
+        </p:spPr>
+        <p:txBody>
+          <a:bodyPr wrap="square" lIns="0" tIns="0" rIns="0" bIns="0" rtlCol="0" anchor="t">
+            <a:normAutofit/>
+          </a:bodyPr>
+          <a:lstStyle/>
+          <a:p>
+            <a:pPr indent="0" marL="0">
+              <a:buNone/>
+            </a:pPr>
+            <a:r>
+              <a:rPr lang="en-US" sz="1250" dirty="0">
                 <a:solidFill>
                   <a:srgbClr val="17364A"/>
                 </a:solidFill>
@@ -3573,9 +4616,116 @@
                 <a:ea typeface="Aptos" pitchFamily="34" charset="-122"/>
                 <a:cs typeface="Aptos" pitchFamily="34" charset="-120"/>
               </a:rPr>
-              <a:t>Agentic workflows may combine RAG, APIs, prompts, classification models, workflow rules, and messaging systems. They are most appropriate when tasks are repetitive, bounded, reviewable, and supported by reliable data. They are least appropriate when the task requires complex judgment, legal interpretation, community sensitivity, or irreversible action without review. Public health agencies should pilot agentic workflows in limited, low-risk settings before expanding. Monitoring should include tool calls, failed actions, overrides, user feedback, time saved, error types, and unintended consequences.</a:t>
-            </a:r>
-            <a:endParaRPr lang="en-US" sz="1420" dirty="0"/>
+              <a:t>Excessive agency.</a:t>
+            </a:r>
+            <a:endParaRPr lang="en-US" sz="1250" dirty="0"/>
+          </a:p>
+        </p:txBody>
+      </p:sp>
+      <p:sp>
+        <p:nvSpPr>
+          <p:cNvPr id="14" name="Shape 12"/>
+          <p:cNvSpPr/>
+          <p:nvPr/>
+        </p:nvSpPr>
+        <p:spPr>
+          <a:xfrm>
+            <a:off x="7909560" y="3520440"/>
+            <a:ext cx="3154680" cy="1737360"/>
+          </a:xfrm>
+          <a:prstGeom prst="roundRect">
+            <a:avLst>
+              <a:gd name="adj" fmla="val 6316"/>
+            </a:avLst>
+          </a:prstGeom>
+          <a:solidFill>
+            <a:srgbClr val="EAF6F8"/>
+          </a:solidFill>
+          <a:ln w="12700">
+            <a:solidFill>
+              <a:srgbClr val="B9D7E6"/>
+            </a:solidFill>
+            <a:prstDash val="solid"/>
+          </a:ln>
+        </p:spPr>
+      </p:sp>
+      <p:sp>
+        <p:nvSpPr>
+          <p:cNvPr id="15" name="Text 13"/>
+          <p:cNvSpPr/>
+          <p:nvPr/>
+        </p:nvSpPr>
+        <p:spPr>
+          <a:xfrm>
+            <a:off x="8074152" y="3666744"/>
+            <a:ext cx="2825496" cy="201168"/>
+          </a:xfrm>
+          <a:prstGeom prst="rect">
+            <a:avLst/>
+          </a:prstGeom>
+          <a:noFill/>
+          <a:ln/>
+        </p:spPr>
+        <p:txBody>
+          <a:bodyPr wrap="square" lIns="0" tIns="0" rIns="0" bIns="0" rtlCol="0" anchor="ctr"/>
+          <a:lstStyle/>
+          <a:p>
+            <a:pPr indent="0" marL="0">
+              <a:buNone/>
+            </a:pPr>
+            <a:r>
+              <a:rPr lang="en-US" sz="950" b="1" dirty="0">
+                <a:solidFill>
+                  <a:srgbClr val="0068B7"/>
+                </a:solidFill>
+                <a:latin typeface="Aptos" pitchFamily="34" charset="0"/>
+                <a:ea typeface="Aptos" pitchFamily="34" charset="-122"/>
+                <a:cs typeface="Aptos" pitchFamily="34" charset="-120"/>
+              </a:rPr>
+              <a:t>Use this for</a:t>
+            </a:r>
+            <a:endParaRPr lang="en-US" sz="950" dirty="0"/>
+          </a:p>
+        </p:txBody>
+      </p:sp>
+      <p:sp>
+        <p:nvSpPr>
+          <p:cNvPr id="16" name="Text 14"/>
+          <p:cNvSpPr/>
+          <p:nvPr/>
+        </p:nvSpPr>
+        <p:spPr>
+          <a:xfrm>
+            <a:off x="8074152" y="3959352"/>
+            <a:ext cx="2825496" cy="1170432"/>
+          </a:xfrm>
+          <a:prstGeom prst="rect">
+            <a:avLst/>
+          </a:prstGeom>
+          <a:noFill/>
+          <a:ln/>
+        </p:spPr>
+        <p:txBody>
+          <a:bodyPr wrap="square" lIns="0" tIns="0" rIns="0" bIns="0" rtlCol="0" anchor="t">
+            <a:normAutofit/>
+          </a:bodyPr>
+          <a:lstStyle/>
+          <a:p>
+            <a:pPr indent="0" marL="0">
+              <a:buNone/>
+            </a:pPr>
+            <a:r>
+              <a:rPr lang="en-US" sz="1250" dirty="0">
+                <a:solidFill>
+                  <a:srgbClr val="17364A"/>
+                </a:solidFill>
+                <a:latin typeface="Aptos" pitchFamily="34" charset="0"/>
+                <a:ea typeface="Aptos" pitchFamily="34" charset="-122"/>
+                <a:cs typeface="Aptos" pitchFamily="34" charset="-120"/>
+              </a:rPr>
+              <a:t>Connect the concept to public health decisions, safeguards, documentation, or implementation work.</a:t>
+            </a:r>
+            <a:endParaRPr lang="en-US" sz="1250" dirty="0"/>
           </a:p>
         </p:txBody>
       </p:sp>
@@ -3638,7 +4788,32 @@
       </p:sp>
       <p:sp>
         <p:nvSpPr>
-          <p:cNvPr id="3" name="Text 1"/>
+          <p:cNvPr id="3" name="Shape 1"/>
+          <p:cNvSpPr/>
+          <p:nvPr/>
+        </p:nvSpPr>
+        <p:spPr>
+          <a:xfrm>
+            <a:off x="0" y="164592"/>
+            <a:ext cx="146304" cy="6693408"/>
+          </a:xfrm>
+          <a:prstGeom prst="rect">
+            <a:avLst/>
+          </a:prstGeom>
+          <a:solidFill>
+            <a:srgbClr val="2F8A28"/>
+          </a:solidFill>
+          <a:ln w="12700">
+            <a:solidFill>
+              <a:srgbClr val="2F8A28"/>
+            </a:solidFill>
+            <a:prstDash val="solid"/>
+          </a:ln>
+        </p:spPr>
+      </p:sp>
+      <p:sp>
+        <p:nvSpPr>
+          <p:cNvPr id="4" name="Text 2"/>
           <p:cNvSpPr/>
           <p:nvPr/>
         </p:nvSpPr>
@@ -3677,7 +4852,7 @@
       </p:sp>
       <p:sp>
         <p:nvSpPr>
-          <p:cNvPr id="4" name="Text 2"/>
+          <p:cNvPr id="5" name="Text 3"/>
           <p:cNvSpPr/>
           <p:nvPr/>
         </p:nvSpPr>
@@ -3716,7 +4891,7 @@
       </p:sp>
       <p:sp>
         <p:nvSpPr>
-          <p:cNvPr id="5" name="Text 3"/>
+          <p:cNvPr id="6" name="Text 4"/>
           <p:cNvSpPr/>
           <p:nvPr/>
         </p:nvSpPr>
@@ -3755,7 +4930,7 @@
       </p:sp>
       <p:sp>
         <p:nvSpPr>
-          <p:cNvPr id="6" name="Text 4"/>
+          <p:cNvPr id="7" name="Text 5"/>
           <p:cNvSpPr/>
           <p:nvPr/>
         </p:nvSpPr>
@@ -3788,7 +4963,7 @@
                 <a:ea typeface="Aptos Display" pitchFamily="34" charset="-122"/>
                 <a:cs typeface="Aptos Display" pitchFamily="34" charset="-120"/>
               </a:rPr>
-              <a:t>Reflection Questions</a:t>
+              <a:t>Risks, Failure Modes, and Guardrails Continued</a:t>
             </a:r>
             <a:endParaRPr lang="en-US" sz="2700" dirty="0"/>
           </a:p>
@@ -3796,32 +4971,164 @@
       </p:sp>
       <p:sp>
         <p:nvSpPr>
-          <p:cNvPr id="7" name="Text 5"/>
-          <p:cNvSpPr/>
-          <p:nvPr/>
-        </p:nvSpPr>
-        <p:spPr>
-          <a:xfrm>
-            <a:off x="822960" y="1325880"/>
-            <a:ext cx="10378440" cy="4800600"/>
-          </a:xfrm>
-          <a:prstGeom prst="rect">
-            <a:avLst/>
-          </a:prstGeom>
-          <a:noFill/>
-          <a:ln/>
-        </p:spPr>
-        <p:txBody>
-          <a:bodyPr wrap="square" lIns="1016" tIns="1016" rIns="1016" bIns="1016" rtlCol="0" anchor="t">
+          <p:cNvPr id="8" name="Text 6"/>
+          <p:cNvSpPr/>
+          <p:nvPr/>
+        </p:nvSpPr>
+        <p:spPr>
+          <a:xfrm>
+            <a:off x="868680" y="1417320"/>
+            <a:ext cx="6675120" cy="4434840"/>
+          </a:xfrm>
+          <a:prstGeom prst="rect">
+            <a:avLst/>
+          </a:prstGeom>
+          <a:noFill/>
+          <a:ln/>
+        </p:spPr>
+        <p:txBody>
+          <a:bodyPr wrap="square" lIns="635" tIns="635" rIns="635" bIns="635" rtlCol="0" anchor="t">
             <a:normAutofit/>
           </a:bodyPr>
           <a:lstStyle/>
           <a:p>
+            <a:r>
+              <a:rPr lang="en-US" sz="1700" dirty="0">
+                <a:solidFill>
+                  <a:srgbClr val="17364A"/>
+                </a:solidFill>
+                <a:latin typeface="Aptos" pitchFamily="34" charset="0"/>
+                <a:ea typeface="Aptos" pitchFamily="34" charset="-122"/>
+                <a:cs typeface="Aptos" pitchFamily="34" charset="-120"/>
+              </a:rPr>
+              <a:t>Unclear accountability.</a:t>
+            </a:r>
+            <a:endParaRPr lang="en-US" sz="1700" dirty="0"/>
+          </a:p>
+          <a:p>
+            <a:r>
+              <a:rPr lang="en-US" sz="1700" dirty="0">
+                <a:solidFill>
+                  <a:srgbClr val="17364A"/>
+                </a:solidFill>
+                <a:latin typeface="Aptos" pitchFamily="34" charset="0"/>
+                <a:ea typeface="Aptos" pitchFamily="34" charset="-122"/>
+                <a:cs typeface="Aptos" pitchFamily="34" charset="-120"/>
+              </a:rPr>
+              <a:t>Staff may not know who is responsible for agent actions.</a:t>
+            </a:r>
+            <a:endParaRPr lang="en-US" sz="1700" dirty="0"/>
+          </a:p>
+          <a:p>
+            <a:r>
+              <a:rPr lang="en-US" sz="1700" dirty="0">
+                <a:solidFill>
+                  <a:srgbClr val="17364A"/>
+                </a:solidFill>
+                <a:latin typeface="Aptos" pitchFamily="34" charset="0"/>
+                <a:ea typeface="Aptos" pitchFamily="34" charset="-122"/>
+                <a:cs typeface="Aptos" pitchFamily="34" charset="-120"/>
+              </a:rPr>
+              <a:t>Guardrails include role definitions, review records, and governance ownership.</a:t>
+            </a:r>
+            <a:endParaRPr lang="en-US" sz="1700" dirty="0"/>
+          </a:p>
+        </p:txBody>
+      </p:sp>
+      <p:sp>
+        <p:nvSpPr>
+          <p:cNvPr id="9" name="Shape 7"/>
+          <p:cNvSpPr/>
+          <p:nvPr/>
+        </p:nvSpPr>
+        <p:spPr>
+          <a:xfrm>
+            <a:off x="7909560" y="1417320"/>
+            <a:ext cx="3154680" cy="1828800"/>
+          </a:xfrm>
+          <a:prstGeom prst="roundRect">
+            <a:avLst>
+              <a:gd name="adj" fmla="val 6000"/>
+            </a:avLst>
+          </a:prstGeom>
+          <a:solidFill>
+            <a:srgbClr val="EEF8ED"/>
+          </a:solidFill>
+          <a:ln w="12700">
+            <a:solidFill>
+              <a:srgbClr val="B9D7E6"/>
+            </a:solidFill>
+            <a:prstDash val="solid"/>
+          </a:ln>
+        </p:spPr>
+      </p:sp>
+      <p:sp>
+        <p:nvSpPr>
+          <p:cNvPr id="10" name="Text 8"/>
+          <p:cNvSpPr/>
+          <p:nvPr/>
+        </p:nvSpPr>
+        <p:spPr>
+          <a:xfrm>
+            <a:off x="8074152" y="1563624"/>
+            <a:ext cx="2825496" cy="201168"/>
+          </a:xfrm>
+          <a:prstGeom prst="rect">
+            <a:avLst/>
+          </a:prstGeom>
+          <a:noFill/>
+          <a:ln/>
+        </p:spPr>
+        <p:txBody>
+          <a:bodyPr wrap="square" lIns="0" tIns="0" rIns="0" bIns="0" rtlCol="0" anchor="ctr"/>
+          <a:lstStyle/>
+          <a:p>
             <a:pPr indent="0" marL="0">
               <a:buNone/>
             </a:pPr>
             <a:r>
-              <a:rPr lang="en-US" sz="1420" dirty="0">
+              <a:rPr lang="en-US" sz="950" b="1" dirty="0">
+                <a:solidFill>
+                  <a:srgbClr val="0068B7"/>
+                </a:solidFill>
+                <a:latin typeface="Aptos" pitchFamily="34" charset="0"/>
+                <a:ea typeface="Aptos" pitchFamily="34" charset="-122"/>
+                <a:cs typeface="Aptos" pitchFamily="34" charset="-120"/>
+              </a:rPr>
+              <a:t>Key idea</a:t>
+            </a:r>
+            <a:endParaRPr lang="en-US" sz="950" dirty="0"/>
+          </a:p>
+        </p:txBody>
+      </p:sp>
+      <p:sp>
+        <p:nvSpPr>
+          <p:cNvPr id="11" name="Text 9"/>
+          <p:cNvSpPr/>
+          <p:nvPr/>
+        </p:nvSpPr>
+        <p:spPr>
+          <a:xfrm>
+            <a:off x="8074152" y="1856232"/>
+            <a:ext cx="2825496" cy="1261872"/>
+          </a:xfrm>
+          <a:prstGeom prst="rect">
+            <a:avLst/>
+          </a:prstGeom>
+          <a:noFill/>
+          <a:ln/>
+        </p:spPr>
+        <p:txBody>
+          <a:bodyPr wrap="square" lIns="0" tIns="0" rIns="0" bIns="0" rtlCol="0" anchor="t">
+            <a:normAutofit/>
+          </a:bodyPr>
+          <a:lstStyle/>
+          <a:p>
+            <a:pPr indent="0" marL="0">
+              <a:buNone/>
+            </a:pPr>
+            <a:r>
+              <a:rPr lang="en-US" sz="1250" dirty="0">
                 <a:solidFill>
                   <a:srgbClr val="17364A"/>
                 </a:solidFill>
@@ -3829,9 +5136,116 @@
                 <a:ea typeface="Aptos" pitchFamily="34" charset="-122"/>
                 <a:cs typeface="Aptos" pitchFamily="34" charset="-120"/>
               </a:rPr>
-              <a:t>What goal would the agent pursue, and how narrowly can it be defined? Which tools or systems would the agent access? Which actions are allowed, prohibited, or require human approval?</a:t>
-            </a:r>
-            <a:endParaRPr lang="en-US" sz="1420" dirty="0"/>
+              <a:t>Unclear accountability.</a:t>
+            </a:r>
+            <a:endParaRPr lang="en-US" sz="1250" dirty="0"/>
+          </a:p>
+        </p:txBody>
+      </p:sp>
+      <p:sp>
+        <p:nvSpPr>
+          <p:cNvPr id="12" name="Shape 10"/>
+          <p:cNvSpPr/>
+          <p:nvPr/>
+        </p:nvSpPr>
+        <p:spPr>
+          <a:xfrm>
+            <a:off x="7909560" y="3520440"/>
+            <a:ext cx="3154680" cy="1737360"/>
+          </a:xfrm>
+          <a:prstGeom prst="roundRect">
+            <a:avLst>
+              <a:gd name="adj" fmla="val 6316"/>
+            </a:avLst>
+          </a:prstGeom>
+          <a:solidFill>
+            <a:srgbClr val="EAF6F8"/>
+          </a:solidFill>
+          <a:ln w="12700">
+            <a:solidFill>
+              <a:srgbClr val="B9D7E6"/>
+            </a:solidFill>
+            <a:prstDash val="solid"/>
+          </a:ln>
+        </p:spPr>
+      </p:sp>
+      <p:sp>
+        <p:nvSpPr>
+          <p:cNvPr id="13" name="Text 11"/>
+          <p:cNvSpPr/>
+          <p:nvPr/>
+        </p:nvSpPr>
+        <p:spPr>
+          <a:xfrm>
+            <a:off x="8074152" y="3666744"/>
+            <a:ext cx="2825496" cy="201168"/>
+          </a:xfrm>
+          <a:prstGeom prst="rect">
+            <a:avLst/>
+          </a:prstGeom>
+          <a:noFill/>
+          <a:ln/>
+        </p:spPr>
+        <p:txBody>
+          <a:bodyPr wrap="square" lIns="0" tIns="0" rIns="0" bIns="0" rtlCol="0" anchor="ctr"/>
+          <a:lstStyle/>
+          <a:p>
+            <a:pPr indent="0" marL="0">
+              <a:buNone/>
+            </a:pPr>
+            <a:r>
+              <a:rPr lang="en-US" sz="950" b="1" dirty="0">
+                <a:solidFill>
+                  <a:srgbClr val="0068B7"/>
+                </a:solidFill>
+                <a:latin typeface="Aptos" pitchFamily="34" charset="0"/>
+                <a:ea typeface="Aptos" pitchFamily="34" charset="-122"/>
+                <a:cs typeface="Aptos" pitchFamily="34" charset="-120"/>
+              </a:rPr>
+              <a:t>Use this for</a:t>
+            </a:r>
+            <a:endParaRPr lang="en-US" sz="950" dirty="0"/>
+          </a:p>
+        </p:txBody>
+      </p:sp>
+      <p:sp>
+        <p:nvSpPr>
+          <p:cNvPr id="14" name="Text 12"/>
+          <p:cNvSpPr/>
+          <p:nvPr/>
+        </p:nvSpPr>
+        <p:spPr>
+          <a:xfrm>
+            <a:off x="8074152" y="3959352"/>
+            <a:ext cx="2825496" cy="1170432"/>
+          </a:xfrm>
+          <a:prstGeom prst="rect">
+            <a:avLst/>
+          </a:prstGeom>
+          <a:noFill/>
+          <a:ln/>
+        </p:spPr>
+        <p:txBody>
+          <a:bodyPr wrap="square" lIns="0" tIns="0" rIns="0" bIns="0" rtlCol="0" anchor="t">
+            <a:normAutofit/>
+          </a:bodyPr>
+          <a:lstStyle/>
+          <a:p>
+            <a:pPr indent="0" marL="0">
+              <a:buNone/>
+            </a:pPr>
+            <a:r>
+              <a:rPr lang="en-US" sz="1250" dirty="0">
+                <a:solidFill>
+                  <a:srgbClr val="17364A"/>
+                </a:solidFill>
+                <a:latin typeface="Aptos" pitchFamily="34" charset="0"/>
+                <a:ea typeface="Aptos" pitchFamily="34" charset="-122"/>
+                <a:cs typeface="Aptos" pitchFamily="34" charset="-120"/>
+              </a:rPr>
+              <a:t>Connect the concept to public health decisions, safeguards, documentation, or implementation work.</a:t>
+            </a:r>
+            <a:endParaRPr lang="en-US" sz="1250" dirty="0"/>
           </a:p>
         </p:txBody>
       </p:sp>
@@ -3894,7 +5308,32 @@
       </p:sp>
       <p:sp>
         <p:nvSpPr>
-          <p:cNvPr id="3" name="Text 1"/>
+          <p:cNvPr id="3" name="Shape 1"/>
+          <p:cNvSpPr/>
+          <p:nvPr/>
+        </p:nvSpPr>
+        <p:spPr>
+          <a:xfrm>
+            <a:off x="0" y="164592"/>
+            <a:ext cx="146304" cy="6693408"/>
+          </a:xfrm>
+          <a:prstGeom prst="rect">
+            <a:avLst/>
+          </a:prstGeom>
+          <a:solidFill>
+            <a:srgbClr val="2F8A28"/>
+          </a:solidFill>
+          <a:ln w="12700">
+            <a:solidFill>
+              <a:srgbClr val="2F8A28"/>
+            </a:solidFill>
+            <a:prstDash val="solid"/>
+          </a:ln>
+        </p:spPr>
+      </p:sp>
+      <p:sp>
+        <p:nvSpPr>
+          <p:cNvPr id="4" name="Text 2"/>
           <p:cNvSpPr/>
           <p:nvPr/>
         </p:nvSpPr>
@@ -3933,7 +5372,7 @@
       </p:sp>
       <p:sp>
         <p:nvSpPr>
-          <p:cNvPr id="4" name="Text 2"/>
+          <p:cNvPr id="5" name="Text 3"/>
           <p:cNvSpPr/>
           <p:nvPr/>
         </p:nvSpPr>
@@ -3972,7 +5411,7 @@
       </p:sp>
       <p:sp>
         <p:nvSpPr>
-          <p:cNvPr id="5" name="Text 3"/>
+          <p:cNvPr id="6" name="Text 4"/>
           <p:cNvSpPr/>
           <p:nvPr/>
         </p:nvSpPr>
@@ -4011,13 +5450,77 @@
       </p:sp>
       <p:sp>
         <p:nvSpPr>
-          <p:cNvPr id="6" name="Text 4"/>
+          <p:cNvPr id="7" name="Shape 5"/>
           <p:cNvSpPr/>
           <p:nvPr/>
         </p:nvSpPr>
         <p:spPr>
           <a:xfrm>
             <a:off x="640080" y="658368"/>
+            <a:ext cx="420624" cy="420624"/>
+          </a:xfrm>
+          <a:prstGeom prst="ellipse">
+            <a:avLst/>
+          </a:prstGeom>
+          <a:solidFill>
+            <a:srgbClr val="0068B7"/>
+          </a:solidFill>
+          <a:ln w="12700">
+            <a:solidFill>
+              <a:srgbClr val="0068B7"/>
+            </a:solidFill>
+            <a:prstDash val="solid"/>
+          </a:ln>
+        </p:spPr>
+      </p:sp>
+      <p:sp>
+        <p:nvSpPr>
+          <p:cNvPr id="8" name="Text 6"/>
+          <p:cNvSpPr/>
+          <p:nvPr/>
+        </p:nvSpPr>
+        <p:spPr>
+          <a:xfrm>
+            <a:off x="640080" y="731520"/>
+            <a:ext cx="420624" cy="164592"/>
+          </a:xfrm>
+          <a:prstGeom prst="rect">
+            <a:avLst/>
+          </a:prstGeom>
+          <a:noFill/>
+          <a:ln/>
+        </p:spPr>
+        <p:txBody>
+          <a:bodyPr wrap="square" lIns="0" tIns="0" rIns="0" bIns="0" rtlCol="0" anchor="ctr"/>
+          <a:lstStyle/>
+          <a:p>
+            <a:pPr algn="ctr" indent="0" marL="0">
+              <a:buNone/>
+            </a:pPr>
+            <a:r>
+              <a:rPr lang="en-US" sz="1100" b="1" dirty="0">
+                <a:solidFill>
+                  <a:srgbClr val="FFFFFF"/>
+                </a:solidFill>
+                <a:latin typeface="Aptos" pitchFamily="34" charset="0"/>
+                <a:ea typeface="Aptos" pitchFamily="34" charset="-122"/>
+                <a:cs typeface="Aptos" pitchFamily="34" charset="-120"/>
+              </a:rPr>
+              <a:t>7</a:t>
+            </a:r>
+            <a:endParaRPr lang="en-US" sz="1100" dirty="0"/>
+          </a:p>
+        </p:txBody>
+      </p:sp>
+      <p:sp>
+        <p:nvSpPr>
+          <p:cNvPr id="9" name="Text 7"/>
+          <p:cNvSpPr/>
+          <p:nvPr/>
+        </p:nvSpPr>
+        <p:spPr>
+          <a:xfrm>
+            <a:off x="640080" y="621792"/>
             <a:ext cx="10881360" cy="566928"/>
           </a:xfrm>
           <a:prstGeom prst="rect">
@@ -4044,7 +5547,7 @@
                 <a:ea typeface="Aptos Display" pitchFamily="34" charset="-122"/>
                 <a:cs typeface="Aptos Display" pitchFamily="34" charset="-120"/>
               </a:rPr>
-              <a:t>Reflection Questions Continued</a:t>
+              <a:t>Application to AI-Supported Workflows</a:t>
             </a:r>
             <a:endParaRPr lang="en-US" sz="2700" dirty="0"/>
           </a:p>
@@ -4052,32 +5555,178 @@
       </p:sp>
       <p:sp>
         <p:nvSpPr>
-          <p:cNvPr id="7" name="Text 5"/>
-          <p:cNvSpPr/>
-          <p:nvPr/>
-        </p:nvSpPr>
-        <p:spPr>
-          <a:xfrm>
-            <a:off x="822960" y="1325880"/>
-            <a:ext cx="10378440" cy="4800600"/>
-          </a:xfrm>
-          <a:prstGeom prst="rect">
-            <a:avLst/>
-          </a:prstGeom>
-          <a:noFill/>
-          <a:ln/>
-        </p:spPr>
-        <p:txBody>
-          <a:bodyPr wrap="square" lIns="1016" tIns="1016" rIns="1016" bIns="1016" rtlCol="0" anchor="t">
+          <p:cNvPr id="10" name="Text 8"/>
+          <p:cNvSpPr/>
+          <p:nvPr/>
+        </p:nvSpPr>
+        <p:spPr>
+          <a:xfrm>
+            <a:off x="868680" y="1417320"/>
+            <a:ext cx="6675120" cy="4434840"/>
+          </a:xfrm>
+          <a:prstGeom prst="rect">
+            <a:avLst/>
+          </a:prstGeom>
+          <a:noFill/>
+          <a:ln/>
+        </p:spPr>
+        <p:txBody>
+          <a:bodyPr wrap="square" lIns="635" tIns="635" rIns="635" bIns="635" rtlCol="0" anchor="t">
             <a:normAutofit/>
           </a:bodyPr>
           <a:lstStyle/>
           <a:p>
+            <a:r>
+              <a:rPr lang="en-US" sz="1700" dirty="0">
+                <a:solidFill>
+                  <a:srgbClr val="17364A"/>
+                </a:solidFill>
+                <a:latin typeface="Aptos" pitchFamily="34" charset="0"/>
+                <a:ea typeface="Aptos" pitchFamily="34" charset="-122"/>
+                <a:cs typeface="Aptos" pitchFamily="34" charset="-120"/>
+              </a:rPr>
+              <a:t>Agentic workflows may combine RAG, APIs, prompts, classification models, workflow rules, and messaging systems.</a:t>
+            </a:r>
+            <a:endParaRPr lang="en-US" sz="1700" dirty="0"/>
+          </a:p>
+          <a:p>
+            <a:r>
+              <a:rPr lang="en-US" sz="1700" dirty="0">
+                <a:solidFill>
+                  <a:srgbClr val="17364A"/>
+                </a:solidFill>
+                <a:latin typeface="Aptos" pitchFamily="34" charset="0"/>
+                <a:ea typeface="Aptos" pitchFamily="34" charset="-122"/>
+                <a:cs typeface="Aptos" pitchFamily="34" charset="-120"/>
+              </a:rPr>
+              <a:t>They are most appropriate when tasks are repetitive, bounded, reviewable, and supported by reliable data.</a:t>
+            </a:r>
+            <a:endParaRPr lang="en-US" sz="1700" dirty="0"/>
+          </a:p>
+          <a:p>
+            <a:r>
+              <a:rPr lang="en-US" sz="1700" dirty="0">
+                <a:solidFill>
+                  <a:srgbClr val="17364A"/>
+                </a:solidFill>
+                <a:latin typeface="Aptos" pitchFamily="34" charset="0"/>
+                <a:ea typeface="Aptos" pitchFamily="34" charset="-122"/>
+                <a:cs typeface="Aptos" pitchFamily="34" charset="-120"/>
+              </a:rPr>
+              <a:t>They are least appropriate when the task requires complex judgment, legal interpretation, community sensitivity, or.</a:t>
+            </a:r>
+            <a:endParaRPr lang="en-US" sz="1700" dirty="0"/>
+          </a:p>
+          <a:p>
+            <a:r>
+              <a:rPr lang="en-US" sz="1700" dirty="0">
+                <a:solidFill>
+                  <a:srgbClr val="17364A"/>
+                </a:solidFill>
+                <a:latin typeface="Aptos" pitchFamily="34" charset="0"/>
+                <a:ea typeface="Aptos" pitchFamily="34" charset="-122"/>
+                <a:cs typeface="Aptos" pitchFamily="34" charset="-120"/>
+              </a:rPr>
+              <a:t>Public health agencies should pilot agentic workflows in limited, low-risk settings before expanding.</a:t>
+            </a:r>
+            <a:endParaRPr lang="en-US" sz="1700" dirty="0"/>
+          </a:p>
+        </p:txBody>
+      </p:sp>
+      <p:sp>
+        <p:nvSpPr>
+          <p:cNvPr id="11" name="Shape 9"/>
+          <p:cNvSpPr/>
+          <p:nvPr/>
+        </p:nvSpPr>
+        <p:spPr>
+          <a:xfrm>
+            <a:off x="7909560" y="1417320"/>
+            <a:ext cx="3154680" cy="1828800"/>
+          </a:xfrm>
+          <a:prstGeom prst="roundRect">
+            <a:avLst>
+              <a:gd name="adj" fmla="val 6000"/>
+            </a:avLst>
+          </a:prstGeom>
+          <a:solidFill>
+            <a:srgbClr val="EEF8ED"/>
+          </a:solidFill>
+          <a:ln w="12700">
+            <a:solidFill>
+              <a:srgbClr val="B9D7E6"/>
+            </a:solidFill>
+            <a:prstDash val="solid"/>
+          </a:ln>
+        </p:spPr>
+      </p:sp>
+      <p:sp>
+        <p:nvSpPr>
+          <p:cNvPr id="12" name="Text 10"/>
+          <p:cNvSpPr/>
+          <p:nvPr/>
+        </p:nvSpPr>
+        <p:spPr>
+          <a:xfrm>
+            <a:off x="8074152" y="1563624"/>
+            <a:ext cx="2825496" cy="201168"/>
+          </a:xfrm>
+          <a:prstGeom prst="rect">
+            <a:avLst/>
+          </a:prstGeom>
+          <a:noFill/>
+          <a:ln/>
+        </p:spPr>
+        <p:txBody>
+          <a:bodyPr wrap="square" lIns="0" tIns="0" rIns="0" bIns="0" rtlCol="0" anchor="ctr"/>
+          <a:lstStyle/>
+          <a:p>
             <a:pPr indent="0" marL="0">
               <a:buNone/>
             </a:pPr>
             <a:r>
-              <a:rPr lang="en-US" sz="1420" dirty="0">
+              <a:rPr lang="en-US" sz="950" b="1" dirty="0">
+                <a:solidFill>
+                  <a:srgbClr val="0068B7"/>
+                </a:solidFill>
+                <a:latin typeface="Aptos" pitchFamily="34" charset="0"/>
+                <a:ea typeface="Aptos" pitchFamily="34" charset="-122"/>
+                <a:cs typeface="Aptos" pitchFamily="34" charset="-120"/>
+              </a:rPr>
+              <a:t>Key idea</a:t>
+            </a:r>
+            <a:endParaRPr lang="en-US" sz="950" dirty="0"/>
+          </a:p>
+        </p:txBody>
+      </p:sp>
+      <p:sp>
+        <p:nvSpPr>
+          <p:cNvPr id="13" name="Text 11"/>
+          <p:cNvSpPr/>
+          <p:nvPr/>
+        </p:nvSpPr>
+        <p:spPr>
+          <a:xfrm>
+            <a:off x="8074152" y="1856232"/>
+            <a:ext cx="2825496" cy="1261872"/>
+          </a:xfrm>
+          <a:prstGeom prst="rect">
+            <a:avLst/>
+          </a:prstGeom>
+          <a:noFill/>
+          <a:ln/>
+        </p:spPr>
+        <p:txBody>
+          <a:bodyPr wrap="square" lIns="0" tIns="0" rIns="0" bIns="0" rtlCol="0" anchor="t">
+            <a:normAutofit/>
+          </a:bodyPr>
+          <a:lstStyle/>
+          <a:p>
+            <a:pPr indent="0" marL="0">
+              <a:buNone/>
+            </a:pPr>
+            <a:r>
+              <a:rPr lang="en-US" sz="1250" dirty="0">
                 <a:solidFill>
                   <a:srgbClr val="17364A"/>
                 </a:solidFill>
@@ -4085,9 +5734,116 @@
                 <a:ea typeface="Aptos" pitchFamily="34" charset="-122"/>
                 <a:cs typeface="Aptos" pitchFamily="34" charset="-120"/>
               </a:rPr>
-              <a:t>What logs are needed to reconstruct agent behavior? What rollback or correction process is needed if the agent makes an error?</a:t>
-            </a:r>
-            <a:endParaRPr lang="en-US" sz="1420" dirty="0"/>
+              <a:t>Agentic workflows may combine RAG, APIs, prompts, classification models, workflow rules, and messaging systems.</a:t>
+            </a:r>
+            <a:endParaRPr lang="en-US" sz="1250" dirty="0"/>
+          </a:p>
+        </p:txBody>
+      </p:sp>
+      <p:sp>
+        <p:nvSpPr>
+          <p:cNvPr id="14" name="Shape 12"/>
+          <p:cNvSpPr/>
+          <p:nvPr/>
+        </p:nvSpPr>
+        <p:spPr>
+          <a:xfrm>
+            <a:off x="7909560" y="3520440"/>
+            <a:ext cx="3154680" cy="1737360"/>
+          </a:xfrm>
+          <a:prstGeom prst="roundRect">
+            <a:avLst>
+              <a:gd name="adj" fmla="val 6316"/>
+            </a:avLst>
+          </a:prstGeom>
+          <a:solidFill>
+            <a:srgbClr val="EAF6F8"/>
+          </a:solidFill>
+          <a:ln w="12700">
+            <a:solidFill>
+              <a:srgbClr val="B9D7E6"/>
+            </a:solidFill>
+            <a:prstDash val="solid"/>
+          </a:ln>
+        </p:spPr>
+      </p:sp>
+      <p:sp>
+        <p:nvSpPr>
+          <p:cNvPr id="15" name="Text 13"/>
+          <p:cNvSpPr/>
+          <p:nvPr/>
+        </p:nvSpPr>
+        <p:spPr>
+          <a:xfrm>
+            <a:off x="8074152" y="3666744"/>
+            <a:ext cx="2825496" cy="201168"/>
+          </a:xfrm>
+          <a:prstGeom prst="rect">
+            <a:avLst/>
+          </a:prstGeom>
+          <a:noFill/>
+          <a:ln/>
+        </p:spPr>
+        <p:txBody>
+          <a:bodyPr wrap="square" lIns="0" tIns="0" rIns="0" bIns="0" rtlCol="0" anchor="ctr"/>
+          <a:lstStyle/>
+          <a:p>
+            <a:pPr indent="0" marL="0">
+              <a:buNone/>
+            </a:pPr>
+            <a:r>
+              <a:rPr lang="en-US" sz="950" b="1" dirty="0">
+                <a:solidFill>
+                  <a:srgbClr val="0068B7"/>
+                </a:solidFill>
+                <a:latin typeface="Aptos" pitchFamily="34" charset="0"/>
+                <a:ea typeface="Aptos" pitchFamily="34" charset="-122"/>
+                <a:cs typeface="Aptos" pitchFamily="34" charset="-120"/>
+              </a:rPr>
+              <a:t>Use this for</a:t>
+            </a:r>
+            <a:endParaRPr lang="en-US" sz="950" dirty="0"/>
+          </a:p>
+        </p:txBody>
+      </p:sp>
+      <p:sp>
+        <p:nvSpPr>
+          <p:cNvPr id="16" name="Text 14"/>
+          <p:cNvSpPr/>
+          <p:nvPr/>
+        </p:nvSpPr>
+        <p:spPr>
+          <a:xfrm>
+            <a:off x="8074152" y="3959352"/>
+            <a:ext cx="2825496" cy="1170432"/>
+          </a:xfrm>
+          <a:prstGeom prst="rect">
+            <a:avLst/>
+          </a:prstGeom>
+          <a:noFill/>
+          <a:ln/>
+        </p:spPr>
+        <p:txBody>
+          <a:bodyPr wrap="square" lIns="0" tIns="0" rIns="0" bIns="0" rtlCol="0" anchor="t">
+            <a:normAutofit/>
+          </a:bodyPr>
+          <a:lstStyle/>
+          <a:p>
+            <a:pPr indent="0" marL="0">
+              <a:buNone/>
+            </a:pPr>
+            <a:r>
+              <a:rPr lang="en-US" sz="1250" dirty="0">
+                <a:solidFill>
+                  <a:srgbClr val="17364A"/>
+                </a:solidFill>
+                <a:latin typeface="Aptos" pitchFamily="34" charset="0"/>
+                <a:ea typeface="Aptos" pitchFamily="34" charset="-122"/>
+                <a:cs typeface="Aptos" pitchFamily="34" charset="-120"/>
+              </a:rPr>
+              <a:t>Connect the concept to public health decisions, safeguards, documentation, or implementation work.</a:t>
+            </a:r>
+            <a:endParaRPr lang="en-US" sz="1250" dirty="0"/>
           </a:p>
         </p:txBody>
       </p:sp>
@@ -4150,7 +5906,32 @@
       </p:sp>
       <p:sp>
         <p:nvSpPr>
-          <p:cNvPr id="3" name="Text 1"/>
+          <p:cNvPr id="3" name="Shape 1"/>
+          <p:cNvSpPr/>
+          <p:nvPr/>
+        </p:nvSpPr>
+        <p:spPr>
+          <a:xfrm>
+            <a:off x="0" y="164592"/>
+            <a:ext cx="146304" cy="6693408"/>
+          </a:xfrm>
+          <a:prstGeom prst="rect">
+            <a:avLst/>
+          </a:prstGeom>
+          <a:solidFill>
+            <a:srgbClr val="2F8A28"/>
+          </a:solidFill>
+          <a:ln w="12700">
+            <a:solidFill>
+              <a:srgbClr val="2F8A28"/>
+            </a:solidFill>
+            <a:prstDash val="solid"/>
+          </a:ln>
+        </p:spPr>
+      </p:sp>
+      <p:sp>
+        <p:nvSpPr>
+          <p:cNvPr id="4" name="Text 2"/>
           <p:cNvSpPr/>
           <p:nvPr/>
         </p:nvSpPr>
@@ -4189,7 +5970,7 @@
       </p:sp>
       <p:sp>
         <p:nvSpPr>
-          <p:cNvPr id="4" name="Text 2"/>
+          <p:cNvPr id="5" name="Text 3"/>
           <p:cNvSpPr/>
           <p:nvPr/>
         </p:nvSpPr>
@@ -4228,7 +6009,7 @@
       </p:sp>
       <p:sp>
         <p:nvSpPr>
-          <p:cNvPr id="5" name="Text 3"/>
+          <p:cNvPr id="6" name="Text 4"/>
           <p:cNvSpPr/>
           <p:nvPr/>
         </p:nvSpPr>
@@ -4267,13 +6048,77 @@
       </p:sp>
       <p:sp>
         <p:nvSpPr>
-          <p:cNvPr id="6" name="Text 4"/>
+          <p:cNvPr id="7" name="Shape 5"/>
           <p:cNvSpPr/>
           <p:nvPr/>
         </p:nvSpPr>
         <p:spPr>
           <a:xfrm>
             <a:off x="640080" y="658368"/>
+            <a:ext cx="420624" cy="420624"/>
+          </a:xfrm>
+          <a:prstGeom prst="ellipse">
+            <a:avLst/>
+          </a:prstGeom>
+          <a:solidFill>
+            <a:srgbClr val="0068B7"/>
+          </a:solidFill>
+          <a:ln w="12700">
+            <a:solidFill>
+              <a:srgbClr val="0068B7"/>
+            </a:solidFill>
+            <a:prstDash val="solid"/>
+          </a:ln>
+        </p:spPr>
+      </p:sp>
+      <p:sp>
+        <p:nvSpPr>
+          <p:cNvPr id="8" name="Text 6"/>
+          <p:cNvSpPr/>
+          <p:nvPr/>
+        </p:nvSpPr>
+        <p:spPr>
+          <a:xfrm>
+            <a:off x="640080" y="731520"/>
+            <a:ext cx="420624" cy="164592"/>
+          </a:xfrm>
+          <a:prstGeom prst="rect">
+            <a:avLst/>
+          </a:prstGeom>
+          <a:noFill/>
+          <a:ln/>
+        </p:spPr>
+        <p:txBody>
+          <a:bodyPr wrap="square" lIns="0" tIns="0" rIns="0" bIns="0" rtlCol="0" anchor="ctr"/>
+          <a:lstStyle/>
+          <a:p>
+            <a:pPr algn="ctr" indent="0" marL="0">
+              <a:buNone/>
+            </a:pPr>
+            <a:r>
+              <a:rPr lang="en-US" sz="1100" b="1" dirty="0">
+                <a:solidFill>
+                  <a:srgbClr val="FFFFFF"/>
+                </a:solidFill>
+                <a:latin typeface="Aptos" pitchFamily="34" charset="0"/>
+                <a:ea typeface="Aptos" pitchFamily="34" charset="-122"/>
+                <a:cs typeface="Aptos" pitchFamily="34" charset="-120"/>
+              </a:rPr>
+              <a:t>8</a:t>
+            </a:r>
+            <a:endParaRPr lang="en-US" sz="1100" dirty="0"/>
+          </a:p>
+        </p:txBody>
+      </p:sp>
+      <p:sp>
+        <p:nvSpPr>
+          <p:cNvPr id="9" name="Text 7"/>
+          <p:cNvSpPr/>
+          <p:nvPr/>
+        </p:nvSpPr>
+        <p:spPr>
+          <a:xfrm>
+            <a:off x="640080" y="621792"/>
             <a:ext cx="10881360" cy="566928"/>
           </a:xfrm>
           <a:prstGeom prst="rect">
@@ -4300,7 +6145,7 @@
                 <a:ea typeface="Aptos Display" pitchFamily="34" charset="-122"/>
                 <a:cs typeface="Aptos Display" pitchFamily="34" charset="-120"/>
               </a:rPr>
-              <a:t>Practical Exercise</a:t>
+              <a:t>Reflection Questions</a:t>
             </a:r>
             <a:endParaRPr lang="en-US" sz="2700" dirty="0"/>
           </a:p>
@@ -4308,32 +6153,164 @@
       </p:sp>
       <p:sp>
         <p:nvSpPr>
-          <p:cNvPr id="7" name="Text 5"/>
-          <p:cNvSpPr/>
-          <p:nvPr/>
-        </p:nvSpPr>
-        <p:spPr>
-          <a:xfrm>
-            <a:off x="822960" y="1325880"/>
-            <a:ext cx="10378440" cy="4800600"/>
-          </a:xfrm>
-          <a:prstGeom prst="rect">
-            <a:avLst/>
-          </a:prstGeom>
-          <a:noFill/>
-          <a:ln/>
-        </p:spPr>
-        <p:txBody>
-          <a:bodyPr wrap="square" lIns="1016" tIns="1016" rIns="1016" bIns="1016" rtlCol="0" anchor="t">
+          <p:cNvPr id="10" name="Text 8"/>
+          <p:cNvSpPr/>
+          <p:nvPr/>
+        </p:nvSpPr>
+        <p:spPr>
+          <a:xfrm>
+            <a:off x="868680" y="1417320"/>
+            <a:ext cx="6675120" cy="4434840"/>
+          </a:xfrm>
+          <a:prstGeom prst="rect">
+            <a:avLst/>
+          </a:prstGeom>
+          <a:noFill/>
+          <a:ln/>
+        </p:spPr>
+        <p:txBody>
+          <a:bodyPr wrap="square" lIns="635" tIns="635" rIns="635" bIns="635" rtlCol="0" anchor="t">
             <a:normAutofit/>
           </a:bodyPr>
           <a:lstStyle/>
           <a:p>
+            <a:r>
+              <a:rPr lang="en-US" sz="1700" dirty="0">
+                <a:solidFill>
+                  <a:srgbClr val="17364A"/>
+                </a:solidFill>
+                <a:latin typeface="Aptos" pitchFamily="34" charset="0"/>
+                <a:ea typeface="Aptos" pitchFamily="34" charset="-122"/>
+                <a:cs typeface="Aptos" pitchFamily="34" charset="-120"/>
+              </a:rPr>
+              <a:t>What goal would the agent pursue, and how narrowly can it be defined?</a:t>
+            </a:r>
+            <a:endParaRPr lang="en-US" sz="1700" dirty="0"/>
+          </a:p>
+          <a:p>
+            <a:r>
+              <a:rPr lang="en-US" sz="1700" dirty="0">
+                <a:solidFill>
+                  <a:srgbClr val="17364A"/>
+                </a:solidFill>
+                <a:latin typeface="Aptos" pitchFamily="34" charset="0"/>
+                <a:ea typeface="Aptos" pitchFamily="34" charset="-122"/>
+                <a:cs typeface="Aptos" pitchFamily="34" charset="-120"/>
+              </a:rPr>
+              <a:t>Which tools or systems would the agent access?</a:t>
+            </a:r>
+            <a:endParaRPr lang="en-US" sz="1700" dirty="0"/>
+          </a:p>
+          <a:p>
+            <a:r>
+              <a:rPr lang="en-US" sz="1700" dirty="0">
+                <a:solidFill>
+                  <a:srgbClr val="17364A"/>
+                </a:solidFill>
+                <a:latin typeface="Aptos" pitchFamily="34" charset="0"/>
+                <a:ea typeface="Aptos" pitchFamily="34" charset="-122"/>
+                <a:cs typeface="Aptos" pitchFamily="34" charset="-120"/>
+              </a:rPr>
+              <a:t>Which actions are allowed, prohibited, or require human approval?</a:t>
+            </a:r>
+            <a:endParaRPr lang="en-US" sz="1700" dirty="0"/>
+          </a:p>
+        </p:txBody>
+      </p:sp>
+      <p:sp>
+        <p:nvSpPr>
+          <p:cNvPr id="11" name="Shape 9"/>
+          <p:cNvSpPr/>
+          <p:nvPr/>
+        </p:nvSpPr>
+        <p:spPr>
+          <a:xfrm>
+            <a:off x="7909560" y="1417320"/>
+            <a:ext cx="3154680" cy="1828800"/>
+          </a:xfrm>
+          <a:prstGeom prst="roundRect">
+            <a:avLst>
+              <a:gd name="adj" fmla="val 6000"/>
+            </a:avLst>
+          </a:prstGeom>
+          <a:solidFill>
+            <a:srgbClr val="EEF8ED"/>
+          </a:solidFill>
+          <a:ln w="12700">
+            <a:solidFill>
+              <a:srgbClr val="B9D7E6"/>
+            </a:solidFill>
+            <a:prstDash val="solid"/>
+          </a:ln>
+        </p:spPr>
+      </p:sp>
+      <p:sp>
+        <p:nvSpPr>
+          <p:cNvPr id="12" name="Text 10"/>
+          <p:cNvSpPr/>
+          <p:nvPr/>
+        </p:nvSpPr>
+        <p:spPr>
+          <a:xfrm>
+            <a:off x="8074152" y="1563624"/>
+            <a:ext cx="2825496" cy="201168"/>
+          </a:xfrm>
+          <a:prstGeom prst="rect">
+            <a:avLst/>
+          </a:prstGeom>
+          <a:noFill/>
+          <a:ln/>
+        </p:spPr>
+        <p:txBody>
+          <a:bodyPr wrap="square" lIns="0" tIns="0" rIns="0" bIns="0" rtlCol="0" anchor="ctr"/>
+          <a:lstStyle/>
+          <a:p>
             <a:pPr indent="0" marL="0">
               <a:buNone/>
             </a:pPr>
             <a:r>
-              <a:rPr lang="en-US" sz="1420" dirty="0">
+              <a:rPr lang="en-US" sz="950" b="1" dirty="0">
+                <a:solidFill>
+                  <a:srgbClr val="0068B7"/>
+                </a:solidFill>
+                <a:latin typeface="Aptos" pitchFamily="34" charset="0"/>
+                <a:ea typeface="Aptos" pitchFamily="34" charset="-122"/>
+                <a:cs typeface="Aptos" pitchFamily="34" charset="-120"/>
+              </a:rPr>
+              <a:t>Key idea</a:t>
+            </a:r>
+            <a:endParaRPr lang="en-US" sz="950" dirty="0"/>
+          </a:p>
+        </p:txBody>
+      </p:sp>
+      <p:sp>
+        <p:nvSpPr>
+          <p:cNvPr id="13" name="Text 11"/>
+          <p:cNvSpPr/>
+          <p:nvPr/>
+        </p:nvSpPr>
+        <p:spPr>
+          <a:xfrm>
+            <a:off x="8074152" y="1856232"/>
+            <a:ext cx="2825496" cy="1261872"/>
+          </a:xfrm>
+          <a:prstGeom prst="rect">
+            <a:avLst/>
+          </a:prstGeom>
+          <a:noFill/>
+          <a:ln/>
+        </p:spPr>
+        <p:txBody>
+          <a:bodyPr wrap="square" lIns="0" tIns="0" rIns="0" bIns="0" rtlCol="0" anchor="t">
+            <a:normAutofit/>
+          </a:bodyPr>
+          <a:lstStyle/>
+          <a:p>
+            <a:pPr indent="0" marL="0">
+              <a:buNone/>
+            </a:pPr>
+            <a:r>
+              <a:rPr lang="en-US" sz="1250" dirty="0">
                 <a:solidFill>
                   <a:srgbClr val="17364A"/>
                 </a:solidFill>
@@ -4341,9 +6318,116 @@
                 <a:ea typeface="Aptos" pitchFamily="34" charset="-122"/>
                 <a:cs typeface="Aptos" pitchFamily="34" charset="-120"/>
               </a:rPr>
-              <a:t>Create an agentic workflow control plan. Include the goal, trigger, data sources, tools, allowed actions, prohibited actions, approval points, memory rules, logs, monitoring indicators, rollback process, incident triggers, and responsible owner. The plan should identify at least one low-risk pilot boundary and one condition that would require pausing the workflow.</a:t>
-            </a:r>
-            <a:endParaRPr lang="en-US" sz="1420" dirty="0"/>
+              <a:t>What goal would the agent pursue, and how narrowly can it be defined?</a:t>
+            </a:r>
+            <a:endParaRPr lang="en-US" sz="1250" dirty="0"/>
+          </a:p>
+        </p:txBody>
+      </p:sp>
+      <p:sp>
+        <p:nvSpPr>
+          <p:cNvPr id="14" name="Shape 12"/>
+          <p:cNvSpPr/>
+          <p:nvPr/>
+        </p:nvSpPr>
+        <p:spPr>
+          <a:xfrm>
+            <a:off x="7909560" y="3520440"/>
+            <a:ext cx="3154680" cy="1737360"/>
+          </a:xfrm>
+          <a:prstGeom prst="roundRect">
+            <a:avLst>
+              <a:gd name="adj" fmla="val 6316"/>
+            </a:avLst>
+          </a:prstGeom>
+          <a:solidFill>
+            <a:srgbClr val="EAF6F8"/>
+          </a:solidFill>
+          <a:ln w="12700">
+            <a:solidFill>
+              <a:srgbClr val="B9D7E6"/>
+            </a:solidFill>
+            <a:prstDash val="solid"/>
+          </a:ln>
+        </p:spPr>
+      </p:sp>
+      <p:sp>
+        <p:nvSpPr>
+          <p:cNvPr id="15" name="Text 13"/>
+          <p:cNvSpPr/>
+          <p:nvPr/>
+        </p:nvSpPr>
+        <p:spPr>
+          <a:xfrm>
+            <a:off x="8074152" y="3666744"/>
+            <a:ext cx="2825496" cy="201168"/>
+          </a:xfrm>
+          <a:prstGeom prst="rect">
+            <a:avLst/>
+          </a:prstGeom>
+          <a:noFill/>
+          <a:ln/>
+        </p:spPr>
+        <p:txBody>
+          <a:bodyPr wrap="square" lIns="0" tIns="0" rIns="0" bIns="0" rtlCol="0" anchor="ctr"/>
+          <a:lstStyle/>
+          <a:p>
+            <a:pPr indent="0" marL="0">
+              <a:buNone/>
+            </a:pPr>
+            <a:r>
+              <a:rPr lang="en-US" sz="950" b="1" dirty="0">
+                <a:solidFill>
+                  <a:srgbClr val="0068B7"/>
+                </a:solidFill>
+                <a:latin typeface="Aptos" pitchFamily="34" charset="0"/>
+                <a:ea typeface="Aptos" pitchFamily="34" charset="-122"/>
+                <a:cs typeface="Aptos" pitchFamily="34" charset="-120"/>
+              </a:rPr>
+              <a:t>Use this for</a:t>
+            </a:r>
+            <a:endParaRPr lang="en-US" sz="950" dirty="0"/>
+          </a:p>
+        </p:txBody>
+      </p:sp>
+      <p:sp>
+        <p:nvSpPr>
+          <p:cNvPr id="16" name="Text 14"/>
+          <p:cNvSpPr/>
+          <p:nvPr/>
+        </p:nvSpPr>
+        <p:spPr>
+          <a:xfrm>
+            <a:off x="8074152" y="3959352"/>
+            <a:ext cx="2825496" cy="1170432"/>
+          </a:xfrm>
+          <a:prstGeom prst="rect">
+            <a:avLst/>
+          </a:prstGeom>
+          <a:noFill/>
+          <a:ln/>
+        </p:spPr>
+        <p:txBody>
+          <a:bodyPr wrap="square" lIns="0" tIns="0" rIns="0" bIns="0" rtlCol="0" anchor="t">
+            <a:normAutofit/>
+          </a:bodyPr>
+          <a:lstStyle/>
+          <a:p>
+            <a:pPr indent="0" marL="0">
+              <a:buNone/>
+            </a:pPr>
+            <a:r>
+              <a:rPr lang="en-US" sz="1250" dirty="0">
+                <a:solidFill>
+                  <a:srgbClr val="17364A"/>
+                </a:solidFill>
+                <a:latin typeface="Aptos" pitchFamily="34" charset="0"/>
+                <a:ea typeface="Aptos" pitchFamily="34" charset="-122"/>
+                <a:cs typeface="Aptos" pitchFamily="34" charset="-120"/>
+              </a:rPr>
+              <a:t>Connect the concept to public health decisions, safeguards, documentation, or implementation work.</a:t>
+            </a:r>
+            <a:endParaRPr lang="en-US" sz="1250" dirty="0"/>
           </a:p>
         </p:txBody>
       </p:sp>
@@ -4406,7 +6490,32 @@
       </p:sp>
       <p:sp>
         <p:nvSpPr>
-          <p:cNvPr id="3" name="Text 1"/>
+          <p:cNvPr id="3" name="Shape 1"/>
+          <p:cNvSpPr/>
+          <p:nvPr/>
+        </p:nvSpPr>
+        <p:spPr>
+          <a:xfrm>
+            <a:off x="0" y="164592"/>
+            <a:ext cx="146304" cy="6693408"/>
+          </a:xfrm>
+          <a:prstGeom prst="rect">
+            <a:avLst/>
+          </a:prstGeom>
+          <a:solidFill>
+            <a:srgbClr val="2F8A28"/>
+          </a:solidFill>
+          <a:ln w="12700">
+            <a:solidFill>
+              <a:srgbClr val="2F8A28"/>
+            </a:solidFill>
+            <a:prstDash val="solid"/>
+          </a:ln>
+        </p:spPr>
+      </p:sp>
+      <p:sp>
+        <p:nvSpPr>
+          <p:cNvPr id="4" name="Text 2"/>
           <p:cNvSpPr/>
           <p:nvPr/>
         </p:nvSpPr>
@@ -4445,7 +6554,7 @@
       </p:sp>
       <p:sp>
         <p:nvSpPr>
-          <p:cNvPr id="4" name="Text 2"/>
+          <p:cNvPr id="5" name="Text 3"/>
           <p:cNvSpPr/>
           <p:nvPr/>
         </p:nvSpPr>
@@ -4484,7 +6593,7 @@
       </p:sp>
       <p:sp>
         <p:nvSpPr>
-          <p:cNvPr id="5" name="Text 3"/>
+          <p:cNvPr id="6" name="Text 4"/>
           <p:cNvSpPr/>
           <p:nvPr/>
         </p:nvSpPr>
@@ -4523,7 +6632,7 @@
       </p:sp>
       <p:sp>
         <p:nvSpPr>
-          <p:cNvPr id="6" name="Text 4"/>
+          <p:cNvPr id="7" name="Text 5"/>
           <p:cNvSpPr/>
           <p:nvPr/>
         </p:nvSpPr>
@@ -4556,7 +6665,7 @@
                 <a:ea typeface="Aptos Display" pitchFamily="34" charset="-122"/>
                 <a:cs typeface="Aptos Display" pitchFamily="34" charset="-120"/>
               </a:rPr>
-              <a:t>Expected Artifact or Evidence</a:t>
+              <a:t>Reflection Questions Continued</a:t>
             </a:r>
             <a:endParaRPr lang="en-US" sz="2700" dirty="0"/>
           </a:p>
@@ -4564,32 +6673,150 @@
       </p:sp>
       <p:sp>
         <p:nvSpPr>
-          <p:cNvPr id="7" name="Text 5"/>
-          <p:cNvSpPr/>
-          <p:nvPr/>
-        </p:nvSpPr>
-        <p:spPr>
-          <a:xfrm>
-            <a:off x="822960" y="1325880"/>
-            <a:ext cx="10378440" cy="4800600"/>
-          </a:xfrm>
-          <a:prstGeom prst="rect">
-            <a:avLst/>
-          </a:prstGeom>
-          <a:noFill/>
-          <a:ln/>
-        </p:spPr>
-        <p:txBody>
-          <a:bodyPr wrap="square" lIns="1016" tIns="1016" rIns="1016" bIns="1016" rtlCol="0" anchor="t">
+          <p:cNvPr id="8" name="Text 6"/>
+          <p:cNvSpPr/>
+          <p:nvPr/>
+        </p:nvSpPr>
+        <p:spPr>
+          <a:xfrm>
+            <a:off x="868680" y="1417320"/>
+            <a:ext cx="6675120" cy="4434840"/>
+          </a:xfrm>
+          <a:prstGeom prst="rect">
+            <a:avLst/>
+          </a:prstGeom>
+          <a:noFill/>
+          <a:ln/>
+        </p:spPr>
+        <p:txBody>
+          <a:bodyPr wrap="square" lIns="635" tIns="635" rIns="635" bIns="635" rtlCol="0" anchor="t">
             <a:normAutofit/>
           </a:bodyPr>
           <a:lstStyle/>
           <a:p>
+            <a:r>
+              <a:rPr lang="en-US" sz="1700" dirty="0">
+                <a:solidFill>
+                  <a:srgbClr val="17364A"/>
+                </a:solidFill>
+                <a:latin typeface="Aptos" pitchFamily="34" charset="0"/>
+                <a:ea typeface="Aptos" pitchFamily="34" charset="-122"/>
+                <a:cs typeface="Aptos" pitchFamily="34" charset="-120"/>
+              </a:rPr>
+              <a:t>What logs are needed to reconstruct agent behavior?</a:t>
+            </a:r>
+            <a:endParaRPr lang="en-US" sz="1700" dirty="0"/>
+          </a:p>
+          <a:p>
+            <a:r>
+              <a:rPr lang="en-US" sz="1700" dirty="0">
+                <a:solidFill>
+                  <a:srgbClr val="17364A"/>
+                </a:solidFill>
+                <a:latin typeface="Aptos" pitchFamily="34" charset="0"/>
+                <a:ea typeface="Aptos" pitchFamily="34" charset="-122"/>
+                <a:cs typeface="Aptos" pitchFamily="34" charset="-120"/>
+              </a:rPr>
+              <a:t>What rollback or correction process is needed if the agent makes an error?</a:t>
+            </a:r>
+            <a:endParaRPr lang="en-US" sz="1700" dirty="0"/>
+          </a:p>
+        </p:txBody>
+      </p:sp>
+      <p:sp>
+        <p:nvSpPr>
+          <p:cNvPr id="9" name="Shape 7"/>
+          <p:cNvSpPr/>
+          <p:nvPr/>
+        </p:nvSpPr>
+        <p:spPr>
+          <a:xfrm>
+            <a:off x="7909560" y="1417320"/>
+            <a:ext cx="3154680" cy="1828800"/>
+          </a:xfrm>
+          <a:prstGeom prst="roundRect">
+            <a:avLst>
+              <a:gd name="adj" fmla="val 6000"/>
+            </a:avLst>
+          </a:prstGeom>
+          <a:solidFill>
+            <a:srgbClr val="EEF8ED"/>
+          </a:solidFill>
+          <a:ln w="12700">
+            <a:solidFill>
+              <a:srgbClr val="B9D7E6"/>
+            </a:solidFill>
+            <a:prstDash val="solid"/>
+          </a:ln>
+        </p:spPr>
+      </p:sp>
+      <p:sp>
+        <p:nvSpPr>
+          <p:cNvPr id="10" name="Text 8"/>
+          <p:cNvSpPr/>
+          <p:nvPr/>
+        </p:nvSpPr>
+        <p:spPr>
+          <a:xfrm>
+            <a:off x="8074152" y="1563624"/>
+            <a:ext cx="2825496" cy="201168"/>
+          </a:xfrm>
+          <a:prstGeom prst="rect">
+            <a:avLst/>
+          </a:prstGeom>
+          <a:noFill/>
+          <a:ln/>
+        </p:spPr>
+        <p:txBody>
+          <a:bodyPr wrap="square" lIns="0" tIns="0" rIns="0" bIns="0" rtlCol="0" anchor="ctr"/>
+          <a:lstStyle/>
+          <a:p>
             <a:pPr indent="0" marL="0">
               <a:buNone/>
             </a:pPr>
             <a:r>
-              <a:rPr lang="en-US" sz="1420" dirty="0">
+              <a:rPr lang="en-US" sz="950" b="1" dirty="0">
+                <a:solidFill>
+                  <a:srgbClr val="0068B7"/>
+                </a:solidFill>
+                <a:latin typeface="Aptos" pitchFamily="34" charset="0"/>
+                <a:ea typeface="Aptos" pitchFamily="34" charset="-122"/>
+                <a:cs typeface="Aptos" pitchFamily="34" charset="-120"/>
+              </a:rPr>
+              <a:t>Key idea</a:t>
+            </a:r>
+            <a:endParaRPr lang="en-US" sz="950" dirty="0"/>
+          </a:p>
+        </p:txBody>
+      </p:sp>
+      <p:sp>
+        <p:nvSpPr>
+          <p:cNvPr id="11" name="Text 9"/>
+          <p:cNvSpPr/>
+          <p:nvPr/>
+        </p:nvSpPr>
+        <p:spPr>
+          <a:xfrm>
+            <a:off x="8074152" y="1856232"/>
+            <a:ext cx="2825496" cy="1261872"/>
+          </a:xfrm>
+          <a:prstGeom prst="rect">
+            <a:avLst/>
+          </a:prstGeom>
+          <a:noFill/>
+          <a:ln/>
+        </p:spPr>
+        <p:txBody>
+          <a:bodyPr wrap="square" lIns="0" tIns="0" rIns="0" bIns="0" rtlCol="0" anchor="t">
+            <a:normAutofit/>
+          </a:bodyPr>
+          <a:lstStyle/>
+          <a:p>
+            <a:pPr indent="0" marL="0">
+              <a:buNone/>
+            </a:pPr>
+            <a:r>
+              <a:rPr lang="en-US" sz="1250" dirty="0">
                 <a:solidFill>
                   <a:srgbClr val="17364A"/>
                 </a:solidFill>
@@ -4597,9 +6824,116 @@
                 <a:ea typeface="Aptos" pitchFamily="34" charset="-122"/>
                 <a:cs typeface="Aptos" pitchFamily="34" charset="-120"/>
               </a:rPr>
-              <a:t>Agentic workflow control plan Allowed/prohibited action list Human approval and escalation map</a:t>
-            </a:r>
-            <a:endParaRPr lang="en-US" sz="1420" dirty="0"/>
+              <a:t>What logs are needed to reconstruct agent behavior?</a:t>
+            </a:r>
+            <a:endParaRPr lang="en-US" sz="1250" dirty="0"/>
+          </a:p>
+        </p:txBody>
+      </p:sp>
+      <p:sp>
+        <p:nvSpPr>
+          <p:cNvPr id="12" name="Shape 10"/>
+          <p:cNvSpPr/>
+          <p:nvPr/>
+        </p:nvSpPr>
+        <p:spPr>
+          <a:xfrm>
+            <a:off x="7909560" y="3520440"/>
+            <a:ext cx="3154680" cy="1737360"/>
+          </a:xfrm>
+          <a:prstGeom prst="roundRect">
+            <a:avLst>
+              <a:gd name="adj" fmla="val 6316"/>
+            </a:avLst>
+          </a:prstGeom>
+          <a:solidFill>
+            <a:srgbClr val="EAF6F8"/>
+          </a:solidFill>
+          <a:ln w="12700">
+            <a:solidFill>
+              <a:srgbClr val="B9D7E6"/>
+            </a:solidFill>
+            <a:prstDash val="solid"/>
+          </a:ln>
+        </p:spPr>
+      </p:sp>
+      <p:sp>
+        <p:nvSpPr>
+          <p:cNvPr id="13" name="Text 11"/>
+          <p:cNvSpPr/>
+          <p:nvPr/>
+        </p:nvSpPr>
+        <p:spPr>
+          <a:xfrm>
+            <a:off x="8074152" y="3666744"/>
+            <a:ext cx="2825496" cy="201168"/>
+          </a:xfrm>
+          <a:prstGeom prst="rect">
+            <a:avLst/>
+          </a:prstGeom>
+          <a:noFill/>
+          <a:ln/>
+        </p:spPr>
+        <p:txBody>
+          <a:bodyPr wrap="square" lIns="0" tIns="0" rIns="0" bIns="0" rtlCol="0" anchor="ctr"/>
+          <a:lstStyle/>
+          <a:p>
+            <a:pPr indent="0" marL="0">
+              <a:buNone/>
+            </a:pPr>
+            <a:r>
+              <a:rPr lang="en-US" sz="950" b="1" dirty="0">
+                <a:solidFill>
+                  <a:srgbClr val="0068B7"/>
+                </a:solidFill>
+                <a:latin typeface="Aptos" pitchFamily="34" charset="0"/>
+                <a:ea typeface="Aptos" pitchFamily="34" charset="-122"/>
+                <a:cs typeface="Aptos" pitchFamily="34" charset="-120"/>
+              </a:rPr>
+              <a:t>Use this for</a:t>
+            </a:r>
+            <a:endParaRPr lang="en-US" sz="950" dirty="0"/>
+          </a:p>
+        </p:txBody>
+      </p:sp>
+      <p:sp>
+        <p:nvSpPr>
+          <p:cNvPr id="14" name="Text 12"/>
+          <p:cNvSpPr/>
+          <p:nvPr/>
+        </p:nvSpPr>
+        <p:spPr>
+          <a:xfrm>
+            <a:off x="8074152" y="3959352"/>
+            <a:ext cx="2825496" cy="1170432"/>
+          </a:xfrm>
+          <a:prstGeom prst="rect">
+            <a:avLst/>
+          </a:prstGeom>
+          <a:noFill/>
+          <a:ln/>
+        </p:spPr>
+        <p:txBody>
+          <a:bodyPr wrap="square" lIns="0" tIns="0" rIns="0" bIns="0" rtlCol="0" anchor="t">
+            <a:normAutofit/>
+          </a:bodyPr>
+          <a:lstStyle/>
+          <a:p>
+            <a:pPr indent="0" marL="0">
+              <a:buNone/>
+            </a:pPr>
+            <a:r>
+              <a:rPr lang="en-US" sz="1250" dirty="0">
+                <a:solidFill>
+                  <a:srgbClr val="17364A"/>
+                </a:solidFill>
+                <a:latin typeface="Aptos" pitchFamily="34" charset="0"/>
+                <a:ea typeface="Aptos" pitchFamily="34" charset="-122"/>
+                <a:cs typeface="Aptos" pitchFamily="34" charset="-120"/>
+              </a:rPr>
+              <a:t>Connect the concept to public health decisions, safeguards, documentation, or implementation work.</a:t>
+            </a:r>
+            <a:endParaRPr lang="en-US" sz="1250" dirty="0"/>
           </a:p>
         </p:txBody>
       </p:sp>
@@ -4662,7 +6996,32 @@
       </p:sp>
       <p:sp>
         <p:nvSpPr>
-          <p:cNvPr id="3" name="Text 1"/>
+          <p:cNvPr id="3" name="Shape 1"/>
+          <p:cNvSpPr/>
+          <p:nvPr/>
+        </p:nvSpPr>
+        <p:spPr>
+          <a:xfrm>
+            <a:off x="0" y="164592"/>
+            <a:ext cx="146304" cy="6693408"/>
+          </a:xfrm>
+          <a:prstGeom prst="rect">
+            <a:avLst/>
+          </a:prstGeom>
+          <a:solidFill>
+            <a:srgbClr val="2F8A28"/>
+          </a:solidFill>
+          <a:ln w="12700">
+            <a:solidFill>
+              <a:srgbClr val="2F8A28"/>
+            </a:solidFill>
+            <a:prstDash val="solid"/>
+          </a:ln>
+        </p:spPr>
+      </p:sp>
+      <p:sp>
+        <p:nvSpPr>
+          <p:cNvPr id="4" name="Text 2"/>
           <p:cNvSpPr/>
           <p:nvPr/>
         </p:nvSpPr>
@@ -4701,7 +7060,7 @@
       </p:sp>
       <p:sp>
         <p:nvSpPr>
-          <p:cNvPr id="4" name="Text 2"/>
+          <p:cNvPr id="5" name="Text 3"/>
           <p:cNvSpPr/>
           <p:nvPr/>
         </p:nvSpPr>
@@ -4740,7 +7099,7 @@
       </p:sp>
       <p:sp>
         <p:nvSpPr>
-          <p:cNvPr id="5" name="Text 3"/>
+          <p:cNvPr id="6" name="Text 4"/>
           <p:cNvSpPr/>
           <p:nvPr/>
         </p:nvSpPr>
@@ -4779,13 +7138,77 @@
       </p:sp>
       <p:sp>
         <p:nvSpPr>
-          <p:cNvPr id="6" name="Text 4"/>
+          <p:cNvPr id="7" name="Shape 5"/>
           <p:cNvSpPr/>
           <p:nvPr/>
         </p:nvSpPr>
         <p:spPr>
           <a:xfrm>
             <a:off x="640080" y="658368"/>
+            <a:ext cx="420624" cy="420624"/>
+          </a:xfrm>
+          <a:prstGeom prst="ellipse">
+            <a:avLst/>
+          </a:prstGeom>
+          <a:solidFill>
+            <a:srgbClr val="0068B7"/>
+          </a:solidFill>
+          <a:ln w="12700">
+            <a:solidFill>
+              <a:srgbClr val="0068B7"/>
+            </a:solidFill>
+            <a:prstDash val="solid"/>
+          </a:ln>
+        </p:spPr>
+      </p:sp>
+      <p:sp>
+        <p:nvSpPr>
+          <p:cNvPr id="8" name="Text 6"/>
+          <p:cNvSpPr/>
+          <p:nvPr/>
+        </p:nvSpPr>
+        <p:spPr>
+          <a:xfrm>
+            <a:off x="640080" y="731520"/>
+            <a:ext cx="420624" cy="164592"/>
+          </a:xfrm>
+          <a:prstGeom prst="rect">
+            <a:avLst/>
+          </a:prstGeom>
+          <a:noFill/>
+          <a:ln/>
+        </p:spPr>
+        <p:txBody>
+          <a:bodyPr wrap="square" lIns="0" tIns="0" rIns="0" bIns="0" rtlCol="0" anchor="ctr"/>
+          <a:lstStyle/>
+          <a:p>
+            <a:pPr algn="ctr" indent="0" marL="0">
+              <a:buNone/>
+            </a:pPr>
+            <a:r>
+              <a:rPr lang="en-US" sz="1100" b="1" dirty="0">
+                <a:solidFill>
+                  <a:srgbClr val="FFFFFF"/>
+                </a:solidFill>
+                <a:latin typeface="Aptos" pitchFamily="34" charset="0"/>
+                <a:ea typeface="Aptos" pitchFamily="34" charset="-122"/>
+                <a:cs typeface="Aptos" pitchFamily="34" charset="-120"/>
+              </a:rPr>
+              <a:t>9</a:t>
+            </a:r>
+            <a:endParaRPr lang="en-US" sz="1100" dirty="0"/>
+          </a:p>
+        </p:txBody>
+      </p:sp>
+      <p:sp>
+        <p:nvSpPr>
+          <p:cNvPr id="9" name="Text 7"/>
+          <p:cNvSpPr/>
+          <p:nvPr/>
+        </p:nvSpPr>
+        <p:spPr>
+          <a:xfrm>
+            <a:off x="640080" y="621792"/>
             <a:ext cx="10881360" cy="566928"/>
           </a:xfrm>
           <a:prstGeom prst="rect">
@@ -4812,7 +7235,7 @@
                 <a:ea typeface="Aptos Display" pitchFamily="34" charset="-122"/>
                 <a:cs typeface="Aptos Display" pitchFamily="34" charset="-120"/>
               </a:rPr>
-              <a:t>Expected Artifact or Evidence Continued</a:t>
+              <a:t>Practical Exercise</a:t>
             </a:r>
             <a:endParaRPr lang="en-US" sz="2700" dirty="0"/>
           </a:p>
@@ -4820,32 +7243,164 @@
       </p:sp>
       <p:sp>
         <p:nvSpPr>
-          <p:cNvPr id="7" name="Text 5"/>
-          <p:cNvSpPr/>
-          <p:nvPr/>
-        </p:nvSpPr>
-        <p:spPr>
-          <a:xfrm>
-            <a:off x="822960" y="1325880"/>
-            <a:ext cx="10378440" cy="4800600"/>
-          </a:xfrm>
-          <a:prstGeom prst="rect">
-            <a:avLst/>
-          </a:prstGeom>
-          <a:noFill/>
-          <a:ln/>
-        </p:spPr>
-        <p:txBody>
-          <a:bodyPr wrap="square" lIns="1016" tIns="1016" rIns="1016" bIns="1016" rtlCol="0" anchor="t">
+          <p:cNvPr id="10" name="Text 8"/>
+          <p:cNvSpPr/>
+          <p:nvPr/>
+        </p:nvSpPr>
+        <p:spPr>
+          <a:xfrm>
+            <a:off x="868680" y="1417320"/>
+            <a:ext cx="6675120" cy="4434840"/>
+          </a:xfrm>
+          <a:prstGeom prst="rect">
+            <a:avLst/>
+          </a:prstGeom>
+          <a:noFill/>
+          <a:ln/>
+        </p:spPr>
+        <p:txBody>
+          <a:bodyPr wrap="square" lIns="635" tIns="635" rIns="635" bIns="635" rtlCol="0" anchor="t">
             <a:normAutofit/>
           </a:bodyPr>
           <a:lstStyle/>
           <a:p>
+            <a:r>
+              <a:rPr lang="en-US" sz="1700" dirty="0">
+                <a:solidFill>
+                  <a:srgbClr val="17364A"/>
+                </a:solidFill>
+                <a:latin typeface="Aptos" pitchFamily="34" charset="0"/>
+                <a:ea typeface="Aptos" pitchFamily="34" charset="-122"/>
+                <a:cs typeface="Aptos" pitchFamily="34" charset="-120"/>
+              </a:rPr>
+              <a:t>Create an agentic workflow control plan.</a:t>
+            </a:r>
+            <a:endParaRPr lang="en-US" sz="1700" dirty="0"/>
+          </a:p>
+          <a:p>
+            <a:r>
+              <a:rPr lang="en-US" sz="1700" dirty="0">
+                <a:solidFill>
+                  <a:srgbClr val="17364A"/>
+                </a:solidFill>
+                <a:latin typeface="Aptos" pitchFamily="34" charset="0"/>
+                <a:ea typeface="Aptos" pitchFamily="34" charset="-122"/>
+                <a:cs typeface="Aptos" pitchFamily="34" charset="-120"/>
+              </a:rPr>
+              <a:t>Include the goal, trigger, data sources, tools, allowed actions, prohibited actions, approval points, memory rules, logs,.</a:t>
+            </a:r>
+            <a:endParaRPr lang="en-US" sz="1700" dirty="0"/>
+          </a:p>
+          <a:p>
+            <a:r>
+              <a:rPr lang="en-US" sz="1700" dirty="0">
+                <a:solidFill>
+                  <a:srgbClr val="17364A"/>
+                </a:solidFill>
+                <a:latin typeface="Aptos" pitchFamily="34" charset="0"/>
+                <a:ea typeface="Aptos" pitchFamily="34" charset="-122"/>
+                <a:cs typeface="Aptos" pitchFamily="34" charset="-120"/>
+              </a:rPr>
+              <a:t>The plan should identify at least one low-risk pilot boundary and one condition that would require pausing the workflow.</a:t>
+            </a:r>
+            <a:endParaRPr lang="en-US" sz="1700" dirty="0"/>
+          </a:p>
+        </p:txBody>
+      </p:sp>
+      <p:sp>
+        <p:nvSpPr>
+          <p:cNvPr id="11" name="Shape 9"/>
+          <p:cNvSpPr/>
+          <p:nvPr/>
+        </p:nvSpPr>
+        <p:spPr>
+          <a:xfrm>
+            <a:off x="7909560" y="1417320"/>
+            <a:ext cx="3154680" cy="1828800"/>
+          </a:xfrm>
+          <a:prstGeom prst="roundRect">
+            <a:avLst>
+              <a:gd name="adj" fmla="val 6000"/>
+            </a:avLst>
+          </a:prstGeom>
+          <a:solidFill>
+            <a:srgbClr val="EEF8ED"/>
+          </a:solidFill>
+          <a:ln w="12700">
+            <a:solidFill>
+              <a:srgbClr val="B9D7E6"/>
+            </a:solidFill>
+            <a:prstDash val="solid"/>
+          </a:ln>
+        </p:spPr>
+      </p:sp>
+      <p:sp>
+        <p:nvSpPr>
+          <p:cNvPr id="12" name="Text 10"/>
+          <p:cNvSpPr/>
+          <p:nvPr/>
+        </p:nvSpPr>
+        <p:spPr>
+          <a:xfrm>
+            <a:off x="8074152" y="1563624"/>
+            <a:ext cx="2825496" cy="201168"/>
+          </a:xfrm>
+          <a:prstGeom prst="rect">
+            <a:avLst/>
+          </a:prstGeom>
+          <a:noFill/>
+          <a:ln/>
+        </p:spPr>
+        <p:txBody>
+          <a:bodyPr wrap="square" lIns="0" tIns="0" rIns="0" bIns="0" rtlCol="0" anchor="ctr"/>
+          <a:lstStyle/>
+          <a:p>
             <a:pPr indent="0" marL="0">
               <a:buNone/>
             </a:pPr>
             <a:r>
-              <a:rPr lang="en-US" sz="1420" dirty="0">
+              <a:rPr lang="en-US" sz="950" b="1" dirty="0">
+                <a:solidFill>
+                  <a:srgbClr val="0068B7"/>
+                </a:solidFill>
+                <a:latin typeface="Aptos" pitchFamily="34" charset="0"/>
+                <a:ea typeface="Aptos" pitchFamily="34" charset="-122"/>
+                <a:cs typeface="Aptos" pitchFamily="34" charset="-120"/>
+              </a:rPr>
+              <a:t>Key idea</a:t>
+            </a:r>
+            <a:endParaRPr lang="en-US" sz="950" dirty="0"/>
+          </a:p>
+        </p:txBody>
+      </p:sp>
+      <p:sp>
+        <p:nvSpPr>
+          <p:cNvPr id="13" name="Text 11"/>
+          <p:cNvSpPr/>
+          <p:nvPr/>
+        </p:nvSpPr>
+        <p:spPr>
+          <a:xfrm>
+            <a:off x="8074152" y="1856232"/>
+            <a:ext cx="2825496" cy="1261872"/>
+          </a:xfrm>
+          <a:prstGeom prst="rect">
+            <a:avLst/>
+          </a:prstGeom>
+          <a:noFill/>
+          <a:ln/>
+        </p:spPr>
+        <p:txBody>
+          <a:bodyPr wrap="square" lIns="0" tIns="0" rIns="0" bIns="0" rtlCol="0" anchor="t">
+            <a:normAutofit/>
+          </a:bodyPr>
+          <a:lstStyle/>
+          <a:p>
+            <a:pPr indent="0" marL="0">
+              <a:buNone/>
+            </a:pPr>
+            <a:r>
+              <a:rPr lang="en-US" sz="1250" dirty="0">
                 <a:solidFill>
                   <a:srgbClr val="17364A"/>
                 </a:solidFill>
@@ -4853,9 +7408,116 @@
                 <a:ea typeface="Aptos" pitchFamily="34" charset="-122"/>
                 <a:cs typeface="Aptos" pitchFamily="34" charset="-120"/>
               </a:rPr>
-              <a:t>Tool-call logging requirements</a:t>
-            </a:r>
-            <a:endParaRPr lang="en-US" sz="1420" dirty="0"/>
+              <a:t>Create an agentic workflow control plan.</a:t>
+            </a:r>
+            <a:endParaRPr lang="en-US" sz="1250" dirty="0"/>
+          </a:p>
+        </p:txBody>
+      </p:sp>
+      <p:sp>
+        <p:nvSpPr>
+          <p:cNvPr id="14" name="Shape 12"/>
+          <p:cNvSpPr/>
+          <p:nvPr/>
+        </p:nvSpPr>
+        <p:spPr>
+          <a:xfrm>
+            <a:off x="7909560" y="3520440"/>
+            <a:ext cx="3154680" cy="1737360"/>
+          </a:xfrm>
+          <a:prstGeom prst="roundRect">
+            <a:avLst>
+              <a:gd name="adj" fmla="val 6316"/>
+            </a:avLst>
+          </a:prstGeom>
+          <a:solidFill>
+            <a:srgbClr val="EAF6F8"/>
+          </a:solidFill>
+          <a:ln w="12700">
+            <a:solidFill>
+              <a:srgbClr val="B9D7E6"/>
+            </a:solidFill>
+            <a:prstDash val="solid"/>
+          </a:ln>
+        </p:spPr>
+      </p:sp>
+      <p:sp>
+        <p:nvSpPr>
+          <p:cNvPr id="15" name="Text 13"/>
+          <p:cNvSpPr/>
+          <p:nvPr/>
+        </p:nvSpPr>
+        <p:spPr>
+          <a:xfrm>
+            <a:off x="8074152" y="3666744"/>
+            <a:ext cx="2825496" cy="201168"/>
+          </a:xfrm>
+          <a:prstGeom prst="rect">
+            <a:avLst/>
+          </a:prstGeom>
+          <a:noFill/>
+          <a:ln/>
+        </p:spPr>
+        <p:txBody>
+          <a:bodyPr wrap="square" lIns="0" tIns="0" rIns="0" bIns="0" rtlCol="0" anchor="ctr"/>
+          <a:lstStyle/>
+          <a:p>
+            <a:pPr indent="0" marL="0">
+              <a:buNone/>
+            </a:pPr>
+            <a:r>
+              <a:rPr lang="en-US" sz="950" b="1" dirty="0">
+                <a:solidFill>
+                  <a:srgbClr val="0068B7"/>
+                </a:solidFill>
+                <a:latin typeface="Aptos" pitchFamily="34" charset="0"/>
+                <a:ea typeface="Aptos" pitchFamily="34" charset="-122"/>
+                <a:cs typeface="Aptos" pitchFamily="34" charset="-120"/>
+              </a:rPr>
+              <a:t>Use this for</a:t>
+            </a:r>
+            <a:endParaRPr lang="en-US" sz="950" dirty="0"/>
+          </a:p>
+        </p:txBody>
+      </p:sp>
+      <p:sp>
+        <p:nvSpPr>
+          <p:cNvPr id="16" name="Text 14"/>
+          <p:cNvSpPr/>
+          <p:nvPr/>
+        </p:nvSpPr>
+        <p:spPr>
+          <a:xfrm>
+            <a:off x="8074152" y="3959352"/>
+            <a:ext cx="2825496" cy="1170432"/>
+          </a:xfrm>
+          <a:prstGeom prst="rect">
+            <a:avLst/>
+          </a:prstGeom>
+          <a:noFill/>
+          <a:ln/>
+        </p:spPr>
+        <p:txBody>
+          <a:bodyPr wrap="square" lIns="0" tIns="0" rIns="0" bIns="0" rtlCol="0" anchor="t">
+            <a:normAutofit/>
+          </a:bodyPr>
+          <a:lstStyle/>
+          <a:p>
+            <a:pPr indent="0" marL="0">
+              <a:buNone/>
+            </a:pPr>
+            <a:r>
+              <a:rPr lang="en-US" sz="1250" dirty="0">
+                <a:solidFill>
+                  <a:srgbClr val="17364A"/>
+                </a:solidFill>
+                <a:latin typeface="Aptos" pitchFamily="34" charset="0"/>
+                <a:ea typeface="Aptos" pitchFamily="34" charset="-122"/>
+                <a:cs typeface="Aptos" pitchFamily="34" charset="-120"/>
+              </a:rPr>
+              <a:t>Connect the concept to public health decisions, safeguards, documentation, or implementation work.</a:t>
+            </a:r>
+            <a:endParaRPr lang="en-US" sz="1250" dirty="0"/>
           </a:p>
         </p:txBody>
       </p:sp>
@@ -4918,7 +7580,32 @@
       </p:sp>
       <p:sp>
         <p:nvSpPr>
-          <p:cNvPr id="3" name="Text 1"/>
+          <p:cNvPr id="3" name="Shape 1"/>
+          <p:cNvSpPr/>
+          <p:nvPr/>
+        </p:nvSpPr>
+        <p:spPr>
+          <a:xfrm>
+            <a:off x="0" y="164592"/>
+            <a:ext cx="146304" cy="6693408"/>
+          </a:xfrm>
+          <a:prstGeom prst="rect">
+            <a:avLst/>
+          </a:prstGeom>
+          <a:solidFill>
+            <a:srgbClr val="2F8A28"/>
+          </a:solidFill>
+          <a:ln w="12700">
+            <a:solidFill>
+              <a:srgbClr val="2F8A28"/>
+            </a:solidFill>
+            <a:prstDash val="solid"/>
+          </a:ln>
+        </p:spPr>
+      </p:sp>
+      <p:sp>
+        <p:nvSpPr>
+          <p:cNvPr id="4" name="Text 2"/>
           <p:cNvSpPr/>
           <p:nvPr/>
         </p:nvSpPr>
@@ -4957,7 +7644,7 @@
       </p:sp>
       <p:sp>
         <p:nvSpPr>
-          <p:cNvPr id="4" name="Text 2"/>
+          <p:cNvPr id="5" name="Text 3"/>
           <p:cNvSpPr/>
           <p:nvPr/>
         </p:nvSpPr>
@@ -4996,7 +7683,7 @@
       </p:sp>
       <p:sp>
         <p:nvSpPr>
-          <p:cNvPr id="5" name="Text 3"/>
+          <p:cNvPr id="6" name="Text 4"/>
           <p:cNvSpPr/>
           <p:nvPr/>
         </p:nvSpPr>
@@ -5035,13 +7722,77 @@
       </p:sp>
       <p:sp>
         <p:nvSpPr>
-          <p:cNvPr id="6" name="Text 4"/>
+          <p:cNvPr id="7" name="Shape 5"/>
           <p:cNvSpPr/>
           <p:nvPr/>
         </p:nvSpPr>
         <p:spPr>
           <a:xfrm>
             <a:off x="640080" y="658368"/>
+            <a:ext cx="420624" cy="420624"/>
+          </a:xfrm>
+          <a:prstGeom prst="ellipse">
+            <a:avLst/>
+          </a:prstGeom>
+          <a:solidFill>
+            <a:srgbClr val="0068B7"/>
+          </a:solidFill>
+          <a:ln w="12700">
+            <a:solidFill>
+              <a:srgbClr val="0068B7"/>
+            </a:solidFill>
+            <a:prstDash val="solid"/>
+          </a:ln>
+        </p:spPr>
+      </p:sp>
+      <p:sp>
+        <p:nvSpPr>
+          <p:cNvPr id="8" name="Text 6"/>
+          <p:cNvSpPr/>
+          <p:nvPr/>
+        </p:nvSpPr>
+        <p:spPr>
+          <a:xfrm>
+            <a:off x="640080" y="731520"/>
+            <a:ext cx="420624" cy="164592"/>
+          </a:xfrm>
+          <a:prstGeom prst="rect">
+            <a:avLst/>
+          </a:prstGeom>
+          <a:noFill/>
+          <a:ln/>
+        </p:spPr>
+        <p:txBody>
+          <a:bodyPr wrap="square" lIns="0" tIns="0" rIns="0" bIns="0" rtlCol="0" anchor="ctr"/>
+          <a:lstStyle/>
+          <a:p>
+            <a:pPr algn="ctr" indent="0" marL="0">
+              <a:buNone/>
+            </a:pPr>
+            <a:r>
+              <a:rPr lang="en-US" sz="1100" b="1" dirty="0">
+                <a:solidFill>
+                  <a:srgbClr val="FFFFFF"/>
+                </a:solidFill>
+                <a:latin typeface="Aptos" pitchFamily="34" charset="0"/>
+                <a:ea typeface="Aptos" pitchFamily="34" charset="-122"/>
+                <a:cs typeface="Aptos" pitchFamily="34" charset="-120"/>
+              </a:rPr>
+              <a:t>10</a:t>
+            </a:r>
+            <a:endParaRPr lang="en-US" sz="1100" dirty="0"/>
+          </a:p>
+        </p:txBody>
+      </p:sp>
+      <p:sp>
+        <p:nvSpPr>
+          <p:cNvPr id="9" name="Text 7"/>
+          <p:cNvSpPr/>
+          <p:nvPr/>
+        </p:nvSpPr>
+        <p:spPr>
+          <a:xfrm>
+            <a:off x="640080" y="621792"/>
             <a:ext cx="10881360" cy="566928"/>
           </a:xfrm>
           <a:prstGeom prst="rect">
@@ -5068,7 +7819,7 @@
                 <a:ea typeface="Aptos Display" pitchFamily="34" charset="-122"/>
                 <a:cs typeface="Aptos Display" pitchFamily="34" charset="-120"/>
               </a:rPr>
-              <a:t>Expected Assignment</a:t>
+              <a:t>Expected Artifact or Evidence</a:t>
             </a:r>
             <a:endParaRPr lang="en-US" sz="2700" dirty="0"/>
           </a:p>
@@ -5076,14 +7827,14 @@
       </p:sp>
       <p:sp>
         <p:nvSpPr>
-          <p:cNvPr id="7" name="Text 5"/>
-          <p:cNvSpPr/>
-          <p:nvPr/>
-        </p:nvSpPr>
-        <p:spPr>
-          <a:xfrm>
-            <a:off x="822960" y="1325880"/>
-            <a:ext cx="10378440" cy="4800600"/>
+          <p:cNvPr id="10" name="Text 8"/>
+          <p:cNvSpPr/>
+          <p:nvPr/>
+        </p:nvSpPr>
+        <p:spPr>
+          <a:xfrm>
+            <a:off x="868680" y="1417320"/>
+            <a:ext cx="6675120" cy="4434840"/>
           </a:xfrm>
           <a:prstGeom prst="rect">
             <a:avLst/>
@@ -5098,7 +7849,7 @@
           <a:lstStyle/>
           <a:p>
             <a:r>
-              <a:rPr lang="en-US" sz="1450" dirty="0">
+              <a:rPr lang="en-US" sz="1700" dirty="0">
                 <a:solidFill>
                   <a:srgbClr val="17364A"/>
                 </a:solidFill>
@@ -5108,11 +7859,11 @@
               </a:rPr>
               <a:t>Agentic workflow control plan</a:t>
             </a:r>
-            <a:endParaRPr lang="en-US" sz="1450" dirty="0"/>
-          </a:p>
-          <a:p>
-            <a:r>
-              <a:rPr lang="en-US" sz="1450" dirty="0">
+            <a:endParaRPr lang="en-US" sz="1700" dirty="0"/>
+          </a:p>
+          <a:p>
+            <a:r>
+              <a:rPr lang="en-US" sz="1700" dirty="0">
                 <a:solidFill>
                   <a:srgbClr val="17364A"/>
                 </a:solidFill>
@@ -5122,11 +7873,11 @@
               </a:rPr>
               <a:t>Allowed/prohibited action list</a:t>
             </a:r>
-            <a:endParaRPr lang="en-US" sz="1450" dirty="0"/>
-          </a:p>
-          <a:p>
-            <a:r>
-              <a:rPr lang="en-US" sz="1450" dirty="0">
+            <a:endParaRPr lang="en-US" sz="1700" dirty="0"/>
+          </a:p>
+          <a:p>
+            <a:r>
+              <a:rPr lang="en-US" sz="1700" dirty="0">
                 <a:solidFill>
                   <a:srgbClr val="17364A"/>
                 </a:solidFill>
@@ -5136,11 +7887,104 @@
               </a:rPr>
               <a:t>Human approval and escalation map</a:t>
             </a:r>
-            <a:endParaRPr lang="en-US" sz="1450" dirty="0"/>
-          </a:p>
-          <a:p>
-            <a:r>
-              <a:rPr lang="en-US" sz="1450" dirty="0">
+            <a:endParaRPr lang="en-US" sz="1700" dirty="0"/>
+          </a:p>
+        </p:txBody>
+      </p:sp>
+      <p:sp>
+        <p:nvSpPr>
+          <p:cNvPr id="11" name="Shape 9"/>
+          <p:cNvSpPr/>
+          <p:nvPr/>
+        </p:nvSpPr>
+        <p:spPr>
+          <a:xfrm>
+            <a:off x="7909560" y="1417320"/>
+            <a:ext cx="3154680" cy="1828800"/>
+          </a:xfrm>
+          <a:prstGeom prst="roundRect">
+            <a:avLst>
+              <a:gd name="adj" fmla="val 6000"/>
+            </a:avLst>
+          </a:prstGeom>
+          <a:solidFill>
+            <a:srgbClr val="EEF8ED"/>
+          </a:solidFill>
+          <a:ln w="12700">
+            <a:solidFill>
+              <a:srgbClr val="B9D7E6"/>
+            </a:solidFill>
+            <a:prstDash val="solid"/>
+          </a:ln>
+        </p:spPr>
+      </p:sp>
+      <p:sp>
+        <p:nvSpPr>
+          <p:cNvPr id="12" name="Text 10"/>
+          <p:cNvSpPr/>
+          <p:nvPr/>
+        </p:nvSpPr>
+        <p:spPr>
+          <a:xfrm>
+            <a:off x="8074152" y="1563624"/>
+            <a:ext cx="2825496" cy="201168"/>
+          </a:xfrm>
+          <a:prstGeom prst="rect">
+            <a:avLst/>
+          </a:prstGeom>
+          <a:noFill/>
+          <a:ln/>
+        </p:spPr>
+        <p:txBody>
+          <a:bodyPr wrap="square" lIns="0" tIns="0" rIns="0" bIns="0" rtlCol="0" anchor="ctr"/>
+          <a:lstStyle/>
+          <a:p>
+            <a:pPr indent="0" marL="0">
+              <a:buNone/>
+            </a:pPr>
+            <a:r>
+              <a:rPr lang="en-US" sz="950" b="1" dirty="0">
+                <a:solidFill>
+                  <a:srgbClr val="0068B7"/>
+                </a:solidFill>
+                <a:latin typeface="Aptos" pitchFamily="34" charset="0"/>
+                <a:ea typeface="Aptos" pitchFamily="34" charset="-122"/>
+                <a:cs typeface="Aptos" pitchFamily="34" charset="-120"/>
+              </a:rPr>
+              <a:t>Key idea</a:t>
+            </a:r>
+            <a:endParaRPr lang="en-US" sz="950" dirty="0"/>
+          </a:p>
+        </p:txBody>
+      </p:sp>
+      <p:sp>
+        <p:nvSpPr>
+          <p:cNvPr id="13" name="Text 11"/>
+          <p:cNvSpPr/>
+          <p:nvPr/>
+        </p:nvSpPr>
+        <p:spPr>
+          <a:xfrm>
+            <a:off x="8074152" y="1856232"/>
+            <a:ext cx="2825496" cy="1261872"/>
+          </a:xfrm>
+          <a:prstGeom prst="rect">
+            <a:avLst/>
+          </a:prstGeom>
+          <a:noFill/>
+          <a:ln/>
+        </p:spPr>
+        <p:txBody>
+          <a:bodyPr wrap="square" lIns="0" tIns="0" rIns="0" bIns="0" rtlCol="0" anchor="t">
+            <a:normAutofit/>
+          </a:bodyPr>
+          <a:lstStyle/>
+          <a:p>
+            <a:pPr indent="0" marL="0">
+              <a:buNone/>
+            </a:pPr>
+            <a:r>
+              <a:rPr lang="en-US" sz="1250" dirty="0">
                 <a:solidFill>
                   <a:srgbClr val="17364A"/>
                 </a:solidFill>
@@ -5148,9 +7992,116 @@
                 <a:ea typeface="Aptos" pitchFamily="34" charset="-122"/>
                 <a:cs typeface="Aptos" pitchFamily="34" charset="-120"/>
               </a:rPr>
-              <a:t>Tool-call logging requirements</a:t>
-            </a:r>
-            <a:endParaRPr lang="en-US" sz="1450" dirty="0"/>
+              <a:t>Agentic workflow control plan</a:t>
+            </a:r>
+            <a:endParaRPr lang="en-US" sz="1250" dirty="0"/>
+          </a:p>
+        </p:txBody>
+      </p:sp>
+      <p:sp>
+        <p:nvSpPr>
+          <p:cNvPr id="14" name="Shape 12"/>
+          <p:cNvSpPr/>
+          <p:nvPr/>
+        </p:nvSpPr>
+        <p:spPr>
+          <a:xfrm>
+            <a:off x="7909560" y="3520440"/>
+            <a:ext cx="3154680" cy="1737360"/>
+          </a:xfrm>
+          <a:prstGeom prst="roundRect">
+            <a:avLst>
+              <a:gd name="adj" fmla="val 6316"/>
+            </a:avLst>
+          </a:prstGeom>
+          <a:solidFill>
+            <a:srgbClr val="EAF6F8"/>
+          </a:solidFill>
+          <a:ln w="12700">
+            <a:solidFill>
+              <a:srgbClr val="B9D7E6"/>
+            </a:solidFill>
+            <a:prstDash val="solid"/>
+          </a:ln>
+        </p:spPr>
+      </p:sp>
+      <p:sp>
+        <p:nvSpPr>
+          <p:cNvPr id="15" name="Text 13"/>
+          <p:cNvSpPr/>
+          <p:nvPr/>
+        </p:nvSpPr>
+        <p:spPr>
+          <a:xfrm>
+            <a:off x="8074152" y="3666744"/>
+            <a:ext cx="2825496" cy="201168"/>
+          </a:xfrm>
+          <a:prstGeom prst="rect">
+            <a:avLst/>
+          </a:prstGeom>
+          <a:noFill/>
+          <a:ln/>
+        </p:spPr>
+        <p:txBody>
+          <a:bodyPr wrap="square" lIns="0" tIns="0" rIns="0" bIns="0" rtlCol="0" anchor="ctr"/>
+          <a:lstStyle/>
+          <a:p>
+            <a:pPr indent="0" marL="0">
+              <a:buNone/>
+            </a:pPr>
+            <a:r>
+              <a:rPr lang="en-US" sz="950" b="1" dirty="0">
+                <a:solidFill>
+                  <a:srgbClr val="0068B7"/>
+                </a:solidFill>
+                <a:latin typeface="Aptos" pitchFamily="34" charset="0"/>
+                <a:ea typeface="Aptos" pitchFamily="34" charset="-122"/>
+                <a:cs typeface="Aptos" pitchFamily="34" charset="-120"/>
+              </a:rPr>
+              <a:t>Use this for</a:t>
+            </a:r>
+            <a:endParaRPr lang="en-US" sz="950" dirty="0"/>
+          </a:p>
+        </p:txBody>
+      </p:sp>
+      <p:sp>
+        <p:nvSpPr>
+          <p:cNvPr id="16" name="Text 14"/>
+          <p:cNvSpPr/>
+          <p:nvPr/>
+        </p:nvSpPr>
+        <p:spPr>
+          <a:xfrm>
+            <a:off x="8074152" y="3959352"/>
+            <a:ext cx="2825496" cy="1170432"/>
+          </a:xfrm>
+          <a:prstGeom prst="rect">
+            <a:avLst/>
+          </a:prstGeom>
+          <a:noFill/>
+          <a:ln/>
+        </p:spPr>
+        <p:txBody>
+          <a:bodyPr wrap="square" lIns="0" tIns="0" rIns="0" bIns="0" rtlCol="0" anchor="t">
+            <a:normAutofit/>
+          </a:bodyPr>
+          <a:lstStyle/>
+          <a:p>
+            <a:pPr indent="0" marL="0">
+              <a:buNone/>
+            </a:pPr>
+            <a:r>
+              <a:rPr lang="en-US" sz="1250" dirty="0">
+                <a:solidFill>
+                  <a:srgbClr val="17364A"/>
+                </a:solidFill>
+                <a:latin typeface="Aptos" pitchFamily="34" charset="0"/>
+                <a:ea typeface="Aptos" pitchFamily="34" charset="-122"/>
+                <a:cs typeface="Aptos" pitchFamily="34" charset="-120"/>
+              </a:rPr>
+              <a:t>Connect the concept to public health decisions, safeguards, documentation, or implementation work.</a:t>
+            </a:r>
+            <a:endParaRPr lang="en-US" sz="1250" dirty="0"/>
           </a:p>
         </p:txBody>
       </p:sp>
@@ -5213,7 +8164,32 @@
       </p:sp>
       <p:sp>
         <p:nvSpPr>
-          <p:cNvPr id="3" name="Text 1"/>
+          <p:cNvPr id="3" name="Shape 1"/>
+          <p:cNvSpPr/>
+          <p:nvPr/>
+        </p:nvSpPr>
+        <p:spPr>
+          <a:xfrm>
+            <a:off x="0" y="164592"/>
+            <a:ext cx="146304" cy="6693408"/>
+          </a:xfrm>
+          <a:prstGeom prst="rect">
+            <a:avLst/>
+          </a:prstGeom>
+          <a:solidFill>
+            <a:srgbClr val="2F8A28"/>
+          </a:solidFill>
+          <a:ln w="12700">
+            <a:solidFill>
+              <a:srgbClr val="2F8A28"/>
+            </a:solidFill>
+            <a:prstDash val="solid"/>
+          </a:ln>
+        </p:spPr>
+      </p:sp>
+      <p:sp>
+        <p:nvSpPr>
+          <p:cNvPr id="4" name="Text 2"/>
           <p:cNvSpPr/>
           <p:nvPr/>
         </p:nvSpPr>
@@ -5252,7 +8228,7 @@
       </p:sp>
       <p:sp>
         <p:nvSpPr>
-          <p:cNvPr id="4" name="Text 2"/>
+          <p:cNvPr id="5" name="Text 3"/>
           <p:cNvSpPr/>
           <p:nvPr/>
         </p:nvSpPr>
@@ -5291,7 +8267,7 @@
       </p:sp>
       <p:sp>
         <p:nvSpPr>
-          <p:cNvPr id="5" name="Text 3"/>
+          <p:cNvPr id="6" name="Text 4"/>
           <p:cNvSpPr/>
           <p:nvPr/>
         </p:nvSpPr>
@@ -5330,7 +8306,7 @@
       </p:sp>
       <p:sp>
         <p:nvSpPr>
-          <p:cNvPr id="6" name="Text 4"/>
+          <p:cNvPr id="7" name="Text 5"/>
           <p:cNvSpPr/>
           <p:nvPr/>
         </p:nvSpPr>
@@ -5363,7 +8339,7 @@
                 <a:ea typeface="Aptos Display" pitchFamily="34" charset="-122"/>
                 <a:cs typeface="Aptos Display" pitchFamily="34" charset="-120"/>
               </a:rPr>
-              <a:t>Knowledge Check</a:t>
+              <a:t>Expected Artifact or Evidence Continued</a:t>
             </a:r>
             <a:endParaRPr lang="en-US" sz="2700" dirty="0"/>
           </a:p>
@@ -5371,14 +8347,14 @@
       </p:sp>
       <p:sp>
         <p:nvSpPr>
-          <p:cNvPr id="7" name="Text 5"/>
-          <p:cNvSpPr/>
-          <p:nvPr/>
-        </p:nvSpPr>
-        <p:spPr>
-          <a:xfrm>
-            <a:off x="822960" y="1325880"/>
-            <a:ext cx="10378440" cy="4800600"/>
+          <p:cNvPr id="8" name="Text 6"/>
+          <p:cNvSpPr/>
+          <p:nvPr/>
+        </p:nvSpPr>
+        <p:spPr>
+          <a:xfrm>
+            <a:off x="868680" y="1417320"/>
+            <a:ext cx="6675120" cy="4434840"/>
           </a:xfrm>
           <a:prstGeom prst="rect">
             <a:avLst/>
@@ -5393,7 +8369,7 @@
           <a:lstStyle/>
           <a:p>
             <a:r>
-              <a:rPr lang="en-US" sz="1450" dirty="0">
+              <a:rPr lang="en-US" sz="1700" dirty="0">
                 <a:solidFill>
                   <a:srgbClr val="17364A"/>
                 </a:solidFill>
@@ -5401,13 +8377,106 @@
                 <a:ea typeface="Aptos" pitchFamily="34" charset="-122"/>
                 <a:cs typeface="Aptos" pitchFamily="34" charset="-120"/>
               </a:rPr>
-              <a:t>1. What makes agentic AI different from simple drafting support?</a:t>
-            </a:r>
-            <a:endParaRPr lang="en-US" sz="1450" dirty="0"/>
-          </a:p>
-          <a:p>
-            <a:r>
-              <a:rPr lang="en-US" sz="1450" dirty="0">
+              <a:t>Tool-call logging requirements</a:t>
+            </a:r>
+            <a:endParaRPr lang="en-US" sz="1700" dirty="0"/>
+          </a:p>
+        </p:txBody>
+      </p:sp>
+      <p:sp>
+        <p:nvSpPr>
+          <p:cNvPr id="9" name="Shape 7"/>
+          <p:cNvSpPr/>
+          <p:nvPr/>
+        </p:nvSpPr>
+        <p:spPr>
+          <a:xfrm>
+            <a:off x="7909560" y="1417320"/>
+            <a:ext cx="3154680" cy="1828800"/>
+          </a:xfrm>
+          <a:prstGeom prst="roundRect">
+            <a:avLst>
+              <a:gd name="adj" fmla="val 6000"/>
+            </a:avLst>
+          </a:prstGeom>
+          <a:solidFill>
+            <a:srgbClr val="EEF8ED"/>
+          </a:solidFill>
+          <a:ln w="12700">
+            <a:solidFill>
+              <a:srgbClr val="B9D7E6"/>
+            </a:solidFill>
+            <a:prstDash val="solid"/>
+          </a:ln>
+        </p:spPr>
+      </p:sp>
+      <p:sp>
+        <p:nvSpPr>
+          <p:cNvPr id="10" name="Text 8"/>
+          <p:cNvSpPr/>
+          <p:nvPr/>
+        </p:nvSpPr>
+        <p:spPr>
+          <a:xfrm>
+            <a:off x="8074152" y="1563624"/>
+            <a:ext cx="2825496" cy="201168"/>
+          </a:xfrm>
+          <a:prstGeom prst="rect">
+            <a:avLst/>
+          </a:prstGeom>
+          <a:noFill/>
+          <a:ln/>
+        </p:spPr>
+        <p:txBody>
+          <a:bodyPr wrap="square" lIns="0" tIns="0" rIns="0" bIns="0" rtlCol="0" anchor="ctr"/>
+          <a:lstStyle/>
+          <a:p>
+            <a:pPr indent="0" marL="0">
+              <a:buNone/>
+            </a:pPr>
+            <a:r>
+              <a:rPr lang="en-US" sz="950" b="1" dirty="0">
+                <a:solidFill>
+                  <a:srgbClr val="0068B7"/>
+                </a:solidFill>
+                <a:latin typeface="Aptos" pitchFamily="34" charset="0"/>
+                <a:ea typeface="Aptos" pitchFamily="34" charset="-122"/>
+                <a:cs typeface="Aptos" pitchFamily="34" charset="-120"/>
+              </a:rPr>
+              <a:t>Key idea</a:t>
+            </a:r>
+            <a:endParaRPr lang="en-US" sz="950" dirty="0"/>
+          </a:p>
+        </p:txBody>
+      </p:sp>
+      <p:sp>
+        <p:nvSpPr>
+          <p:cNvPr id="11" name="Text 9"/>
+          <p:cNvSpPr/>
+          <p:nvPr/>
+        </p:nvSpPr>
+        <p:spPr>
+          <a:xfrm>
+            <a:off x="8074152" y="1856232"/>
+            <a:ext cx="2825496" cy="1261872"/>
+          </a:xfrm>
+          <a:prstGeom prst="rect">
+            <a:avLst/>
+          </a:prstGeom>
+          <a:noFill/>
+          <a:ln/>
+        </p:spPr>
+        <p:txBody>
+          <a:bodyPr wrap="square" lIns="0" tIns="0" rIns="0" bIns="0" rtlCol="0" anchor="t">
+            <a:normAutofit/>
+          </a:bodyPr>
+          <a:lstStyle/>
+          <a:p>
+            <a:pPr indent="0" marL="0">
+              <a:buNone/>
+            </a:pPr>
+            <a:r>
+              <a:rPr lang="en-US" sz="1250" dirty="0">
                 <a:solidFill>
                   <a:srgbClr val="17364A"/>
                 </a:solidFill>
@@ -5415,13 +8484,106 @@
                 <a:ea typeface="Aptos" pitchFamily="34" charset="-122"/>
                 <a:cs typeface="Aptos" pitchFamily="34" charset="-120"/>
               </a:rPr>
-              <a:t>2. Which action usually requires stronger oversight?</a:t>
-            </a:r>
-            <a:endParaRPr lang="en-US" sz="1450" dirty="0"/>
-          </a:p>
-          <a:p>
-            <a:r>
-              <a:rPr lang="en-US" sz="1450" dirty="0">
+              <a:t>Tool-call logging requirements</a:t>
+            </a:r>
+            <a:endParaRPr lang="en-US" sz="1250" dirty="0"/>
+          </a:p>
+        </p:txBody>
+      </p:sp>
+      <p:sp>
+        <p:nvSpPr>
+          <p:cNvPr id="12" name="Shape 10"/>
+          <p:cNvSpPr/>
+          <p:nvPr/>
+        </p:nvSpPr>
+        <p:spPr>
+          <a:xfrm>
+            <a:off x="7909560" y="3520440"/>
+            <a:ext cx="3154680" cy="1737360"/>
+          </a:xfrm>
+          <a:prstGeom prst="roundRect">
+            <a:avLst>
+              <a:gd name="adj" fmla="val 6316"/>
+            </a:avLst>
+          </a:prstGeom>
+          <a:solidFill>
+            <a:srgbClr val="EAF6F8"/>
+          </a:solidFill>
+          <a:ln w="12700">
+            <a:solidFill>
+              <a:srgbClr val="B9D7E6"/>
+            </a:solidFill>
+            <a:prstDash val="solid"/>
+          </a:ln>
+        </p:spPr>
+      </p:sp>
+      <p:sp>
+        <p:nvSpPr>
+          <p:cNvPr id="13" name="Text 11"/>
+          <p:cNvSpPr/>
+          <p:nvPr/>
+        </p:nvSpPr>
+        <p:spPr>
+          <a:xfrm>
+            <a:off x="8074152" y="3666744"/>
+            <a:ext cx="2825496" cy="201168"/>
+          </a:xfrm>
+          <a:prstGeom prst="rect">
+            <a:avLst/>
+          </a:prstGeom>
+          <a:noFill/>
+          <a:ln/>
+        </p:spPr>
+        <p:txBody>
+          <a:bodyPr wrap="square" lIns="0" tIns="0" rIns="0" bIns="0" rtlCol="0" anchor="ctr"/>
+          <a:lstStyle/>
+          <a:p>
+            <a:pPr indent="0" marL="0">
+              <a:buNone/>
+            </a:pPr>
+            <a:r>
+              <a:rPr lang="en-US" sz="950" b="1" dirty="0">
+                <a:solidFill>
+                  <a:srgbClr val="0068B7"/>
+                </a:solidFill>
+                <a:latin typeface="Aptos" pitchFamily="34" charset="0"/>
+                <a:ea typeface="Aptos" pitchFamily="34" charset="-122"/>
+                <a:cs typeface="Aptos" pitchFamily="34" charset="-120"/>
+              </a:rPr>
+              <a:t>Use this for</a:t>
+            </a:r>
+            <a:endParaRPr lang="en-US" sz="950" dirty="0"/>
+          </a:p>
+        </p:txBody>
+      </p:sp>
+      <p:sp>
+        <p:nvSpPr>
+          <p:cNvPr id="14" name="Text 12"/>
+          <p:cNvSpPr/>
+          <p:nvPr/>
+        </p:nvSpPr>
+        <p:spPr>
+          <a:xfrm>
+            <a:off x="8074152" y="3959352"/>
+            <a:ext cx="2825496" cy="1170432"/>
+          </a:xfrm>
+          <a:prstGeom prst="rect">
+            <a:avLst/>
+          </a:prstGeom>
+          <a:noFill/>
+          <a:ln/>
+        </p:spPr>
+        <p:txBody>
+          <a:bodyPr wrap="square" lIns="0" tIns="0" rIns="0" bIns="0" rtlCol="0" anchor="t">
+            <a:normAutofit/>
+          </a:bodyPr>
+          <a:lstStyle/>
+          <a:p>
+            <a:pPr indent="0" marL="0">
+              <a:buNone/>
+            </a:pPr>
+            <a:r>
+              <a:rPr lang="en-US" sz="1250" dirty="0">
                 <a:solidFill>
                   <a:srgbClr val="17364A"/>
                 </a:solidFill>
@@ -5429,37 +8591,9 @@
                 <a:ea typeface="Aptos" pitchFamily="34" charset="-122"/>
                 <a:cs typeface="Aptos" pitchFamily="34" charset="-120"/>
               </a:rPr>
-              <a:t>3. What is orchestration?</a:t>
-            </a:r>
-            <a:endParaRPr lang="en-US" sz="1450" dirty="0"/>
-          </a:p>
-          <a:p>
-            <a:r>
-              <a:rPr lang="en-US" sz="1450" dirty="0">
-                <a:solidFill>
-                  <a:srgbClr val="17364A"/>
-                </a:solidFill>
-                <a:latin typeface="Aptos" pitchFamily="34" charset="0"/>
-                <a:ea typeface="Aptos" pitchFamily="34" charset="-122"/>
-                <a:cs typeface="Aptos" pitchFamily="34" charset="-120"/>
-              </a:rPr>
-              <a:t>4. What should happen when an agent encounters an out-of-scope request?</a:t>
-            </a:r>
-            <a:endParaRPr lang="en-US" sz="1450" dirty="0"/>
-          </a:p>
-          <a:p>
-            <a:r>
-              <a:rPr lang="en-US" sz="1450" dirty="0">
-                <a:solidFill>
-                  <a:srgbClr val="17364A"/>
-                </a:solidFill>
-                <a:latin typeface="Aptos" pitchFamily="34" charset="0"/>
-                <a:ea typeface="Aptos" pitchFamily="34" charset="-122"/>
-                <a:cs typeface="Aptos" pitchFamily="34" charset="-120"/>
-              </a:rPr>
-              <a:t>5. What is strong completion evidence for this module?</a:t>
-            </a:r>
-            <a:endParaRPr lang="en-US" sz="1450" dirty="0"/>
+              <a:t>Connect the concept to public health decisions, safeguards, documentation, or implementation work.</a:t>
+            </a:r>
+            <a:endParaRPr lang="en-US" sz="1250" dirty="0"/>
           </a:p>
         </p:txBody>
       </p:sp>
@@ -5522,7 +8656,32 @@
       </p:sp>
       <p:sp>
         <p:nvSpPr>
-          <p:cNvPr id="3" name="Text 1"/>
+          <p:cNvPr id="3" name="Shape 1"/>
+          <p:cNvSpPr/>
+          <p:nvPr/>
+        </p:nvSpPr>
+        <p:spPr>
+          <a:xfrm>
+            <a:off x="0" y="164592"/>
+            <a:ext cx="146304" cy="6693408"/>
+          </a:xfrm>
+          <a:prstGeom prst="rect">
+            <a:avLst/>
+          </a:prstGeom>
+          <a:solidFill>
+            <a:srgbClr val="2F8A28"/>
+          </a:solidFill>
+          <a:ln w="12700">
+            <a:solidFill>
+              <a:srgbClr val="2F8A28"/>
+            </a:solidFill>
+            <a:prstDash val="solid"/>
+          </a:ln>
+        </p:spPr>
+      </p:sp>
+      <p:sp>
+        <p:nvSpPr>
+          <p:cNvPr id="4" name="Text 2"/>
           <p:cNvSpPr/>
           <p:nvPr/>
         </p:nvSpPr>
@@ -5561,7 +8720,7 @@
       </p:sp>
       <p:sp>
         <p:nvSpPr>
-          <p:cNvPr id="4" name="Text 2"/>
+          <p:cNvPr id="5" name="Text 3"/>
           <p:cNvSpPr/>
           <p:nvPr/>
         </p:nvSpPr>
@@ -5600,7 +8759,7 @@
       </p:sp>
       <p:sp>
         <p:nvSpPr>
-          <p:cNvPr id="5" name="Text 3"/>
+          <p:cNvPr id="6" name="Text 4"/>
           <p:cNvSpPr/>
           <p:nvPr/>
         </p:nvSpPr>
@@ -5639,7 +8798,7 @@
       </p:sp>
       <p:sp>
         <p:nvSpPr>
-          <p:cNvPr id="6" name="Text 4"/>
+          <p:cNvPr id="7" name="Text 5"/>
           <p:cNvSpPr/>
           <p:nvPr/>
         </p:nvSpPr>
@@ -5672,7 +8831,7 @@
                 <a:ea typeface="Aptos Display" pitchFamily="34" charset="-122"/>
                 <a:cs typeface="Aptos Display" pitchFamily="34" charset="-120"/>
               </a:rPr>
-              <a:t>Module Context</a:t>
+              <a:t>What this module helps you do</a:t>
             </a:r>
             <a:endParaRPr lang="en-US" sz="2700" dirty="0"/>
           </a:p>
@@ -5680,14 +8839,14 @@
       </p:sp>
       <p:sp>
         <p:nvSpPr>
-          <p:cNvPr id="7" name="Text 5"/>
-          <p:cNvSpPr/>
-          <p:nvPr/>
-        </p:nvSpPr>
-        <p:spPr>
-          <a:xfrm>
-            <a:off x="822960" y="1325880"/>
-            <a:ext cx="10378440" cy="1371600"/>
+          <p:cNvPr id="8" name="Text 6"/>
+          <p:cNvSpPr/>
+          <p:nvPr/>
+        </p:nvSpPr>
+        <p:spPr>
+          <a:xfrm>
+            <a:off x="868680" y="1417320"/>
+            <a:ext cx="6675120" cy="3291840"/>
           </a:xfrm>
           <a:prstGeom prst="rect">
             <a:avLst/>
@@ -5702,7 +8861,7 @@
           <a:lstStyle/>
           <a:p>
             <a:r>
-              <a:rPr lang="en-US" sz="1600" dirty="0">
+              <a:rPr lang="en-US" sz="1700" dirty="0">
                 <a:solidFill>
                   <a:srgbClr val="17364A"/>
                 </a:solidFill>
@@ -5710,13 +8869,13 @@
                 <a:ea typeface="Aptos" pitchFamily="34" charset="-122"/>
                 <a:cs typeface="Aptos" pitchFamily="34" charset="-120"/>
               </a:rPr>
-              <a:t>Level: intermediate/practitioner</a:t>
-            </a:r>
-            <a:endParaRPr lang="en-US" sz="1600" dirty="0"/>
-          </a:p>
-          <a:p>
-            <a:r>
-              <a:rPr lang="en-US" sz="1600" dirty="0">
+              <a:t>Agentic AI refers to AI systems configured to pursue a goal through multiple steps, often by using tools, calling APIs, retrieving information,.</a:t>
+            </a:r>
+            <a:endParaRPr lang="en-US" sz="1700" dirty="0"/>
+          </a:p>
+          <a:p>
+            <a:r>
+              <a:rPr lang="en-US" sz="1700" dirty="0">
                 <a:solidFill>
                   <a:srgbClr val="17364A"/>
                 </a:solidFill>
@@ -5724,13 +8883,13 @@
                 <a:ea typeface="Aptos" pitchFamily="34" charset="-122"/>
                 <a:cs typeface="Aptos" pitchFamily="34" charset="-120"/>
               </a:rPr>
-              <a:t>Primary track: Technical Architecture Track</a:t>
-            </a:r>
-            <a:endParaRPr lang="en-US" sz="1600" dirty="0"/>
-          </a:p>
-          <a:p>
-            <a:r>
-              <a:rPr lang="en-US" sz="1600" dirty="0">
+              <a:t>In public health, agentic workflows may eventually support intake triage, document routing, surveillance review, resource referral, emergency.</a:t>
+            </a:r>
+            <a:endParaRPr lang="en-US" sz="1700" dirty="0"/>
+          </a:p>
+          <a:p>
+            <a:r>
+              <a:rPr lang="en-US" sz="1700" dirty="0">
                 <a:solidFill>
                   <a:srgbClr val="17364A"/>
                 </a:solidFill>
@@ -5738,31 +8897,111 @@
                 <a:ea typeface="Aptos" pitchFamily="34" charset="-122"/>
                 <a:cs typeface="Aptos" pitchFamily="34" charset="-120"/>
               </a:rPr>
-              <a:t>Appears in tracks: analytics-modeling</a:t>
-            </a:r>
-            <a:endParaRPr lang="en-US" sz="1600" dirty="0"/>
-          </a:p>
-        </p:txBody>
-      </p:sp>
-      <p:sp>
-        <p:nvSpPr>
-          <p:cNvPr id="8" name="Text 6"/>
-          <p:cNvSpPr/>
-          <p:nvPr/>
-        </p:nvSpPr>
-        <p:spPr>
-          <a:xfrm>
-            <a:off x="822960" y="2743200"/>
-            <a:ext cx="10378440" cy="2834640"/>
-          </a:xfrm>
-          <a:prstGeom prst="rect">
-            <a:avLst/>
-          </a:prstGeom>
-          <a:noFill/>
-          <a:ln/>
-        </p:spPr>
-        <p:txBody>
-          <a:bodyPr wrap="square" lIns="1016" tIns="1016" rIns="1016" bIns="1016" rtlCol="0" anchor="t">
+              <a:t>These uses require stronger controls than simple drafting or summarization.</a:t>
+            </a:r>
+            <a:endParaRPr lang="en-US" sz="1700" dirty="0"/>
+          </a:p>
+          <a:p>
+            <a:r>
+              <a:rPr lang="en-US" sz="1700" dirty="0">
+                <a:solidFill>
+                  <a:srgbClr val="17364A"/>
+                </a:solidFill>
+                <a:latin typeface="Aptos" pitchFamily="34" charset="0"/>
+                <a:ea typeface="Aptos" pitchFamily="34" charset="-122"/>
+                <a:cs typeface="Aptos" pitchFamily="34" charset="-120"/>
+              </a:rPr>
+              <a:t>This module teaches learners how to design agentic workflows with clear boundaries.</a:t>
+            </a:r>
+            <a:endParaRPr lang="en-US" sz="1700" dirty="0"/>
+          </a:p>
+        </p:txBody>
+      </p:sp>
+      <p:sp>
+        <p:nvSpPr>
+          <p:cNvPr id="9" name="Shape 7"/>
+          <p:cNvSpPr/>
+          <p:nvPr/>
+        </p:nvSpPr>
+        <p:spPr>
+          <a:xfrm>
+            <a:off x="7909560" y="1417320"/>
+            <a:ext cx="3154680" cy="1920240"/>
+          </a:xfrm>
+          <a:prstGeom prst="roundRect">
+            <a:avLst>
+              <a:gd name="adj" fmla="val 5714"/>
+            </a:avLst>
+          </a:prstGeom>
+          <a:solidFill>
+            <a:srgbClr val="EAF6F8"/>
+          </a:solidFill>
+          <a:ln w="12700">
+            <a:solidFill>
+              <a:srgbClr val="B9D7E6"/>
+            </a:solidFill>
+            <a:prstDash val="solid"/>
+          </a:ln>
+        </p:spPr>
+      </p:sp>
+      <p:sp>
+        <p:nvSpPr>
+          <p:cNvPr id="10" name="Text 8"/>
+          <p:cNvSpPr/>
+          <p:nvPr/>
+        </p:nvSpPr>
+        <p:spPr>
+          <a:xfrm>
+            <a:off x="8074152" y="1563624"/>
+            <a:ext cx="2825496" cy="201168"/>
+          </a:xfrm>
+          <a:prstGeom prst="rect">
+            <a:avLst/>
+          </a:prstGeom>
+          <a:noFill/>
+          <a:ln/>
+        </p:spPr>
+        <p:txBody>
+          <a:bodyPr wrap="square" lIns="0" tIns="0" rIns="0" bIns="0" rtlCol="0" anchor="ctr"/>
+          <a:lstStyle/>
+          <a:p>
+            <a:pPr indent="0" marL="0">
+              <a:buNone/>
+            </a:pPr>
+            <a:r>
+              <a:rPr lang="en-US" sz="950" b="1" dirty="0">
+                <a:solidFill>
+                  <a:srgbClr val="0068B7"/>
+                </a:solidFill>
+                <a:latin typeface="Aptos" pitchFamily="34" charset="0"/>
+                <a:ea typeface="Aptos" pitchFamily="34" charset="-122"/>
+                <a:cs typeface="Aptos" pitchFamily="34" charset="-120"/>
+              </a:rPr>
+              <a:t>Module details</a:t>
+            </a:r>
+            <a:endParaRPr lang="en-US" sz="950" dirty="0"/>
+          </a:p>
+        </p:txBody>
+      </p:sp>
+      <p:sp>
+        <p:nvSpPr>
+          <p:cNvPr id="11" name="Text 9"/>
+          <p:cNvSpPr/>
+          <p:nvPr/>
+        </p:nvSpPr>
+        <p:spPr>
+          <a:xfrm>
+            <a:off x="8074152" y="1856232"/>
+            <a:ext cx="2825496" cy="1353312"/>
+          </a:xfrm>
+          <a:prstGeom prst="rect">
+            <a:avLst/>
+          </a:prstGeom>
+          <a:noFill/>
+          <a:ln/>
+        </p:spPr>
+        <p:txBody>
+          <a:bodyPr wrap="square" lIns="0" tIns="0" rIns="0" bIns="0" rtlCol="0" anchor="t">
             <a:normAutofit/>
           </a:bodyPr>
           <a:lstStyle/>
@@ -5771,7 +9010,7 @@
               <a:buNone/>
             </a:pPr>
             <a:r>
-              <a:rPr lang="en-US" sz="1400" dirty="0">
+              <a:rPr lang="en-US" sz="1250" dirty="0">
                 <a:solidFill>
                   <a:srgbClr val="17364A"/>
                 </a:solidFill>
@@ -5779,9 +9018,150 @@
                 <a:ea typeface="Aptos" pitchFamily="34" charset="-122"/>
                 <a:cs typeface="Aptos" pitchFamily="34" charset="-120"/>
               </a:rPr>
-              <a:t>Agentic AI refers to AI systems configured to pursue a goal through multiple steps, often by using tools, calling APIs, retrieving information, creating tasks, or taking actions. In public health, agentic workflows may eventually support intake triage, document routing, surveillance review, resource referral, emergency operations, procurement review, or administrative automation. These uses require stronger controls than simple drafting or summarization. This module teaches learners how to design agentic workflows with clear boundaries. An AI agent should not be understood as an independent decision-maker. It is a software component operating within a governed workflow. Public health agencies must define the goal, permitted tools, data access, action limits, human approval points, logs, failure handling, and rollback procedures. Learners will create an agentic workflow control plan that identifies allowed actions, prohibited actions, oversight requirements, and incident triggers.</a:t>
-            </a:r>
-            <a:endParaRPr lang="en-US" sz="1400" dirty="0"/>
+              <a:t>Level: intermediate/practitioner</a:t>
+            </a:r>
+            <a:endParaRPr lang="en-US" sz="1250" dirty="0"/>
+          </a:p>
+          <a:p>
+            <a:pPr indent="0" marL="0">
+              <a:buNone/>
+            </a:pPr>
+            <a:r>
+              <a:rPr lang="en-US" sz="1250" dirty="0">
+                <a:solidFill>
+                  <a:srgbClr val="17364A"/>
+                </a:solidFill>
+                <a:latin typeface="Aptos" pitchFamily="34" charset="0"/>
+                <a:ea typeface="Aptos" pitchFamily="34" charset="-122"/>
+                <a:cs typeface="Aptos" pitchFamily="34" charset="-120"/>
+              </a:rPr>
+              <a:t>Primary track: Technical Architecture Track</a:t>
+            </a:r>
+            <a:endParaRPr lang="en-US" sz="1250" dirty="0"/>
+          </a:p>
+          <a:p>
+            <a:pPr indent="0" marL="0">
+              <a:buNone/>
+            </a:pPr>
+            <a:r>
+              <a:rPr lang="en-US" sz="1250" dirty="0">
+                <a:solidFill>
+                  <a:srgbClr val="17364A"/>
+                </a:solidFill>
+                <a:latin typeface="Aptos" pitchFamily="34" charset="0"/>
+                <a:ea typeface="Aptos" pitchFamily="34" charset="-122"/>
+                <a:cs typeface="Aptos" pitchFamily="34" charset="-120"/>
+              </a:rPr>
+              <a:t>Appears in tracks: analytics-modeling</a:t>
+            </a:r>
+            <a:endParaRPr lang="en-US" sz="1250" dirty="0"/>
+          </a:p>
+        </p:txBody>
+      </p:sp>
+      <p:sp>
+        <p:nvSpPr>
+          <p:cNvPr id="12" name="Shape 10"/>
+          <p:cNvSpPr/>
+          <p:nvPr/>
+        </p:nvSpPr>
+        <p:spPr>
+          <a:xfrm>
+            <a:off x="7909560" y="3611880"/>
+            <a:ext cx="3154680" cy="1783080"/>
+          </a:xfrm>
+          <a:prstGeom prst="roundRect">
+            <a:avLst>
+              <a:gd name="adj" fmla="val 6154"/>
+            </a:avLst>
+          </a:prstGeom>
+          <a:solidFill>
+            <a:srgbClr val="EEF8ED"/>
+          </a:solidFill>
+          <a:ln w="12700">
+            <a:solidFill>
+              <a:srgbClr val="B9D7E6"/>
+            </a:solidFill>
+            <a:prstDash val="solid"/>
+          </a:ln>
+        </p:spPr>
+      </p:sp>
+      <p:sp>
+        <p:nvSpPr>
+          <p:cNvPr id="13" name="Text 11"/>
+          <p:cNvSpPr/>
+          <p:nvPr/>
+        </p:nvSpPr>
+        <p:spPr>
+          <a:xfrm>
+            <a:off x="8074152" y="3758184"/>
+            <a:ext cx="2825496" cy="201168"/>
+          </a:xfrm>
+          <a:prstGeom prst="rect">
+            <a:avLst/>
+          </a:prstGeom>
+          <a:noFill/>
+          <a:ln/>
+        </p:spPr>
+        <p:txBody>
+          <a:bodyPr wrap="square" lIns="0" tIns="0" rIns="0" bIns="0" rtlCol="0" anchor="ctr"/>
+          <a:lstStyle/>
+          <a:p>
+            <a:pPr indent="0" marL="0">
+              <a:buNone/>
+            </a:pPr>
+            <a:r>
+              <a:rPr lang="en-US" sz="950" b="1" dirty="0">
+                <a:solidFill>
+                  <a:srgbClr val="0068B7"/>
+                </a:solidFill>
+                <a:latin typeface="Aptos" pitchFamily="34" charset="0"/>
+                <a:ea typeface="Aptos" pitchFamily="34" charset="-122"/>
+                <a:cs typeface="Aptos" pitchFamily="34" charset="-120"/>
+              </a:rPr>
+              <a:t>Learning approach</a:t>
+            </a:r>
+            <a:endParaRPr lang="en-US" sz="950" dirty="0"/>
+          </a:p>
+        </p:txBody>
+      </p:sp>
+      <p:sp>
+        <p:nvSpPr>
+          <p:cNvPr id="14" name="Text 12"/>
+          <p:cNvSpPr/>
+          <p:nvPr/>
+        </p:nvSpPr>
+        <p:spPr>
+          <a:xfrm>
+            <a:off x="8074152" y="4050792"/>
+            <a:ext cx="2825496" cy="1216152"/>
+          </a:xfrm>
+          <a:prstGeom prst="rect">
+            <a:avLst/>
+          </a:prstGeom>
+          <a:noFill/>
+          <a:ln/>
+        </p:spPr>
+        <p:txBody>
+          <a:bodyPr wrap="square" lIns="0" tIns="0" rIns="0" bIns="0" rtlCol="0" anchor="t">
+            <a:normAutofit/>
+          </a:bodyPr>
+          <a:lstStyle/>
+          <a:p>
+            <a:pPr indent="0" marL="0">
+              <a:buNone/>
+            </a:pPr>
+            <a:r>
+              <a:rPr lang="en-US" sz="1250" dirty="0">
+                <a:solidFill>
+                  <a:srgbClr val="17364A"/>
+                </a:solidFill>
+                <a:latin typeface="Aptos" pitchFamily="34" charset="0"/>
+                <a:ea typeface="Aptos" pitchFamily="34" charset="-122"/>
+                <a:cs typeface="Aptos" pitchFamily="34" charset="-120"/>
+              </a:rPr>
+              <a:t>Review the core ideas, complete the practical exercise, check your understanding, and use the related plays and tools to apply the lesson.</a:t>
+            </a:r>
+            <a:endParaRPr lang="en-US" sz="1250" dirty="0"/>
           </a:p>
         </p:txBody>
       </p:sp>
@@ -5844,7 +9224,32 @@
       </p:sp>
       <p:sp>
         <p:nvSpPr>
-          <p:cNvPr id="3" name="Text 1"/>
+          <p:cNvPr id="3" name="Shape 1"/>
+          <p:cNvSpPr/>
+          <p:nvPr/>
+        </p:nvSpPr>
+        <p:spPr>
+          <a:xfrm>
+            <a:off x="0" y="164592"/>
+            <a:ext cx="146304" cy="6693408"/>
+          </a:xfrm>
+          <a:prstGeom prst="rect">
+            <a:avLst/>
+          </a:prstGeom>
+          <a:solidFill>
+            <a:srgbClr val="2F8A28"/>
+          </a:solidFill>
+          <a:ln w="12700">
+            <a:solidFill>
+              <a:srgbClr val="2F8A28"/>
+            </a:solidFill>
+            <a:prstDash val="solid"/>
+          </a:ln>
+        </p:spPr>
+      </p:sp>
+      <p:sp>
+        <p:nvSpPr>
+          <p:cNvPr id="4" name="Text 2"/>
           <p:cNvSpPr/>
           <p:nvPr/>
         </p:nvSpPr>
@@ -5883,7 +9288,7 @@
       </p:sp>
       <p:sp>
         <p:nvSpPr>
-          <p:cNvPr id="4" name="Text 2"/>
+          <p:cNvPr id="5" name="Text 3"/>
           <p:cNvSpPr/>
           <p:nvPr/>
         </p:nvSpPr>
@@ -5922,7 +9327,7 @@
       </p:sp>
       <p:sp>
         <p:nvSpPr>
-          <p:cNvPr id="5" name="Text 3"/>
+          <p:cNvPr id="6" name="Text 4"/>
           <p:cNvSpPr/>
           <p:nvPr/>
         </p:nvSpPr>
@@ -5961,13 +9366,77 @@
       </p:sp>
       <p:sp>
         <p:nvSpPr>
-          <p:cNvPr id="6" name="Text 4"/>
+          <p:cNvPr id="7" name="Shape 5"/>
           <p:cNvSpPr/>
           <p:nvPr/>
         </p:nvSpPr>
         <p:spPr>
           <a:xfrm>
             <a:off x="640080" y="658368"/>
+            <a:ext cx="420624" cy="420624"/>
+          </a:xfrm>
+          <a:prstGeom prst="ellipse">
+            <a:avLst/>
+          </a:prstGeom>
+          <a:solidFill>
+            <a:srgbClr val="0068B7"/>
+          </a:solidFill>
+          <a:ln w="12700">
+            <a:solidFill>
+              <a:srgbClr val="0068B7"/>
+            </a:solidFill>
+            <a:prstDash val="solid"/>
+          </a:ln>
+        </p:spPr>
+      </p:sp>
+      <p:sp>
+        <p:nvSpPr>
+          <p:cNvPr id="8" name="Text 6"/>
+          <p:cNvSpPr/>
+          <p:nvPr/>
+        </p:nvSpPr>
+        <p:spPr>
+          <a:xfrm>
+            <a:off x="640080" y="731520"/>
+            <a:ext cx="420624" cy="164592"/>
+          </a:xfrm>
+          <a:prstGeom prst="rect">
+            <a:avLst/>
+          </a:prstGeom>
+          <a:noFill/>
+          <a:ln/>
+        </p:spPr>
+        <p:txBody>
+          <a:bodyPr wrap="square" lIns="0" tIns="0" rIns="0" bIns="0" rtlCol="0" anchor="ctr"/>
+          <a:lstStyle/>
+          <a:p>
+            <a:pPr algn="ctr" indent="0" marL="0">
+              <a:buNone/>
+            </a:pPr>
+            <a:r>
+              <a:rPr lang="en-US" sz="1100" b="1" dirty="0">
+                <a:solidFill>
+                  <a:srgbClr val="FFFFFF"/>
+                </a:solidFill>
+                <a:latin typeface="Aptos" pitchFamily="34" charset="0"/>
+                <a:ea typeface="Aptos" pitchFamily="34" charset="-122"/>
+                <a:cs typeface="Aptos" pitchFamily="34" charset="-120"/>
+              </a:rPr>
+              <a:t>11</a:t>
+            </a:r>
+            <a:endParaRPr lang="en-US" sz="1100" dirty="0"/>
+          </a:p>
+        </p:txBody>
+      </p:sp>
+      <p:sp>
+        <p:nvSpPr>
+          <p:cNvPr id="9" name="Text 7"/>
+          <p:cNvSpPr/>
+          <p:nvPr/>
+        </p:nvSpPr>
+        <p:spPr>
+          <a:xfrm>
+            <a:off x="640080" y="621792"/>
             <a:ext cx="10881360" cy="566928"/>
           </a:xfrm>
           <a:prstGeom prst="rect">
@@ -5994,7 +9463,7 @@
                 <a:ea typeface="Aptos Display" pitchFamily="34" charset="-122"/>
                 <a:cs typeface="Aptos Display" pitchFamily="34" charset="-120"/>
               </a:rPr>
-              <a:t>References and Resources</a:t>
+              <a:t>Expected Assignment</a:t>
             </a:r>
             <a:endParaRPr lang="en-US" sz="2700" dirty="0"/>
           </a:p>
@@ -6002,14 +9471,14 @@
       </p:sp>
       <p:sp>
         <p:nvSpPr>
-          <p:cNvPr id="7" name="Text 5"/>
-          <p:cNvSpPr/>
-          <p:nvPr/>
-        </p:nvSpPr>
-        <p:spPr>
-          <a:xfrm>
-            <a:off x="822960" y="1325880"/>
-            <a:ext cx="10378440" cy="4800600"/>
+          <p:cNvPr id="10" name="Text 8"/>
+          <p:cNvSpPr/>
+          <p:nvPr/>
+        </p:nvSpPr>
+        <p:spPr>
+          <a:xfrm>
+            <a:off x="868680" y="1417320"/>
+            <a:ext cx="6675120" cy="4434840"/>
           </a:xfrm>
           <a:prstGeom prst="rect">
             <a:avLst/>
@@ -6024,7 +9493,7 @@
           <a:lstStyle/>
           <a:p>
             <a:r>
-              <a:rPr lang="en-US" sz="1450" dirty="0">
+              <a:rPr lang="en-US" sz="1700" dirty="0">
                 <a:solidFill>
                   <a:srgbClr val="17364A"/>
                 </a:solidFill>
@@ -6032,13 +9501,1209 @@
                 <a:ea typeface="Aptos" pitchFamily="34" charset="-122"/>
                 <a:cs typeface="Aptos" pitchFamily="34" charset="-120"/>
               </a:rPr>
+              <a:t>Agentic workflow control plan</a:t>
+            </a:r>
+            <a:endParaRPr lang="en-US" sz="1700" dirty="0"/>
+          </a:p>
+          <a:p>
+            <a:r>
+              <a:rPr lang="en-US" sz="1700" dirty="0">
+                <a:solidFill>
+                  <a:srgbClr val="17364A"/>
+                </a:solidFill>
+                <a:latin typeface="Aptos" pitchFamily="34" charset="0"/>
+                <a:ea typeface="Aptos" pitchFamily="34" charset="-122"/>
+                <a:cs typeface="Aptos" pitchFamily="34" charset="-120"/>
+              </a:rPr>
+              <a:t>Allowed/prohibited action list</a:t>
+            </a:r>
+            <a:endParaRPr lang="en-US" sz="1700" dirty="0"/>
+          </a:p>
+          <a:p>
+            <a:r>
+              <a:rPr lang="en-US" sz="1700" dirty="0">
+                <a:solidFill>
+                  <a:srgbClr val="17364A"/>
+                </a:solidFill>
+                <a:latin typeface="Aptos" pitchFamily="34" charset="0"/>
+                <a:ea typeface="Aptos" pitchFamily="34" charset="-122"/>
+                <a:cs typeface="Aptos" pitchFamily="34" charset="-120"/>
+              </a:rPr>
+              <a:t>Human approval and escalation map</a:t>
+            </a:r>
+            <a:endParaRPr lang="en-US" sz="1700" dirty="0"/>
+          </a:p>
+          <a:p>
+            <a:r>
+              <a:rPr lang="en-US" sz="1700" dirty="0">
+                <a:solidFill>
+                  <a:srgbClr val="17364A"/>
+                </a:solidFill>
+                <a:latin typeface="Aptos" pitchFamily="34" charset="0"/>
+                <a:ea typeface="Aptos" pitchFamily="34" charset="-122"/>
+                <a:cs typeface="Aptos" pitchFamily="34" charset="-120"/>
+              </a:rPr>
+              <a:t>Tool-call logging requirements</a:t>
+            </a:r>
+            <a:endParaRPr lang="en-US" sz="1700" dirty="0"/>
+          </a:p>
+        </p:txBody>
+      </p:sp>
+      <p:sp>
+        <p:nvSpPr>
+          <p:cNvPr id="11" name="Shape 9"/>
+          <p:cNvSpPr/>
+          <p:nvPr/>
+        </p:nvSpPr>
+        <p:spPr>
+          <a:xfrm>
+            <a:off x="7909560" y="1417320"/>
+            <a:ext cx="3154680" cy="1828800"/>
+          </a:xfrm>
+          <a:prstGeom prst="roundRect">
+            <a:avLst>
+              <a:gd name="adj" fmla="val 6000"/>
+            </a:avLst>
+          </a:prstGeom>
+          <a:solidFill>
+            <a:srgbClr val="EEF8ED"/>
+          </a:solidFill>
+          <a:ln w="12700">
+            <a:solidFill>
+              <a:srgbClr val="B9D7E6"/>
+            </a:solidFill>
+            <a:prstDash val="solid"/>
+          </a:ln>
+        </p:spPr>
+      </p:sp>
+      <p:sp>
+        <p:nvSpPr>
+          <p:cNvPr id="12" name="Text 10"/>
+          <p:cNvSpPr/>
+          <p:nvPr/>
+        </p:nvSpPr>
+        <p:spPr>
+          <a:xfrm>
+            <a:off x="8074152" y="1563624"/>
+            <a:ext cx="2825496" cy="201168"/>
+          </a:xfrm>
+          <a:prstGeom prst="rect">
+            <a:avLst/>
+          </a:prstGeom>
+          <a:noFill/>
+          <a:ln/>
+        </p:spPr>
+        <p:txBody>
+          <a:bodyPr wrap="square" lIns="0" tIns="0" rIns="0" bIns="0" rtlCol="0" anchor="ctr"/>
+          <a:lstStyle/>
+          <a:p>
+            <a:pPr indent="0" marL="0">
+              <a:buNone/>
+            </a:pPr>
+            <a:r>
+              <a:rPr lang="en-US" sz="950" b="1" dirty="0">
+                <a:solidFill>
+                  <a:srgbClr val="0068B7"/>
+                </a:solidFill>
+                <a:latin typeface="Aptos" pitchFamily="34" charset="0"/>
+                <a:ea typeface="Aptos" pitchFamily="34" charset="-122"/>
+                <a:cs typeface="Aptos" pitchFamily="34" charset="-120"/>
+              </a:rPr>
+              <a:t>Key idea</a:t>
+            </a:r>
+            <a:endParaRPr lang="en-US" sz="950" dirty="0"/>
+          </a:p>
+        </p:txBody>
+      </p:sp>
+      <p:sp>
+        <p:nvSpPr>
+          <p:cNvPr id="13" name="Text 11"/>
+          <p:cNvSpPr/>
+          <p:nvPr/>
+        </p:nvSpPr>
+        <p:spPr>
+          <a:xfrm>
+            <a:off x="8074152" y="1856232"/>
+            <a:ext cx="2825496" cy="1261872"/>
+          </a:xfrm>
+          <a:prstGeom prst="rect">
+            <a:avLst/>
+          </a:prstGeom>
+          <a:noFill/>
+          <a:ln/>
+        </p:spPr>
+        <p:txBody>
+          <a:bodyPr wrap="square" lIns="0" tIns="0" rIns="0" bIns="0" rtlCol="0" anchor="t">
+            <a:normAutofit/>
+          </a:bodyPr>
+          <a:lstStyle/>
+          <a:p>
+            <a:pPr indent="0" marL="0">
+              <a:buNone/>
+            </a:pPr>
+            <a:r>
+              <a:rPr lang="en-US" sz="1250" dirty="0">
+                <a:solidFill>
+                  <a:srgbClr val="17364A"/>
+                </a:solidFill>
+                <a:latin typeface="Aptos" pitchFamily="34" charset="0"/>
+                <a:ea typeface="Aptos" pitchFamily="34" charset="-122"/>
+                <a:cs typeface="Aptos" pitchFamily="34" charset="-120"/>
+              </a:rPr>
+              <a:t>Agentic workflow control plan</a:t>
+            </a:r>
+            <a:endParaRPr lang="en-US" sz="1250" dirty="0"/>
+          </a:p>
+        </p:txBody>
+      </p:sp>
+      <p:sp>
+        <p:nvSpPr>
+          <p:cNvPr id="14" name="Shape 12"/>
+          <p:cNvSpPr/>
+          <p:nvPr/>
+        </p:nvSpPr>
+        <p:spPr>
+          <a:xfrm>
+            <a:off x="7909560" y="3520440"/>
+            <a:ext cx="3154680" cy="1737360"/>
+          </a:xfrm>
+          <a:prstGeom prst="roundRect">
+            <a:avLst>
+              <a:gd name="adj" fmla="val 6316"/>
+            </a:avLst>
+          </a:prstGeom>
+          <a:solidFill>
+            <a:srgbClr val="EAF6F8"/>
+          </a:solidFill>
+          <a:ln w="12700">
+            <a:solidFill>
+              <a:srgbClr val="B9D7E6"/>
+            </a:solidFill>
+            <a:prstDash val="solid"/>
+          </a:ln>
+        </p:spPr>
+      </p:sp>
+      <p:sp>
+        <p:nvSpPr>
+          <p:cNvPr id="15" name="Text 13"/>
+          <p:cNvSpPr/>
+          <p:nvPr/>
+        </p:nvSpPr>
+        <p:spPr>
+          <a:xfrm>
+            <a:off x="8074152" y="3666744"/>
+            <a:ext cx="2825496" cy="201168"/>
+          </a:xfrm>
+          <a:prstGeom prst="rect">
+            <a:avLst/>
+          </a:prstGeom>
+          <a:noFill/>
+          <a:ln/>
+        </p:spPr>
+        <p:txBody>
+          <a:bodyPr wrap="square" lIns="0" tIns="0" rIns="0" bIns="0" rtlCol="0" anchor="ctr"/>
+          <a:lstStyle/>
+          <a:p>
+            <a:pPr indent="0" marL="0">
+              <a:buNone/>
+            </a:pPr>
+            <a:r>
+              <a:rPr lang="en-US" sz="950" b="1" dirty="0">
+                <a:solidFill>
+                  <a:srgbClr val="0068B7"/>
+                </a:solidFill>
+                <a:latin typeface="Aptos" pitchFamily="34" charset="0"/>
+                <a:ea typeface="Aptos" pitchFamily="34" charset="-122"/>
+                <a:cs typeface="Aptos" pitchFamily="34" charset="-120"/>
+              </a:rPr>
+              <a:t>Use this for</a:t>
+            </a:r>
+            <a:endParaRPr lang="en-US" sz="950" dirty="0"/>
+          </a:p>
+        </p:txBody>
+      </p:sp>
+      <p:sp>
+        <p:nvSpPr>
+          <p:cNvPr id="16" name="Text 14"/>
+          <p:cNvSpPr/>
+          <p:nvPr/>
+        </p:nvSpPr>
+        <p:spPr>
+          <a:xfrm>
+            <a:off x="8074152" y="3959352"/>
+            <a:ext cx="2825496" cy="1170432"/>
+          </a:xfrm>
+          <a:prstGeom prst="rect">
+            <a:avLst/>
+          </a:prstGeom>
+          <a:noFill/>
+          <a:ln/>
+        </p:spPr>
+        <p:txBody>
+          <a:bodyPr wrap="square" lIns="0" tIns="0" rIns="0" bIns="0" rtlCol="0" anchor="t">
+            <a:normAutofit/>
+          </a:bodyPr>
+          <a:lstStyle/>
+          <a:p>
+            <a:pPr indent="0" marL="0">
+              <a:buNone/>
+            </a:pPr>
+            <a:r>
+              <a:rPr lang="en-US" sz="1250" dirty="0">
+                <a:solidFill>
+                  <a:srgbClr val="17364A"/>
+                </a:solidFill>
+                <a:latin typeface="Aptos" pitchFamily="34" charset="0"/>
+                <a:ea typeface="Aptos" pitchFamily="34" charset="-122"/>
+                <a:cs typeface="Aptos" pitchFamily="34" charset="-120"/>
+              </a:rPr>
+              <a:t>Connect the concept to public health decisions, safeguards, documentation, or implementation work.</a:t>
+            </a:r>
+            <a:endParaRPr lang="en-US" sz="1250" dirty="0"/>
+          </a:p>
+        </p:txBody>
+      </p:sp>
+    </p:spTree>
+  </p:cSld>
+  <p:clrMapOvr>
+    <a:masterClrMapping/>
+  </p:clrMapOvr>
+</p:sld>
+</file>
+
+<file path=ppt/slides/slide21.xml><?xml version="1.0" encoding="utf-8"?>
+<p:sld xmlns:a="http://schemas.openxmlformats.org/drawingml/2006/main" xmlns:r="http://schemas.openxmlformats.org/officeDocument/2006/relationships" xmlns:p="http://schemas.openxmlformats.org/presentationml/2006/main">
+  <p:cSld name="Slide 21">
+    <p:bg>
+      <p:bgPr>
+        <a:solidFill>
+          <a:srgbClr val="F7FBFD"/>
+        </a:solidFill>
+      </p:bgPr>
+    </p:bg>
+    <p:spTree>
+      <p:nvGrpSpPr>
+        <p:cNvPr id="1" name=""/>
+        <p:cNvGrpSpPr/>
+        <p:nvPr/>
+      </p:nvGrpSpPr>
+      <p:grpSpPr>
+        <a:xfrm>
+          <a:off x="0" y="0"/>
+          <a:ext cx="0" cy="0"/>
+          <a:chOff x="0" y="0"/>
+          <a:chExt cx="0" cy="0"/>
+        </a:xfrm>
+      </p:grpSpPr>
+      <p:sp>
+        <p:nvSpPr>
+          <p:cNvPr id="2" name="Shape 0"/>
+          <p:cNvSpPr/>
+          <p:nvPr/>
+        </p:nvSpPr>
+        <p:spPr>
+          <a:xfrm>
+            <a:off x="0" y="0"/>
+            <a:ext cx="12191695" cy="164592"/>
+          </a:xfrm>
+          <a:prstGeom prst="rect">
+            <a:avLst/>
+          </a:prstGeom>
+          <a:solidFill>
+            <a:srgbClr val="0068B7"/>
+          </a:solidFill>
+          <a:ln w="12700">
+            <a:solidFill>
+              <a:srgbClr val="0068B7"/>
+            </a:solidFill>
+            <a:prstDash val="solid"/>
+          </a:ln>
+        </p:spPr>
+      </p:sp>
+      <p:sp>
+        <p:nvSpPr>
+          <p:cNvPr id="3" name="Shape 1"/>
+          <p:cNvSpPr/>
+          <p:nvPr/>
+        </p:nvSpPr>
+        <p:spPr>
+          <a:xfrm>
+            <a:off x="0" y="164592"/>
+            <a:ext cx="146304" cy="6693408"/>
+          </a:xfrm>
+          <a:prstGeom prst="rect">
+            <a:avLst/>
+          </a:prstGeom>
+          <a:solidFill>
+            <a:srgbClr val="2F8A28"/>
+          </a:solidFill>
+          <a:ln w="12700">
+            <a:solidFill>
+              <a:srgbClr val="2F8A28"/>
+            </a:solidFill>
+            <a:prstDash val="solid"/>
+          </a:ln>
+        </p:spPr>
+      </p:sp>
+      <p:sp>
+        <p:nvSpPr>
+          <p:cNvPr id="4" name="Text 2"/>
+          <p:cNvSpPr/>
+          <p:nvPr/>
+        </p:nvSpPr>
+        <p:spPr>
+          <a:xfrm>
+            <a:off x="502920" y="292608"/>
+            <a:ext cx="10149840" cy="256032"/>
+          </a:xfrm>
+          <a:prstGeom prst="rect">
+            <a:avLst/>
+          </a:prstGeom>
+          <a:noFill/>
+          <a:ln/>
+        </p:spPr>
+        <p:txBody>
+          <a:bodyPr wrap="square" lIns="0" tIns="0" rIns="0" bIns="0" rtlCol="0" anchor="ctr"/>
+          <a:lstStyle/>
+          <a:p>
+            <a:pPr indent="0" marL="0">
+              <a:buNone/>
+            </a:pPr>
+            <a:r>
+              <a:rPr lang="en-US" sz="900" b="1" dirty="0">
+                <a:solidFill>
+                  <a:srgbClr val="5F7181"/>
+                </a:solidFill>
+                <a:latin typeface="Aptos" pitchFamily="34" charset="0"/>
+                <a:ea typeface="Aptos" pitchFamily="34" charset="-122"/>
+                <a:cs typeface="Aptos" pitchFamily="34" charset="-120"/>
+              </a:rPr>
+              <a:t>Agentic Workflow Design and Orchestration</a:t>
+            </a:r>
+            <a:endParaRPr lang="en-US" sz="900" dirty="0"/>
+          </a:p>
+        </p:txBody>
+      </p:sp>
+      <p:sp>
+        <p:nvSpPr>
+          <p:cNvPr id="5" name="Text 3"/>
+          <p:cNvSpPr/>
+          <p:nvPr/>
+        </p:nvSpPr>
+        <p:spPr>
+          <a:xfrm>
+            <a:off x="502920" y="6537960"/>
+            <a:ext cx="7772400" cy="201168"/>
+          </a:xfrm>
+          <a:prstGeom prst="rect">
+            <a:avLst/>
+          </a:prstGeom>
+          <a:noFill/>
+          <a:ln/>
+        </p:spPr>
+        <p:txBody>
+          <a:bodyPr wrap="square" lIns="0" tIns="0" rIns="0" bIns="0" rtlCol="0" anchor="ctr"/>
+          <a:lstStyle/>
+          <a:p>
+            <a:pPr indent="0" marL="0">
+              <a:buNone/>
+            </a:pPr>
+            <a:r>
+              <a:rPr lang="en-US" sz="800" dirty="0">
+                <a:solidFill>
+                  <a:srgbClr val="5F7181"/>
+                </a:solidFill>
+                <a:latin typeface="Aptos" pitchFamily="34" charset="0"/>
+                <a:ea typeface="Aptos" pitchFamily="34" charset="-122"/>
+                <a:cs typeface="Aptos" pitchFamily="34" charset="-120"/>
+              </a:rPr>
+              <a:t>AI Playbook and Toolkit for Public Health Departments</a:t>
+            </a:r>
+            <a:endParaRPr lang="en-US" sz="800" dirty="0"/>
+          </a:p>
+        </p:txBody>
+      </p:sp>
+      <p:sp>
+        <p:nvSpPr>
+          <p:cNvPr id="6" name="Text 4"/>
+          <p:cNvSpPr/>
+          <p:nvPr/>
+        </p:nvSpPr>
+        <p:spPr>
+          <a:xfrm>
+            <a:off x="9966960" y="6537960"/>
+            <a:ext cx="1645920" cy="201168"/>
+          </a:xfrm>
+          <a:prstGeom prst="rect">
+            <a:avLst/>
+          </a:prstGeom>
+          <a:noFill/>
+          <a:ln/>
+        </p:spPr>
+        <p:txBody>
+          <a:bodyPr wrap="square" lIns="0" tIns="0" rIns="0" bIns="0" rtlCol="0" anchor="ctr"/>
+          <a:lstStyle/>
+          <a:p>
+            <a:pPr algn="r" indent="0" marL="0">
+              <a:buNone/>
+            </a:pPr>
+            <a:r>
+              <a:rPr lang="en-US" sz="800" dirty="0">
+                <a:solidFill>
+                  <a:srgbClr val="5F7181"/>
+                </a:solidFill>
+                <a:latin typeface="Aptos" pitchFamily="34" charset="0"/>
+                <a:ea typeface="Aptos" pitchFamily="34" charset="-122"/>
+                <a:cs typeface="Aptos" pitchFamily="34" charset="-120"/>
+              </a:rPr>
+              <a:t>© Paula Soper</a:t>
+            </a:r>
+            <a:endParaRPr lang="en-US" sz="800" dirty="0"/>
+          </a:p>
+        </p:txBody>
+      </p:sp>
+      <p:sp>
+        <p:nvSpPr>
+          <p:cNvPr id="7" name="Shape 5"/>
+          <p:cNvSpPr/>
+          <p:nvPr/>
+        </p:nvSpPr>
+        <p:spPr>
+          <a:xfrm>
+            <a:off x="640080" y="658368"/>
+            <a:ext cx="420624" cy="420624"/>
+          </a:xfrm>
+          <a:prstGeom prst="ellipse">
+            <a:avLst/>
+          </a:prstGeom>
+          <a:solidFill>
+            <a:srgbClr val="0068B7"/>
+          </a:solidFill>
+          <a:ln w="12700">
+            <a:solidFill>
+              <a:srgbClr val="0068B7"/>
+            </a:solidFill>
+            <a:prstDash val="solid"/>
+          </a:ln>
+        </p:spPr>
+      </p:sp>
+      <p:sp>
+        <p:nvSpPr>
+          <p:cNvPr id="8" name="Text 6"/>
+          <p:cNvSpPr/>
+          <p:nvPr/>
+        </p:nvSpPr>
+        <p:spPr>
+          <a:xfrm>
+            <a:off x="640080" y="731520"/>
+            <a:ext cx="420624" cy="164592"/>
+          </a:xfrm>
+          <a:prstGeom prst="rect">
+            <a:avLst/>
+          </a:prstGeom>
+          <a:noFill/>
+          <a:ln/>
+        </p:spPr>
+        <p:txBody>
+          <a:bodyPr wrap="square" lIns="0" tIns="0" rIns="0" bIns="0" rtlCol="0" anchor="ctr"/>
+          <a:lstStyle/>
+          <a:p>
+            <a:pPr algn="ctr" indent="0" marL="0">
+              <a:buNone/>
+            </a:pPr>
+            <a:r>
+              <a:rPr lang="en-US" sz="1100" b="1" dirty="0">
+                <a:solidFill>
+                  <a:srgbClr val="FFFFFF"/>
+                </a:solidFill>
+                <a:latin typeface="Aptos" pitchFamily="34" charset="0"/>
+                <a:ea typeface="Aptos" pitchFamily="34" charset="-122"/>
+                <a:cs typeface="Aptos" pitchFamily="34" charset="-120"/>
+              </a:rPr>
+              <a:t>12</a:t>
+            </a:r>
+            <a:endParaRPr lang="en-US" sz="1100" dirty="0"/>
+          </a:p>
+        </p:txBody>
+      </p:sp>
+      <p:sp>
+        <p:nvSpPr>
+          <p:cNvPr id="9" name="Text 7"/>
+          <p:cNvSpPr/>
+          <p:nvPr/>
+        </p:nvSpPr>
+        <p:spPr>
+          <a:xfrm>
+            <a:off x="640080" y="621792"/>
+            <a:ext cx="10881360" cy="566928"/>
+          </a:xfrm>
+          <a:prstGeom prst="rect">
+            <a:avLst/>
+          </a:prstGeom>
+          <a:noFill/>
+          <a:ln/>
+        </p:spPr>
+        <p:txBody>
+          <a:bodyPr wrap="square" lIns="0" tIns="0" rIns="0" bIns="0" rtlCol="0" anchor="ctr">
+            <a:normAutofit/>
+          </a:bodyPr>
+          <a:lstStyle/>
+          <a:p>
+            <a:pPr indent="0" marL="0">
+              <a:buNone/>
+            </a:pPr>
+            <a:r>
+              <a:rPr lang="en-US" sz="2700" b="1" dirty="0">
+                <a:solidFill>
+                  <a:srgbClr val="003A63"/>
+                </a:solidFill>
+                <a:latin typeface="Aptos Display" pitchFamily="34" charset="0"/>
+                <a:ea typeface="Aptos Display" pitchFamily="34" charset="-122"/>
+                <a:cs typeface="Aptos Display" pitchFamily="34" charset="-120"/>
+              </a:rPr>
+              <a:t>Knowledge Check</a:t>
+            </a:r>
+            <a:endParaRPr lang="en-US" sz="2700" dirty="0"/>
+          </a:p>
+        </p:txBody>
+      </p:sp>
+      <p:sp>
+        <p:nvSpPr>
+          <p:cNvPr id="10" name="Text 8"/>
+          <p:cNvSpPr/>
+          <p:nvPr/>
+        </p:nvSpPr>
+        <p:spPr>
+          <a:xfrm>
+            <a:off x="868680" y="1417320"/>
+            <a:ext cx="6675120" cy="4434840"/>
+          </a:xfrm>
+          <a:prstGeom prst="rect">
+            <a:avLst/>
+          </a:prstGeom>
+          <a:noFill/>
+          <a:ln/>
+        </p:spPr>
+        <p:txBody>
+          <a:bodyPr wrap="square" lIns="635" tIns="635" rIns="635" bIns="635" rtlCol="0" anchor="t">
+            <a:normAutofit/>
+          </a:bodyPr>
+          <a:lstStyle/>
+          <a:p>
+            <a:r>
+              <a:rPr lang="en-US" sz="1700" dirty="0">
+                <a:solidFill>
+                  <a:srgbClr val="17364A"/>
+                </a:solidFill>
+                <a:latin typeface="Aptos" pitchFamily="34" charset="0"/>
+                <a:ea typeface="Aptos" pitchFamily="34" charset="-122"/>
+                <a:cs typeface="Aptos" pitchFamily="34" charset="-120"/>
+              </a:rPr>
+              <a:t>1. What makes agentic AI different from simple drafting support?</a:t>
+            </a:r>
+            <a:endParaRPr lang="en-US" sz="1700" dirty="0"/>
+          </a:p>
+          <a:p>
+            <a:r>
+              <a:rPr lang="en-US" sz="1700" dirty="0">
+                <a:solidFill>
+                  <a:srgbClr val="17364A"/>
+                </a:solidFill>
+                <a:latin typeface="Aptos" pitchFamily="34" charset="0"/>
+                <a:ea typeface="Aptos" pitchFamily="34" charset="-122"/>
+                <a:cs typeface="Aptos" pitchFamily="34" charset="-120"/>
+              </a:rPr>
+              <a:t>2. Which action usually requires stronger oversight?</a:t>
+            </a:r>
+            <a:endParaRPr lang="en-US" sz="1700" dirty="0"/>
+          </a:p>
+          <a:p>
+            <a:r>
+              <a:rPr lang="en-US" sz="1700" dirty="0">
+                <a:solidFill>
+                  <a:srgbClr val="17364A"/>
+                </a:solidFill>
+                <a:latin typeface="Aptos" pitchFamily="34" charset="0"/>
+                <a:ea typeface="Aptos" pitchFamily="34" charset="-122"/>
+                <a:cs typeface="Aptos" pitchFamily="34" charset="-120"/>
+              </a:rPr>
+              <a:t>3. What is orchestration?</a:t>
+            </a:r>
+            <a:endParaRPr lang="en-US" sz="1700" dirty="0"/>
+          </a:p>
+          <a:p>
+            <a:r>
+              <a:rPr lang="en-US" sz="1700" dirty="0">
+                <a:solidFill>
+                  <a:srgbClr val="17364A"/>
+                </a:solidFill>
+                <a:latin typeface="Aptos" pitchFamily="34" charset="0"/>
+                <a:ea typeface="Aptos" pitchFamily="34" charset="-122"/>
+                <a:cs typeface="Aptos" pitchFamily="34" charset="-120"/>
+              </a:rPr>
+              <a:t>4. What should happen when an agent encounters an out-of-scope request?</a:t>
+            </a:r>
+            <a:endParaRPr lang="en-US" sz="1700" dirty="0"/>
+          </a:p>
+        </p:txBody>
+      </p:sp>
+      <p:sp>
+        <p:nvSpPr>
+          <p:cNvPr id="11" name="Shape 9"/>
+          <p:cNvSpPr/>
+          <p:nvPr/>
+        </p:nvSpPr>
+        <p:spPr>
+          <a:xfrm>
+            <a:off x="7909560" y="1417320"/>
+            <a:ext cx="3154680" cy="1828800"/>
+          </a:xfrm>
+          <a:prstGeom prst="roundRect">
+            <a:avLst>
+              <a:gd name="adj" fmla="val 6000"/>
+            </a:avLst>
+          </a:prstGeom>
+          <a:solidFill>
+            <a:srgbClr val="EEF8ED"/>
+          </a:solidFill>
+          <a:ln w="12700">
+            <a:solidFill>
+              <a:srgbClr val="B9D7E6"/>
+            </a:solidFill>
+            <a:prstDash val="solid"/>
+          </a:ln>
+        </p:spPr>
+      </p:sp>
+      <p:sp>
+        <p:nvSpPr>
+          <p:cNvPr id="12" name="Text 10"/>
+          <p:cNvSpPr/>
+          <p:nvPr/>
+        </p:nvSpPr>
+        <p:spPr>
+          <a:xfrm>
+            <a:off x="8074152" y="1563624"/>
+            <a:ext cx="2825496" cy="201168"/>
+          </a:xfrm>
+          <a:prstGeom prst="rect">
+            <a:avLst/>
+          </a:prstGeom>
+          <a:noFill/>
+          <a:ln/>
+        </p:spPr>
+        <p:txBody>
+          <a:bodyPr wrap="square" lIns="0" tIns="0" rIns="0" bIns="0" rtlCol="0" anchor="ctr"/>
+          <a:lstStyle/>
+          <a:p>
+            <a:pPr indent="0" marL="0">
+              <a:buNone/>
+            </a:pPr>
+            <a:r>
+              <a:rPr lang="en-US" sz="950" b="1" dirty="0">
+                <a:solidFill>
+                  <a:srgbClr val="0068B7"/>
+                </a:solidFill>
+                <a:latin typeface="Aptos" pitchFamily="34" charset="0"/>
+                <a:ea typeface="Aptos" pitchFamily="34" charset="-122"/>
+                <a:cs typeface="Aptos" pitchFamily="34" charset="-120"/>
+              </a:rPr>
+              <a:t>Key idea</a:t>
+            </a:r>
+            <a:endParaRPr lang="en-US" sz="950" dirty="0"/>
+          </a:p>
+        </p:txBody>
+      </p:sp>
+      <p:sp>
+        <p:nvSpPr>
+          <p:cNvPr id="13" name="Text 11"/>
+          <p:cNvSpPr/>
+          <p:nvPr/>
+        </p:nvSpPr>
+        <p:spPr>
+          <a:xfrm>
+            <a:off x="8074152" y="1856232"/>
+            <a:ext cx="2825496" cy="1261872"/>
+          </a:xfrm>
+          <a:prstGeom prst="rect">
+            <a:avLst/>
+          </a:prstGeom>
+          <a:noFill/>
+          <a:ln/>
+        </p:spPr>
+        <p:txBody>
+          <a:bodyPr wrap="square" lIns="0" tIns="0" rIns="0" bIns="0" rtlCol="0" anchor="t">
+            <a:normAutofit/>
+          </a:bodyPr>
+          <a:lstStyle/>
+          <a:p>
+            <a:pPr indent="0" marL="0">
+              <a:buNone/>
+            </a:pPr>
+            <a:r>
+              <a:rPr lang="en-US" sz="1250" dirty="0">
+                <a:solidFill>
+                  <a:srgbClr val="17364A"/>
+                </a:solidFill>
+                <a:latin typeface="Aptos" pitchFamily="34" charset="0"/>
+                <a:ea typeface="Aptos" pitchFamily="34" charset="-122"/>
+                <a:cs typeface="Aptos" pitchFamily="34" charset="-120"/>
+              </a:rPr>
+              <a:t>1. What makes agentic AI different from simple drafting support?</a:t>
+            </a:r>
+            <a:endParaRPr lang="en-US" sz="1250" dirty="0"/>
+          </a:p>
+        </p:txBody>
+      </p:sp>
+      <p:sp>
+        <p:nvSpPr>
+          <p:cNvPr id="14" name="Shape 12"/>
+          <p:cNvSpPr/>
+          <p:nvPr/>
+        </p:nvSpPr>
+        <p:spPr>
+          <a:xfrm>
+            <a:off x="7909560" y="3520440"/>
+            <a:ext cx="3154680" cy="1737360"/>
+          </a:xfrm>
+          <a:prstGeom prst="roundRect">
+            <a:avLst>
+              <a:gd name="adj" fmla="val 6316"/>
+            </a:avLst>
+          </a:prstGeom>
+          <a:solidFill>
+            <a:srgbClr val="EAF6F8"/>
+          </a:solidFill>
+          <a:ln w="12700">
+            <a:solidFill>
+              <a:srgbClr val="B9D7E6"/>
+            </a:solidFill>
+            <a:prstDash val="solid"/>
+          </a:ln>
+        </p:spPr>
+      </p:sp>
+      <p:sp>
+        <p:nvSpPr>
+          <p:cNvPr id="15" name="Text 13"/>
+          <p:cNvSpPr/>
+          <p:nvPr/>
+        </p:nvSpPr>
+        <p:spPr>
+          <a:xfrm>
+            <a:off x="8074152" y="3666744"/>
+            <a:ext cx="2825496" cy="201168"/>
+          </a:xfrm>
+          <a:prstGeom prst="rect">
+            <a:avLst/>
+          </a:prstGeom>
+          <a:noFill/>
+          <a:ln/>
+        </p:spPr>
+        <p:txBody>
+          <a:bodyPr wrap="square" lIns="0" tIns="0" rIns="0" bIns="0" rtlCol="0" anchor="ctr"/>
+          <a:lstStyle/>
+          <a:p>
+            <a:pPr indent="0" marL="0">
+              <a:buNone/>
+            </a:pPr>
+            <a:r>
+              <a:rPr lang="en-US" sz="950" b="1" dirty="0">
+                <a:solidFill>
+                  <a:srgbClr val="0068B7"/>
+                </a:solidFill>
+                <a:latin typeface="Aptos" pitchFamily="34" charset="0"/>
+                <a:ea typeface="Aptos" pitchFamily="34" charset="-122"/>
+                <a:cs typeface="Aptos" pitchFamily="34" charset="-120"/>
+              </a:rPr>
+              <a:t>Use this for</a:t>
+            </a:r>
+            <a:endParaRPr lang="en-US" sz="950" dirty="0"/>
+          </a:p>
+        </p:txBody>
+      </p:sp>
+      <p:sp>
+        <p:nvSpPr>
+          <p:cNvPr id="16" name="Text 14"/>
+          <p:cNvSpPr/>
+          <p:nvPr/>
+        </p:nvSpPr>
+        <p:spPr>
+          <a:xfrm>
+            <a:off x="8074152" y="3959352"/>
+            <a:ext cx="2825496" cy="1170432"/>
+          </a:xfrm>
+          <a:prstGeom prst="rect">
+            <a:avLst/>
+          </a:prstGeom>
+          <a:noFill/>
+          <a:ln/>
+        </p:spPr>
+        <p:txBody>
+          <a:bodyPr wrap="square" lIns="0" tIns="0" rIns="0" bIns="0" rtlCol="0" anchor="t">
+            <a:normAutofit/>
+          </a:bodyPr>
+          <a:lstStyle/>
+          <a:p>
+            <a:pPr indent="0" marL="0">
+              <a:buNone/>
+            </a:pPr>
+            <a:r>
+              <a:rPr lang="en-US" sz="1250" dirty="0">
+                <a:solidFill>
+                  <a:srgbClr val="17364A"/>
+                </a:solidFill>
+                <a:latin typeface="Aptos" pitchFamily="34" charset="0"/>
+                <a:ea typeface="Aptos" pitchFamily="34" charset="-122"/>
+                <a:cs typeface="Aptos" pitchFamily="34" charset="-120"/>
+              </a:rPr>
+              <a:t>Connect the concept to public health decisions, safeguards, documentation, or implementation work.</a:t>
+            </a:r>
+            <a:endParaRPr lang="en-US" sz="1250" dirty="0"/>
+          </a:p>
+        </p:txBody>
+      </p:sp>
+    </p:spTree>
+  </p:cSld>
+  <p:clrMapOvr>
+    <a:masterClrMapping/>
+  </p:clrMapOvr>
+</p:sld>
+</file>
+
+<file path=ppt/slides/slide22.xml><?xml version="1.0" encoding="utf-8"?>
+<p:sld xmlns:a="http://schemas.openxmlformats.org/drawingml/2006/main" xmlns:r="http://schemas.openxmlformats.org/officeDocument/2006/relationships" xmlns:p="http://schemas.openxmlformats.org/presentationml/2006/main">
+  <p:cSld name="Slide 22">
+    <p:bg>
+      <p:bgPr>
+        <a:solidFill>
+          <a:srgbClr val="F7FBFD"/>
+        </a:solidFill>
+      </p:bgPr>
+    </p:bg>
+    <p:spTree>
+      <p:nvGrpSpPr>
+        <p:cNvPr id="1" name=""/>
+        <p:cNvGrpSpPr/>
+        <p:nvPr/>
+      </p:nvGrpSpPr>
+      <p:grpSpPr>
+        <a:xfrm>
+          <a:off x="0" y="0"/>
+          <a:ext cx="0" cy="0"/>
+          <a:chOff x="0" y="0"/>
+          <a:chExt cx="0" cy="0"/>
+        </a:xfrm>
+      </p:grpSpPr>
+      <p:sp>
+        <p:nvSpPr>
+          <p:cNvPr id="2" name="Shape 0"/>
+          <p:cNvSpPr/>
+          <p:nvPr/>
+        </p:nvSpPr>
+        <p:spPr>
+          <a:xfrm>
+            <a:off x="0" y="0"/>
+            <a:ext cx="12191695" cy="164592"/>
+          </a:xfrm>
+          <a:prstGeom prst="rect">
+            <a:avLst/>
+          </a:prstGeom>
+          <a:solidFill>
+            <a:srgbClr val="0068B7"/>
+          </a:solidFill>
+          <a:ln w="12700">
+            <a:solidFill>
+              <a:srgbClr val="0068B7"/>
+            </a:solidFill>
+            <a:prstDash val="solid"/>
+          </a:ln>
+        </p:spPr>
+      </p:sp>
+      <p:sp>
+        <p:nvSpPr>
+          <p:cNvPr id="3" name="Shape 1"/>
+          <p:cNvSpPr/>
+          <p:nvPr/>
+        </p:nvSpPr>
+        <p:spPr>
+          <a:xfrm>
+            <a:off x="0" y="164592"/>
+            <a:ext cx="146304" cy="6693408"/>
+          </a:xfrm>
+          <a:prstGeom prst="rect">
+            <a:avLst/>
+          </a:prstGeom>
+          <a:solidFill>
+            <a:srgbClr val="2F8A28"/>
+          </a:solidFill>
+          <a:ln w="12700">
+            <a:solidFill>
+              <a:srgbClr val="2F8A28"/>
+            </a:solidFill>
+            <a:prstDash val="solid"/>
+          </a:ln>
+        </p:spPr>
+      </p:sp>
+      <p:sp>
+        <p:nvSpPr>
+          <p:cNvPr id="4" name="Text 2"/>
+          <p:cNvSpPr/>
+          <p:nvPr/>
+        </p:nvSpPr>
+        <p:spPr>
+          <a:xfrm>
+            <a:off x="502920" y="292608"/>
+            <a:ext cx="10149840" cy="256032"/>
+          </a:xfrm>
+          <a:prstGeom prst="rect">
+            <a:avLst/>
+          </a:prstGeom>
+          <a:noFill/>
+          <a:ln/>
+        </p:spPr>
+        <p:txBody>
+          <a:bodyPr wrap="square" lIns="0" tIns="0" rIns="0" bIns="0" rtlCol="0" anchor="ctr"/>
+          <a:lstStyle/>
+          <a:p>
+            <a:pPr indent="0" marL="0">
+              <a:buNone/>
+            </a:pPr>
+            <a:r>
+              <a:rPr lang="en-US" sz="900" b="1" dirty="0">
+                <a:solidFill>
+                  <a:srgbClr val="5F7181"/>
+                </a:solidFill>
+                <a:latin typeface="Aptos" pitchFamily="34" charset="0"/>
+                <a:ea typeface="Aptos" pitchFamily="34" charset="-122"/>
+                <a:cs typeface="Aptos" pitchFamily="34" charset="-120"/>
+              </a:rPr>
+              <a:t>Agentic Workflow Design and Orchestration</a:t>
+            </a:r>
+            <a:endParaRPr lang="en-US" sz="900" dirty="0"/>
+          </a:p>
+        </p:txBody>
+      </p:sp>
+      <p:sp>
+        <p:nvSpPr>
+          <p:cNvPr id="5" name="Text 3"/>
+          <p:cNvSpPr/>
+          <p:nvPr/>
+        </p:nvSpPr>
+        <p:spPr>
+          <a:xfrm>
+            <a:off x="502920" y="6537960"/>
+            <a:ext cx="7772400" cy="201168"/>
+          </a:xfrm>
+          <a:prstGeom prst="rect">
+            <a:avLst/>
+          </a:prstGeom>
+          <a:noFill/>
+          <a:ln/>
+        </p:spPr>
+        <p:txBody>
+          <a:bodyPr wrap="square" lIns="0" tIns="0" rIns="0" bIns="0" rtlCol="0" anchor="ctr"/>
+          <a:lstStyle/>
+          <a:p>
+            <a:pPr indent="0" marL="0">
+              <a:buNone/>
+            </a:pPr>
+            <a:r>
+              <a:rPr lang="en-US" sz="800" dirty="0">
+                <a:solidFill>
+                  <a:srgbClr val="5F7181"/>
+                </a:solidFill>
+                <a:latin typeface="Aptos" pitchFamily="34" charset="0"/>
+                <a:ea typeface="Aptos" pitchFamily="34" charset="-122"/>
+                <a:cs typeface="Aptos" pitchFamily="34" charset="-120"/>
+              </a:rPr>
+              <a:t>AI Playbook and Toolkit for Public Health Departments</a:t>
+            </a:r>
+            <a:endParaRPr lang="en-US" sz="800" dirty="0"/>
+          </a:p>
+        </p:txBody>
+      </p:sp>
+      <p:sp>
+        <p:nvSpPr>
+          <p:cNvPr id="6" name="Text 4"/>
+          <p:cNvSpPr/>
+          <p:nvPr/>
+        </p:nvSpPr>
+        <p:spPr>
+          <a:xfrm>
+            <a:off x="9966960" y="6537960"/>
+            <a:ext cx="1645920" cy="201168"/>
+          </a:xfrm>
+          <a:prstGeom prst="rect">
+            <a:avLst/>
+          </a:prstGeom>
+          <a:noFill/>
+          <a:ln/>
+        </p:spPr>
+        <p:txBody>
+          <a:bodyPr wrap="square" lIns="0" tIns="0" rIns="0" bIns="0" rtlCol="0" anchor="ctr"/>
+          <a:lstStyle/>
+          <a:p>
+            <a:pPr algn="r" indent="0" marL="0">
+              <a:buNone/>
+            </a:pPr>
+            <a:r>
+              <a:rPr lang="en-US" sz="800" dirty="0">
+                <a:solidFill>
+                  <a:srgbClr val="5F7181"/>
+                </a:solidFill>
+                <a:latin typeface="Aptos" pitchFamily="34" charset="0"/>
+                <a:ea typeface="Aptos" pitchFamily="34" charset="-122"/>
+                <a:cs typeface="Aptos" pitchFamily="34" charset="-120"/>
+              </a:rPr>
+              <a:t>© Paula Soper</a:t>
+            </a:r>
+            <a:endParaRPr lang="en-US" sz="800" dirty="0"/>
+          </a:p>
+        </p:txBody>
+      </p:sp>
+      <p:sp>
+        <p:nvSpPr>
+          <p:cNvPr id="7" name="Shape 5"/>
+          <p:cNvSpPr/>
+          <p:nvPr/>
+        </p:nvSpPr>
+        <p:spPr>
+          <a:xfrm>
+            <a:off x="640080" y="658368"/>
+            <a:ext cx="420624" cy="420624"/>
+          </a:xfrm>
+          <a:prstGeom prst="ellipse">
+            <a:avLst/>
+          </a:prstGeom>
+          <a:solidFill>
+            <a:srgbClr val="0068B7"/>
+          </a:solidFill>
+          <a:ln w="12700">
+            <a:solidFill>
+              <a:srgbClr val="0068B7"/>
+            </a:solidFill>
+            <a:prstDash val="solid"/>
+          </a:ln>
+        </p:spPr>
+      </p:sp>
+      <p:sp>
+        <p:nvSpPr>
+          <p:cNvPr id="8" name="Text 6"/>
+          <p:cNvSpPr/>
+          <p:nvPr/>
+        </p:nvSpPr>
+        <p:spPr>
+          <a:xfrm>
+            <a:off x="640080" y="731520"/>
+            <a:ext cx="420624" cy="164592"/>
+          </a:xfrm>
+          <a:prstGeom prst="rect">
+            <a:avLst/>
+          </a:prstGeom>
+          <a:noFill/>
+          <a:ln/>
+        </p:spPr>
+        <p:txBody>
+          <a:bodyPr wrap="square" lIns="0" tIns="0" rIns="0" bIns="0" rtlCol="0" anchor="ctr"/>
+          <a:lstStyle/>
+          <a:p>
+            <a:pPr algn="ctr" indent="0" marL="0">
+              <a:buNone/>
+            </a:pPr>
+            <a:r>
+              <a:rPr lang="en-US" sz="1100" b="1" dirty="0">
+                <a:solidFill>
+                  <a:srgbClr val="FFFFFF"/>
+                </a:solidFill>
+                <a:latin typeface="Aptos" pitchFamily="34" charset="0"/>
+                <a:ea typeface="Aptos" pitchFamily="34" charset="-122"/>
+                <a:cs typeface="Aptos" pitchFamily="34" charset="-120"/>
+              </a:rPr>
+              <a:t>13</a:t>
+            </a:r>
+            <a:endParaRPr lang="en-US" sz="1100" dirty="0"/>
+          </a:p>
+        </p:txBody>
+      </p:sp>
+      <p:sp>
+        <p:nvSpPr>
+          <p:cNvPr id="9" name="Text 7"/>
+          <p:cNvSpPr/>
+          <p:nvPr/>
+        </p:nvSpPr>
+        <p:spPr>
+          <a:xfrm>
+            <a:off x="640080" y="621792"/>
+            <a:ext cx="10881360" cy="566928"/>
+          </a:xfrm>
+          <a:prstGeom prst="rect">
+            <a:avLst/>
+          </a:prstGeom>
+          <a:noFill/>
+          <a:ln/>
+        </p:spPr>
+        <p:txBody>
+          <a:bodyPr wrap="square" lIns="0" tIns="0" rIns="0" bIns="0" rtlCol="0" anchor="ctr">
+            <a:normAutofit/>
+          </a:bodyPr>
+          <a:lstStyle/>
+          <a:p>
+            <a:pPr indent="0" marL="0">
+              <a:buNone/>
+            </a:pPr>
+            <a:r>
+              <a:rPr lang="en-US" sz="2700" b="1" dirty="0">
+                <a:solidFill>
+                  <a:srgbClr val="003A63"/>
+                </a:solidFill>
+                <a:latin typeface="Aptos Display" pitchFamily="34" charset="0"/>
+                <a:ea typeface="Aptos Display" pitchFamily="34" charset="-122"/>
+                <a:cs typeface="Aptos Display" pitchFamily="34" charset="-120"/>
+              </a:rPr>
+              <a:t>References and Resources</a:t>
+            </a:r>
+            <a:endParaRPr lang="en-US" sz="2700" dirty="0"/>
+          </a:p>
+        </p:txBody>
+      </p:sp>
+      <p:sp>
+        <p:nvSpPr>
+          <p:cNvPr id="10" name="Text 8"/>
+          <p:cNvSpPr/>
+          <p:nvPr/>
+        </p:nvSpPr>
+        <p:spPr>
+          <a:xfrm>
+            <a:off x="868680" y="1417320"/>
+            <a:ext cx="6675120" cy="4434840"/>
+          </a:xfrm>
+          <a:prstGeom prst="rect">
+            <a:avLst/>
+          </a:prstGeom>
+          <a:noFill/>
+          <a:ln/>
+        </p:spPr>
+        <p:txBody>
+          <a:bodyPr wrap="square" lIns="635" tIns="635" rIns="635" bIns="635" rtlCol="0" anchor="t">
+            <a:normAutofit/>
+          </a:bodyPr>
+          <a:lstStyle/>
+          <a:p>
+            <a:r>
+              <a:rPr lang="en-US" sz="1700" dirty="0">
+                <a:solidFill>
+                  <a:srgbClr val="17364A"/>
+                </a:solidFill>
+                <a:latin typeface="Aptos" pitchFamily="34" charset="0"/>
+                <a:ea typeface="Aptos" pitchFamily="34" charset="-122"/>
+                <a:cs typeface="Aptos" pitchFamily="34" charset="-120"/>
+              </a:rPr>
               <a:t>OWASP Top 10 for Large Language Model Applications: https://owasp.org/www-project-top-10-for-large-language-model-applications/</a:t>
             </a:r>
-            <a:endParaRPr lang="en-US" sz="1450" dirty="0"/>
-          </a:p>
-          <a:p>
-            <a:r>
-              <a:rPr lang="en-US" sz="1450" dirty="0">
+            <a:endParaRPr lang="en-US" sz="1700" dirty="0"/>
+          </a:p>
+          <a:p>
+            <a:r>
+              <a:rPr lang="en-US" sz="1700" dirty="0">
                 <a:solidFill>
                   <a:srgbClr val="17364A"/>
                 </a:solidFill>
@@ -6046,13 +10711,13 @@
                 <a:ea typeface="Aptos" pitchFamily="34" charset="-122"/>
                 <a:cs typeface="Aptos" pitchFamily="34" charset="-120"/>
               </a:rPr>
-              <a:t>NIST AI RMF Generative AI Profile: https://www.nist.gov/publications/artificial-intelligence-risk-management-framework-generative-artificial-intelligence</a:t>
-            </a:r>
-            <a:endParaRPr lang="en-US" sz="1450" dirty="0"/>
-          </a:p>
-          <a:p>
-            <a:r>
-              <a:rPr lang="en-US" sz="1450" dirty="0">
+              <a:t>NIST AI RMF Generative AI Profile:.</a:t>
+            </a:r>
+            <a:endParaRPr lang="en-US" sz="1700" dirty="0"/>
+          </a:p>
+          <a:p>
+            <a:r>
+              <a:rPr lang="en-US" sz="1700" dirty="0">
                 <a:solidFill>
                   <a:srgbClr val="17364A"/>
                 </a:solidFill>
@@ -6062,11 +10727,11 @@
               </a:rPr>
               <a:t>NIST Artificial Intelligence Risk Management Framework: https://www.nist.gov/itl/ai-risk-management-framework</a:t>
             </a:r>
-            <a:endParaRPr lang="en-US" sz="1450" dirty="0"/>
-          </a:p>
-          <a:p>
-            <a:r>
-              <a:rPr lang="en-US" sz="1450" dirty="0">
+            <a:endParaRPr lang="en-US" sz="1700" dirty="0"/>
+          </a:p>
+          <a:p>
+            <a:r>
+              <a:rPr lang="en-US" sz="1700" dirty="0">
                 <a:solidFill>
                   <a:srgbClr val="17364A"/>
                 </a:solidFill>
@@ -6076,7 +10741,221 @@
               </a:rPr>
               <a:t>NIST Privacy Framework: https://www.nist.gov/privacy-framework</a:t>
             </a:r>
-            <a:endParaRPr lang="en-US" sz="1450" dirty="0"/>
+            <a:endParaRPr lang="en-US" sz="1700" dirty="0"/>
+          </a:p>
+        </p:txBody>
+      </p:sp>
+      <p:sp>
+        <p:nvSpPr>
+          <p:cNvPr id="11" name="Shape 9"/>
+          <p:cNvSpPr/>
+          <p:nvPr/>
+        </p:nvSpPr>
+        <p:spPr>
+          <a:xfrm>
+            <a:off x="7909560" y="1417320"/>
+            <a:ext cx="3154680" cy="1828800"/>
+          </a:xfrm>
+          <a:prstGeom prst="roundRect">
+            <a:avLst>
+              <a:gd name="adj" fmla="val 6000"/>
+            </a:avLst>
+          </a:prstGeom>
+          <a:solidFill>
+            <a:srgbClr val="EEF8ED"/>
+          </a:solidFill>
+          <a:ln w="12700">
+            <a:solidFill>
+              <a:srgbClr val="B9D7E6"/>
+            </a:solidFill>
+            <a:prstDash val="solid"/>
+          </a:ln>
+        </p:spPr>
+      </p:sp>
+      <p:sp>
+        <p:nvSpPr>
+          <p:cNvPr id="12" name="Text 10"/>
+          <p:cNvSpPr/>
+          <p:nvPr/>
+        </p:nvSpPr>
+        <p:spPr>
+          <a:xfrm>
+            <a:off x="8074152" y="1563624"/>
+            <a:ext cx="2825496" cy="201168"/>
+          </a:xfrm>
+          <a:prstGeom prst="rect">
+            <a:avLst/>
+          </a:prstGeom>
+          <a:noFill/>
+          <a:ln/>
+        </p:spPr>
+        <p:txBody>
+          <a:bodyPr wrap="square" lIns="0" tIns="0" rIns="0" bIns="0" rtlCol="0" anchor="ctr"/>
+          <a:lstStyle/>
+          <a:p>
+            <a:pPr indent="0" marL="0">
+              <a:buNone/>
+            </a:pPr>
+            <a:r>
+              <a:rPr lang="en-US" sz="950" b="1" dirty="0">
+                <a:solidFill>
+                  <a:srgbClr val="0068B7"/>
+                </a:solidFill>
+                <a:latin typeface="Aptos" pitchFamily="34" charset="0"/>
+                <a:ea typeface="Aptos" pitchFamily="34" charset="-122"/>
+                <a:cs typeface="Aptos" pitchFamily="34" charset="-120"/>
+              </a:rPr>
+              <a:t>Key idea</a:t>
+            </a:r>
+            <a:endParaRPr lang="en-US" sz="950" dirty="0"/>
+          </a:p>
+        </p:txBody>
+      </p:sp>
+      <p:sp>
+        <p:nvSpPr>
+          <p:cNvPr id="13" name="Text 11"/>
+          <p:cNvSpPr/>
+          <p:nvPr/>
+        </p:nvSpPr>
+        <p:spPr>
+          <a:xfrm>
+            <a:off x="8074152" y="1856232"/>
+            <a:ext cx="2825496" cy="1261872"/>
+          </a:xfrm>
+          <a:prstGeom prst="rect">
+            <a:avLst/>
+          </a:prstGeom>
+          <a:noFill/>
+          <a:ln/>
+        </p:spPr>
+        <p:txBody>
+          <a:bodyPr wrap="square" lIns="0" tIns="0" rIns="0" bIns="0" rtlCol="0" anchor="t">
+            <a:normAutofit/>
+          </a:bodyPr>
+          <a:lstStyle/>
+          <a:p>
+            <a:pPr indent="0" marL="0">
+              <a:buNone/>
+            </a:pPr>
+            <a:r>
+              <a:rPr lang="en-US" sz="1250" dirty="0">
+                <a:solidFill>
+                  <a:srgbClr val="17364A"/>
+                </a:solidFill>
+                <a:latin typeface="Aptos" pitchFamily="34" charset="0"/>
+                <a:ea typeface="Aptos" pitchFamily="34" charset="-122"/>
+                <a:cs typeface="Aptos" pitchFamily="34" charset="-120"/>
+              </a:rPr>
+              <a:t>OWASP Top 10 for Large Language Model Applications: https://owasp.org/www-project-top-10-for-large-language-model-applications/</a:t>
+            </a:r>
+            <a:endParaRPr lang="en-US" sz="1250" dirty="0"/>
+          </a:p>
+        </p:txBody>
+      </p:sp>
+      <p:sp>
+        <p:nvSpPr>
+          <p:cNvPr id="14" name="Shape 12"/>
+          <p:cNvSpPr/>
+          <p:nvPr/>
+        </p:nvSpPr>
+        <p:spPr>
+          <a:xfrm>
+            <a:off x="7909560" y="3520440"/>
+            <a:ext cx="3154680" cy="1737360"/>
+          </a:xfrm>
+          <a:prstGeom prst="roundRect">
+            <a:avLst>
+              <a:gd name="adj" fmla="val 6316"/>
+            </a:avLst>
+          </a:prstGeom>
+          <a:solidFill>
+            <a:srgbClr val="EAF6F8"/>
+          </a:solidFill>
+          <a:ln w="12700">
+            <a:solidFill>
+              <a:srgbClr val="B9D7E6"/>
+            </a:solidFill>
+            <a:prstDash val="solid"/>
+          </a:ln>
+        </p:spPr>
+      </p:sp>
+      <p:sp>
+        <p:nvSpPr>
+          <p:cNvPr id="15" name="Text 13"/>
+          <p:cNvSpPr/>
+          <p:nvPr/>
+        </p:nvSpPr>
+        <p:spPr>
+          <a:xfrm>
+            <a:off x="8074152" y="3666744"/>
+            <a:ext cx="2825496" cy="201168"/>
+          </a:xfrm>
+          <a:prstGeom prst="rect">
+            <a:avLst/>
+          </a:prstGeom>
+          <a:noFill/>
+          <a:ln/>
+        </p:spPr>
+        <p:txBody>
+          <a:bodyPr wrap="square" lIns="0" tIns="0" rIns="0" bIns="0" rtlCol="0" anchor="ctr"/>
+          <a:lstStyle/>
+          <a:p>
+            <a:pPr indent="0" marL="0">
+              <a:buNone/>
+            </a:pPr>
+            <a:r>
+              <a:rPr lang="en-US" sz="950" b="1" dirty="0">
+                <a:solidFill>
+                  <a:srgbClr val="0068B7"/>
+                </a:solidFill>
+                <a:latin typeface="Aptos" pitchFamily="34" charset="0"/>
+                <a:ea typeface="Aptos" pitchFamily="34" charset="-122"/>
+                <a:cs typeface="Aptos" pitchFamily="34" charset="-120"/>
+              </a:rPr>
+              <a:t>Use this for</a:t>
+            </a:r>
+            <a:endParaRPr lang="en-US" sz="950" dirty="0"/>
+          </a:p>
+        </p:txBody>
+      </p:sp>
+      <p:sp>
+        <p:nvSpPr>
+          <p:cNvPr id="16" name="Text 14"/>
+          <p:cNvSpPr/>
+          <p:nvPr/>
+        </p:nvSpPr>
+        <p:spPr>
+          <a:xfrm>
+            <a:off x="8074152" y="3959352"/>
+            <a:ext cx="2825496" cy="1170432"/>
+          </a:xfrm>
+          <a:prstGeom prst="rect">
+            <a:avLst/>
+          </a:prstGeom>
+          <a:noFill/>
+          <a:ln/>
+        </p:spPr>
+        <p:txBody>
+          <a:bodyPr wrap="square" lIns="0" tIns="0" rIns="0" bIns="0" rtlCol="0" anchor="t">
+            <a:normAutofit/>
+          </a:bodyPr>
+          <a:lstStyle/>
+          <a:p>
+            <a:pPr indent="0" marL="0">
+              <a:buNone/>
+            </a:pPr>
+            <a:r>
+              <a:rPr lang="en-US" sz="1250" dirty="0">
+                <a:solidFill>
+                  <a:srgbClr val="17364A"/>
+                </a:solidFill>
+                <a:latin typeface="Aptos" pitchFamily="34" charset="0"/>
+                <a:ea typeface="Aptos" pitchFamily="34" charset="-122"/>
+                <a:cs typeface="Aptos" pitchFamily="34" charset="-120"/>
+              </a:rPr>
+              <a:t>Connect the concept to public health decisions, safeguards, documentation, or implementation work.</a:t>
+            </a:r>
+            <a:endParaRPr lang="en-US" sz="1250" dirty="0"/>
           </a:p>
         </p:txBody>
       </p:sp>
@@ -6139,7 +11018,32 @@
       </p:sp>
       <p:sp>
         <p:nvSpPr>
-          <p:cNvPr id="3" name="Text 1"/>
+          <p:cNvPr id="3" name="Shape 1"/>
+          <p:cNvSpPr/>
+          <p:nvPr/>
+        </p:nvSpPr>
+        <p:spPr>
+          <a:xfrm>
+            <a:off x="0" y="164592"/>
+            <a:ext cx="146304" cy="6693408"/>
+          </a:xfrm>
+          <a:prstGeom prst="rect">
+            <a:avLst/>
+          </a:prstGeom>
+          <a:solidFill>
+            <a:srgbClr val="2F8A28"/>
+          </a:solidFill>
+          <a:ln w="12700">
+            <a:solidFill>
+              <a:srgbClr val="2F8A28"/>
+            </a:solidFill>
+            <a:prstDash val="solid"/>
+          </a:ln>
+        </p:spPr>
+      </p:sp>
+      <p:sp>
+        <p:nvSpPr>
+          <p:cNvPr id="4" name="Text 2"/>
           <p:cNvSpPr/>
           <p:nvPr/>
         </p:nvSpPr>
@@ -6178,7 +11082,7 @@
       </p:sp>
       <p:sp>
         <p:nvSpPr>
-          <p:cNvPr id="4" name="Text 2"/>
+          <p:cNvPr id="5" name="Text 3"/>
           <p:cNvSpPr/>
           <p:nvPr/>
         </p:nvSpPr>
@@ -6217,7 +11121,7 @@
       </p:sp>
       <p:sp>
         <p:nvSpPr>
-          <p:cNvPr id="5" name="Text 3"/>
+          <p:cNvPr id="6" name="Text 4"/>
           <p:cNvSpPr/>
           <p:nvPr/>
         </p:nvSpPr>
@@ -6256,7 +11160,7 @@
       </p:sp>
       <p:sp>
         <p:nvSpPr>
-          <p:cNvPr id="6" name="Text 4"/>
+          <p:cNvPr id="7" name="Text 5"/>
           <p:cNvSpPr/>
           <p:nvPr/>
         </p:nvSpPr>
@@ -6289,7 +11193,7 @@
                 <a:ea typeface="Aptos Display" pitchFamily="34" charset="-122"/>
                 <a:cs typeface="Aptos Display" pitchFamily="34" charset="-120"/>
               </a:rPr>
-              <a:t>Learning Objectives</a:t>
+              <a:t>How this module connects to the playbook</a:t>
             </a:r>
             <a:endParaRPr lang="en-US" sz="2700" dirty="0"/>
           </a:p>
@@ -6297,14 +11201,14 @@
       </p:sp>
       <p:sp>
         <p:nvSpPr>
-          <p:cNvPr id="7" name="Text 5"/>
-          <p:cNvSpPr/>
-          <p:nvPr/>
-        </p:nvSpPr>
-        <p:spPr>
-          <a:xfrm>
-            <a:off x="822960" y="1325880"/>
-            <a:ext cx="10378440" cy="4800600"/>
+          <p:cNvPr id="8" name="Text 6"/>
+          <p:cNvSpPr/>
+          <p:nvPr/>
+        </p:nvSpPr>
+        <p:spPr>
+          <a:xfrm>
+            <a:off x="868680" y="1417320"/>
+            <a:ext cx="6903720" cy="4480560"/>
           </a:xfrm>
           <a:prstGeom prst="rect">
             <a:avLst/>
@@ -6319,7 +11223,7 @@
           <a:lstStyle/>
           <a:p>
             <a:r>
-              <a:rPr lang="en-US" sz="1450" dirty="0">
+              <a:rPr lang="en-US" sz="1540" dirty="0">
                 <a:solidFill>
                   <a:srgbClr val="17364A"/>
                 </a:solidFill>
@@ -6327,13 +11231,13 @@
                 <a:ea typeface="Aptos" pitchFamily="34" charset="-122"/>
                 <a:cs typeface="Aptos" pitchFamily="34" charset="-120"/>
               </a:rPr>
-              <a:t>Define agentic AI and orchestration in public health terms.</a:t>
-            </a:r>
-            <a:endParaRPr lang="en-US" sz="1450" dirty="0"/>
-          </a:p>
-          <a:p>
-            <a:r>
-              <a:rPr lang="en-US" sz="1450" dirty="0">
+              <a:t>Play 11: Build and Deploy AI Solutions - This lesson informs Play 11 by helping learners connect the lesson topic to build and deploy.</a:t>
+            </a:r>
+            <a:endParaRPr lang="en-US" sz="1540" dirty="0"/>
+          </a:p>
+          <a:p>
+            <a:r>
+              <a:rPr lang="en-US" sz="1540" dirty="0">
                 <a:solidFill>
                   <a:srgbClr val="17364A"/>
                 </a:solidFill>
@@ -6341,13 +11245,13 @@
                 <a:ea typeface="Aptos" pitchFamily="34" charset="-122"/>
                 <a:cs typeface="Aptos" pitchFamily="34" charset="-120"/>
               </a:rPr>
-              <a:t>Distinguish advisory outputs from tool-using or action-taking AI workflows.</a:t>
-            </a:r>
-            <a:endParaRPr lang="en-US" sz="1450" dirty="0"/>
-          </a:p>
-          <a:p>
-            <a:r>
-              <a:rPr lang="en-US" sz="1450" dirty="0">
+              <a:t>Play 3: Establish AI Governance - This lesson informs Play 3 by helping learners connect the lesson topic to establish ai governance.</a:t>
+            </a:r>
+            <a:endParaRPr lang="en-US" sz="1540" dirty="0"/>
+          </a:p>
+          <a:p>
+            <a:r>
+              <a:rPr lang="en-US" sz="1540" dirty="0">
                 <a:solidFill>
                   <a:srgbClr val="17364A"/>
                 </a:solidFill>
@@ -6355,13 +11259,13 @@
                 <a:ea typeface="Aptos" pitchFamily="34" charset="-122"/>
                 <a:cs typeface="Aptos" pitchFamily="34" charset="-120"/>
               </a:rPr>
-              <a:t>Identify the components of an agentic workflow, including goals, tools, permissions, memory, planning, human approval, logs, and rollback.</a:t>
-            </a:r>
-            <a:endParaRPr lang="en-US" sz="1450" dirty="0"/>
-          </a:p>
-          <a:p>
-            <a:r>
-              <a:rPr lang="en-US" sz="1450" dirty="0">
+              <a:t>Play 12: Execute Governance and Oversight - This lesson informs Play 12 by helping learners connect the lesson topic to execute.</a:t>
+            </a:r>
+            <a:endParaRPr lang="en-US" sz="1540" dirty="0"/>
+          </a:p>
+          <a:p>
+            <a:r>
+              <a:rPr lang="en-US" sz="1540" dirty="0">
                 <a:solidFill>
                   <a:srgbClr val="17364A"/>
                 </a:solidFill>
@@ -6369,13 +11273,106 @@
                 <a:ea typeface="Aptos" pitchFamily="34" charset="-122"/>
                 <a:cs typeface="Aptos" pitchFamily="34" charset="-120"/>
               </a:rPr>
-              <a:t>Assess risks from excessive agency, unauthorized actions, error propagation, prompt injection, and unclear accountability.</a:t>
-            </a:r>
-            <a:endParaRPr lang="en-US" sz="1450" dirty="0"/>
-          </a:p>
-          <a:p>
-            <a:r>
-              <a:rPr lang="en-US" sz="1450" dirty="0">
+              <a:t>Play 4: Engage Stakeholders - This lesson informs Play 4 by helping learners connect the lesson topic to engage stakeholders work in.</a:t>
+            </a:r>
+            <a:endParaRPr lang="en-US" sz="1540" dirty="0"/>
+          </a:p>
+        </p:txBody>
+      </p:sp>
+      <p:sp>
+        <p:nvSpPr>
+          <p:cNvPr id="9" name="Shape 7"/>
+          <p:cNvSpPr/>
+          <p:nvPr/>
+        </p:nvSpPr>
+        <p:spPr>
+          <a:xfrm>
+            <a:off x="8046720" y="1417320"/>
+            <a:ext cx="3063240" cy="2103120"/>
+          </a:xfrm>
+          <a:prstGeom prst="roundRect">
+            <a:avLst>
+              <a:gd name="adj" fmla="val 5217"/>
+            </a:avLst>
+          </a:prstGeom>
+          <a:solidFill>
+            <a:srgbClr val="EEF8ED"/>
+          </a:solidFill>
+          <a:ln w="12700">
+            <a:solidFill>
+              <a:srgbClr val="B9D7E6"/>
+            </a:solidFill>
+            <a:prstDash val="solid"/>
+          </a:ln>
+        </p:spPr>
+      </p:sp>
+      <p:sp>
+        <p:nvSpPr>
+          <p:cNvPr id="10" name="Text 8"/>
+          <p:cNvSpPr/>
+          <p:nvPr/>
+        </p:nvSpPr>
+        <p:spPr>
+          <a:xfrm>
+            <a:off x="8211312" y="1563624"/>
+            <a:ext cx="2734056" cy="201168"/>
+          </a:xfrm>
+          <a:prstGeom prst="rect">
+            <a:avLst/>
+          </a:prstGeom>
+          <a:noFill/>
+          <a:ln/>
+        </p:spPr>
+        <p:txBody>
+          <a:bodyPr wrap="square" lIns="0" tIns="0" rIns="0" bIns="0" rtlCol="0" anchor="ctr"/>
+          <a:lstStyle/>
+          <a:p>
+            <a:pPr indent="0" marL="0">
+              <a:buNone/>
+            </a:pPr>
+            <a:r>
+              <a:rPr lang="en-US" sz="950" b="1" dirty="0">
+                <a:solidFill>
+                  <a:srgbClr val="0068B7"/>
+                </a:solidFill>
+                <a:latin typeface="Aptos" pitchFamily="34" charset="0"/>
+                <a:ea typeface="Aptos" pitchFamily="34" charset="-122"/>
+                <a:cs typeface="Aptos" pitchFamily="34" charset="-120"/>
+              </a:rPr>
+              <a:t>Apply the lesson</a:t>
+            </a:r>
+            <a:endParaRPr lang="en-US" sz="950" dirty="0"/>
+          </a:p>
+        </p:txBody>
+      </p:sp>
+      <p:sp>
+        <p:nvSpPr>
+          <p:cNvPr id="11" name="Text 9"/>
+          <p:cNvSpPr/>
+          <p:nvPr/>
+        </p:nvSpPr>
+        <p:spPr>
+          <a:xfrm>
+            <a:off x="8211312" y="1856232"/>
+            <a:ext cx="2734056" cy="1536192"/>
+          </a:xfrm>
+          <a:prstGeom prst="rect">
+            <a:avLst/>
+          </a:prstGeom>
+          <a:noFill/>
+          <a:ln/>
+        </p:spPr>
+        <p:txBody>
+          <a:bodyPr wrap="square" lIns="0" tIns="0" rIns="0" bIns="0" rtlCol="0" anchor="t">
+            <a:normAutofit/>
+          </a:bodyPr>
+          <a:lstStyle/>
+          <a:p>
+            <a:pPr indent="0" marL="0">
+              <a:buNone/>
+            </a:pPr>
+            <a:r>
+              <a:rPr lang="en-US" sz="1250" dirty="0">
                 <a:solidFill>
                   <a:srgbClr val="17364A"/>
                 </a:solidFill>
@@ -6383,9 +11380,116 @@
                 <a:ea typeface="Aptos" pitchFamily="34" charset="-122"/>
                 <a:cs typeface="Aptos" pitchFamily="34" charset="-120"/>
               </a:rPr>
-              <a:t>Design human-in-the-loop and human-on-the-loop controls for public health workflows.</a:t>
-            </a:r>
-            <a:endParaRPr lang="en-US" sz="1450" dirty="0"/>
+              <a:t>Use the related plays to identify decisions, participants, timing, approvals, and documentation needed for responsible implementation.</a:t>
+            </a:r>
+            <a:endParaRPr lang="en-US" sz="1250" dirty="0"/>
+          </a:p>
+        </p:txBody>
+      </p:sp>
+      <p:sp>
+        <p:nvSpPr>
+          <p:cNvPr id="12" name="Shape 10"/>
+          <p:cNvSpPr/>
+          <p:nvPr/>
+        </p:nvSpPr>
+        <p:spPr>
+          <a:xfrm>
+            <a:off x="8046720" y="3794760"/>
+            <a:ext cx="3063240" cy="1508760"/>
+          </a:xfrm>
+          <a:prstGeom prst="roundRect">
+            <a:avLst>
+              <a:gd name="adj" fmla="val 7273"/>
+            </a:avLst>
+          </a:prstGeom>
+          <a:solidFill>
+            <a:srgbClr val="FFF4D9"/>
+          </a:solidFill>
+          <a:ln w="12700">
+            <a:solidFill>
+              <a:srgbClr val="B9D7E6"/>
+            </a:solidFill>
+            <a:prstDash val="solid"/>
+          </a:ln>
+        </p:spPr>
+      </p:sp>
+      <p:sp>
+        <p:nvSpPr>
+          <p:cNvPr id="13" name="Text 11"/>
+          <p:cNvSpPr/>
+          <p:nvPr/>
+        </p:nvSpPr>
+        <p:spPr>
+          <a:xfrm>
+            <a:off x="8211312" y="3941064"/>
+            <a:ext cx="2734056" cy="201168"/>
+          </a:xfrm>
+          <a:prstGeom prst="rect">
+            <a:avLst/>
+          </a:prstGeom>
+          <a:noFill/>
+          <a:ln/>
+        </p:spPr>
+        <p:txBody>
+          <a:bodyPr wrap="square" lIns="0" tIns="0" rIns="0" bIns="0" rtlCol="0" anchor="ctr"/>
+          <a:lstStyle/>
+          <a:p>
+            <a:pPr indent="0" marL="0">
+              <a:buNone/>
+            </a:pPr>
+            <a:r>
+              <a:rPr lang="en-US" sz="950" b="1" dirty="0">
+                <a:solidFill>
+                  <a:srgbClr val="0068B7"/>
+                </a:solidFill>
+                <a:latin typeface="Aptos" pitchFamily="34" charset="0"/>
+                <a:ea typeface="Aptos" pitchFamily="34" charset="-122"/>
+                <a:cs typeface="Aptos" pitchFamily="34" charset="-120"/>
+              </a:rPr>
+              <a:t>Keep in mind</a:t>
+            </a:r>
+            <a:endParaRPr lang="en-US" sz="950" dirty="0"/>
+          </a:p>
+        </p:txBody>
+      </p:sp>
+      <p:sp>
+        <p:nvSpPr>
+          <p:cNvPr id="14" name="Text 12"/>
+          <p:cNvSpPr/>
+          <p:nvPr/>
+        </p:nvSpPr>
+        <p:spPr>
+          <a:xfrm>
+            <a:off x="8211312" y="4233672"/>
+            <a:ext cx="2734056" cy="941832"/>
+          </a:xfrm>
+          <a:prstGeom prst="rect">
+            <a:avLst/>
+          </a:prstGeom>
+          <a:noFill/>
+          <a:ln/>
+        </p:spPr>
+        <p:txBody>
+          <a:bodyPr wrap="square" lIns="0" tIns="0" rIns="0" bIns="0" rtlCol="0" anchor="t">
+            <a:normAutofit/>
+          </a:bodyPr>
+          <a:lstStyle/>
+          <a:p>
+            <a:pPr indent="0" marL="0">
+              <a:buNone/>
+            </a:pPr>
+            <a:r>
+              <a:rPr lang="en-US" sz="1250" dirty="0">
+                <a:solidFill>
+                  <a:srgbClr val="17364A"/>
+                </a:solidFill>
+                <a:latin typeface="Aptos" pitchFamily="34" charset="0"/>
+                <a:ea typeface="Aptos" pitchFamily="34" charset="-122"/>
+                <a:cs typeface="Aptos" pitchFamily="34" charset="-120"/>
+              </a:rPr>
+              <a:t>The playbook connection helps turn training into agency work, not just individual knowledge.</a:t>
+            </a:r>
+            <a:endParaRPr lang="en-US" sz="1250" dirty="0"/>
           </a:p>
         </p:txBody>
       </p:sp>
@@ -6448,7 +11552,32 @@
       </p:sp>
       <p:sp>
         <p:nvSpPr>
-          <p:cNvPr id="3" name="Text 1"/>
+          <p:cNvPr id="3" name="Shape 1"/>
+          <p:cNvSpPr/>
+          <p:nvPr/>
+        </p:nvSpPr>
+        <p:spPr>
+          <a:xfrm>
+            <a:off x="0" y="164592"/>
+            <a:ext cx="146304" cy="6693408"/>
+          </a:xfrm>
+          <a:prstGeom prst="rect">
+            <a:avLst/>
+          </a:prstGeom>
+          <a:solidFill>
+            <a:srgbClr val="2F8A28"/>
+          </a:solidFill>
+          <a:ln w="12700">
+            <a:solidFill>
+              <a:srgbClr val="2F8A28"/>
+            </a:solidFill>
+            <a:prstDash val="solid"/>
+          </a:ln>
+        </p:spPr>
+      </p:sp>
+      <p:sp>
+        <p:nvSpPr>
+          <p:cNvPr id="4" name="Text 2"/>
           <p:cNvSpPr/>
           <p:nvPr/>
         </p:nvSpPr>
@@ -6487,7 +11616,7 @@
       </p:sp>
       <p:sp>
         <p:nvSpPr>
-          <p:cNvPr id="4" name="Text 2"/>
+          <p:cNvPr id="5" name="Text 3"/>
           <p:cNvSpPr/>
           <p:nvPr/>
         </p:nvSpPr>
@@ -6526,7 +11655,7 @@
       </p:sp>
       <p:sp>
         <p:nvSpPr>
-          <p:cNvPr id="5" name="Text 3"/>
+          <p:cNvPr id="6" name="Text 4"/>
           <p:cNvSpPr/>
           <p:nvPr/>
         </p:nvSpPr>
@@ -6565,7 +11694,7 @@
       </p:sp>
       <p:sp>
         <p:nvSpPr>
-          <p:cNvPr id="6" name="Text 4"/>
+          <p:cNvPr id="7" name="Text 5"/>
           <p:cNvSpPr/>
           <p:nvPr/>
         </p:nvSpPr>
@@ -6598,7 +11727,7 @@
                 <a:ea typeface="Aptos Display" pitchFamily="34" charset="-122"/>
                 <a:cs typeface="Aptos Display" pitchFamily="34" charset="-120"/>
               </a:rPr>
-              <a:t>Learning Objectives Continued</a:t>
+              <a:t>Related toolkit resources</a:t>
             </a:r>
             <a:endParaRPr lang="en-US" sz="2700" dirty="0"/>
           </a:p>
@@ -6606,14 +11735,14 @@
       </p:sp>
       <p:sp>
         <p:nvSpPr>
-          <p:cNvPr id="7" name="Text 5"/>
-          <p:cNvSpPr/>
-          <p:nvPr/>
-        </p:nvSpPr>
-        <p:spPr>
-          <a:xfrm>
-            <a:off x="822960" y="1325880"/>
-            <a:ext cx="10378440" cy="4800600"/>
+          <p:cNvPr id="8" name="Text 6"/>
+          <p:cNvSpPr/>
+          <p:nvPr/>
+        </p:nvSpPr>
+        <p:spPr>
+          <a:xfrm>
+            <a:off x="868680" y="1417320"/>
+            <a:ext cx="6903720" cy="4480560"/>
           </a:xfrm>
           <a:prstGeom prst="rect">
             <a:avLst/>
@@ -6628,7 +11757,7 @@
           <a:lstStyle/>
           <a:p>
             <a:r>
-              <a:rPr lang="en-US" sz="1450" dirty="0">
+              <a:rPr lang="en-US" sz="1460" dirty="0">
                 <a:solidFill>
                   <a:srgbClr val="17364A"/>
                 </a:solidFill>
@@ -6636,9 +11765,279 @@
                 <a:ea typeface="Aptos" pitchFamily="34" charset="-122"/>
                 <a:cs typeface="Aptos" pitchFamily="34" charset="-120"/>
               </a:rPr>
-              <a:t>Produce an agentic workflow control plan.</a:t>
-            </a:r>
-            <a:endParaRPr lang="en-US" sz="1450" dirty="0"/>
+              <a:t>Tool 16: Incident Response Checklist (Checklist) - Use Incident Response Checklist to translate this lesson into a documented public.</a:t>
+            </a:r>
+            <a:endParaRPr lang="en-US" sz="1460" dirty="0"/>
+          </a:p>
+          <a:p>
+            <a:r>
+              <a:rPr lang="en-US" sz="1460" dirty="0">
+                <a:solidFill>
+                  <a:srgbClr val="17364A"/>
+                </a:solidFill>
+                <a:latin typeface="Aptos" pitchFamily="34" charset="0"/>
+                <a:ea typeface="Aptos" pitchFamily="34" charset="-122"/>
+                <a:cs typeface="Aptos" pitchFamily="34" charset="-120"/>
+              </a:rPr>
+              <a:t>Tool 17: Compliance Audit Checklist (Checklist) - Use Compliance Audit Checklist to translate this lesson into a documented public.</a:t>
+            </a:r>
+            <a:endParaRPr lang="en-US" sz="1460" dirty="0"/>
+          </a:p>
+          <a:p>
+            <a:r>
+              <a:rPr lang="en-US" sz="1460" dirty="0">
+                <a:solidFill>
+                  <a:srgbClr val="17364A"/>
+                </a:solidFill>
+                <a:latin typeface="Aptos" pitchFamily="34" charset="0"/>
+                <a:ea typeface="Aptos" pitchFamily="34" charset="-122"/>
+                <a:cs typeface="Aptos" pitchFamily="34" charset="-120"/>
+              </a:rPr>
+              <a:t>Tool 18: Policy Update &amp; Version Control Log (Log) - Use this tool to complete or strengthen the practical exercise for the module.</a:t>
+            </a:r>
+            <a:endParaRPr lang="en-US" sz="1460" dirty="0"/>
+          </a:p>
+          <a:p>
+            <a:r>
+              <a:rPr lang="en-US" sz="1460" dirty="0">
+                <a:solidFill>
+                  <a:srgbClr val="17364A"/>
+                </a:solidFill>
+                <a:latin typeface="Aptos" pitchFamily="34" charset="0"/>
+                <a:ea typeface="Aptos" pitchFamily="34" charset="-122"/>
+                <a:cs typeface="Aptos" pitchFamily="34" charset="-120"/>
+              </a:rPr>
+              <a:t>Tool 19: Plain-Language AI Public Notice Template (Template) - Use Plain-Language AI Public Notice Template to translate this lesson.</a:t>
+            </a:r>
+            <a:endParaRPr lang="en-US" sz="1460" dirty="0"/>
+          </a:p>
+          <a:p>
+            <a:r>
+              <a:rPr lang="en-US" sz="1460" dirty="0">
+                <a:solidFill>
+                  <a:srgbClr val="17364A"/>
+                </a:solidFill>
+                <a:latin typeface="Aptos" pitchFamily="34" charset="0"/>
+                <a:ea typeface="Aptos" pitchFamily="34" charset="-122"/>
+                <a:cs typeface="Aptos" pitchFamily="34" charset="-120"/>
+              </a:rPr>
+              <a:t>Tool 32: Vendor Evaluation Checklist (Checklist) - Use this tool to complete or strengthen the practical exercise for the module.</a:t>
+            </a:r>
+            <a:endParaRPr lang="en-US" sz="1460" dirty="0"/>
+          </a:p>
+        </p:txBody>
+      </p:sp>
+      <p:sp>
+        <p:nvSpPr>
+          <p:cNvPr id="9" name="Shape 7"/>
+          <p:cNvSpPr/>
+          <p:nvPr/>
+        </p:nvSpPr>
+        <p:spPr>
+          <a:xfrm>
+            <a:off x="8046720" y="1417320"/>
+            <a:ext cx="3063240" cy="2103120"/>
+          </a:xfrm>
+          <a:prstGeom prst="roundRect">
+            <a:avLst>
+              <a:gd name="adj" fmla="val 5217"/>
+            </a:avLst>
+          </a:prstGeom>
+          <a:solidFill>
+            <a:srgbClr val="EAF6F8"/>
+          </a:solidFill>
+          <a:ln w="12700">
+            <a:solidFill>
+              <a:srgbClr val="B9D7E6"/>
+            </a:solidFill>
+            <a:prstDash val="solid"/>
+          </a:ln>
+        </p:spPr>
+      </p:sp>
+      <p:sp>
+        <p:nvSpPr>
+          <p:cNvPr id="10" name="Text 8"/>
+          <p:cNvSpPr/>
+          <p:nvPr/>
+        </p:nvSpPr>
+        <p:spPr>
+          <a:xfrm>
+            <a:off x="8211312" y="1563624"/>
+            <a:ext cx="2734056" cy="201168"/>
+          </a:xfrm>
+          <a:prstGeom prst="rect">
+            <a:avLst/>
+          </a:prstGeom>
+          <a:noFill/>
+          <a:ln/>
+        </p:spPr>
+        <p:txBody>
+          <a:bodyPr wrap="square" lIns="0" tIns="0" rIns="0" bIns="0" rtlCol="0" anchor="ctr"/>
+          <a:lstStyle/>
+          <a:p>
+            <a:pPr indent="0" marL="0">
+              <a:buNone/>
+            </a:pPr>
+            <a:r>
+              <a:rPr lang="en-US" sz="950" b="1" dirty="0">
+                <a:solidFill>
+                  <a:srgbClr val="0068B7"/>
+                </a:solidFill>
+                <a:latin typeface="Aptos" pitchFamily="34" charset="0"/>
+                <a:ea typeface="Aptos" pitchFamily="34" charset="-122"/>
+                <a:cs typeface="Aptos" pitchFamily="34" charset="-120"/>
+              </a:rPr>
+              <a:t>Use the tools</a:t>
+            </a:r>
+            <a:endParaRPr lang="en-US" sz="950" dirty="0"/>
+          </a:p>
+        </p:txBody>
+      </p:sp>
+      <p:sp>
+        <p:nvSpPr>
+          <p:cNvPr id="11" name="Text 9"/>
+          <p:cNvSpPr/>
+          <p:nvPr/>
+        </p:nvSpPr>
+        <p:spPr>
+          <a:xfrm>
+            <a:off x="8211312" y="1856232"/>
+            <a:ext cx="2734056" cy="1536192"/>
+          </a:xfrm>
+          <a:prstGeom prst="rect">
+            <a:avLst/>
+          </a:prstGeom>
+          <a:noFill/>
+          <a:ln/>
+        </p:spPr>
+        <p:txBody>
+          <a:bodyPr wrap="square" lIns="0" tIns="0" rIns="0" bIns="0" rtlCol="0" anchor="t">
+            <a:normAutofit/>
+          </a:bodyPr>
+          <a:lstStyle/>
+          <a:p>
+            <a:pPr indent="0" marL="0">
+              <a:buNone/>
+            </a:pPr>
+            <a:r>
+              <a:rPr lang="en-US" sz="1250" dirty="0">
+                <a:solidFill>
+                  <a:srgbClr val="17364A"/>
+                </a:solidFill>
+                <a:latin typeface="Aptos" pitchFamily="34" charset="0"/>
+                <a:ea typeface="Aptos" pitchFamily="34" charset="-122"/>
+                <a:cs typeface="Aptos" pitchFamily="34" charset="-120"/>
+              </a:rPr>
+              <a:t>Use linked tools when your department needs a structured worksheet, template, checklist, review process, or documentation artifact.</a:t>
+            </a:r>
+            <a:endParaRPr lang="en-US" sz="1250" dirty="0"/>
+          </a:p>
+        </p:txBody>
+      </p:sp>
+      <p:sp>
+        <p:nvSpPr>
+          <p:cNvPr id="12" name="Shape 10"/>
+          <p:cNvSpPr/>
+          <p:nvPr/>
+        </p:nvSpPr>
+        <p:spPr>
+          <a:xfrm>
+            <a:off x="8046720" y="3794760"/>
+            <a:ext cx="3063240" cy="1508760"/>
+          </a:xfrm>
+          <a:prstGeom prst="roundRect">
+            <a:avLst>
+              <a:gd name="adj" fmla="val 7273"/>
+            </a:avLst>
+          </a:prstGeom>
+          <a:solidFill>
+            <a:srgbClr val="EEF8ED"/>
+          </a:solidFill>
+          <a:ln w="12700">
+            <a:solidFill>
+              <a:srgbClr val="B9D7E6"/>
+            </a:solidFill>
+            <a:prstDash val="solid"/>
+          </a:ln>
+        </p:spPr>
+      </p:sp>
+      <p:sp>
+        <p:nvSpPr>
+          <p:cNvPr id="13" name="Text 11"/>
+          <p:cNvSpPr/>
+          <p:nvPr/>
+        </p:nvSpPr>
+        <p:spPr>
+          <a:xfrm>
+            <a:off x="8211312" y="3941064"/>
+            <a:ext cx="2734056" cy="201168"/>
+          </a:xfrm>
+          <a:prstGeom prst="rect">
+            <a:avLst/>
+          </a:prstGeom>
+          <a:noFill/>
+          <a:ln/>
+        </p:spPr>
+        <p:txBody>
+          <a:bodyPr wrap="square" lIns="0" tIns="0" rIns="0" bIns="0" rtlCol="0" anchor="ctr"/>
+          <a:lstStyle/>
+          <a:p>
+            <a:pPr indent="0" marL="0">
+              <a:buNone/>
+            </a:pPr>
+            <a:r>
+              <a:rPr lang="en-US" sz="950" b="1" dirty="0">
+                <a:solidFill>
+                  <a:srgbClr val="0068B7"/>
+                </a:solidFill>
+                <a:latin typeface="Aptos" pitchFamily="34" charset="0"/>
+                <a:ea typeface="Aptos" pitchFamily="34" charset="-122"/>
+                <a:cs typeface="Aptos" pitchFamily="34" charset="-120"/>
+              </a:rPr>
+              <a:t>Avoid duplication</a:t>
+            </a:r>
+            <a:endParaRPr lang="en-US" sz="950" dirty="0"/>
+          </a:p>
+        </p:txBody>
+      </p:sp>
+      <p:sp>
+        <p:nvSpPr>
+          <p:cNvPr id="14" name="Text 12"/>
+          <p:cNvSpPr/>
+          <p:nvPr/>
+        </p:nvSpPr>
+        <p:spPr>
+          <a:xfrm>
+            <a:off x="8211312" y="4233672"/>
+            <a:ext cx="2734056" cy="941832"/>
+          </a:xfrm>
+          <a:prstGeom prst="rect">
+            <a:avLst/>
+          </a:prstGeom>
+          <a:noFill/>
+          <a:ln/>
+        </p:spPr>
+        <p:txBody>
+          <a:bodyPr wrap="square" lIns="0" tIns="0" rIns="0" bIns="0" rtlCol="0" anchor="t">
+            <a:normAutofit/>
+          </a:bodyPr>
+          <a:lstStyle/>
+          <a:p>
+            <a:pPr indent="0" marL="0">
+              <a:buNone/>
+            </a:pPr>
+            <a:r>
+              <a:rPr lang="en-US" sz="1250" dirty="0">
+                <a:solidFill>
+                  <a:srgbClr val="17364A"/>
+                </a:solidFill>
+                <a:latin typeface="Aptos" pitchFamily="34" charset="0"/>
+                <a:ea typeface="Aptos" pitchFamily="34" charset="-122"/>
+                <a:cs typeface="Aptos" pitchFamily="34" charset="-120"/>
+              </a:rPr>
+              <a:t>If your department already has a strong equivalent tool, adapt or use the existing process instead of recreating it.</a:t>
+            </a:r>
+            <a:endParaRPr lang="en-US" sz="1250" dirty="0"/>
           </a:p>
         </p:txBody>
       </p:sp>
@@ -6701,7 +12100,32 @@
       </p:sp>
       <p:sp>
         <p:nvSpPr>
-          <p:cNvPr id="3" name="Text 1"/>
+          <p:cNvPr id="3" name="Shape 1"/>
+          <p:cNvSpPr/>
+          <p:nvPr/>
+        </p:nvSpPr>
+        <p:spPr>
+          <a:xfrm>
+            <a:off x="0" y="164592"/>
+            <a:ext cx="146304" cy="6693408"/>
+          </a:xfrm>
+          <a:prstGeom prst="rect">
+            <a:avLst/>
+          </a:prstGeom>
+          <a:solidFill>
+            <a:srgbClr val="2F8A28"/>
+          </a:solidFill>
+          <a:ln w="12700">
+            <a:solidFill>
+              <a:srgbClr val="2F8A28"/>
+            </a:solidFill>
+            <a:prstDash val="solid"/>
+          </a:ln>
+        </p:spPr>
+      </p:sp>
+      <p:sp>
+        <p:nvSpPr>
+          <p:cNvPr id="4" name="Text 2"/>
           <p:cNvSpPr/>
           <p:nvPr/>
         </p:nvSpPr>
@@ -6740,7 +12164,7 @@
       </p:sp>
       <p:sp>
         <p:nvSpPr>
-          <p:cNvPr id="4" name="Text 2"/>
+          <p:cNvPr id="5" name="Text 3"/>
           <p:cNvSpPr/>
           <p:nvPr/>
         </p:nvSpPr>
@@ -6779,7 +12203,7 @@
       </p:sp>
       <p:sp>
         <p:nvSpPr>
-          <p:cNvPr id="5" name="Text 3"/>
+          <p:cNvPr id="6" name="Text 4"/>
           <p:cNvSpPr/>
           <p:nvPr/>
         </p:nvSpPr>
@@ -6818,13 +12242,77 @@
       </p:sp>
       <p:sp>
         <p:nvSpPr>
-          <p:cNvPr id="6" name="Text 4"/>
+          <p:cNvPr id="7" name="Shape 5"/>
           <p:cNvSpPr/>
           <p:nvPr/>
         </p:nvSpPr>
         <p:spPr>
           <a:xfrm>
             <a:off x="640080" y="658368"/>
+            <a:ext cx="420624" cy="420624"/>
+          </a:xfrm>
+          <a:prstGeom prst="ellipse">
+            <a:avLst/>
+          </a:prstGeom>
+          <a:solidFill>
+            <a:srgbClr val="0068B7"/>
+          </a:solidFill>
+          <a:ln w="12700">
+            <a:solidFill>
+              <a:srgbClr val="0068B7"/>
+            </a:solidFill>
+            <a:prstDash val="solid"/>
+          </a:ln>
+        </p:spPr>
+      </p:sp>
+      <p:sp>
+        <p:nvSpPr>
+          <p:cNvPr id="8" name="Text 6"/>
+          <p:cNvSpPr/>
+          <p:nvPr/>
+        </p:nvSpPr>
+        <p:spPr>
+          <a:xfrm>
+            <a:off x="640080" y="731520"/>
+            <a:ext cx="420624" cy="164592"/>
+          </a:xfrm>
+          <a:prstGeom prst="rect">
+            <a:avLst/>
+          </a:prstGeom>
+          <a:noFill/>
+          <a:ln/>
+        </p:spPr>
+        <p:txBody>
+          <a:bodyPr wrap="square" lIns="0" tIns="0" rIns="0" bIns="0" rtlCol="0" anchor="ctr"/>
+          <a:lstStyle/>
+          <a:p>
+            <a:pPr algn="ctr" indent="0" marL="0">
+              <a:buNone/>
+            </a:pPr>
+            <a:r>
+              <a:rPr lang="en-US" sz="1100" b="1" dirty="0">
+                <a:solidFill>
+                  <a:srgbClr val="FFFFFF"/>
+                </a:solidFill>
+                <a:latin typeface="Aptos" pitchFamily="34" charset="0"/>
+                <a:ea typeface="Aptos" pitchFamily="34" charset="-122"/>
+                <a:cs typeface="Aptos" pitchFamily="34" charset="-120"/>
+              </a:rPr>
+              <a:t>1</a:t>
+            </a:r>
+            <a:endParaRPr lang="en-US" sz="1100" dirty="0"/>
+          </a:p>
+        </p:txBody>
+      </p:sp>
+      <p:sp>
+        <p:nvSpPr>
+          <p:cNvPr id="9" name="Text 7"/>
+          <p:cNvSpPr/>
+          <p:nvPr/>
+        </p:nvSpPr>
+        <p:spPr>
+          <a:xfrm>
+            <a:off x="640080" y="621792"/>
             <a:ext cx="10881360" cy="566928"/>
           </a:xfrm>
           <a:prstGeom prst="rect">
@@ -6851,7 +12339,7 @@
                 <a:ea typeface="Aptos Display" pitchFamily="34" charset="-122"/>
                 <a:cs typeface="Aptos Display" pitchFamily="34" charset="-120"/>
               </a:rPr>
-              <a:t>Module Overview</a:t>
+              <a:t>Learning Objectives</a:t>
             </a:r>
             <a:endParaRPr lang="en-US" sz="2700" dirty="0"/>
           </a:p>
@@ -6859,32 +12347,178 @@
       </p:sp>
       <p:sp>
         <p:nvSpPr>
-          <p:cNvPr id="7" name="Text 5"/>
-          <p:cNvSpPr/>
-          <p:nvPr/>
-        </p:nvSpPr>
-        <p:spPr>
-          <a:xfrm>
-            <a:off x="822960" y="1325880"/>
-            <a:ext cx="10378440" cy="4800600"/>
-          </a:xfrm>
-          <a:prstGeom prst="rect">
-            <a:avLst/>
-          </a:prstGeom>
-          <a:noFill/>
-          <a:ln/>
-        </p:spPr>
-        <p:txBody>
-          <a:bodyPr wrap="square" lIns="1016" tIns="1016" rIns="1016" bIns="1016" rtlCol="0" anchor="t">
+          <p:cNvPr id="10" name="Text 8"/>
+          <p:cNvSpPr/>
+          <p:nvPr/>
+        </p:nvSpPr>
+        <p:spPr>
+          <a:xfrm>
+            <a:off x="868680" y="1417320"/>
+            <a:ext cx="6675120" cy="4434840"/>
+          </a:xfrm>
+          <a:prstGeom prst="rect">
+            <a:avLst/>
+          </a:prstGeom>
+          <a:noFill/>
+          <a:ln/>
+        </p:spPr>
+        <p:txBody>
+          <a:bodyPr wrap="square" lIns="635" tIns="635" rIns="635" bIns="635" rtlCol="0" anchor="t">
             <a:normAutofit/>
           </a:bodyPr>
           <a:lstStyle/>
           <a:p>
+            <a:r>
+              <a:rPr lang="en-US" sz="1700" dirty="0">
+                <a:solidFill>
+                  <a:srgbClr val="17364A"/>
+                </a:solidFill>
+                <a:latin typeface="Aptos" pitchFamily="34" charset="0"/>
+                <a:ea typeface="Aptos" pitchFamily="34" charset="-122"/>
+                <a:cs typeface="Aptos" pitchFamily="34" charset="-120"/>
+              </a:rPr>
+              <a:t>Define agentic AI and orchestration in public health terms.</a:t>
+            </a:r>
+            <a:endParaRPr lang="en-US" sz="1700" dirty="0"/>
+          </a:p>
+          <a:p>
+            <a:r>
+              <a:rPr lang="en-US" sz="1700" dirty="0">
+                <a:solidFill>
+                  <a:srgbClr val="17364A"/>
+                </a:solidFill>
+                <a:latin typeface="Aptos" pitchFamily="34" charset="0"/>
+                <a:ea typeface="Aptos" pitchFamily="34" charset="-122"/>
+                <a:cs typeface="Aptos" pitchFamily="34" charset="-120"/>
+              </a:rPr>
+              <a:t>Distinguish advisory outputs from tool-using or action-taking AI workflows.</a:t>
+            </a:r>
+            <a:endParaRPr lang="en-US" sz="1700" dirty="0"/>
+          </a:p>
+          <a:p>
+            <a:r>
+              <a:rPr lang="en-US" sz="1700" dirty="0">
+                <a:solidFill>
+                  <a:srgbClr val="17364A"/>
+                </a:solidFill>
+                <a:latin typeface="Aptos" pitchFamily="34" charset="0"/>
+                <a:ea typeface="Aptos" pitchFamily="34" charset="-122"/>
+                <a:cs typeface="Aptos" pitchFamily="34" charset="-120"/>
+              </a:rPr>
+              <a:t>Identify the components of an agentic workflow, including goals, tools, permissions, memory, planning, human approval, logs,.</a:t>
+            </a:r>
+            <a:endParaRPr lang="en-US" sz="1700" dirty="0"/>
+          </a:p>
+          <a:p>
+            <a:r>
+              <a:rPr lang="en-US" sz="1700" dirty="0">
+                <a:solidFill>
+                  <a:srgbClr val="17364A"/>
+                </a:solidFill>
+                <a:latin typeface="Aptos" pitchFamily="34" charset="0"/>
+                <a:ea typeface="Aptos" pitchFamily="34" charset="-122"/>
+                <a:cs typeface="Aptos" pitchFamily="34" charset="-120"/>
+              </a:rPr>
+              <a:t>Assess risks from excessive agency, unauthorized actions, error propagation, prompt injection, and unclear accountability.</a:t>
+            </a:r>
+            <a:endParaRPr lang="en-US" sz="1700" dirty="0"/>
+          </a:p>
+        </p:txBody>
+      </p:sp>
+      <p:sp>
+        <p:nvSpPr>
+          <p:cNvPr id="11" name="Shape 9"/>
+          <p:cNvSpPr/>
+          <p:nvPr/>
+        </p:nvSpPr>
+        <p:spPr>
+          <a:xfrm>
+            <a:off x="7909560" y="1417320"/>
+            <a:ext cx="3154680" cy="1828800"/>
+          </a:xfrm>
+          <a:prstGeom prst="roundRect">
+            <a:avLst>
+              <a:gd name="adj" fmla="val 6000"/>
+            </a:avLst>
+          </a:prstGeom>
+          <a:solidFill>
+            <a:srgbClr val="EEF8ED"/>
+          </a:solidFill>
+          <a:ln w="12700">
+            <a:solidFill>
+              <a:srgbClr val="B9D7E6"/>
+            </a:solidFill>
+            <a:prstDash val="solid"/>
+          </a:ln>
+        </p:spPr>
+      </p:sp>
+      <p:sp>
+        <p:nvSpPr>
+          <p:cNvPr id="12" name="Text 10"/>
+          <p:cNvSpPr/>
+          <p:nvPr/>
+        </p:nvSpPr>
+        <p:spPr>
+          <a:xfrm>
+            <a:off x="8074152" y="1563624"/>
+            <a:ext cx="2825496" cy="201168"/>
+          </a:xfrm>
+          <a:prstGeom prst="rect">
+            <a:avLst/>
+          </a:prstGeom>
+          <a:noFill/>
+          <a:ln/>
+        </p:spPr>
+        <p:txBody>
+          <a:bodyPr wrap="square" lIns="0" tIns="0" rIns="0" bIns="0" rtlCol="0" anchor="ctr"/>
+          <a:lstStyle/>
+          <a:p>
             <a:pPr indent="0" marL="0">
               <a:buNone/>
             </a:pPr>
             <a:r>
-              <a:rPr lang="en-US" sz="1420" dirty="0">
+              <a:rPr lang="en-US" sz="950" b="1" dirty="0">
+                <a:solidFill>
+                  <a:srgbClr val="0068B7"/>
+                </a:solidFill>
+                <a:latin typeface="Aptos" pitchFamily="34" charset="0"/>
+                <a:ea typeface="Aptos" pitchFamily="34" charset="-122"/>
+                <a:cs typeface="Aptos" pitchFamily="34" charset="-120"/>
+              </a:rPr>
+              <a:t>Key idea</a:t>
+            </a:r>
+            <a:endParaRPr lang="en-US" sz="950" dirty="0"/>
+          </a:p>
+        </p:txBody>
+      </p:sp>
+      <p:sp>
+        <p:nvSpPr>
+          <p:cNvPr id="13" name="Text 11"/>
+          <p:cNvSpPr/>
+          <p:nvPr/>
+        </p:nvSpPr>
+        <p:spPr>
+          <a:xfrm>
+            <a:off x="8074152" y="1856232"/>
+            <a:ext cx="2825496" cy="1261872"/>
+          </a:xfrm>
+          <a:prstGeom prst="rect">
+            <a:avLst/>
+          </a:prstGeom>
+          <a:noFill/>
+          <a:ln/>
+        </p:spPr>
+        <p:txBody>
+          <a:bodyPr wrap="square" lIns="0" tIns="0" rIns="0" bIns="0" rtlCol="0" anchor="t">
+            <a:normAutofit/>
+          </a:bodyPr>
+          <a:lstStyle/>
+          <a:p>
+            <a:pPr indent="0" marL="0">
+              <a:buNone/>
+            </a:pPr>
+            <a:r>
+              <a:rPr lang="en-US" sz="1250" dirty="0">
                 <a:solidFill>
                   <a:srgbClr val="17364A"/>
                 </a:solidFill>
@@ -6892,9 +12526,116 @@
                 <a:ea typeface="Aptos" pitchFamily="34" charset="-122"/>
                 <a:cs typeface="Aptos" pitchFamily="34" charset="-120"/>
               </a:rPr>
-              <a:t>Agentic AI refers to AI systems configured to pursue a goal through multiple steps, often by using tools, calling APIs, retrieving information, creating tasks, or taking actions. In public health, agentic workflows may eventually support intake triage, document routing, surveillance review, resource referral, emergency operations, procurement review, or administrative automation. These uses require stronger controls than simple drafting or summarization. This module teaches learners how to design agentic workflows with clear boundaries. An AI agent should not be understood as an independent decision-maker. It is a software component operating within a governed workflow. Public health agencies must define the goal, permitted tools, data access, action limits, human approval points, logs, failure handling, and rollback procedures. Learners will create an agentic workflow control plan that identifies allowed actions, prohibited actions, oversight requirements, and incident triggers.</a:t>
-            </a:r>
-            <a:endParaRPr lang="en-US" sz="1420" dirty="0"/>
+              <a:t>Define agentic AI and orchestration in public health terms.</a:t>
+            </a:r>
+            <a:endParaRPr lang="en-US" sz="1250" dirty="0"/>
+          </a:p>
+        </p:txBody>
+      </p:sp>
+      <p:sp>
+        <p:nvSpPr>
+          <p:cNvPr id="14" name="Shape 12"/>
+          <p:cNvSpPr/>
+          <p:nvPr/>
+        </p:nvSpPr>
+        <p:spPr>
+          <a:xfrm>
+            <a:off x="7909560" y="3520440"/>
+            <a:ext cx="3154680" cy="1737360"/>
+          </a:xfrm>
+          <a:prstGeom prst="roundRect">
+            <a:avLst>
+              <a:gd name="adj" fmla="val 6316"/>
+            </a:avLst>
+          </a:prstGeom>
+          <a:solidFill>
+            <a:srgbClr val="EAF6F8"/>
+          </a:solidFill>
+          <a:ln w="12700">
+            <a:solidFill>
+              <a:srgbClr val="B9D7E6"/>
+            </a:solidFill>
+            <a:prstDash val="solid"/>
+          </a:ln>
+        </p:spPr>
+      </p:sp>
+      <p:sp>
+        <p:nvSpPr>
+          <p:cNvPr id="15" name="Text 13"/>
+          <p:cNvSpPr/>
+          <p:nvPr/>
+        </p:nvSpPr>
+        <p:spPr>
+          <a:xfrm>
+            <a:off x="8074152" y="3666744"/>
+            <a:ext cx="2825496" cy="201168"/>
+          </a:xfrm>
+          <a:prstGeom prst="rect">
+            <a:avLst/>
+          </a:prstGeom>
+          <a:noFill/>
+          <a:ln/>
+        </p:spPr>
+        <p:txBody>
+          <a:bodyPr wrap="square" lIns="0" tIns="0" rIns="0" bIns="0" rtlCol="0" anchor="ctr"/>
+          <a:lstStyle/>
+          <a:p>
+            <a:pPr indent="0" marL="0">
+              <a:buNone/>
+            </a:pPr>
+            <a:r>
+              <a:rPr lang="en-US" sz="950" b="1" dirty="0">
+                <a:solidFill>
+                  <a:srgbClr val="0068B7"/>
+                </a:solidFill>
+                <a:latin typeface="Aptos" pitchFamily="34" charset="0"/>
+                <a:ea typeface="Aptos" pitchFamily="34" charset="-122"/>
+                <a:cs typeface="Aptos" pitchFamily="34" charset="-120"/>
+              </a:rPr>
+              <a:t>Use this for</a:t>
+            </a:r>
+            <a:endParaRPr lang="en-US" sz="950" dirty="0"/>
+          </a:p>
+        </p:txBody>
+      </p:sp>
+      <p:sp>
+        <p:nvSpPr>
+          <p:cNvPr id="16" name="Text 14"/>
+          <p:cNvSpPr/>
+          <p:nvPr/>
+        </p:nvSpPr>
+        <p:spPr>
+          <a:xfrm>
+            <a:off x="8074152" y="3959352"/>
+            <a:ext cx="2825496" cy="1170432"/>
+          </a:xfrm>
+          <a:prstGeom prst="rect">
+            <a:avLst/>
+          </a:prstGeom>
+          <a:noFill/>
+          <a:ln/>
+        </p:spPr>
+        <p:txBody>
+          <a:bodyPr wrap="square" lIns="0" tIns="0" rIns="0" bIns="0" rtlCol="0" anchor="t">
+            <a:normAutofit/>
+          </a:bodyPr>
+          <a:lstStyle/>
+          <a:p>
+            <a:pPr indent="0" marL="0">
+              <a:buNone/>
+            </a:pPr>
+            <a:r>
+              <a:rPr lang="en-US" sz="1250" dirty="0">
+                <a:solidFill>
+                  <a:srgbClr val="17364A"/>
+                </a:solidFill>
+                <a:latin typeface="Aptos" pitchFamily="34" charset="0"/>
+                <a:ea typeface="Aptos" pitchFamily="34" charset="-122"/>
+                <a:cs typeface="Aptos" pitchFamily="34" charset="-120"/>
+              </a:rPr>
+              <a:t>Connect the concept to public health decisions, safeguards, documentation, or implementation work.</a:t>
+            </a:r>
+            <a:endParaRPr lang="en-US" sz="1250" dirty="0"/>
           </a:p>
         </p:txBody>
       </p:sp>
@@ -6957,7 +12698,32 @@
       </p:sp>
       <p:sp>
         <p:nvSpPr>
-          <p:cNvPr id="3" name="Text 1"/>
+          <p:cNvPr id="3" name="Shape 1"/>
+          <p:cNvSpPr/>
+          <p:nvPr/>
+        </p:nvSpPr>
+        <p:spPr>
+          <a:xfrm>
+            <a:off x="0" y="164592"/>
+            <a:ext cx="146304" cy="6693408"/>
+          </a:xfrm>
+          <a:prstGeom prst="rect">
+            <a:avLst/>
+          </a:prstGeom>
+          <a:solidFill>
+            <a:srgbClr val="2F8A28"/>
+          </a:solidFill>
+          <a:ln w="12700">
+            <a:solidFill>
+              <a:srgbClr val="2F8A28"/>
+            </a:solidFill>
+            <a:prstDash val="solid"/>
+          </a:ln>
+        </p:spPr>
+      </p:sp>
+      <p:sp>
+        <p:nvSpPr>
+          <p:cNvPr id="4" name="Text 2"/>
           <p:cNvSpPr/>
           <p:nvPr/>
         </p:nvSpPr>
@@ -6996,7 +12762,7 @@
       </p:sp>
       <p:sp>
         <p:nvSpPr>
-          <p:cNvPr id="4" name="Text 2"/>
+          <p:cNvPr id="5" name="Text 3"/>
           <p:cNvSpPr/>
           <p:nvPr/>
         </p:nvSpPr>
@@ -7035,7 +12801,7 @@
       </p:sp>
       <p:sp>
         <p:nvSpPr>
-          <p:cNvPr id="5" name="Text 3"/>
+          <p:cNvPr id="6" name="Text 4"/>
           <p:cNvSpPr/>
           <p:nvPr/>
         </p:nvSpPr>
@@ -7074,7 +12840,7 @@
       </p:sp>
       <p:sp>
         <p:nvSpPr>
-          <p:cNvPr id="6" name="Text 4"/>
+          <p:cNvPr id="7" name="Text 5"/>
           <p:cNvSpPr/>
           <p:nvPr/>
         </p:nvSpPr>
@@ -7107,7 +12873,7 @@
                 <a:ea typeface="Aptos Display" pitchFamily="34" charset="-122"/>
                 <a:cs typeface="Aptos Display" pitchFamily="34" charset="-120"/>
               </a:rPr>
-              <a:t>Why This Topic Matters for Public Health AI</a:t>
+              <a:t>Learning Objectives Continued</a:t>
             </a:r>
             <a:endParaRPr lang="en-US" sz="2700" dirty="0"/>
           </a:p>
@@ -7115,32 +12881,136 @@
       </p:sp>
       <p:sp>
         <p:nvSpPr>
-          <p:cNvPr id="7" name="Text 5"/>
-          <p:cNvSpPr/>
-          <p:nvPr/>
-        </p:nvSpPr>
-        <p:spPr>
-          <a:xfrm>
-            <a:off x="822960" y="1325880"/>
-            <a:ext cx="10378440" cy="4800600"/>
-          </a:xfrm>
-          <a:prstGeom prst="rect">
-            <a:avLst/>
-          </a:prstGeom>
-          <a:noFill/>
-          <a:ln/>
-        </p:spPr>
-        <p:txBody>
-          <a:bodyPr wrap="square" lIns="1016" tIns="1016" rIns="1016" bIns="1016" rtlCol="0" anchor="t">
+          <p:cNvPr id="8" name="Text 6"/>
+          <p:cNvSpPr/>
+          <p:nvPr/>
+        </p:nvSpPr>
+        <p:spPr>
+          <a:xfrm>
+            <a:off x="868680" y="1417320"/>
+            <a:ext cx="6675120" cy="4434840"/>
+          </a:xfrm>
+          <a:prstGeom prst="rect">
+            <a:avLst/>
+          </a:prstGeom>
+          <a:noFill/>
+          <a:ln/>
+        </p:spPr>
+        <p:txBody>
+          <a:bodyPr wrap="square" lIns="635" tIns="635" rIns="635" bIns="635" rtlCol="0" anchor="t">
             <a:normAutofit/>
           </a:bodyPr>
           <a:lstStyle/>
           <a:p>
+            <a:r>
+              <a:rPr lang="en-US" sz="1700" dirty="0">
+                <a:solidFill>
+                  <a:srgbClr val="17364A"/>
+                </a:solidFill>
+                <a:latin typeface="Aptos" pitchFamily="34" charset="0"/>
+                <a:ea typeface="Aptos" pitchFamily="34" charset="-122"/>
+                <a:cs typeface="Aptos" pitchFamily="34" charset="-120"/>
+              </a:rPr>
+              <a:t>Produce an agentic workflow control plan.</a:t>
+            </a:r>
+            <a:endParaRPr lang="en-US" sz="1700" dirty="0"/>
+          </a:p>
+        </p:txBody>
+      </p:sp>
+      <p:sp>
+        <p:nvSpPr>
+          <p:cNvPr id="9" name="Shape 7"/>
+          <p:cNvSpPr/>
+          <p:nvPr/>
+        </p:nvSpPr>
+        <p:spPr>
+          <a:xfrm>
+            <a:off x="7909560" y="1417320"/>
+            <a:ext cx="3154680" cy="1828800"/>
+          </a:xfrm>
+          <a:prstGeom prst="roundRect">
+            <a:avLst>
+              <a:gd name="adj" fmla="val 6000"/>
+            </a:avLst>
+          </a:prstGeom>
+          <a:solidFill>
+            <a:srgbClr val="EEF8ED"/>
+          </a:solidFill>
+          <a:ln w="12700">
+            <a:solidFill>
+              <a:srgbClr val="B9D7E6"/>
+            </a:solidFill>
+            <a:prstDash val="solid"/>
+          </a:ln>
+        </p:spPr>
+      </p:sp>
+      <p:sp>
+        <p:nvSpPr>
+          <p:cNvPr id="10" name="Text 8"/>
+          <p:cNvSpPr/>
+          <p:nvPr/>
+        </p:nvSpPr>
+        <p:spPr>
+          <a:xfrm>
+            <a:off x="8074152" y="1563624"/>
+            <a:ext cx="2825496" cy="201168"/>
+          </a:xfrm>
+          <a:prstGeom prst="rect">
+            <a:avLst/>
+          </a:prstGeom>
+          <a:noFill/>
+          <a:ln/>
+        </p:spPr>
+        <p:txBody>
+          <a:bodyPr wrap="square" lIns="0" tIns="0" rIns="0" bIns="0" rtlCol="0" anchor="ctr"/>
+          <a:lstStyle/>
+          <a:p>
             <a:pPr indent="0" marL="0">
               <a:buNone/>
             </a:pPr>
             <a:r>
-              <a:rPr lang="en-US" sz="1420" dirty="0">
+              <a:rPr lang="en-US" sz="950" b="1" dirty="0">
+                <a:solidFill>
+                  <a:srgbClr val="0068B7"/>
+                </a:solidFill>
+                <a:latin typeface="Aptos" pitchFamily="34" charset="0"/>
+                <a:ea typeface="Aptos" pitchFamily="34" charset="-122"/>
+                <a:cs typeface="Aptos" pitchFamily="34" charset="-120"/>
+              </a:rPr>
+              <a:t>Key idea</a:t>
+            </a:r>
+            <a:endParaRPr lang="en-US" sz="950" dirty="0"/>
+          </a:p>
+        </p:txBody>
+      </p:sp>
+      <p:sp>
+        <p:nvSpPr>
+          <p:cNvPr id="11" name="Text 9"/>
+          <p:cNvSpPr/>
+          <p:nvPr/>
+        </p:nvSpPr>
+        <p:spPr>
+          <a:xfrm>
+            <a:off x="8074152" y="1856232"/>
+            <a:ext cx="2825496" cy="1261872"/>
+          </a:xfrm>
+          <a:prstGeom prst="rect">
+            <a:avLst/>
+          </a:prstGeom>
+          <a:noFill/>
+          <a:ln/>
+        </p:spPr>
+        <p:txBody>
+          <a:bodyPr wrap="square" lIns="0" tIns="0" rIns="0" bIns="0" rtlCol="0" anchor="t">
+            <a:normAutofit/>
+          </a:bodyPr>
+          <a:lstStyle/>
+          <a:p>
+            <a:pPr indent="0" marL="0">
+              <a:buNone/>
+            </a:pPr>
+            <a:r>
+              <a:rPr lang="en-US" sz="1250" dirty="0">
                 <a:solidFill>
                   <a:srgbClr val="17364A"/>
                 </a:solidFill>
@@ -7148,9 +13018,116 @@
                 <a:ea typeface="Aptos" pitchFamily="34" charset="-122"/>
                 <a:cs typeface="Aptos" pitchFamily="34" charset="-120"/>
               </a:rPr>
-              <a:t>Agentic AI matters because it shifts AI from generating outputs to participating in workflows. A chatbot that drafts a message is one level of risk. An agent that sends the message, updates a case record, creates a task, or notifies a partner is a different level of risk. Action-taking systems require explicit governance because errors can propagate quickly. Public health workflows often involve legal authority, sensitive data, vulnerable communities, and time-sensitive decisions. An agentic workflow could be valuable if it helps route records, gather relevant documents, prepare draft summaries, or create follow-up tasks. It could be harmful if it acts outside scope, updates records incorrectly, exposes information, or creates alerts without appropriate review. Responsible agentic design begins with constraint. Agencies should define what the agent is allowed to know, allowed to do, required to ask, required to log, and prohibited from doing. The system should fail safely when it encounters uncertainty, missing data, conflicting guidance, or requests outside approved scope.</a:t>
-            </a:r>
-            <a:endParaRPr lang="en-US" sz="1420" dirty="0"/>
+              <a:t>Produce an agentic workflow control plan.</a:t>
+            </a:r>
+            <a:endParaRPr lang="en-US" sz="1250" dirty="0"/>
+          </a:p>
+        </p:txBody>
+      </p:sp>
+      <p:sp>
+        <p:nvSpPr>
+          <p:cNvPr id="12" name="Shape 10"/>
+          <p:cNvSpPr/>
+          <p:nvPr/>
+        </p:nvSpPr>
+        <p:spPr>
+          <a:xfrm>
+            <a:off x="7909560" y="3520440"/>
+            <a:ext cx="3154680" cy="1737360"/>
+          </a:xfrm>
+          <a:prstGeom prst="roundRect">
+            <a:avLst>
+              <a:gd name="adj" fmla="val 6316"/>
+            </a:avLst>
+          </a:prstGeom>
+          <a:solidFill>
+            <a:srgbClr val="EAF6F8"/>
+          </a:solidFill>
+          <a:ln w="12700">
+            <a:solidFill>
+              <a:srgbClr val="B9D7E6"/>
+            </a:solidFill>
+            <a:prstDash val="solid"/>
+          </a:ln>
+        </p:spPr>
+      </p:sp>
+      <p:sp>
+        <p:nvSpPr>
+          <p:cNvPr id="13" name="Text 11"/>
+          <p:cNvSpPr/>
+          <p:nvPr/>
+        </p:nvSpPr>
+        <p:spPr>
+          <a:xfrm>
+            <a:off x="8074152" y="3666744"/>
+            <a:ext cx="2825496" cy="201168"/>
+          </a:xfrm>
+          <a:prstGeom prst="rect">
+            <a:avLst/>
+          </a:prstGeom>
+          <a:noFill/>
+          <a:ln/>
+        </p:spPr>
+        <p:txBody>
+          <a:bodyPr wrap="square" lIns="0" tIns="0" rIns="0" bIns="0" rtlCol="0" anchor="ctr"/>
+          <a:lstStyle/>
+          <a:p>
+            <a:pPr indent="0" marL="0">
+              <a:buNone/>
+            </a:pPr>
+            <a:r>
+              <a:rPr lang="en-US" sz="950" b="1" dirty="0">
+                <a:solidFill>
+                  <a:srgbClr val="0068B7"/>
+                </a:solidFill>
+                <a:latin typeface="Aptos" pitchFamily="34" charset="0"/>
+                <a:ea typeface="Aptos" pitchFamily="34" charset="-122"/>
+                <a:cs typeface="Aptos" pitchFamily="34" charset="-120"/>
+              </a:rPr>
+              <a:t>Use this for</a:t>
+            </a:r>
+            <a:endParaRPr lang="en-US" sz="950" dirty="0"/>
+          </a:p>
+        </p:txBody>
+      </p:sp>
+      <p:sp>
+        <p:nvSpPr>
+          <p:cNvPr id="14" name="Text 12"/>
+          <p:cNvSpPr/>
+          <p:nvPr/>
+        </p:nvSpPr>
+        <p:spPr>
+          <a:xfrm>
+            <a:off x="8074152" y="3959352"/>
+            <a:ext cx="2825496" cy="1170432"/>
+          </a:xfrm>
+          <a:prstGeom prst="rect">
+            <a:avLst/>
+          </a:prstGeom>
+          <a:noFill/>
+          <a:ln/>
+        </p:spPr>
+        <p:txBody>
+          <a:bodyPr wrap="square" lIns="0" tIns="0" rIns="0" bIns="0" rtlCol="0" anchor="t">
+            <a:normAutofit/>
+          </a:bodyPr>
+          <a:lstStyle/>
+          <a:p>
+            <a:pPr indent="0" marL="0">
+              <a:buNone/>
+            </a:pPr>
+            <a:r>
+              <a:rPr lang="en-US" sz="1250" dirty="0">
+                <a:solidFill>
+                  <a:srgbClr val="17364A"/>
+                </a:solidFill>
+                <a:latin typeface="Aptos" pitchFamily="34" charset="0"/>
+                <a:ea typeface="Aptos" pitchFamily="34" charset="-122"/>
+                <a:cs typeface="Aptos" pitchFamily="34" charset="-120"/>
+              </a:rPr>
+              <a:t>Connect the concept to public health decisions, safeguards, documentation, or implementation work.</a:t>
+            </a:r>
+            <a:endParaRPr lang="en-US" sz="1250" dirty="0"/>
           </a:p>
         </p:txBody>
       </p:sp>
@@ -7213,7 +13190,32 @@
       </p:sp>
       <p:sp>
         <p:nvSpPr>
-          <p:cNvPr id="3" name="Text 1"/>
+          <p:cNvPr id="3" name="Shape 1"/>
+          <p:cNvSpPr/>
+          <p:nvPr/>
+        </p:nvSpPr>
+        <p:spPr>
+          <a:xfrm>
+            <a:off x="0" y="164592"/>
+            <a:ext cx="146304" cy="6693408"/>
+          </a:xfrm>
+          <a:prstGeom prst="rect">
+            <a:avLst/>
+          </a:prstGeom>
+          <a:solidFill>
+            <a:srgbClr val="2F8A28"/>
+          </a:solidFill>
+          <a:ln w="12700">
+            <a:solidFill>
+              <a:srgbClr val="2F8A28"/>
+            </a:solidFill>
+            <a:prstDash val="solid"/>
+          </a:ln>
+        </p:spPr>
+      </p:sp>
+      <p:sp>
+        <p:nvSpPr>
+          <p:cNvPr id="4" name="Text 2"/>
           <p:cNvSpPr/>
           <p:nvPr/>
         </p:nvSpPr>
@@ -7252,7 +13254,7 @@
       </p:sp>
       <p:sp>
         <p:nvSpPr>
-          <p:cNvPr id="4" name="Text 2"/>
+          <p:cNvPr id="5" name="Text 3"/>
           <p:cNvSpPr/>
           <p:nvPr/>
         </p:nvSpPr>
@@ -7291,7 +13293,7 @@
       </p:sp>
       <p:sp>
         <p:nvSpPr>
-          <p:cNvPr id="5" name="Text 3"/>
+          <p:cNvPr id="6" name="Text 4"/>
           <p:cNvSpPr/>
           <p:nvPr/>
         </p:nvSpPr>
@@ -7330,13 +13332,77 @@
       </p:sp>
       <p:sp>
         <p:nvSpPr>
-          <p:cNvPr id="6" name="Text 4"/>
+          <p:cNvPr id="7" name="Shape 5"/>
           <p:cNvSpPr/>
           <p:nvPr/>
         </p:nvSpPr>
         <p:spPr>
           <a:xfrm>
             <a:off x="640080" y="658368"/>
+            <a:ext cx="420624" cy="420624"/>
+          </a:xfrm>
+          <a:prstGeom prst="ellipse">
+            <a:avLst/>
+          </a:prstGeom>
+          <a:solidFill>
+            <a:srgbClr val="0068B7"/>
+          </a:solidFill>
+          <a:ln w="12700">
+            <a:solidFill>
+              <a:srgbClr val="0068B7"/>
+            </a:solidFill>
+            <a:prstDash val="solid"/>
+          </a:ln>
+        </p:spPr>
+      </p:sp>
+      <p:sp>
+        <p:nvSpPr>
+          <p:cNvPr id="8" name="Text 6"/>
+          <p:cNvSpPr/>
+          <p:nvPr/>
+        </p:nvSpPr>
+        <p:spPr>
+          <a:xfrm>
+            <a:off x="640080" y="731520"/>
+            <a:ext cx="420624" cy="164592"/>
+          </a:xfrm>
+          <a:prstGeom prst="rect">
+            <a:avLst/>
+          </a:prstGeom>
+          <a:noFill/>
+          <a:ln/>
+        </p:spPr>
+        <p:txBody>
+          <a:bodyPr wrap="square" lIns="0" tIns="0" rIns="0" bIns="0" rtlCol="0" anchor="ctr"/>
+          <a:lstStyle/>
+          <a:p>
+            <a:pPr algn="ctr" indent="0" marL="0">
+              <a:buNone/>
+            </a:pPr>
+            <a:r>
+              <a:rPr lang="en-US" sz="1100" b="1" dirty="0">
+                <a:solidFill>
+                  <a:srgbClr val="FFFFFF"/>
+                </a:solidFill>
+                <a:latin typeface="Aptos" pitchFamily="34" charset="0"/>
+                <a:ea typeface="Aptos" pitchFamily="34" charset="-122"/>
+                <a:cs typeface="Aptos" pitchFamily="34" charset="-120"/>
+              </a:rPr>
+              <a:t>2</a:t>
+            </a:r>
+            <a:endParaRPr lang="en-US" sz="1100" dirty="0"/>
+          </a:p>
+        </p:txBody>
+      </p:sp>
+      <p:sp>
+        <p:nvSpPr>
+          <p:cNvPr id="9" name="Text 7"/>
+          <p:cNvSpPr/>
+          <p:nvPr/>
+        </p:nvSpPr>
+        <p:spPr>
+          <a:xfrm>
+            <a:off x="640080" y="621792"/>
             <a:ext cx="10881360" cy="566928"/>
           </a:xfrm>
           <a:prstGeom prst="rect">
@@ -7363,7 +13429,7 @@
                 <a:ea typeface="Aptos Display" pitchFamily="34" charset="-122"/>
                 <a:cs typeface="Aptos Display" pitchFamily="34" charset="-120"/>
               </a:rPr>
-              <a:t>Public Health Example</a:t>
+              <a:t>Module Overview</a:t>
             </a:r>
             <a:endParaRPr lang="en-US" sz="2700" dirty="0"/>
           </a:p>
@@ -7371,32 +13437,178 @@
       </p:sp>
       <p:sp>
         <p:nvSpPr>
-          <p:cNvPr id="7" name="Text 5"/>
-          <p:cNvSpPr/>
-          <p:nvPr/>
-        </p:nvSpPr>
-        <p:spPr>
-          <a:xfrm>
-            <a:off x="822960" y="1325880"/>
-            <a:ext cx="10378440" cy="4800600"/>
-          </a:xfrm>
-          <a:prstGeom prst="rect">
-            <a:avLst/>
-          </a:prstGeom>
-          <a:noFill/>
-          <a:ln/>
-        </p:spPr>
-        <p:txBody>
-          <a:bodyPr wrap="square" lIns="1016" tIns="1016" rIns="1016" bIns="1016" rtlCol="0" anchor="t">
+          <p:cNvPr id="10" name="Text 8"/>
+          <p:cNvSpPr/>
+          <p:nvPr/>
+        </p:nvSpPr>
+        <p:spPr>
+          <a:xfrm>
+            <a:off x="868680" y="1417320"/>
+            <a:ext cx="6675120" cy="4434840"/>
+          </a:xfrm>
+          <a:prstGeom prst="rect">
+            <a:avLst/>
+          </a:prstGeom>
+          <a:noFill/>
+          <a:ln/>
+        </p:spPr>
+        <p:txBody>
+          <a:bodyPr wrap="square" lIns="635" tIns="635" rIns="635" bIns="635" rtlCol="0" anchor="t">
             <a:normAutofit/>
           </a:bodyPr>
           <a:lstStyle/>
           <a:p>
+            <a:r>
+              <a:rPr lang="en-US" sz="1700" dirty="0">
+                <a:solidFill>
+                  <a:srgbClr val="17364A"/>
+                </a:solidFill>
+                <a:latin typeface="Aptos" pitchFamily="34" charset="0"/>
+                <a:ea typeface="Aptos" pitchFamily="34" charset="-122"/>
+                <a:cs typeface="Aptos" pitchFamily="34" charset="-120"/>
+              </a:rPr>
+              <a:t>Agentic AI refers to AI systems configured to pursue a goal through multiple steps, often by using tools, calling APIs,.</a:t>
+            </a:r>
+            <a:endParaRPr lang="en-US" sz="1700" dirty="0"/>
+          </a:p>
+          <a:p>
+            <a:r>
+              <a:rPr lang="en-US" sz="1700" dirty="0">
+                <a:solidFill>
+                  <a:srgbClr val="17364A"/>
+                </a:solidFill>
+                <a:latin typeface="Aptos" pitchFamily="34" charset="0"/>
+                <a:ea typeface="Aptos" pitchFamily="34" charset="-122"/>
+                <a:cs typeface="Aptos" pitchFamily="34" charset="-120"/>
+              </a:rPr>
+              <a:t>In public health, agentic workflows may eventually support intake triage, document routing, surveillance review, resource.</a:t>
+            </a:r>
+            <a:endParaRPr lang="en-US" sz="1700" dirty="0"/>
+          </a:p>
+          <a:p>
+            <a:r>
+              <a:rPr lang="en-US" sz="1700" dirty="0">
+                <a:solidFill>
+                  <a:srgbClr val="17364A"/>
+                </a:solidFill>
+                <a:latin typeface="Aptos" pitchFamily="34" charset="0"/>
+                <a:ea typeface="Aptos" pitchFamily="34" charset="-122"/>
+                <a:cs typeface="Aptos" pitchFamily="34" charset="-120"/>
+              </a:rPr>
+              <a:t>These uses require stronger controls than simple drafting or summarization.</a:t>
+            </a:r>
+            <a:endParaRPr lang="en-US" sz="1700" dirty="0"/>
+          </a:p>
+          <a:p>
+            <a:r>
+              <a:rPr lang="en-US" sz="1700" dirty="0">
+                <a:solidFill>
+                  <a:srgbClr val="17364A"/>
+                </a:solidFill>
+                <a:latin typeface="Aptos" pitchFamily="34" charset="0"/>
+                <a:ea typeface="Aptos" pitchFamily="34" charset="-122"/>
+                <a:cs typeface="Aptos" pitchFamily="34" charset="-120"/>
+              </a:rPr>
+              <a:t>This module teaches learners how to design agentic workflows with clear boundaries.</a:t>
+            </a:r>
+            <a:endParaRPr lang="en-US" sz="1700" dirty="0"/>
+          </a:p>
+        </p:txBody>
+      </p:sp>
+      <p:sp>
+        <p:nvSpPr>
+          <p:cNvPr id="11" name="Shape 9"/>
+          <p:cNvSpPr/>
+          <p:nvPr/>
+        </p:nvSpPr>
+        <p:spPr>
+          <a:xfrm>
+            <a:off x="7909560" y="1417320"/>
+            <a:ext cx="3154680" cy="1828800"/>
+          </a:xfrm>
+          <a:prstGeom prst="roundRect">
+            <a:avLst>
+              <a:gd name="adj" fmla="val 6000"/>
+            </a:avLst>
+          </a:prstGeom>
+          <a:solidFill>
+            <a:srgbClr val="EEF8ED"/>
+          </a:solidFill>
+          <a:ln w="12700">
+            <a:solidFill>
+              <a:srgbClr val="B9D7E6"/>
+            </a:solidFill>
+            <a:prstDash val="solid"/>
+          </a:ln>
+        </p:spPr>
+      </p:sp>
+      <p:sp>
+        <p:nvSpPr>
+          <p:cNvPr id="12" name="Text 10"/>
+          <p:cNvSpPr/>
+          <p:nvPr/>
+        </p:nvSpPr>
+        <p:spPr>
+          <a:xfrm>
+            <a:off x="8074152" y="1563624"/>
+            <a:ext cx="2825496" cy="201168"/>
+          </a:xfrm>
+          <a:prstGeom prst="rect">
+            <a:avLst/>
+          </a:prstGeom>
+          <a:noFill/>
+          <a:ln/>
+        </p:spPr>
+        <p:txBody>
+          <a:bodyPr wrap="square" lIns="0" tIns="0" rIns="0" bIns="0" rtlCol="0" anchor="ctr"/>
+          <a:lstStyle/>
+          <a:p>
             <a:pPr indent="0" marL="0">
               <a:buNone/>
             </a:pPr>
             <a:r>
-              <a:rPr lang="en-US" sz="1420" dirty="0">
+              <a:rPr lang="en-US" sz="950" b="1" dirty="0">
+                <a:solidFill>
+                  <a:srgbClr val="0068B7"/>
+                </a:solidFill>
+                <a:latin typeface="Aptos" pitchFamily="34" charset="0"/>
+                <a:ea typeface="Aptos" pitchFamily="34" charset="-122"/>
+                <a:cs typeface="Aptos" pitchFamily="34" charset="-120"/>
+              </a:rPr>
+              <a:t>Key idea</a:t>
+            </a:r>
+            <a:endParaRPr lang="en-US" sz="950" dirty="0"/>
+          </a:p>
+        </p:txBody>
+      </p:sp>
+      <p:sp>
+        <p:nvSpPr>
+          <p:cNvPr id="13" name="Text 11"/>
+          <p:cNvSpPr/>
+          <p:nvPr/>
+        </p:nvSpPr>
+        <p:spPr>
+          <a:xfrm>
+            <a:off x="8074152" y="1856232"/>
+            <a:ext cx="2825496" cy="1261872"/>
+          </a:xfrm>
+          <a:prstGeom prst="rect">
+            <a:avLst/>
+          </a:prstGeom>
+          <a:noFill/>
+          <a:ln/>
+        </p:spPr>
+        <p:txBody>
+          <a:bodyPr wrap="square" lIns="0" tIns="0" rIns="0" bIns="0" rtlCol="0" anchor="t">
+            <a:normAutofit/>
+          </a:bodyPr>
+          <a:lstStyle/>
+          <a:p>
+            <a:pPr indent="0" marL="0">
+              <a:buNone/>
+            </a:pPr>
+            <a:r>
+              <a:rPr lang="en-US" sz="1250" dirty="0">
                 <a:solidFill>
                   <a:srgbClr val="17364A"/>
                 </a:solidFill>
@@ -7404,9 +13616,116 @@
                 <a:ea typeface="Aptos" pitchFamily="34" charset="-122"/>
                 <a:cs typeface="Aptos" pitchFamily="34" charset="-120"/>
               </a:rPr>
-              <a:t>A health department may consider an agentic workflow for incoming public health inquiries. The agent could classify the inquiry, retrieve relevant approved guidance, draft a response, create a ticket, and route the item to the appropriate program. For low-risk general information, the agent might prepare a draft for staff review. For sensitive complaints, reportable disease concerns, media inquiries, or legal issues, the agent should escalate rather than respond. This design requires orchestration rules. The agent needs classification criteria, approved guidance sources, limits on data access, prohibited response categories, human approval before sending messages, audit logs, and procedures for correcting misrouted items. The value comes from workflow support, not from removing accountability.</a:t>
-            </a:r>
-            <a:endParaRPr lang="en-US" sz="1420" dirty="0"/>
+              <a:t>Agentic AI refers to AI systems configured to pursue a goal through multiple steps, often by using tools, calling APIs,.</a:t>
+            </a:r>
+            <a:endParaRPr lang="en-US" sz="1250" dirty="0"/>
+          </a:p>
+        </p:txBody>
+      </p:sp>
+      <p:sp>
+        <p:nvSpPr>
+          <p:cNvPr id="14" name="Shape 12"/>
+          <p:cNvSpPr/>
+          <p:nvPr/>
+        </p:nvSpPr>
+        <p:spPr>
+          <a:xfrm>
+            <a:off x="7909560" y="3520440"/>
+            <a:ext cx="3154680" cy="1737360"/>
+          </a:xfrm>
+          <a:prstGeom prst="roundRect">
+            <a:avLst>
+              <a:gd name="adj" fmla="val 6316"/>
+            </a:avLst>
+          </a:prstGeom>
+          <a:solidFill>
+            <a:srgbClr val="EAF6F8"/>
+          </a:solidFill>
+          <a:ln w="12700">
+            <a:solidFill>
+              <a:srgbClr val="B9D7E6"/>
+            </a:solidFill>
+            <a:prstDash val="solid"/>
+          </a:ln>
+        </p:spPr>
+      </p:sp>
+      <p:sp>
+        <p:nvSpPr>
+          <p:cNvPr id="15" name="Text 13"/>
+          <p:cNvSpPr/>
+          <p:nvPr/>
+        </p:nvSpPr>
+        <p:spPr>
+          <a:xfrm>
+            <a:off x="8074152" y="3666744"/>
+            <a:ext cx="2825496" cy="201168"/>
+          </a:xfrm>
+          <a:prstGeom prst="rect">
+            <a:avLst/>
+          </a:prstGeom>
+          <a:noFill/>
+          <a:ln/>
+        </p:spPr>
+        <p:txBody>
+          <a:bodyPr wrap="square" lIns="0" tIns="0" rIns="0" bIns="0" rtlCol="0" anchor="ctr"/>
+          <a:lstStyle/>
+          <a:p>
+            <a:pPr indent="0" marL="0">
+              <a:buNone/>
+            </a:pPr>
+            <a:r>
+              <a:rPr lang="en-US" sz="950" b="1" dirty="0">
+                <a:solidFill>
+                  <a:srgbClr val="0068B7"/>
+                </a:solidFill>
+                <a:latin typeface="Aptos" pitchFamily="34" charset="0"/>
+                <a:ea typeface="Aptos" pitchFamily="34" charset="-122"/>
+                <a:cs typeface="Aptos" pitchFamily="34" charset="-120"/>
+              </a:rPr>
+              <a:t>Use this for</a:t>
+            </a:r>
+            <a:endParaRPr lang="en-US" sz="950" dirty="0"/>
+          </a:p>
+        </p:txBody>
+      </p:sp>
+      <p:sp>
+        <p:nvSpPr>
+          <p:cNvPr id="16" name="Text 14"/>
+          <p:cNvSpPr/>
+          <p:nvPr/>
+        </p:nvSpPr>
+        <p:spPr>
+          <a:xfrm>
+            <a:off x="8074152" y="3959352"/>
+            <a:ext cx="2825496" cy="1170432"/>
+          </a:xfrm>
+          <a:prstGeom prst="rect">
+            <a:avLst/>
+          </a:prstGeom>
+          <a:noFill/>
+          <a:ln/>
+        </p:spPr>
+        <p:txBody>
+          <a:bodyPr wrap="square" lIns="0" tIns="0" rIns="0" bIns="0" rtlCol="0" anchor="t">
+            <a:normAutofit/>
+          </a:bodyPr>
+          <a:lstStyle/>
+          <a:p>
+            <a:pPr indent="0" marL="0">
+              <a:buNone/>
+            </a:pPr>
+            <a:r>
+              <a:rPr lang="en-US" sz="1250" dirty="0">
+                <a:solidFill>
+                  <a:srgbClr val="17364A"/>
+                </a:solidFill>
+                <a:latin typeface="Aptos" pitchFamily="34" charset="0"/>
+                <a:ea typeface="Aptos" pitchFamily="34" charset="-122"/>
+                <a:cs typeface="Aptos" pitchFamily="34" charset="-120"/>
+              </a:rPr>
+              <a:t>Connect the concept to public health decisions, safeguards, documentation, or implementation work.</a:t>
+            </a:r>
+            <a:endParaRPr lang="en-US" sz="1250" dirty="0"/>
           </a:p>
         </p:txBody>
       </p:sp>
@@ -7469,7 +13788,32 @@
       </p:sp>
       <p:sp>
         <p:nvSpPr>
-          <p:cNvPr id="3" name="Text 1"/>
+          <p:cNvPr id="3" name="Shape 1"/>
+          <p:cNvSpPr/>
+          <p:nvPr/>
+        </p:nvSpPr>
+        <p:spPr>
+          <a:xfrm>
+            <a:off x="0" y="164592"/>
+            <a:ext cx="146304" cy="6693408"/>
+          </a:xfrm>
+          <a:prstGeom prst="rect">
+            <a:avLst/>
+          </a:prstGeom>
+          <a:solidFill>
+            <a:srgbClr val="2F8A28"/>
+          </a:solidFill>
+          <a:ln w="12700">
+            <a:solidFill>
+              <a:srgbClr val="2F8A28"/>
+            </a:solidFill>
+            <a:prstDash val="solid"/>
+          </a:ln>
+        </p:spPr>
+      </p:sp>
+      <p:sp>
+        <p:nvSpPr>
+          <p:cNvPr id="4" name="Text 2"/>
           <p:cNvSpPr/>
           <p:nvPr/>
         </p:nvSpPr>
@@ -7508,7 +13852,7 @@
       </p:sp>
       <p:sp>
         <p:nvSpPr>
-          <p:cNvPr id="4" name="Text 2"/>
+          <p:cNvPr id="5" name="Text 3"/>
           <p:cNvSpPr/>
           <p:nvPr/>
         </p:nvSpPr>
@@ -7547,7 +13891,7 @@
       </p:sp>
       <p:sp>
         <p:nvSpPr>
-          <p:cNvPr id="5" name="Text 3"/>
+          <p:cNvPr id="6" name="Text 4"/>
           <p:cNvSpPr/>
           <p:nvPr/>
         </p:nvSpPr>
@@ -7586,13 +13930,77 @@
       </p:sp>
       <p:sp>
         <p:nvSpPr>
-          <p:cNvPr id="6" name="Text 4"/>
+          <p:cNvPr id="7" name="Shape 5"/>
           <p:cNvSpPr/>
           <p:nvPr/>
         </p:nvSpPr>
         <p:spPr>
           <a:xfrm>
             <a:off x="640080" y="658368"/>
+            <a:ext cx="420624" cy="420624"/>
+          </a:xfrm>
+          <a:prstGeom prst="ellipse">
+            <a:avLst/>
+          </a:prstGeom>
+          <a:solidFill>
+            <a:srgbClr val="0068B7"/>
+          </a:solidFill>
+          <a:ln w="12700">
+            <a:solidFill>
+              <a:srgbClr val="0068B7"/>
+            </a:solidFill>
+            <a:prstDash val="solid"/>
+          </a:ln>
+        </p:spPr>
+      </p:sp>
+      <p:sp>
+        <p:nvSpPr>
+          <p:cNvPr id="8" name="Text 6"/>
+          <p:cNvSpPr/>
+          <p:nvPr/>
+        </p:nvSpPr>
+        <p:spPr>
+          <a:xfrm>
+            <a:off x="640080" y="731520"/>
+            <a:ext cx="420624" cy="164592"/>
+          </a:xfrm>
+          <a:prstGeom prst="rect">
+            <a:avLst/>
+          </a:prstGeom>
+          <a:noFill/>
+          <a:ln/>
+        </p:spPr>
+        <p:txBody>
+          <a:bodyPr wrap="square" lIns="0" tIns="0" rIns="0" bIns="0" rtlCol="0" anchor="ctr"/>
+          <a:lstStyle/>
+          <a:p>
+            <a:pPr algn="ctr" indent="0" marL="0">
+              <a:buNone/>
+            </a:pPr>
+            <a:r>
+              <a:rPr lang="en-US" sz="1100" b="1" dirty="0">
+                <a:solidFill>
+                  <a:srgbClr val="FFFFFF"/>
+                </a:solidFill>
+                <a:latin typeface="Aptos" pitchFamily="34" charset="0"/>
+                <a:ea typeface="Aptos" pitchFamily="34" charset="-122"/>
+                <a:cs typeface="Aptos" pitchFamily="34" charset="-120"/>
+              </a:rPr>
+              <a:t>3</a:t>
+            </a:r>
+            <a:endParaRPr lang="en-US" sz="1100" dirty="0"/>
+          </a:p>
+        </p:txBody>
+      </p:sp>
+      <p:sp>
+        <p:nvSpPr>
+          <p:cNvPr id="9" name="Text 7"/>
+          <p:cNvSpPr/>
+          <p:nvPr/>
+        </p:nvSpPr>
+        <p:spPr>
+          <a:xfrm>
+            <a:off x="640080" y="621792"/>
             <a:ext cx="10881360" cy="566928"/>
           </a:xfrm>
           <a:prstGeom prst="rect">
@@ -7619,7 +14027,7 @@
                 <a:ea typeface="Aptos Display" pitchFamily="34" charset="-122"/>
                 <a:cs typeface="Aptos Display" pitchFamily="34" charset="-120"/>
               </a:rPr>
-              <a:t>Technical Deep Dive</a:t>
+              <a:t>Why This Topic Matters for Public Health AI</a:t>
             </a:r>
             <a:endParaRPr lang="en-US" sz="2700" dirty="0"/>
           </a:p>
@@ -7627,32 +14035,178 @@
       </p:sp>
       <p:sp>
         <p:nvSpPr>
-          <p:cNvPr id="7" name="Text 5"/>
-          <p:cNvSpPr/>
-          <p:nvPr/>
-        </p:nvSpPr>
-        <p:spPr>
-          <a:xfrm>
-            <a:off x="822960" y="1325880"/>
-            <a:ext cx="10378440" cy="4800600"/>
-          </a:xfrm>
-          <a:prstGeom prst="rect">
-            <a:avLst/>
-          </a:prstGeom>
-          <a:noFill/>
-          <a:ln/>
-        </p:spPr>
-        <p:txBody>
-          <a:bodyPr wrap="square" lIns="1016" tIns="1016" rIns="1016" bIns="1016" rtlCol="0" anchor="t">
+          <p:cNvPr id="10" name="Text 8"/>
+          <p:cNvSpPr/>
+          <p:nvPr/>
+        </p:nvSpPr>
+        <p:spPr>
+          <a:xfrm>
+            <a:off x="868680" y="1417320"/>
+            <a:ext cx="6675120" cy="4434840"/>
+          </a:xfrm>
+          <a:prstGeom prst="rect">
+            <a:avLst/>
+          </a:prstGeom>
+          <a:noFill/>
+          <a:ln/>
+        </p:spPr>
+        <p:txBody>
+          <a:bodyPr wrap="square" lIns="635" tIns="635" rIns="635" bIns="635" rtlCol="0" anchor="t">
             <a:normAutofit/>
           </a:bodyPr>
           <a:lstStyle/>
           <a:p>
+            <a:r>
+              <a:rPr lang="en-US" sz="1700" dirty="0">
+                <a:solidFill>
+                  <a:srgbClr val="17364A"/>
+                </a:solidFill>
+                <a:latin typeface="Aptos" pitchFamily="34" charset="0"/>
+                <a:ea typeface="Aptos" pitchFamily="34" charset="-122"/>
+                <a:cs typeface="Aptos" pitchFamily="34" charset="-120"/>
+              </a:rPr>
+              <a:t>Agentic AI matters because it shifts AI from generating outputs to participating in workflows.</a:t>
+            </a:r>
+            <a:endParaRPr lang="en-US" sz="1700" dirty="0"/>
+          </a:p>
+          <a:p>
+            <a:r>
+              <a:rPr lang="en-US" sz="1700" dirty="0">
+                <a:solidFill>
+                  <a:srgbClr val="17364A"/>
+                </a:solidFill>
+                <a:latin typeface="Aptos" pitchFamily="34" charset="0"/>
+                <a:ea typeface="Aptos" pitchFamily="34" charset="-122"/>
+                <a:cs typeface="Aptos" pitchFamily="34" charset="-120"/>
+              </a:rPr>
+              <a:t>A chatbot that drafts a message is one level of risk.</a:t>
+            </a:r>
+            <a:endParaRPr lang="en-US" sz="1700" dirty="0"/>
+          </a:p>
+          <a:p>
+            <a:r>
+              <a:rPr lang="en-US" sz="1700" dirty="0">
+                <a:solidFill>
+                  <a:srgbClr val="17364A"/>
+                </a:solidFill>
+                <a:latin typeface="Aptos" pitchFamily="34" charset="0"/>
+                <a:ea typeface="Aptos" pitchFamily="34" charset="-122"/>
+                <a:cs typeface="Aptos" pitchFamily="34" charset="-120"/>
+              </a:rPr>
+              <a:t>An agent that sends the message, updates a case record, creates a task, or notifies a partner is a different level of risk.</a:t>
+            </a:r>
+            <a:endParaRPr lang="en-US" sz="1700" dirty="0"/>
+          </a:p>
+          <a:p>
+            <a:r>
+              <a:rPr lang="en-US" sz="1700" dirty="0">
+                <a:solidFill>
+                  <a:srgbClr val="17364A"/>
+                </a:solidFill>
+                <a:latin typeface="Aptos" pitchFamily="34" charset="0"/>
+                <a:ea typeface="Aptos" pitchFamily="34" charset="-122"/>
+                <a:cs typeface="Aptos" pitchFamily="34" charset="-120"/>
+              </a:rPr>
+              <a:t>Action-taking systems require explicit governance because errors can propagate quickly.</a:t>
+            </a:r>
+            <a:endParaRPr lang="en-US" sz="1700" dirty="0"/>
+          </a:p>
+        </p:txBody>
+      </p:sp>
+      <p:sp>
+        <p:nvSpPr>
+          <p:cNvPr id="11" name="Shape 9"/>
+          <p:cNvSpPr/>
+          <p:nvPr/>
+        </p:nvSpPr>
+        <p:spPr>
+          <a:xfrm>
+            <a:off x="7909560" y="1417320"/>
+            <a:ext cx="3154680" cy="1828800"/>
+          </a:xfrm>
+          <a:prstGeom prst="roundRect">
+            <a:avLst>
+              <a:gd name="adj" fmla="val 6000"/>
+            </a:avLst>
+          </a:prstGeom>
+          <a:solidFill>
+            <a:srgbClr val="EEF8ED"/>
+          </a:solidFill>
+          <a:ln w="12700">
+            <a:solidFill>
+              <a:srgbClr val="B9D7E6"/>
+            </a:solidFill>
+            <a:prstDash val="solid"/>
+          </a:ln>
+        </p:spPr>
+      </p:sp>
+      <p:sp>
+        <p:nvSpPr>
+          <p:cNvPr id="12" name="Text 10"/>
+          <p:cNvSpPr/>
+          <p:nvPr/>
+        </p:nvSpPr>
+        <p:spPr>
+          <a:xfrm>
+            <a:off x="8074152" y="1563624"/>
+            <a:ext cx="2825496" cy="201168"/>
+          </a:xfrm>
+          <a:prstGeom prst="rect">
+            <a:avLst/>
+          </a:prstGeom>
+          <a:noFill/>
+          <a:ln/>
+        </p:spPr>
+        <p:txBody>
+          <a:bodyPr wrap="square" lIns="0" tIns="0" rIns="0" bIns="0" rtlCol="0" anchor="ctr"/>
+          <a:lstStyle/>
+          <a:p>
             <a:pPr indent="0" marL="0">
               <a:buNone/>
             </a:pPr>
             <a:r>
-              <a:rPr lang="en-US" sz="1420" dirty="0">
+              <a:rPr lang="en-US" sz="950" b="1" dirty="0">
+                <a:solidFill>
+                  <a:srgbClr val="0068B7"/>
+                </a:solidFill>
+                <a:latin typeface="Aptos" pitchFamily="34" charset="0"/>
+                <a:ea typeface="Aptos" pitchFamily="34" charset="-122"/>
+                <a:cs typeface="Aptos" pitchFamily="34" charset="-120"/>
+              </a:rPr>
+              <a:t>Key idea</a:t>
+            </a:r>
+            <a:endParaRPr lang="en-US" sz="950" dirty="0"/>
+          </a:p>
+        </p:txBody>
+      </p:sp>
+      <p:sp>
+        <p:nvSpPr>
+          <p:cNvPr id="13" name="Text 11"/>
+          <p:cNvSpPr/>
+          <p:nvPr/>
+        </p:nvSpPr>
+        <p:spPr>
+          <a:xfrm>
+            <a:off x="8074152" y="1856232"/>
+            <a:ext cx="2825496" cy="1261872"/>
+          </a:xfrm>
+          <a:prstGeom prst="rect">
+            <a:avLst/>
+          </a:prstGeom>
+          <a:noFill/>
+          <a:ln/>
+        </p:spPr>
+        <p:txBody>
+          <a:bodyPr wrap="square" lIns="0" tIns="0" rIns="0" bIns="0" rtlCol="0" anchor="t">
+            <a:normAutofit/>
+          </a:bodyPr>
+          <a:lstStyle/>
+          <a:p>
+            <a:pPr indent="0" marL="0">
+              <a:buNone/>
+            </a:pPr>
+            <a:r>
+              <a:rPr lang="en-US" sz="1250" dirty="0">
                 <a:solidFill>
                   <a:srgbClr val="17364A"/>
                 </a:solidFill>
@@ -7660,9 +14214,116 @@
                 <a:ea typeface="Aptos" pitchFamily="34" charset="-122"/>
                 <a:cs typeface="Aptos" pitchFamily="34" charset="-120"/>
               </a:rPr>
-              <a:t>Agentic workflow design begins with the goal. The goal should be narrow and operationally defined. “Help with surveillance” is too broad. “Draft a summary of new records and create a review task for a supervisor when defined criteria are met” is more suitable. Narrow goals make it easier to define tools, permissions, validation, and monitoring. Tool access is a central design decision. An agent may be allowed to search documents, query a database, create a task, send a draft message, or update a record. Each tool should be reviewed for sensitivity, consequence, and reversibility. Read-only access is generally lower risk than write access. External communication and system-of-record updates usually require human approval. Memory should be handled carefully. Some agents retain context across interactions or workflows. Persistent memory may improve continuity but can create privacy, accuracy, and records risks. Agencies should define what may be stored, for how long, who can access it, and how it can be corrected or deleted.</a:t>
-            </a:r>
-            <a:endParaRPr lang="en-US" sz="1420" dirty="0"/>
+              <a:t>Agentic AI matters because it shifts AI from generating outputs to participating in workflows.</a:t>
+            </a:r>
+            <a:endParaRPr lang="en-US" sz="1250" dirty="0"/>
+          </a:p>
+        </p:txBody>
+      </p:sp>
+      <p:sp>
+        <p:nvSpPr>
+          <p:cNvPr id="14" name="Shape 12"/>
+          <p:cNvSpPr/>
+          <p:nvPr/>
+        </p:nvSpPr>
+        <p:spPr>
+          <a:xfrm>
+            <a:off x="7909560" y="3520440"/>
+            <a:ext cx="3154680" cy="1737360"/>
+          </a:xfrm>
+          <a:prstGeom prst="roundRect">
+            <a:avLst>
+              <a:gd name="adj" fmla="val 6316"/>
+            </a:avLst>
+          </a:prstGeom>
+          <a:solidFill>
+            <a:srgbClr val="EAF6F8"/>
+          </a:solidFill>
+          <a:ln w="12700">
+            <a:solidFill>
+              <a:srgbClr val="B9D7E6"/>
+            </a:solidFill>
+            <a:prstDash val="solid"/>
+          </a:ln>
+        </p:spPr>
+      </p:sp>
+      <p:sp>
+        <p:nvSpPr>
+          <p:cNvPr id="15" name="Text 13"/>
+          <p:cNvSpPr/>
+          <p:nvPr/>
+        </p:nvSpPr>
+        <p:spPr>
+          <a:xfrm>
+            <a:off x="8074152" y="3666744"/>
+            <a:ext cx="2825496" cy="201168"/>
+          </a:xfrm>
+          <a:prstGeom prst="rect">
+            <a:avLst/>
+          </a:prstGeom>
+          <a:noFill/>
+          <a:ln/>
+        </p:spPr>
+        <p:txBody>
+          <a:bodyPr wrap="square" lIns="0" tIns="0" rIns="0" bIns="0" rtlCol="0" anchor="ctr"/>
+          <a:lstStyle/>
+          <a:p>
+            <a:pPr indent="0" marL="0">
+              <a:buNone/>
+            </a:pPr>
+            <a:r>
+              <a:rPr lang="en-US" sz="950" b="1" dirty="0">
+                <a:solidFill>
+                  <a:srgbClr val="0068B7"/>
+                </a:solidFill>
+                <a:latin typeface="Aptos" pitchFamily="34" charset="0"/>
+                <a:ea typeface="Aptos" pitchFamily="34" charset="-122"/>
+                <a:cs typeface="Aptos" pitchFamily="34" charset="-120"/>
+              </a:rPr>
+              <a:t>Use this for</a:t>
+            </a:r>
+            <a:endParaRPr lang="en-US" sz="950" dirty="0"/>
+          </a:p>
+        </p:txBody>
+      </p:sp>
+      <p:sp>
+        <p:nvSpPr>
+          <p:cNvPr id="16" name="Text 14"/>
+          <p:cNvSpPr/>
+          <p:nvPr/>
+        </p:nvSpPr>
+        <p:spPr>
+          <a:xfrm>
+            <a:off x="8074152" y="3959352"/>
+            <a:ext cx="2825496" cy="1170432"/>
+          </a:xfrm>
+          <a:prstGeom prst="rect">
+            <a:avLst/>
+          </a:prstGeom>
+          <a:noFill/>
+          <a:ln/>
+        </p:spPr>
+        <p:txBody>
+          <a:bodyPr wrap="square" lIns="0" tIns="0" rIns="0" bIns="0" rtlCol="0" anchor="t">
+            <a:normAutofit/>
+          </a:bodyPr>
+          <a:lstStyle/>
+          <a:p>
+            <a:pPr indent="0" marL="0">
+              <a:buNone/>
+            </a:pPr>
+            <a:r>
+              <a:rPr lang="en-US" sz="1250" dirty="0">
+                <a:solidFill>
+                  <a:srgbClr val="17364A"/>
+                </a:solidFill>
+                <a:latin typeface="Aptos" pitchFamily="34" charset="0"/>
+                <a:ea typeface="Aptos" pitchFamily="34" charset="-122"/>
+                <a:cs typeface="Aptos" pitchFamily="34" charset="-120"/>
+              </a:rPr>
+              <a:t>Connect the concept to public health decisions, safeguards, documentation, or implementation work.</a:t>
+            </a:r>
+            <a:endParaRPr lang="en-US" sz="1250" dirty="0"/>
           </a:p>
         </p:txBody>
       </p:sp>
@@ -7725,7 +14386,32 @@
       </p:sp>
       <p:sp>
         <p:nvSpPr>
-          <p:cNvPr id="3" name="Text 1"/>
+          <p:cNvPr id="3" name="Shape 1"/>
+          <p:cNvSpPr/>
+          <p:nvPr/>
+        </p:nvSpPr>
+        <p:spPr>
+          <a:xfrm>
+            <a:off x="0" y="164592"/>
+            <a:ext cx="146304" cy="6693408"/>
+          </a:xfrm>
+          <a:prstGeom prst="rect">
+            <a:avLst/>
+          </a:prstGeom>
+          <a:solidFill>
+            <a:srgbClr val="2F8A28"/>
+          </a:solidFill>
+          <a:ln w="12700">
+            <a:solidFill>
+              <a:srgbClr val="2F8A28"/>
+            </a:solidFill>
+            <a:prstDash val="solid"/>
+          </a:ln>
+        </p:spPr>
+      </p:sp>
+      <p:sp>
+        <p:nvSpPr>
+          <p:cNvPr id="4" name="Text 2"/>
           <p:cNvSpPr/>
           <p:nvPr/>
         </p:nvSpPr>
@@ -7764,7 +14450,7 @@
       </p:sp>
       <p:sp>
         <p:nvSpPr>
-          <p:cNvPr id="4" name="Text 2"/>
+          <p:cNvPr id="5" name="Text 3"/>
           <p:cNvSpPr/>
           <p:nvPr/>
         </p:nvSpPr>
@@ -7803,7 +14489,7 @@
       </p:sp>
       <p:sp>
         <p:nvSpPr>
-          <p:cNvPr id="5" name="Text 3"/>
+          <p:cNvPr id="6" name="Text 4"/>
           <p:cNvSpPr/>
           <p:nvPr/>
         </p:nvSpPr>
@@ -7842,13 +14528,77 @@
       </p:sp>
       <p:sp>
         <p:nvSpPr>
-          <p:cNvPr id="6" name="Text 4"/>
+          <p:cNvPr id="7" name="Shape 5"/>
           <p:cNvSpPr/>
           <p:nvPr/>
         </p:nvSpPr>
         <p:spPr>
           <a:xfrm>
             <a:off x="640080" y="658368"/>
+            <a:ext cx="420624" cy="420624"/>
+          </a:xfrm>
+          <a:prstGeom prst="ellipse">
+            <a:avLst/>
+          </a:prstGeom>
+          <a:solidFill>
+            <a:srgbClr val="0068B7"/>
+          </a:solidFill>
+          <a:ln w="12700">
+            <a:solidFill>
+              <a:srgbClr val="0068B7"/>
+            </a:solidFill>
+            <a:prstDash val="solid"/>
+          </a:ln>
+        </p:spPr>
+      </p:sp>
+      <p:sp>
+        <p:nvSpPr>
+          <p:cNvPr id="8" name="Text 6"/>
+          <p:cNvSpPr/>
+          <p:nvPr/>
+        </p:nvSpPr>
+        <p:spPr>
+          <a:xfrm>
+            <a:off x="640080" y="731520"/>
+            <a:ext cx="420624" cy="164592"/>
+          </a:xfrm>
+          <a:prstGeom prst="rect">
+            <a:avLst/>
+          </a:prstGeom>
+          <a:noFill/>
+          <a:ln/>
+        </p:spPr>
+        <p:txBody>
+          <a:bodyPr wrap="square" lIns="0" tIns="0" rIns="0" bIns="0" rtlCol="0" anchor="ctr"/>
+          <a:lstStyle/>
+          <a:p>
+            <a:pPr algn="ctr" indent="0" marL="0">
+              <a:buNone/>
+            </a:pPr>
+            <a:r>
+              <a:rPr lang="en-US" sz="1100" b="1" dirty="0">
+                <a:solidFill>
+                  <a:srgbClr val="FFFFFF"/>
+                </a:solidFill>
+                <a:latin typeface="Aptos" pitchFamily="34" charset="0"/>
+                <a:ea typeface="Aptos" pitchFamily="34" charset="-122"/>
+                <a:cs typeface="Aptos" pitchFamily="34" charset="-120"/>
+              </a:rPr>
+              <a:t>4</a:t>
+            </a:r>
+            <a:endParaRPr lang="en-US" sz="1100" dirty="0"/>
+          </a:p>
+        </p:txBody>
+      </p:sp>
+      <p:sp>
+        <p:nvSpPr>
+          <p:cNvPr id="9" name="Text 7"/>
+          <p:cNvSpPr/>
+          <p:nvPr/>
+        </p:nvSpPr>
+        <p:spPr>
+          <a:xfrm>
+            <a:off x="640080" y="621792"/>
             <a:ext cx="10881360" cy="566928"/>
           </a:xfrm>
           <a:prstGeom prst="rect">
@@ -7875,7 +14625,7 @@
                 <a:ea typeface="Aptos Display" pitchFamily="34" charset="-122"/>
                 <a:cs typeface="Aptos Display" pitchFamily="34" charset="-120"/>
               </a:rPr>
-              <a:t>Technical Deep Dive Continued</a:t>
+              <a:t>Public Health Example</a:t>
             </a:r>
             <a:endParaRPr lang="en-US" sz="2700" dirty="0"/>
           </a:p>
@@ -7883,32 +14633,178 @@
       </p:sp>
       <p:sp>
         <p:nvSpPr>
-          <p:cNvPr id="7" name="Text 5"/>
-          <p:cNvSpPr/>
-          <p:nvPr/>
-        </p:nvSpPr>
-        <p:spPr>
-          <a:xfrm>
-            <a:off x="822960" y="1325880"/>
-            <a:ext cx="10378440" cy="4800600"/>
-          </a:xfrm>
-          <a:prstGeom prst="rect">
-            <a:avLst/>
-          </a:prstGeom>
-          <a:noFill/>
-          <a:ln/>
-        </p:spPr>
-        <p:txBody>
-          <a:bodyPr wrap="square" lIns="1016" tIns="1016" rIns="1016" bIns="1016" rtlCol="0" anchor="t">
+          <p:cNvPr id="10" name="Text 8"/>
+          <p:cNvSpPr/>
+          <p:nvPr/>
+        </p:nvSpPr>
+        <p:spPr>
+          <a:xfrm>
+            <a:off x="868680" y="1417320"/>
+            <a:ext cx="6675120" cy="4434840"/>
+          </a:xfrm>
+          <a:prstGeom prst="rect">
+            <a:avLst/>
+          </a:prstGeom>
+          <a:noFill/>
+          <a:ln/>
+        </p:spPr>
+        <p:txBody>
+          <a:bodyPr wrap="square" lIns="635" tIns="635" rIns="635" bIns="635" rtlCol="0" anchor="t">
             <a:normAutofit/>
           </a:bodyPr>
           <a:lstStyle/>
           <a:p>
+            <a:r>
+              <a:rPr lang="en-US" sz="1700" dirty="0">
+                <a:solidFill>
+                  <a:srgbClr val="17364A"/>
+                </a:solidFill>
+                <a:latin typeface="Aptos" pitchFamily="34" charset="0"/>
+                <a:ea typeface="Aptos" pitchFamily="34" charset="-122"/>
+                <a:cs typeface="Aptos" pitchFamily="34" charset="-120"/>
+              </a:rPr>
+              <a:t>A health department may consider an agentic workflow for incoming public health inquiries.</a:t>
+            </a:r>
+            <a:endParaRPr lang="en-US" sz="1700" dirty="0"/>
+          </a:p>
+          <a:p>
+            <a:r>
+              <a:rPr lang="en-US" sz="1700" dirty="0">
+                <a:solidFill>
+                  <a:srgbClr val="17364A"/>
+                </a:solidFill>
+                <a:latin typeface="Aptos" pitchFamily="34" charset="0"/>
+                <a:ea typeface="Aptos" pitchFamily="34" charset="-122"/>
+                <a:cs typeface="Aptos" pitchFamily="34" charset="-120"/>
+              </a:rPr>
+              <a:t>The agent could classify the inquiry, retrieve relevant approved guidance, draft a response, create a ticket, and route the.</a:t>
+            </a:r>
+            <a:endParaRPr lang="en-US" sz="1700" dirty="0"/>
+          </a:p>
+          <a:p>
+            <a:r>
+              <a:rPr lang="en-US" sz="1700" dirty="0">
+                <a:solidFill>
+                  <a:srgbClr val="17364A"/>
+                </a:solidFill>
+                <a:latin typeface="Aptos" pitchFamily="34" charset="0"/>
+                <a:ea typeface="Aptos" pitchFamily="34" charset="-122"/>
+                <a:cs typeface="Aptos" pitchFamily="34" charset="-120"/>
+              </a:rPr>
+              <a:t>For low-risk general information, the agent might prepare a draft for staff review.</a:t>
+            </a:r>
+            <a:endParaRPr lang="en-US" sz="1700" dirty="0"/>
+          </a:p>
+          <a:p>
+            <a:r>
+              <a:rPr lang="en-US" sz="1700" dirty="0">
+                <a:solidFill>
+                  <a:srgbClr val="17364A"/>
+                </a:solidFill>
+                <a:latin typeface="Aptos" pitchFamily="34" charset="0"/>
+                <a:ea typeface="Aptos" pitchFamily="34" charset="-122"/>
+                <a:cs typeface="Aptos" pitchFamily="34" charset="-120"/>
+              </a:rPr>
+              <a:t>For sensitive complaints, reportable disease concerns, media inquiries, or legal issues, the agent should escalate rather.</a:t>
+            </a:r>
+            <a:endParaRPr lang="en-US" sz="1700" dirty="0"/>
+          </a:p>
+        </p:txBody>
+      </p:sp>
+      <p:sp>
+        <p:nvSpPr>
+          <p:cNvPr id="11" name="Shape 9"/>
+          <p:cNvSpPr/>
+          <p:nvPr/>
+        </p:nvSpPr>
+        <p:spPr>
+          <a:xfrm>
+            <a:off x="7909560" y="1417320"/>
+            <a:ext cx="3154680" cy="1828800"/>
+          </a:xfrm>
+          <a:prstGeom prst="roundRect">
+            <a:avLst>
+              <a:gd name="adj" fmla="val 6000"/>
+            </a:avLst>
+          </a:prstGeom>
+          <a:solidFill>
+            <a:srgbClr val="EEF8ED"/>
+          </a:solidFill>
+          <a:ln w="12700">
+            <a:solidFill>
+              <a:srgbClr val="B9D7E6"/>
+            </a:solidFill>
+            <a:prstDash val="solid"/>
+          </a:ln>
+        </p:spPr>
+      </p:sp>
+      <p:sp>
+        <p:nvSpPr>
+          <p:cNvPr id="12" name="Text 10"/>
+          <p:cNvSpPr/>
+          <p:nvPr/>
+        </p:nvSpPr>
+        <p:spPr>
+          <a:xfrm>
+            <a:off x="8074152" y="1563624"/>
+            <a:ext cx="2825496" cy="201168"/>
+          </a:xfrm>
+          <a:prstGeom prst="rect">
+            <a:avLst/>
+          </a:prstGeom>
+          <a:noFill/>
+          <a:ln/>
+        </p:spPr>
+        <p:txBody>
+          <a:bodyPr wrap="square" lIns="0" tIns="0" rIns="0" bIns="0" rtlCol="0" anchor="ctr"/>
+          <a:lstStyle/>
+          <a:p>
             <a:pPr indent="0" marL="0">
               <a:buNone/>
             </a:pPr>
             <a:r>
-              <a:rPr lang="en-US" sz="1420" dirty="0">
+              <a:rPr lang="en-US" sz="950" b="1" dirty="0">
+                <a:solidFill>
+                  <a:srgbClr val="0068B7"/>
+                </a:solidFill>
+                <a:latin typeface="Aptos" pitchFamily="34" charset="0"/>
+                <a:ea typeface="Aptos" pitchFamily="34" charset="-122"/>
+                <a:cs typeface="Aptos" pitchFamily="34" charset="-120"/>
+              </a:rPr>
+              <a:t>Key idea</a:t>
+            </a:r>
+            <a:endParaRPr lang="en-US" sz="950" dirty="0"/>
+          </a:p>
+        </p:txBody>
+      </p:sp>
+      <p:sp>
+        <p:nvSpPr>
+          <p:cNvPr id="13" name="Text 11"/>
+          <p:cNvSpPr/>
+          <p:nvPr/>
+        </p:nvSpPr>
+        <p:spPr>
+          <a:xfrm>
+            <a:off x="8074152" y="1856232"/>
+            <a:ext cx="2825496" cy="1261872"/>
+          </a:xfrm>
+          <a:prstGeom prst="rect">
+            <a:avLst/>
+          </a:prstGeom>
+          <a:noFill/>
+          <a:ln/>
+        </p:spPr>
+        <p:txBody>
+          <a:bodyPr wrap="square" lIns="0" tIns="0" rIns="0" bIns="0" rtlCol="0" anchor="t">
+            <a:normAutofit/>
+          </a:bodyPr>
+          <a:lstStyle/>
+          <a:p>
+            <a:pPr indent="0" marL="0">
+              <a:buNone/>
+            </a:pPr>
+            <a:r>
+              <a:rPr lang="en-US" sz="1250" dirty="0">
                 <a:solidFill>
                   <a:srgbClr val="17364A"/>
                 </a:solidFill>
@@ -7916,9 +14812,116 @@
                 <a:ea typeface="Aptos" pitchFamily="34" charset="-122"/>
                 <a:cs typeface="Aptos" pitchFamily="34" charset="-120"/>
               </a:rPr>
-              <a:t>Human oversight should match risk. Human-in-the-loop approval is appropriate for actions that affect records, services, public communication, legal obligations, or partners. Human-on-the-loop monitoring may be appropriate for lower-risk background tasks if users can intervene quickly. Fully automated action should be limited to low-risk, well-tested, reversible tasks. Agentic workflows require incident response planning. Agencies should define what counts as an agentic incident, such as unauthorized action, data exposure, repeated error, misrouting, unsafe recommendation, or failure to escalate. Logs should support reconstruction of prompts, retrieved sources, tool calls, actions, approvals, and outcomes.</a:t>
-            </a:r>
-            <a:endParaRPr lang="en-US" sz="1420" dirty="0"/>
+              <a:t>A health department may consider an agentic workflow for incoming public health inquiries.</a:t>
+            </a:r>
+            <a:endParaRPr lang="en-US" sz="1250" dirty="0"/>
+          </a:p>
+        </p:txBody>
+      </p:sp>
+      <p:sp>
+        <p:nvSpPr>
+          <p:cNvPr id="14" name="Shape 12"/>
+          <p:cNvSpPr/>
+          <p:nvPr/>
+        </p:nvSpPr>
+        <p:spPr>
+          <a:xfrm>
+            <a:off x="7909560" y="3520440"/>
+            <a:ext cx="3154680" cy="1737360"/>
+          </a:xfrm>
+          <a:prstGeom prst="roundRect">
+            <a:avLst>
+              <a:gd name="adj" fmla="val 6316"/>
+            </a:avLst>
+          </a:prstGeom>
+          <a:solidFill>
+            <a:srgbClr val="EAF6F8"/>
+          </a:solidFill>
+          <a:ln w="12700">
+            <a:solidFill>
+              <a:srgbClr val="B9D7E6"/>
+            </a:solidFill>
+            <a:prstDash val="solid"/>
+          </a:ln>
+        </p:spPr>
+      </p:sp>
+      <p:sp>
+        <p:nvSpPr>
+          <p:cNvPr id="15" name="Text 13"/>
+          <p:cNvSpPr/>
+          <p:nvPr/>
+        </p:nvSpPr>
+        <p:spPr>
+          <a:xfrm>
+            <a:off x="8074152" y="3666744"/>
+            <a:ext cx="2825496" cy="201168"/>
+          </a:xfrm>
+          <a:prstGeom prst="rect">
+            <a:avLst/>
+          </a:prstGeom>
+          <a:noFill/>
+          <a:ln/>
+        </p:spPr>
+        <p:txBody>
+          <a:bodyPr wrap="square" lIns="0" tIns="0" rIns="0" bIns="0" rtlCol="0" anchor="ctr"/>
+          <a:lstStyle/>
+          <a:p>
+            <a:pPr indent="0" marL="0">
+              <a:buNone/>
+            </a:pPr>
+            <a:r>
+              <a:rPr lang="en-US" sz="950" b="1" dirty="0">
+                <a:solidFill>
+                  <a:srgbClr val="0068B7"/>
+                </a:solidFill>
+                <a:latin typeface="Aptos" pitchFamily="34" charset="0"/>
+                <a:ea typeface="Aptos" pitchFamily="34" charset="-122"/>
+                <a:cs typeface="Aptos" pitchFamily="34" charset="-120"/>
+              </a:rPr>
+              <a:t>Use this for</a:t>
+            </a:r>
+            <a:endParaRPr lang="en-US" sz="950" dirty="0"/>
+          </a:p>
+        </p:txBody>
+      </p:sp>
+      <p:sp>
+        <p:nvSpPr>
+          <p:cNvPr id="16" name="Text 14"/>
+          <p:cNvSpPr/>
+          <p:nvPr/>
+        </p:nvSpPr>
+        <p:spPr>
+          <a:xfrm>
+            <a:off x="8074152" y="3959352"/>
+            <a:ext cx="2825496" cy="1170432"/>
+          </a:xfrm>
+          <a:prstGeom prst="rect">
+            <a:avLst/>
+          </a:prstGeom>
+          <a:noFill/>
+          <a:ln/>
+        </p:spPr>
+        <p:txBody>
+          <a:bodyPr wrap="square" lIns="0" tIns="0" rIns="0" bIns="0" rtlCol="0" anchor="t">
+            <a:normAutofit/>
+          </a:bodyPr>
+          <a:lstStyle/>
+          <a:p>
+            <a:pPr indent="0" marL="0">
+              <a:buNone/>
+            </a:pPr>
+            <a:r>
+              <a:rPr lang="en-US" sz="1250" dirty="0">
+                <a:solidFill>
+                  <a:srgbClr val="17364A"/>
+                </a:solidFill>
+                <a:latin typeface="Aptos" pitchFamily="34" charset="0"/>
+                <a:ea typeface="Aptos" pitchFamily="34" charset="-122"/>
+                <a:cs typeface="Aptos" pitchFamily="34" charset="-120"/>
+              </a:rPr>
+              <a:t>Connect the concept to public health decisions, safeguards, documentation, or implementation work.</a:t>
+            </a:r>
+            <a:endParaRPr lang="en-US" sz="1250" dirty="0"/>
           </a:p>
         </p:txBody>
       </p:sp>

--- a/downloads/presentations/modules/lesson-22-agentic-workflow-design-and-orchestration.pptx
+++ b/downloads/presentations/modules/lesson-22-agentic-workflow-design-and-orchestration.pptx
@@ -2999,6 +2999,45 @@
           </a:p>
         </p:txBody>
       </p:sp>
+      <p:sp>
+        <p:nvSpPr>
+          <p:cNvPr id="8" name="Text 5"/>
+          <p:cNvSpPr/>
+          <p:nvPr/>
+        </p:nvSpPr>
+        <p:spPr>
+          <a:xfrm>
+            <a:off x="11137392" y="6510528"/>
+            <a:ext cx="411480" cy="201168"/>
+          </a:xfrm>
+          <a:prstGeom prst="rect">
+            <a:avLst/>
+          </a:prstGeom>
+          <a:noFill/>
+          <a:ln/>
+        </p:spPr>
+        <p:txBody>
+          <a:bodyPr wrap="square" lIns="0" tIns="0" rIns="0" bIns="0" rtlCol="0" anchor="ctr"/>
+          <a:lstStyle/>
+          <a:p>
+            <a:pPr algn="r" indent="0" marL="0">
+              <a:buNone/>
+            </a:pPr>
+            <a:r>
+              <a:rPr lang="en-US" sz="900" dirty="0">
+                <a:solidFill>
+                  <a:srgbClr val="5F7181"/>
+                </a:solidFill>
+                <a:latin typeface="Aptos" pitchFamily="34" charset="0"/>
+                <a:ea typeface="Aptos" pitchFamily="34" charset="-122"/>
+                <a:cs typeface="Aptos" pitchFamily="34" charset="-120"/>
+              </a:rPr>
+              <a:t>1</a:t>
+            </a:r>
+            <a:endParaRPr lang="en-US" sz="900" dirty="0"/>
+          </a:p>
+        </p:txBody>
+      </p:sp>
     </p:spTree>
   </p:cSld>
   <p:clrMapOvr>
@@ -3192,7 +3231,7 @@
                 <a:ea typeface="Aptos" pitchFamily="34" charset="-122"/>
                 <a:cs typeface="Aptos" pitchFamily="34" charset="-120"/>
               </a:rPr>
-              <a:t>© Paula Soper</a:t>
+              <a:t>Â© Paula Soper</a:t>
             </a:r>
             <a:endParaRPr lang="en-US" sz="800" dirty="0"/>
           </a:p>
@@ -3200,7 +3239,46 @@
       </p:sp>
       <p:sp>
         <p:nvSpPr>
-          <p:cNvPr id="7" name="Shape 5"/>
+          <p:cNvPr id="7" name="Text 5"/>
+          <p:cNvSpPr/>
+          <p:nvPr/>
+        </p:nvSpPr>
+        <p:spPr>
+          <a:xfrm>
+            <a:off x="11137392" y="6510528"/>
+            <a:ext cx="411480" cy="201168"/>
+          </a:xfrm>
+          <a:prstGeom prst="rect">
+            <a:avLst/>
+          </a:prstGeom>
+          <a:noFill/>
+          <a:ln/>
+        </p:spPr>
+        <p:txBody>
+          <a:bodyPr wrap="square" lIns="0" tIns="0" rIns="0" bIns="0" rtlCol="0" anchor="ctr"/>
+          <a:lstStyle/>
+          <a:p>
+            <a:pPr algn="r" indent="0" marL="0">
+              <a:buNone/>
+            </a:pPr>
+            <a:r>
+              <a:rPr lang="en-US" sz="900" dirty="0">
+                <a:solidFill>
+                  <a:srgbClr val="5F7181"/>
+                </a:solidFill>
+                <a:latin typeface="Aptos" pitchFamily="34" charset="0"/>
+                <a:ea typeface="Aptos" pitchFamily="34" charset="-122"/>
+                <a:cs typeface="Aptos" pitchFamily="34" charset="-120"/>
+              </a:rPr>
+              <a:t>10</a:t>
+            </a:r>
+            <a:endParaRPr lang="en-US" sz="900" dirty="0"/>
+          </a:p>
+        </p:txBody>
+      </p:sp>
+      <p:sp>
+        <p:nvSpPr>
+          <p:cNvPr id="8" name="Shape 6"/>
           <p:cNvSpPr/>
           <p:nvPr/>
         </p:nvSpPr>
@@ -3225,7 +3303,7 @@
       </p:sp>
       <p:sp>
         <p:nvSpPr>
-          <p:cNvPr id="8" name="Text 6"/>
+          <p:cNvPr id="9" name="Text 7"/>
           <p:cNvSpPr/>
           <p:nvPr/>
         </p:nvSpPr>
@@ -3264,14 +3342,14 @@
       </p:sp>
       <p:sp>
         <p:nvSpPr>
-          <p:cNvPr id="9" name="Text 7"/>
+          <p:cNvPr id="10" name="Text 8"/>
           <p:cNvSpPr/>
           <p:nvPr/>
         </p:nvSpPr>
         <p:spPr>
           <a:xfrm>
             <a:off x="640080" y="621792"/>
-            <a:ext cx="10881360" cy="566928"/>
+            <a:ext cx="10881360" cy="713232"/>
           </a:xfrm>
           <a:prstGeom prst="rect">
             <a:avLst/>
@@ -3289,7 +3367,7 @@
               <a:buNone/>
             </a:pPr>
             <a:r>
-              <a:rPr lang="en-US" sz="2700" b="1" dirty="0">
+              <a:rPr lang="en-US" sz="3400" b="1" dirty="0">
                 <a:solidFill>
                   <a:srgbClr val="003A63"/>
                 </a:solidFill>
@@ -3299,20 +3377,20 @@
               </a:rPr>
               <a:t>Technical Deep Dive</a:t>
             </a:r>
-            <a:endParaRPr lang="en-US" sz="2700" dirty="0"/>
-          </a:p>
-        </p:txBody>
-      </p:sp>
-      <p:sp>
-        <p:nvSpPr>
-          <p:cNvPr id="10" name="Text 8"/>
-          <p:cNvSpPr/>
-          <p:nvPr/>
-        </p:nvSpPr>
-        <p:spPr>
-          <a:xfrm>
-            <a:off x="868680" y="1417320"/>
-            <a:ext cx="6675120" cy="4434840"/>
+            <a:endParaRPr lang="en-US" sz="3400" dirty="0"/>
+          </a:p>
+        </p:txBody>
+      </p:sp>
+      <p:sp>
+        <p:nvSpPr>
+          <p:cNvPr id="11" name="Text 9"/>
+          <p:cNvSpPr/>
+          <p:nvPr/>
+        </p:nvSpPr>
+        <p:spPr>
+          <a:xfrm>
+            <a:off x="868680" y="1508760"/>
+            <a:ext cx="6537960" cy="4160520"/>
           </a:xfrm>
           <a:prstGeom prst="rect">
             <a:avLst/>
@@ -3327,7 +3405,7 @@
           <a:lstStyle/>
           <a:p>
             <a:r>
-              <a:rPr lang="en-US" sz="1700" dirty="0">
+              <a:rPr lang="en-US" sz="2100" dirty="0">
                 <a:solidFill>
                   <a:srgbClr val="17364A"/>
                 </a:solidFill>
@@ -3337,11 +3415,11 @@
               </a:rPr>
               <a:t>Agentic workflow design begins with the goal.</a:t>
             </a:r>
-            <a:endParaRPr lang="en-US" sz="1700" dirty="0"/>
-          </a:p>
-          <a:p>
-            <a:r>
-              <a:rPr lang="en-US" sz="1700" dirty="0">
+            <a:endParaRPr lang="en-US" sz="2100" dirty="0"/>
+          </a:p>
+          <a:p>
+            <a:r>
+              <a:rPr lang="en-US" sz="2100" dirty="0">
                 <a:solidFill>
                   <a:srgbClr val="17364A"/>
                 </a:solidFill>
@@ -3349,13 +3427,13 @@
                 <a:ea typeface="Aptos" pitchFamily="34" charset="-122"/>
                 <a:cs typeface="Aptos" pitchFamily="34" charset="-120"/>
               </a:rPr>
-              <a:t>The goal should be narrow and operationally defined. “Help with surveillance” is too broad. “Draft a summary of new records.</a:t>
-            </a:r>
-            <a:endParaRPr lang="en-US" sz="1700" dirty="0"/>
-          </a:p>
-          <a:p>
-            <a:r>
-              <a:rPr lang="en-US" sz="1700" dirty="0">
+              <a:t>The goal should be narrow and operationally defined. “Help with surveillance” is too broad. “Draft a.</a:t>
+            </a:r>
+            <a:endParaRPr lang="en-US" sz="2100" dirty="0"/>
+          </a:p>
+          <a:p>
+            <a:r>
+              <a:rPr lang="en-US" sz="2100" dirty="0">
                 <a:solidFill>
                   <a:srgbClr val="17364A"/>
                 </a:solidFill>
@@ -3365,27 +3443,13 @@
               </a:rPr>
               <a:t>Narrow goals make it easier to define tools, permissions, validation, and monitoring.</a:t>
             </a:r>
-            <a:endParaRPr lang="en-US" sz="1700" dirty="0"/>
-          </a:p>
-          <a:p>
-            <a:r>
-              <a:rPr lang="en-US" sz="1700" dirty="0">
-                <a:solidFill>
-                  <a:srgbClr val="17364A"/>
-                </a:solidFill>
-                <a:latin typeface="Aptos" pitchFamily="34" charset="0"/>
-                <a:ea typeface="Aptos" pitchFamily="34" charset="-122"/>
-                <a:cs typeface="Aptos" pitchFamily="34" charset="-120"/>
-              </a:rPr>
-              <a:t>Tool access is a central design decision.</a:t>
-            </a:r>
-            <a:endParaRPr lang="en-US" sz="1700" dirty="0"/>
-          </a:p>
-        </p:txBody>
-      </p:sp>
-      <p:sp>
-        <p:nvSpPr>
-          <p:cNvPr id="11" name="Shape 9"/>
+            <a:endParaRPr lang="en-US" sz="2100" dirty="0"/>
+          </a:p>
+        </p:txBody>
+      </p:sp>
+      <p:sp>
+        <p:nvSpPr>
+          <p:cNvPr id="12" name="Shape 10"/>
           <p:cNvSpPr/>
           <p:nvPr/>
         </p:nvSpPr>
@@ -3412,14 +3476,14 @@
       </p:sp>
       <p:sp>
         <p:nvSpPr>
-          <p:cNvPr id="12" name="Text 10"/>
+          <p:cNvPr id="13" name="Text 11"/>
           <p:cNvSpPr/>
           <p:nvPr/>
         </p:nvSpPr>
         <p:spPr>
           <a:xfrm>
             <a:off x="8074152" y="1563624"/>
-            <a:ext cx="2825496" cy="201168"/>
+            <a:ext cx="2825496" cy="256032"/>
           </a:xfrm>
           <a:prstGeom prst="rect">
             <a:avLst/>
@@ -3435,7 +3499,7 @@
               <a:buNone/>
             </a:pPr>
             <a:r>
-              <a:rPr lang="en-US" sz="950" b="1" dirty="0">
+              <a:rPr lang="en-US" sz="1300" b="1" dirty="0">
                 <a:solidFill>
                   <a:srgbClr val="0068B7"/>
                 </a:solidFill>
@@ -3445,20 +3509,20 @@
               </a:rPr>
               <a:t>Key idea</a:t>
             </a:r>
-            <a:endParaRPr lang="en-US" sz="950" dirty="0"/>
-          </a:p>
-        </p:txBody>
-      </p:sp>
-      <p:sp>
-        <p:nvSpPr>
-          <p:cNvPr id="13" name="Text 11"/>
-          <p:cNvSpPr/>
-          <p:nvPr/>
-        </p:nvSpPr>
-        <p:spPr>
-          <a:xfrm>
-            <a:off x="8074152" y="1856232"/>
-            <a:ext cx="2825496" cy="1261872"/>
+            <a:endParaRPr lang="en-US" sz="1300" dirty="0"/>
+          </a:p>
+        </p:txBody>
+      </p:sp>
+      <p:sp>
+        <p:nvSpPr>
+          <p:cNvPr id="14" name="Text 12"/>
+          <p:cNvSpPr/>
+          <p:nvPr/>
+        </p:nvSpPr>
+        <p:spPr>
+          <a:xfrm>
+            <a:off x="8074152" y="1920240"/>
+            <a:ext cx="2825496" cy="1188720"/>
           </a:xfrm>
           <a:prstGeom prst="rect">
             <a:avLst/>
@@ -3476,7 +3540,7 @@
               <a:buNone/>
             </a:pPr>
             <a:r>
-              <a:rPr lang="en-US" sz="1250" dirty="0">
+              <a:rPr lang="en-US" sz="1550" dirty="0">
                 <a:solidFill>
                   <a:srgbClr val="17364A"/>
                 </a:solidFill>
@@ -3486,13 +3550,13 @@
               </a:rPr>
               <a:t>Agentic workflow design begins with the goal.</a:t>
             </a:r>
-            <a:endParaRPr lang="en-US" sz="1250" dirty="0"/>
-          </a:p>
-        </p:txBody>
-      </p:sp>
-      <p:sp>
-        <p:nvSpPr>
-          <p:cNvPr id="14" name="Shape 12"/>
+            <a:endParaRPr lang="en-US" sz="1550" dirty="0"/>
+          </a:p>
+        </p:txBody>
+      </p:sp>
+      <p:sp>
+        <p:nvSpPr>
+          <p:cNvPr id="15" name="Shape 13"/>
           <p:cNvSpPr/>
           <p:nvPr/>
         </p:nvSpPr>
@@ -3519,14 +3583,14 @@
       </p:sp>
       <p:sp>
         <p:nvSpPr>
-          <p:cNvPr id="15" name="Text 13"/>
+          <p:cNvPr id="16" name="Text 14"/>
           <p:cNvSpPr/>
           <p:nvPr/>
         </p:nvSpPr>
         <p:spPr>
           <a:xfrm>
             <a:off x="8074152" y="3666744"/>
-            <a:ext cx="2825496" cy="201168"/>
+            <a:ext cx="2825496" cy="256032"/>
           </a:xfrm>
           <a:prstGeom prst="rect">
             <a:avLst/>
@@ -3542,7 +3606,7 @@
               <a:buNone/>
             </a:pPr>
             <a:r>
-              <a:rPr lang="en-US" sz="950" b="1" dirty="0">
+              <a:rPr lang="en-US" sz="1300" b="1" dirty="0">
                 <a:solidFill>
                   <a:srgbClr val="0068B7"/>
                 </a:solidFill>
@@ -3552,20 +3616,20 @@
               </a:rPr>
               <a:t>Use this for</a:t>
             </a:r>
-            <a:endParaRPr lang="en-US" sz="950" dirty="0"/>
-          </a:p>
-        </p:txBody>
-      </p:sp>
-      <p:sp>
-        <p:nvSpPr>
-          <p:cNvPr id="16" name="Text 14"/>
-          <p:cNvSpPr/>
-          <p:nvPr/>
-        </p:nvSpPr>
-        <p:spPr>
-          <a:xfrm>
-            <a:off x="8074152" y="3959352"/>
-            <a:ext cx="2825496" cy="1170432"/>
+            <a:endParaRPr lang="en-US" sz="1300" dirty="0"/>
+          </a:p>
+        </p:txBody>
+      </p:sp>
+      <p:sp>
+        <p:nvSpPr>
+          <p:cNvPr id="17" name="Text 15"/>
+          <p:cNvSpPr/>
+          <p:nvPr/>
+        </p:nvSpPr>
+        <p:spPr>
+          <a:xfrm>
+            <a:off x="8074152" y="4023360"/>
+            <a:ext cx="2825496" cy="1097280"/>
           </a:xfrm>
           <a:prstGeom prst="rect">
             <a:avLst/>
@@ -3583,7 +3647,7 @@
               <a:buNone/>
             </a:pPr>
             <a:r>
-              <a:rPr lang="en-US" sz="1250" dirty="0">
+              <a:rPr lang="en-US" sz="1550" dirty="0">
                 <a:solidFill>
                   <a:srgbClr val="17364A"/>
                 </a:solidFill>
@@ -3593,7 +3657,7 @@
               </a:rPr>
               <a:t>Connect the concept to public health decisions, safeguards, documentation, or implementation work.</a:t>
             </a:r>
-            <a:endParaRPr lang="en-US" sz="1250" dirty="0"/>
+            <a:endParaRPr lang="en-US" sz="1550" dirty="0"/>
           </a:p>
         </p:txBody>
       </p:sp>
@@ -3790,7 +3854,7 @@
                 <a:ea typeface="Aptos" pitchFamily="34" charset="-122"/>
                 <a:cs typeface="Aptos" pitchFamily="34" charset="-120"/>
               </a:rPr>
-              <a:t>© Paula Soper</a:t>
+              <a:t>Â© Paula Soper</a:t>
             </a:r>
             <a:endParaRPr lang="en-US" sz="800" dirty="0"/>
           </a:p>
@@ -3804,8 +3868,47 @@
         </p:nvSpPr>
         <p:spPr>
           <a:xfrm>
+            <a:off x="11137392" y="6510528"/>
+            <a:ext cx="411480" cy="201168"/>
+          </a:xfrm>
+          <a:prstGeom prst="rect">
+            <a:avLst/>
+          </a:prstGeom>
+          <a:noFill/>
+          <a:ln/>
+        </p:spPr>
+        <p:txBody>
+          <a:bodyPr wrap="square" lIns="0" tIns="0" rIns="0" bIns="0" rtlCol="0" anchor="ctr"/>
+          <a:lstStyle/>
+          <a:p>
+            <a:pPr algn="r" indent="0" marL="0">
+              <a:buNone/>
+            </a:pPr>
+            <a:r>
+              <a:rPr lang="en-US" sz="900" dirty="0">
+                <a:solidFill>
+                  <a:srgbClr val="5F7181"/>
+                </a:solidFill>
+                <a:latin typeface="Aptos" pitchFamily="34" charset="0"/>
+                <a:ea typeface="Aptos" pitchFamily="34" charset="-122"/>
+                <a:cs typeface="Aptos" pitchFamily="34" charset="-120"/>
+              </a:rPr>
+              <a:t>11</a:t>
+            </a:r>
+            <a:endParaRPr lang="en-US" sz="900" dirty="0"/>
+          </a:p>
+        </p:txBody>
+      </p:sp>
+      <p:sp>
+        <p:nvSpPr>
+          <p:cNvPr id="8" name="Text 6"/>
+          <p:cNvSpPr/>
+          <p:nvPr/>
+        </p:nvSpPr>
+        <p:spPr>
+          <a:xfrm>
             <a:off x="640080" y="658368"/>
-            <a:ext cx="10881360" cy="566928"/>
+            <a:ext cx="10881360" cy="713232"/>
           </a:xfrm>
           <a:prstGeom prst="rect">
             <a:avLst/>
@@ -3823,7 +3926,7 @@
               <a:buNone/>
             </a:pPr>
             <a:r>
-              <a:rPr lang="en-US" sz="2700" b="1" dirty="0">
+              <a:rPr lang="en-US" sz="3400" b="1" dirty="0">
                 <a:solidFill>
                   <a:srgbClr val="003A63"/>
                 </a:solidFill>
@@ -3833,20 +3936,20 @@
               </a:rPr>
               <a:t>Technical Deep Dive Continued</a:t>
             </a:r>
-            <a:endParaRPr lang="en-US" sz="2700" dirty="0"/>
-          </a:p>
-        </p:txBody>
-      </p:sp>
-      <p:sp>
-        <p:nvSpPr>
-          <p:cNvPr id="8" name="Text 6"/>
-          <p:cNvSpPr/>
-          <p:nvPr/>
-        </p:nvSpPr>
-        <p:spPr>
-          <a:xfrm>
-            <a:off x="868680" y="1417320"/>
-            <a:ext cx="6675120" cy="4434840"/>
+            <a:endParaRPr lang="en-US" sz="3400" dirty="0"/>
+          </a:p>
+        </p:txBody>
+      </p:sp>
+      <p:sp>
+        <p:nvSpPr>
+          <p:cNvPr id="9" name="Text 7"/>
+          <p:cNvSpPr/>
+          <p:nvPr/>
+        </p:nvSpPr>
+        <p:spPr>
+          <a:xfrm>
+            <a:off x="868680" y="1508760"/>
+            <a:ext cx="6537960" cy="4160520"/>
           </a:xfrm>
           <a:prstGeom prst="rect">
             <a:avLst/>
@@ -3861,7 +3964,7 @@
           <a:lstStyle/>
           <a:p>
             <a:r>
-              <a:rPr lang="en-US" sz="1700" dirty="0">
+              <a:rPr lang="en-US" sz="2100" dirty="0">
                 <a:solidFill>
                   <a:srgbClr val="17364A"/>
                 </a:solidFill>
@@ -3871,11 +3974,11 @@
               </a:rPr>
               <a:t>Human oversight should match risk.</a:t>
             </a:r>
-            <a:endParaRPr lang="en-US" sz="1700" dirty="0"/>
-          </a:p>
-          <a:p>
-            <a:r>
-              <a:rPr lang="en-US" sz="1700" dirty="0">
+            <a:endParaRPr lang="en-US" sz="2100" dirty="0"/>
+          </a:p>
+          <a:p>
+            <a:r>
+              <a:rPr lang="en-US" sz="2100" dirty="0">
                 <a:solidFill>
                   <a:srgbClr val="17364A"/>
                 </a:solidFill>
@@ -3883,13 +3986,13 @@
                 <a:ea typeface="Aptos" pitchFamily="34" charset="-122"/>
                 <a:cs typeface="Aptos" pitchFamily="34" charset="-120"/>
               </a:rPr>
-              <a:t>Human-in-the-loop approval is appropriate for actions that affect records, services, public communication, legal.</a:t>
-            </a:r>
-            <a:endParaRPr lang="en-US" sz="1700" dirty="0"/>
-          </a:p>
-          <a:p>
-            <a:r>
-              <a:rPr lang="en-US" sz="1700" dirty="0">
+              <a:t>Human-in-the-loop approval is appropriate for actions that affect records, services, public.</a:t>
+            </a:r>
+            <a:endParaRPr lang="en-US" sz="2100" dirty="0"/>
+          </a:p>
+          <a:p>
+            <a:r>
+              <a:rPr lang="en-US" sz="2100" dirty="0">
                 <a:solidFill>
                   <a:srgbClr val="17364A"/>
                 </a:solidFill>
@@ -3897,29 +4000,15 @@
                 <a:ea typeface="Aptos" pitchFamily="34" charset="-122"/>
                 <a:cs typeface="Aptos" pitchFamily="34" charset="-120"/>
               </a:rPr>
-              <a:t>Human-on-the-loop monitoring may be appropriate for lower-risk background tasks if users can intervene quickly.</a:t>
-            </a:r>
-            <a:endParaRPr lang="en-US" sz="1700" dirty="0"/>
-          </a:p>
-          <a:p>
-            <a:r>
-              <a:rPr lang="en-US" sz="1700" dirty="0">
-                <a:solidFill>
-                  <a:srgbClr val="17364A"/>
-                </a:solidFill>
-                <a:latin typeface="Aptos" pitchFamily="34" charset="0"/>
-                <a:ea typeface="Aptos" pitchFamily="34" charset="-122"/>
-                <a:cs typeface="Aptos" pitchFamily="34" charset="-120"/>
-              </a:rPr>
-              <a:t>Fully automated action should be limited to low-risk, well-tested, reversible tasks.</a:t>
-            </a:r>
-            <a:endParaRPr lang="en-US" sz="1700" dirty="0"/>
-          </a:p>
-        </p:txBody>
-      </p:sp>
-      <p:sp>
-        <p:nvSpPr>
-          <p:cNvPr id="9" name="Shape 7"/>
+              <a:t>Human-on-the-loop monitoring may be appropriate for lower-risk background tasks if users can intervene.</a:t>
+            </a:r>
+            <a:endParaRPr lang="en-US" sz="2100" dirty="0"/>
+          </a:p>
+        </p:txBody>
+      </p:sp>
+      <p:sp>
+        <p:nvSpPr>
+          <p:cNvPr id="10" name="Shape 8"/>
           <p:cNvSpPr/>
           <p:nvPr/>
         </p:nvSpPr>
@@ -3946,14 +4035,14 @@
       </p:sp>
       <p:sp>
         <p:nvSpPr>
-          <p:cNvPr id="10" name="Text 8"/>
+          <p:cNvPr id="11" name="Text 9"/>
           <p:cNvSpPr/>
           <p:nvPr/>
         </p:nvSpPr>
         <p:spPr>
           <a:xfrm>
             <a:off x="8074152" y="1563624"/>
-            <a:ext cx="2825496" cy="201168"/>
+            <a:ext cx="2825496" cy="256032"/>
           </a:xfrm>
           <a:prstGeom prst="rect">
             <a:avLst/>
@@ -3969,7 +4058,7 @@
               <a:buNone/>
             </a:pPr>
             <a:r>
-              <a:rPr lang="en-US" sz="950" b="1" dirty="0">
+              <a:rPr lang="en-US" sz="1300" b="1" dirty="0">
                 <a:solidFill>
                   <a:srgbClr val="0068B7"/>
                 </a:solidFill>
@@ -3979,20 +4068,20 @@
               </a:rPr>
               <a:t>Key idea</a:t>
             </a:r>
-            <a:endParaRPr lang="en-US" sz="950" dirty="0"/>
-          </a:p>
-        </p:txBody>
-      </p:sp>
-      <p:sp>
-        <p:nvSpPr>
-          <p:cNvPr id="11" name="Text 9"/>
-          <p:cNvSpPr/>
-          <p:nvPr/>
-        </p:nvSpPr>
-        <p:spPr>
-          <a:xfrm>
-            <a:off x="8074152" y="1856232"/>
-            <a:ext cx="2825496" cy="1261872"/>
+            <a:endParaRPr lang="en-US" sz="1300" dirty="0"/>
+          </a:p>
+        </p:txBody>
+      </p:sp>
+      <p:sp>
+        <p:nvSpPr>
+          <p:cNvPr id="12" name="Text 10"/>
+          <p:cNvSpPr/>
+          <p:nvPr/>
+        </p:nvSpPr>
+        <p:spPr>
+          <a:xfrm>
+            <a:off x="8074152" y="1920240"/>
+            <a:ext cx="2825496" cy="1188720"/>
           </a:xfrm>
           <a:prstGeom prst="rect">
             <a:avLst/>
@@ -4010,7 +4099,7 @@
               <a:buNone/>
             </a:pPr>
             <a:r>
-              <a:rPr lang="en-US" sz="1250" dirty="0">
+              <a:rPr lang="en-US" sz="1550" dirty="0">
                 <a:solidFill>
                   <a:srgbClr val="17364A"/>
                 </a:solidFill>
@@ -4020,13 +4109,13 @@
               </a:rPr>
               <a:t>Human oversight should match risk.</a:t>
             </a:r>
-            <a:endParaRPr lang="en-US" sz="1250" dirty="0"/>
-          </a:p>
-        </p:txBody>
-      </p:sp>
-      <p:sp>
-        <p:nvSpPr>
-          <p:cNvPr id="12" name="Shape 10"/>
+            <a:endParaRPr lang="en-US" sz="1550" dirty="0"/>
+          </a:p>
+        </p:txBody>
+      </p:sp>
+      <p:sp>
+        <p:nvSpPr>
+          <p:cNvPr id="13" name="Shape 11"/>
           <p:cNvSpPr/>
           <p:nvPr/>
         </p:nvSpPr>
@@ -4053,14 +4142,14 @@
       </p:sp>
       <p:sp>
         <p:nvSpPr>
-          <p:cNvPr id="13" name="Text 11"/>
+          <p:cNvPr id="14" name="Text 12"/>
           <p:cNvSpPr/>
           <p:nvPr/>
         </p:nvSpPr>
         <p:spPr>
           <a:xfrm>
             <a:off x="8074152" y="3666744"/>
-            <a:ext cx="2825496" cy="201168"/>
+            <a:ext cx="2825496" cy="256032"/>
           </a:xfrm>
           <a:prstGeom prst="rect">
             <a:avLst/>
@@ -4076,7 +4165,7 @@
               <a:buNone/>
             </a:pPr>
             <a:r>
-              <a:rPr lang="en-US" sz="950" b="1" dirty="0">
+              <a:rPr lang="en-US" sz="1300" b="1" dirty="0">
                 <a:solidFill>
                   <a:srgbClr val="0068B7"/>
                 </a:solidFill>
@@ -4086,20 +4175,20 @@
               </a:rPr>
               <a:t>Use this for</a:t>
             </a:r>
-            <a:endParaRPr lang="en-US" sz="950" dirty="0"/>
-          </a:p>
-        </p:txBody>
-      </p:sp>
-      <p:sp>
-        <p:nvSpPr>
-          <p:cNvPr id="14" name="Text 12"/>
-          <p:cNvSpPr/>
-          <p:nvPr/>
-        </p:nvSpPr>
-        <p:spPr>
-          <a:xfrm>
-            <a:off x="8074152" y="3959352"/>
-            <a:ext cx="2825496" cy="1170432"/>
+            <a:endParaRPr lang="en-US" sz="1300" dirty="0"/>
+          </a:p>
+        </p:txBody>
+      </p:sp>
+      <p:sp>
+        <p:nvSpPr>
+          <p:cNvPr id="15" name="Text 13"/>
+          <p:cNvSpPr/>
+          <p:nvPr/>
+        </p:nvSpPr>
+        <p:spPr>
+          <a:xfrm>
+            <a:off x="8074152" y="4023360"/>
+            <a:ext cx="2825496" cy="1097280"/>
           </a:xfrm>
           <a:prstGeom prst="rect">
             <a:avLst/>
@@ -4117,7 +4206,7 @@
               <a:buNone/>
             </a:pPr>
             <a:r>
-              <a:rPr lang="en-US" sz="1250" dirty="0">
+              <a:rPr lang="en-US" sz="1550" dirty="0">
                 <a:solidFill>
                   <a:srgbClr val="17364A"/>
                 </a:solidFill>
@@ -4127,7 +4216,7 @@
               </a:rPr>
               <a:t>Connect the concept to public health decisions, safeguards, documentation, or implementation work.</a:t>
             </a:r>
-            <a:endParaRPr lang="en-US" sz="1250" dirty="0"/>
+            <a:endParaRPr lang="en-US" sz="1550" dirty="0"/>
           </a:p>
         </p:txBody>
       </p:sp>
@@ -4324,7 +4413,7 @@
                 <a:ea typeface="Aptos" pitchFamily="34" charset="-122"/>
                 <a:cs typeface="Aptos" pitchFamily="34" charset="-120"/>
               </a:rPr>
-              <a:t>© Paula Soper</a:t>
+              <a:t>Â© Paula Soper</a:t>
             </a:r>
             <a:endParaRPr lang="en-US" sz="800" dirty="0"/>
           </a:p>
@@ -4332,7 +4421,46 @@
       </p:sp>
       <p:sp>
         <p:nvSpPr>
-          <p:cNvPr id="7" name="Shape 5"/>
+          <p:cNvPr id="7" name="Text 5"/>
+          <p:cNvSpPr/>
+          <p:nvPr/>
+        </p:nvSpPr>
+        <p:spPr>
+          <a:xfrm>
+            <a:off x="11137392" y="6510528"/>
+            <a:ext cx="411480" cy="201168"/>
+          </a:xfrm>
+          <a:prstGeom prst="rect">
+            <a:avLst/>
+          </a:prstGeom>
+          <a:noFill/>
+          <a:ln/>
+        </p:spPr>
+        <p:txBody>
+          <a:bodyPr wrap="square" lIns="0" tIns="0" rIns="0" bIns="0" rtlCol="0" anchor="ctr"/>
+          <a:lstStyle/>
+          <a:p>
+            <a:pPr algn="r" indent="0" marL="0">
+              <a:buNone/>
+            </a:pPr>
+            <a:r>
+              <a:rPr lang="en-US" sz="900" dirty="0">
+                <a:solidFill>
+                  <a:srgbClr val="5F7181"/>
+                </a:solidFill>
+                <a:latin typeface="Aptos" pitchFamily="34" charset="0"/>
+                <a:ea typeface="Aptos" pitchFamily="34" charset="-122"/>
+                <a:cs typeface="Aptos" pitchFamily="34" charset="-120"/>
+              </a:rPr>
+              <a:t>12</a:t>
+            </a:r>
+            <a:endParaRPr lang="en-US" sz="900" dirty="0"/>
+          </a:p>
+        </p:txBody>
+      </p:sp>
+      <p:sp>
+        <p:nvSpPr>
+          <p:cNvPr id="8" name="Shape 6"/>
           <p:cNvSpPr/>
           <p:nvPr/>
         </p:nvSpPr>
@@ -4357,7 +4485,7 @@
       </p:sp>
       <p:sp>
         <p:nvSpPr>
-          <p:cNvPr id="8" name="Text 6"/>
+          <p:cNvPr id="9" name="Text 7"/>
           <p:cNvSpPr/>
           <p:nvPr/>
         </p:nvSpPr>
@@ -4396,14 +4524,14 @@
       </p:sp>
       <p:sp>
         <p:nvSpPr>
-          <p:cNvPr id="9" name="Text 7"/>
+          <p:cNvPr id="10" name="Text 8"/>
           <p:cNvSpPr/>
           <p:nvPr/>
         </p:nvSpPr>
         <p:spPr>
           <a:xfrm>
             <a:off x="640080" y="621792"/>
-            <a:ext cx="10881360" cy="566928"/>
+            <a:ext cx="10881360" cy="713232"/>
           </a:xfrm>
           <a:prstGeom prst="rect">
             <a:avLst/>
@@ -4421,7 +4549,7 @@
               <a:buNone/>
             </a:pPr>
             <a:r>
-              <a:rPr lang="en-US" sz="2700" b="1" dirty="0">
+              <a:rPr lang="en-US" sz="3400" b="1" dirty="0">
                 <a:solidFill>
                   <a:srgbClr val="003A63"/>
                 </a:solidFill>
@@ -4431,20 +4559,20 @@
               </a:rPr>
               <a:t>Risks, Failure Modes, and Guardrails</a:t>
             </a:r>
-            <a:endParaRPr lang="en-US" sz="2700" dirty="0"/>
-          </a:p>
-        </p:txBody>
-      </p:sp>
-      <p:sp>
-        <p:nvSpPr>
-          <p:cNvPr id="10" name="Text 8"/>
-          <p:cNvSpPr/>
-          <p:nvPr/>
-        </p:nvSpPr>
-        <p:spPr>
-          <a:xfrm>
-            <a:off x="868680" y="1417320"/>
-            <a:ext cx="6675120" cy="4434840"/>
+            <a:endParaRPr lang="en-US" sz="3400" dirty="0"/>
+          </a:p>
+        </p:txBody>
+      </p:sp>
+      <p:sp>
+        <p:nvSpPr>
+          <p:cNvPr id="11" name="Text 9"/>
+          <p:cNvSpPr/>
+          <p:nvPr/>
+        </p:nvSpPr>
+        <p:spPr>
+          <a:xfrm>
+            <a:off x="868680" y="1508760"/>
+            <a:ext cx="6537960" cy="4160520"/>
           </a:xfrm>
           <a:prstGeom prst="rect">
             <a:avLst/>
@@ -4459,7 +4587,7 @@
           <a:lstStyle/>
           <a:p>
             <a:r>
-              <a:rPr lang="en-US" sz="1700" dirty="0">
+              <a:rPr lang="en-US" sz="2100" dirty="0">
                 <a:solidFill>
                   <a:srgbClr val="17364A"/>
                 </a:solidFill>
@@ -4469,11 +4597,11 @@
               </a:rPr>
               <a:t>Excessive agency.</a:t>
             </a:r>
-            <a:endParaRPr lang="en-US" sz="1700" dirty="0"/>
-          </a:p>
-          <a:p>
-            <a:r>
-              <a:rPr lang="en-US" sz="1700" dirty="0">
+            <a:endParaRPr lang="en-US" sz="2100" dirty="0"/>
+          </a:p>
+          <a:p>
+            <a:r>
+              <a:rPr lang="en-US" sz="2100" dirty="0">
                 <a:solidFill>
                   <a:srgbClr val="17364A"/>
                 </a:solidFill>
@@ -4483,11 +4611,11 @@
               </a:rPr>
               <a:t>An agent may take actions beyond intended scope.</a:t>
             </a:r>
-            <a:endParaRPr lang="en-US" sz="1700" dirty="0"/>
-          </a:p>
-          <a:p>
-            <a:r>
-              <a:rPr lang="en-US" sz="1700" dirty="0">
+            <a:endParaRPr lang="en-US" sz="2100" dirty="0"/>
+          </a:p>
+          <a:p>
+            <a:r>
+              <a:rPr lang="en-US" sz="2100" dirty="0">
                 <a:solidFill>
                   <a:srgbClr val="17364A"/>
                 </a:solidFill>
@@ -4497,27 +4625,13 @@
               </a:rPr>
               <a:t>Guardrails include narrow goals, allowed-action lists, prohibited actions, and approval gates.</a:t>
             </a:r>
-            <a:endParaRPr lang="en-US" sz="1700" dirty="0"/>
-          </a:p>
-          <a:p>
-            <a:r>
-              <a:rPr lang="en-US" sz="1700" dirty="0">
-                <a:solidFill>
-                  <a:srgbClr val="17364A"/>
-                </a:solidFill>
-                <a:latin typeface="Aptos" pitchFamily="34" charset="0"/>
-                <a:ea typeface="Aptos" pitchFamily="34" charset="-122"/>
-                <a:cs typeface="Aptos" pitchFamily="34" charset="-120"/>
-              </a:rPr>
-              <a:t>Unauthorized system access.</a:t>
-            </a:r>
-            <a:endParaRPr lang="en-US" sz="1700" dirty="0"/>
-          </a:p>
-        </p:txBody>
-      </p:sp>
-      <p:sp>
-        <p:nvSpPr>
-          <p:cNvPr id="11" name="Shape 9"/>
+            <a:endParaRPr lang="en-US" sz="2100" dirty="0"/>
+          </a:p>
+        </p:txBody>
+      </p:sp>
+      <p:sp>
+        <p:nvSpPr>
+          <p:cNvPr id="12" name="Shape 10"/>
           <p:cNvSpPr/>
           <p:nvPr/>
         </p:nvSpPr>
@@ -4544,14 +4658,14 @@
       </p:sp>
       <p:sp>
         <p:nvSpPr>
-          <p:cNvPr id="12" name="Text 10"/>
+          <p:cNvPr id="13" name="Text 11"/>
           <p:cNvSpPr/>
           <p:nvPr/>
         </p:nvSpPr>
         <p:spPr>
           <a:xfrm>
             <a:off x="8074152" y="1563624"/>
-            <a:ext cx="2825496" cy="201168"/>
+            <a:ext cx="2825496" cy="256032"/>
           </a:xfrm>
           <a:prstGeom prst="rect">
             <a:avLst/>
@@ -4567,7 +4681,7 @@
               <a:buNone/>
             </a:pPr>
             <a:r>
-              <a:rPr lang="en-US" sz="950" b="1" dirty="0">
+              <a:rPr lang="en-US" sz="1300" b="1" dirty="0">
                 <a:solidFill>
                   <a:srgbClr val="0068B7"/>
                 </a:solidFill>
@@ -4577,20 +4691,20 @@
               </a:rPr>
               <a:t>Key idea</a:t>
             </a:r>
-            <a:endParaRPr lang="en-US" sz="950" dirty="0"/>
-          </a:p>
-        </p:txBody>
-      </p:sp>
-      <p:sp>
-        <p:nvSpPr>
-          <p:cNvPr id="13" name="Text 11"/>
-          <p:cNvSpPr/>
-          <p:nvPr/>
-        </p:nvSpPr>
-        <p:spPr>
-          <a:xfrm>
-            <a:off x="8074152" y="1856232"/>
-            <a:ext cx="2825496" cy="1261872"/>
+            <a:endParaRPr lang="en-US" sz="1300" dirty="0"/>
+          </a:p>
+        </p:txBody>
+      </p:sp>
+      <p:sp>
+        <p:nvSpPr>
+          <p:cNvPr id="14" name="Text 12"/>
+          <p:cNvSpPr/>
+          <p:nvPr/>
+        </p:nvSpPr>
+        <p:spPr>
+          <a:xfrm>
+            <a:off x="8074152" y="1920240"/>
+            <a:ext cx="2825496" cy="1188720"/>
           </a:xfrm>
           <a:prstGeom prst="rect">
             <a:avLst/>
@@ -4608,7 +4722,7 @@
               <a:buNone/>
             </a:pPr>
             <a:r>
-              <a:rPr lang="en-US" sz="1250" dirty="0">
+              <a:rPr lang="en-US" sz="1550" dirty="0">
                 <a:solidFill>
                   <a:srgbClr val="17364A"/>
                 </a:solidFill>
@@ -4618,13 +4732,13 @@
               </a:rPr>
               <a:t>Excessive agency.</a:t>
             </a:r>
-            <a:endParaRPr lang="en-US" sz="1250" dirty="0"/>
-          </a:p>
-        </p:txBody>
-      </p:sp>
-      <p:sp>
-        <p:nvSpPr>
-          <p:cNvPr id="14" name="Shape 12"/>
+            <a:endParaRPr lang="en-US" sz="1550" dirty="0"/>
+          </a:p>
+        </p:txBody>
+      </p:sp>
+      <p:sp>
+        <p:nvSpPr>
+          <p:cNvPr id="15" name="Shape 13"/>
           <p:cNvSpPr/>
           <p:nvPr/>
         </p:nvSpPr>
@@ -4651,14 +4765,14 @@
       </p:sp>
       <p:sp>
         <p:nvSpPr>
-          <p:cNvPr id="15" name="Text 13"/>
+          <p:cNvPr id="16" name="Text 14"/>
           <p:cNvSpPr/>
           <p:nvPr/>
         </p:nvSpPr>
         <p:spPr>
           <a:xfrm>
             <a:off x="8074152" y="3666744"/>
-            <a:ext cx="2825496" cy="201168"/>
+            <a:ext cx="2825496" cy="256032"/>
           </a:xfrm>
           <a:prstGeom prst="rect">
             <a:avLst/>
@@ -4674,7 +4788,7 @@
               <a:buNone/>
             </a:pPr>
             <a:r>
-              <a:rPr lang="en-US" sz="950" b="1" dirty="0">
+              <a:rPr lang="en-US" sz="1300" b="1" dirty="0">
                 <a:solidFill>
                   <a:srgbClr val="0068B7"/>
                 </a:solidFill>
@@ -4684,20 +4798,20 @@
               </a:rPr>
               <a:t>Use this for</a:t>
             </a:r>
-            <a:endParaRPr lang="en-US" sz="950" dirty="0"/>
-          </a:p>
-        </p:txBody>
-      </p:sp>
-      <p:sp>
-        <p:nvSpPr>
-          <p:cNvPr id="16" name="Text 14"/>
-          <p:cNvSpPr/>
-          <p:nvPr/>
-        </p:nvSpPr>
-        <p:spPr>
-          <a:xfrm>
-            <a:off x="8074152" y="3959352"/>
-            <a:ext cx="2825496" cy="1170432"/>
+            <a:endParaRPr lang="en-US" sz="1300" dirty="0"/>
+          </a:p>
+        </p:txBody>
+      </p:sp>
+      <p:sp>
+        <p:nvSpPr>
+          <p:cNvPr id="17" name="Text 15"/>
+          <p:cNvSpPr/>
+          <p:nvPr/>
+        </p:nvSpPr>
+        <p:spPr>
+          <a:xfrm>
+            <a:off x="8074152" y="4023360"/>
+            <a:ext cx="2825496" cy="1097280"/>
           </a:xfrm>
           <a:prstGeom prst="rect">
             <a:avLst/>
@@ -4715,7 +4829,7 @@
               <a:buNone/>
             </a:pPr>
             <a:r>
-              <a:rPr lang="en-US" sz="1250" dirty="0">
+              <a:rPr lang="en-US" sz="1550" dirty="0">
                 <a:solidFill>
                   <a:srgbClr val="17364A"/>
                 </a:solidFill>
@@ -4725,7 +4839,7 @@
               </a:rPr>
               <a:t>Connect the concept to public health decisions, safeguards, documentation, or implementation work.</a:t>
             </a:r>
-            <a:endParaRPr lang="en-US" sz="1250" dirty="0"/>
+            <a:endParaRPr lang="en-US" sz="1550" dirty="0"/>
           </a:p>
         </p:txBody>
       </p:sp>
@@ -4922,7 +5036,7 @@
                 <a:ea typeface="Aptos" pitchFamily="34" charset="-122"/>
                 <a:cs typeface="Aptos" pitchFamily="34" charset="-120"/>
               </a:rPr>
-              <a:t>© Paula Soper</a:t>
+              <a:t>Â© Paula Soper</a:t>
             </a:r>
             <a:endParaRPr lang="en-US" sz="800" dirty="0"/>
           </a:p>
@@ -4936,8 +5050,47 @@
         </p:nvSpPr>
         <p:spPr>
           <a:xfrm>
+            <a:off x="11137392" y="6510528"/>
+            <a:ext cx="411480" cy="201168"/>
+          </a:xfrm>
+          <a:prstGeom prst="rect">
+            <a:avLst/>
+          </a:prstGeom>
+          <a:noFill/>
+          <a:ln/>
+        </p:spPr>
+        <p:txBody>
+          <a:bodyPr wrap="square" lIns="0" tIns="0" rIns="0" bIns="0" rtlCol="0" anchor="ctr"/>
+          <a:lstStyle/>
+          <a:p>
+            <a:pPr algn="r" indent="0" marL="0">
+              <a:buNone/>
+            </a:pPr>
+            <a:r>
+              <a:rPr lang="en-US" sz="900" dirty="0">
+                <a:solidFill>
+                  <a:srgbClr val="5F7181"/>
+                </a:solidFill>
+                <a:latin typeface="Aptos" pitchFamily="34" charset="0"/>
+                <a:ea typeface="Aptos" pitchFamily="34" charset="-122"/>
+                <a:cs typeface="Aptos" pitchFamily="34" charset="-120"/>
+              </a:rPr>
+              <a:t>13</a:t>
+            </a:r>
+            <a:endParaRPr lang="en-US" sz="900" dirty="0"/>
+          </a:p>
+        </p:txBody>
+      </p:sp>
+      <p:sp>
+        <p:nvSpPr>
+          <p:cNvPr id="8" name="Text 6"/>
+          <p:cNvSpPr/>
+          <p:nvPr/>
+        </p:nvSpPr>
+        <p:spPr>
+          <a:xfrm>
             <a:off x="640080" y="658368"/>
-            <a:ext cx="10881360" cy="566928"/>
+            <a:ext cx="10881360" cy="713232"/>
           </a:xfrm>
           <a:prstGeom prst="rect">
             <a:avLst/>
@@ -4955,7 +5108,7 @@
               <a:buNone/>
             </a:pPr>
             <a:r>
-              <a:rPr lang="en-US" sz="2700" b="1" dirty="0">
+              <a:rPr lang="en-US" sz="3400" b="1" dirty="0">
                 <a:solidFill>
                   <a:srgbClr val="003A63"/>
                 </a:solidFill>
@@ -4965,20 +5118,20 @@
               </a:rPr>
               <a:t>Risks, Failure Modes, and Guardrails Continued</a:t>
             </a:r>
-            <a:endParaRPr lang="en-US" sz="2700" dirty="0"/>
-          </a:p>
-        </p:txBody>
-      </p:sp>
-      <p:sp>
-        <p:nvSpPr>
-          <p:cNvPr id="8" name="Text 6"/>
-          <p:cNvSpPr/>
-          <p:nvPr/>
-        </p:nvSpPr>
-        <p:spPr>
-          <a:xfrm>
-            <a:off x="868680" y="1417320"/>
-            <a:ext cx="6675120" cy="4434840"/>
+            <a:endParaRPr lang="en-US" sz="3400" dirty="0"/>
+          </a:p>
+        </p:txBody>
+      </p:sp>
+      <p:sp>
+        <p:nvSpPr>
+          <p:cNvPr id="9" name="Text 7"/>
+          <p:cNvSpPr/>
+          <p:nvPr/>
+        </p:nvSpPr>
+        <p:spPr>
+          <a:xfrm>
+            <a:off x="868680" y="1508760"/>
+            <a:ext cx="6537960" cy="4160520"/>
           </a:xfrm>
           <a:prstGeom prst="rect">
             <a:avLst/>
@@ -4993,7 +5146,7 @@
           <a:lstStyle/>
           <a:p>
             <a:r>
-              <a:rPr lang="en-US" sz="1700" dirty="0">
+              <a:rPr lang="en-US" sz="2100" dirty="0">
                 <a:solidFill>
                   <a:srgbClr val="17364A"/>
                 </a:solidFill>
@@ -5003,11 +5156,11 @@
               </a:rPr>
               <a:t>Unclear accountability.</a:t>
             </a:r>
-            <a:endParaRPr lang="en-US" sz="1700" dirty="0"/>
-          </a:p>
-          <a:p>
-            <a:r>
-              <a:rPr lang="en-US" sz="1700" dirty="0">
+            <a:endParaRPr lang="en-US" sz="2100" dirty="0"/>
+          </a:p>
+          <a:p>
+            <a:r>
+              <a:rPr lang="en-US" sz="2100" dirty="0">
                 <a:solidFill>
                   <a:srgbClr val="17364A"/>
                 </a:solidFill>
@@ -5017,11 +5170,11 @@
               </a:rPr>
               <a:t>Staff may not know who is responsible for agent actions.</a:t>
             </a:r>
-            <a:endParaRPr lang="en-US" sz="1700" dirty="0"/>
-          </a:p>
-          <a:p>
-            <a:r>
-              <a:rPr lang="en-US" sz="1700" dirty="0">
+            <a:endParaRPr lang="en-US" sz="2100" dirty="0"/>
+          </a:p>
+          <a:p>
+            <a:r>
+              <a:rPr lang="en-US" sz="2100" dirty="0">
                 <a:solidFill>
                   <a:srgbClr val="17364A"/>
                 </a:solidFill>
@@ -5031,13 +5184,13 @@
               </a:rPr>
               <a:t>Guardrails include role definitions, review records, and governance ownership.</a:t>
             </a:r>
-            <a:endParaRPr lang="en-US" sz="1700" dirty="0"/>
-          </a:p>
-        </p:txBody>
-      </p:sp>
-      <p:sp>
-        <p:nvSpPr>
-          <p:cNvPr id="9" name="Shape 7"/>
+            <a:endParaRPr lang="en-US" sz="2100" dirty="0"/>
+          </a:p>
+        </p:txBody>
+      </p:sp>
+      <p:sp>
+        <p:nvSpPr>
+          <p:cNvPr id="10" name="Shape 8"/>
           <p:cNvSpPr/>
           <p:nvPr/>
         </p:nvSpPr>
@@ -5064,14 +5217,14 @@
       </p:sp>
       <p:sp>
         <p:nvSpPr>
-          <p:cNvPr id="10" name="Text 8"/>
+          <p:cNvPr id="11" name="Text 9"/>
           <p:cNvSpPr/>
           <p:nvPr/>
         </p:nvSpPr>
         <p:spPr>
           <a:xfrm>
             <a:off x="8074152" y="1563624"/>
-            <a:ext cx="2825496" cy="201168"/>
+            <a:ext cx="2825496" cy="256032"/>
           </a:xfrm>
           <a:prstGeom prst="rect">
             <a:avLst/>
@@ -5087,7 +5240,7 @@
               <a:buNone/>
             </a:pPr>
             <a:r>
-              <a:rPr lang="en-US" sz="950" b="1" dirty="0">
+              <a:rPr lang="en-US" sz="1300" b="1" dirty="0">
                 <a:solidFill>
                   <a:srgbClr val="0068B7"/>
                 </a:solidFill>
@@ -5097,20 +5250,20 @@
               </a:rPr>
               <a:t>Key idea</a:t>
             </a:r>
-            <a:endParaRPr lang="en-US" sz="950" dirty="0"/>
-          </a:p>
-        </p:txBody>
-      </p:sp>
-      <p:sp>
-        <p:nvSpPr>
-          <p:cNvPr id="11" name="Text 9"/>
-          <p:cNvSpPr/>
-          <p:nvPr/>
-        </p:nvSpPr>
-        <p:spPr>
-          <a:xfrm>
-            <a:off x="8074152" y="1856232"/>
-            <a:ext cx="2825496" cy="1261872"/>
+            <a:endParaRPr lang="en-US" sz="1300" dirty="0"/>
+          </a:p>
+        </p:txBody>
+      </p:sp>
+      <p:sp>
+        <p:nvSpPr>
+          <p:cNvPr id="12" name="Text 10"/>
+          <p:cNvSpPr/>
+          <p:nvPr/>
+        </p:nvSpPr>
+        <p:spPr>
+          <a:xfrm>
+            <a:off x="8074152" y="1920240"/>
+            <a:ext cx="2825496" cy="1188720"/>
           </a:xfrm>
           <a:prstGeom prst="rect">
             <a:avLst/>
@@ -5128,7 +5281,7 @@
               <a:buNone/>
             </a:pPr>
             <a:r>
-              <a:rPr lang="en-US" sz="1250" dirty="0">
+              <a:rPr lang="en-US" sz="1550" dirty="0">
                 <a:solidFill>
                   <a:srgbClr val="17364A"/>
                 </a:solidFill>
@@ -5138,13 +5291,13 @@
               </a:rPr>
               <a:t>Unclear accountability.</a:t>
             </a:r>
-            <a:endParaRPr lang="en-US" sz="1250" dirty="0"/>
-          </a:p>
-        </p:txBody>
-      </p:sp>
-      <p:sp>
-        <p:nvSpPr>
-          <p:cNvPr id="12" name="Shape 10"/>
+            <a:endParaRPr lang="en-US" sz="1550" dirty="0"/>
+          </a:p>
+        </p:txBody>
+      </p:sp>
+      <p:sp>
+        <p:nvSpPr>
+          <p:cNvPr id="13" name="Shape 11"/>
           <p:cNvSpPr/>
           <p:nvPr/>
         </p:nvSpPr>
@@ -5171,14 +5324,14 @@
       </p:sp>
       <p:sp>
         <p:nvSpPr>
-          <p:cNvPr id="13" name="Text 11"/>
+          <p:cNvPr id="14" name="Text 12"/>
           <p:cNvSpPr/>
           <p:nvPr/>
         </p:nvSpPr>
         <p:spPr>
           <a:xfrm>
             <a:off x="8074152" y="3666744"/>
-            <a:ext cx="2825496" cy="201168"/>
+            <a:ext cx="2825496" cy="256032"/>
           </a:xfrm>
           <a:prstGeom prst="rect">
             <a:avLst/>
@@ -5194,7 +5347,7 @@
               <a:buNone/>
             </a:pPr>
             <a:r>
-              <a:rPr lang="en-US" sz="950" b="1" dirty="0">
+              <a:rPr lang="en-US" sz="1300" b="1" dirty="0">
                 <a:solidFill>
                   <a:srgbClr val="0068B7"/>
                 </a:solidFill>
@@ -5204,20 +5357,20 @@
               </a:rPr>
               <a:t>Use this for</a:t>
             </a:r>
-            <a:endParaRPr lang="en-US" sz="950" dirty="0"/>
-          </a:p>
-        </p:txBody>
-      </p:sp>
-      <p:sp>
-        <p:nvSpPr>
-          <p:cNvPr id="14" name="Text 12"/>
-          <p:cNvSpPr/>
-          <p:nvPr/>
-        </p:nvSpPr>
-        <p:spPr>
-          <a:xfrm>
-            <a:off x="8074152" y="3959352"/>
-            <a:ext cx="2825496" cy="1170432"/>
+            <a:endParaRPr lang="en-US" sz="1300" dirty="0"/>
+          </a:p>
+        </p:txBody>
+      </p:sp>
+      <p:sp>
+        <p:nvSpPr>
+          <p:cNvPr id="15" name="Text 13"/>
+          <p:cNvSpPr/>
+          <p:nvPr/>
+        </p:nvSpPr>
+        <p:spPr>
+          <a:xfrm>
+            <a:off x="8074152" y="4023360"/>
+            <a:ext cx="2825496" cy="1097280"/>
           </a:xfrm>
           <a:prstGeom prst="rect">
             <a:avLst/>
@@ -5235,7 +5388,7 @@
               <a:buNone/>
             </a:pPr>
             <a:r>
-              <a:rPr lang="en-US" sz="1250" dirty="0">
+              <a:rPr lang="en-US" sz="1550" dirty="0">
                 <a:solidFill>
                   <a:srgbClr val="17364A"/>
                 </a:solidFill>
@@ -5245,7 +5398,7 @@
               </a:rPr>
               <a:t>Connect the concept to public health decisions, safeguards, documentation, or implementation work.</a:t>
             </a:r>
-            <a:endParaRPr lang="en-US" sz="1250" dirty="0"/>
+            <a:endParaRPr lang="en-US" sz="1550" dirty="0"/>
           </a:p>
         </p:txBody>
       </p:sp>
@@ -5442,7 +5595,7 @@
                 <a:ea typeface="Aptos" pitchFamily="34" charset="-122"/>
                 <a:cs typeface="Aptos" pitchFamily="34" charset="-120"/>
               </a:rPr>
-              <a:t>© Paula Soper</a:t>
+              <a:t>Â© Paula Soper</a:t>
             </a:r>
             <a:endParaRPr lang="en-US" sz="800" dirty="0"/>
           </a:p>
@@ -5450,7 +5603,46 @@
       </p:sp>
       <p:sp>
         <p:nvSpPr>
-          <p:cNvPr id="7" name="Shape 5"/>
+          <p:cNvPr id="7" name="Text 5"/>
+          <p:cNvSpPr/>
+          <p:nvPr/>
+        </p:nvSpPr>
+        <p:spPr>
+          <a:xfrm>
+            <a:off x="11137392" y="6510528"/>
+            <a:ext cx="411480" cy="201168"/>
+          </a:xfrm>
+          <a:prstGeom prst="rect">
+            <a:avLst/>
+          </a:prstGeom>
+          <a:noFill/>
+          <a:ln/>
+        </p:spPr>
+        <p:txBody>
+          <a:bodyPr wrap="square" lIns="0" tIns="0" rIns="0" bIns="0" rtlCol="0" anchor="ctr"/>
+          <a:lstStyle/>
+          <a:p>
+            <a:pPr algn="r" indent="0" marL="0">
+              <a:buNone/>
+            </a:pPr>
+            <a:r>
+              <a:rPr lang="en-US" sz="900" dirty="0">
+                <a:solidFill>
+                  <a:srgbClr val="5F7181"/>
+                </a:solidFill>
+                <a:latin typeface="Aptos" pitchFamily="34" charset="0"/>
+                <a:ea typeface="Aptos" pitchFamily="34" charset="-122"/>
+                <a:cs typeface="Aptos" pitchFamily="34" charset="-120"/>
+              </a:rPr>
+              <a:t>14</a:t>
+            </a:r>
+            <a:endParaRPr lang="en-US" sz="900" dirty="0"/>
+          </a:p>
+        </p:txBody>
+      </p:sp>
+      <p:sp>
+        <p:nvSpPr>
+          <p:cNvPr id="8" name="Shape 6"/>
           <p:cNvSpPr/>
           <p:nvPr/>
         </p:nvSpPr>
@@ -5475,7 +5667,7 @@
       </p:sp>
       <p:sp>
         <p:nvSpPr>
-          <p:cNvPr id="8" name="Text 6"/>
+          <p:cNvPr id="9" name="Text 7"/>
           <p:cNvSpPr/>
           <p:nvPr/>
         </p:nvSpPr>
@@ -5514,14 +5706,14 @@
       </p:sp>
       <p:sp>
         <p:nvSpPr>
-          <p:cNvPr id="9" name="Text 7"/>
+          <p:cNvPr id="10" name="Text 8"/>
           <p:cNvSpPr/>
           <p:nvPr/>
         </p:nvSpPr>
         <p:spPr>
           <a:xfrm>
             <a:off x="640080" y="621792"/>
-            <a:ext cx="10881360" cy="566928"/>
+            <a:ext cx="10881360" cy="713232"/>
           </a:xfrm>
           <a:prstGeom prst="rect">
             <a:avLst/>
@@ -5539,7 +5731,7 @@
               <a:buNone/>
             </a:pPr>
             <a:r>
-              <a:rPr lang="en-US" sz="2700" b="1" dirty="0">
+              <a:rPr lang="en-US" sz="3400" b="1" dirty="0">
                 <a:solidFill>
                   <a:srgbClr val="003A63"/>
                 </a:solidFill>
@@ -5549,20 +5741,20 @@
               </a:rPr>
               <a:t>Application to AI-Supported Workflows</a:t>
             </a:r>
-            <a:endParaRPr lang="en-US" sz="2700" dirty="0"/>
-          </a:p>
-        </p:txBody>
-      </p:sp>
-      <p:sp>
-        <p:nvSpPr>
-          <p:cNvPr id="10" name="Text 8"/>
-          <p:cNvSpPr/>
-          <p:nvPr/>
-        </p:nvSpPr>
-        <p:spPr>
-          <a:xfrm>
-            <a:off x="868680" y="1417320"/>
-            <a:ext cx="6675120" cy="4434840"/>
+            <a:endParaRPr lang="en-US" sz="3400" dirty="0"/>
+          </a:p>
+        </p:txBody>
+      </p:sp>
+      <p:sp>
+        <p:nvSpPr>
+          <p:cNvPr id="11" name="Text 9"/>
+          <p:cNvSpPr/>
+          <p:nvPr/>
+        </p:nvSpPr>
+        <p:spPr>
+          <a:xfrm>
+            <a:off x="868680" y="1508760"/>
+            <a:ext cx="6537960" cy="4160520"/>
           </a:xfrm>
           <a:prstGeom prst="rect">
             <a:avLst/>
@@ -5577,7 +5769,7 @@
           <a:lstStyle/>
           <a:p>
             <a:r>
-              <a:rPr lang="en-US" sz="1700" dirty="0">
+              <a:rPr lang="en-US" sz="2100" dirty="0">
                 <a:solidFill>
                   <a:srgbClr val="17364A"/>
                 </a:solidFill>
@@ -5585,13 +5777,13 @@
                 <a:ea typeface="Aptos" pitchFamily="34" charset="-122"/>
                 <a:cs typeface="Aptos" pitchFamily="34" charset="-120"/>
               </a:rPr>
-              <a:t>Agentic workflows may combine RAG, APIs, prompts, classification models, workflow rules, and messaging systems.</a:t>
-            </a:r>
-            <a:endParaRPr lang="en-US" sz="1700" dirty="0"/>
-          </a:p>
-          <a:p>
-            <a:r>
-              <a:rPr lang="en-US" sz="1700" dirty="0">
+              <a:t>Agentic workflows may combine RAG, APIs, prompts, classification models, workflow rules, and messaging.</a:t>
+            </a:r>
+            <a:endParaRPr lang="en-US" sz="2100" dirty="0"/>
+          </a:p>
+          <a:p>
+            <a:r>
+              <a:rPr lang="en-US" sz="2100" dirty="0">
                 <a:solidFill>
                   <a:srgbClr val="17364A"/>
                 </a:solidFill>
@@ -5601,11 +5793,11 @@
               </a:rPr>
               <a:t>They are most appropriate when tasks are repetitive, bounded, reviewable, and supported by reliable data.</a:t>
             </a:r>
-            <a:endParaRPr lang="en-US" sz="1700" dirty="0"/>
-          </a:p>
-          <a:p>
-            <a:r>
-              <a:rPr lang="en-US" sz="1700" dirty="0">
+            <a:endParaRPr lang="en-US" sz="2100" dirty="0"/>
+          </a:p>
+          <a:p>
+            <a:r>
+              <a:rPr lang="en-US" sz="2100" dirty="0">
                 <a:solidFill>
                   <a:srgbClr val="17364A"/>
                 </a:solidFill>
@@ -5613,29 +5805,15 @@
                 <a:ea typeface="Aptos" pitchFamily="34" charset="-122"/>
                 <a:cs typeface="Aptos" pitchFamily="34" charset="-120"/>
               </a:rPr>
-              <a:t>They are least appropriate when the task requires complex judgment, legal interpretation, community sensitivity, or.</a:t>
-            </a:r>
-            <a:endParaRPr lang="en-US" sz="1700" dirty="0"/>
-          </a:p>
-          <a:p>
-            <a:r>
-              <a:rPr lang="en-US" sz="1700" dirty="0">
-                <a:solidFill>
-                  <a:srgbClr val="17364A"/>
-                </a:solidFill>
-                <a:latin typeface="Aptos" pitchFamily="34" charset="0"/>
-                <a:ea typeface="Aptos" pitchFamily="34" charset="-122"/>
-                <a:cs typeface="Aptos" pitchFamily="34" charset="-120"/>
-              </a:rPr>
-              <a:t>Public health agencies should pilot agentic workflows in limited, low-risk settings before expanding.</a:t>
-            </a:r>
-            <a:endParaRPr lang="en-US" sz="1700" dirty="0"/>
-          </a:p>
-        </p:txBody>
-      </p:sp>
-      <p:sp>
-        <p:nvSpPr>
-          <p:cNvPr id="11" name="Shape 9"/>
+              <a:t>They are least appropriate when the task requires complex judgment, legal interpretation, community.</a:t>
+            </a:r>
+            <a:endParaRPr lang="en-US" sz="2100" dirty="0"/>
+          </a:p>
+        </p:txBody>
+      </p:sp>
+      <p:sp>
+        <p:nvSpPr>
+          <p:cNvPr id="12" name="Shape 10"/>
           <p:cNvSpPr/>
           <p:nvPr/>
         </p:nvSpPr>
@@ -5662,14 +5840,14 @@
       </p:sp>
       <p:sp>
         <p:nvSpPr>
-          <p:cNvPr id="12" name="Text 10"/>
+          <p:cNvPr id="13" name="Text 11"/>
           <p:cNvSpPr/>
           <p:nvPr/>
         </p:nvSpPr>
         <p:spPr>
           <a:xfrm>
             <a:off x="8074152" y="1563624"/>
-            <a:ext cx="2825496" cy="201168"/>
+            <a:ext cx="2825496" cy="256032"/>
           </a:xfrm>
           <a:prstGeom prst="rect">
             <a:avLst/>
@@ -5685,7 +5863,7 @@
               <a:buNone/>
             </a:pPr>
             <a:r>
-              <a:rPr lang="en-US" sz="950" b="1" dirty="0">
+              <a:rPr lang="en-US" sz="1300" b="1" dirty="0">
                 <a:solidFill>
                   <a:srgbClr val="0068B7"/>
                 </a:solidFill>
@@ -5695,20 +5873,20 @@
               </a:rPr>
               <a:t>Key idea</a:t>
             </a:r>
-            <a:endParaRPr lang="en-US" sz="950" dirty="0"/>
-          </a:p>
-        </p:txBody>
-      </p:sp>
-      <p:sp>
-        <p:nvSpPr>
-          <p:cNvPr id="13" name="Text 11"/>
-          <p:cNvSpPr/>
-          <p:nvPr/>
-        </p:nvSpPr>
-        <p:spPr>
-          <a:xfrm>
-            <a:off x="8074152" y="1856232"/>
-            <a:ext cx="2825496" cy="1261872"/>
+            <a:endParaRPr lang="en-US" sz="1300" dirty="0"/>
+          </a:p>
+        </p:txBody>
+      </p:sp>
+      <p:sp>
+        <p:nvSpPr>
+          <p:cNvPr id="14" name="Text 12"/>
+          <p:cNvSpPr/>
+          <p:nvPr/>
+        </p:nvSpPr>
+        <p:spPr>
+          <a:xfrm>
+            <a:off x="8074152" y="1920240"/>
+            <a:ext cx="2825496" cy="1188720"/>
           </a:xfrm>
           <a:prstGeom prst="rect">
             <a:avLst/>
@@ -5726,7 +5904,7 @@
               <a:buNone/>
             </a:pPr>
             <a:r>
-              <a:rPr lang="en-US" sz="1250" dirty="0">
+              <a:rPr lang="en-US" sz="1550" dirty="0">
                 <a:solidFill>
                   <a:srgbClr val="17364A"/>
                 </a:solidFill>
@@ -5734,15 +5912,15 @@
                 <a:ea typeface="Aptos" pitchFamily="34" charset="-122"/>
                 <a:cs typeface="Aptos" pitchFamily="34" charset="-120"/>
               </a:rPr>
-              <a:t>Agentic workflows may combine RAG, APIs, prompts, classification models, workflow rules, and messaging systems.</a:t>
-            </a:r>
-            <a:endParaRPr lang="en-US" sz="1250" dirty="0"/>
-          </a:p>
-        </p:txBody>
-      </p:sp>
-      <p:sp>
-        <p:nvSpPr>
-          <p:cNvPr id="14" name="Shape 12"/>
+              <a:t>Agentic workflows may combine RAG, APIs, prompts, classification models, workflow rules, and messaging.</a:t>
+            </a:r>
+            <a:endParaRPr lang="en-US" sz="1550" dirty="0"/>
+          </a:p>
+        </p:txBody>
+      </p:sp>
+      <p:sp>
+        <p:nvSpPr>
+          <p:cNvPr id="15" name="Shape 13"/>
           <p:cNvSpPr/>
           <p:nvPr/>
         </p:nvSpPr>
@@ -5769,14 +5947,14 @@
       </p:sp>
       <p:sp>
         <p:nvSpPr>
-          <p:cNvPr id="15" name="Text 13"/>
+          <p:cNvPr id="16" name="Text 14"/>
           <p:cNvSpPr/>
           <p:nvPr/>
         </p:nvSpPr>
         <p:spPr>
           <a:xfrm>
             <a:off x="8074152" y="3666744"/>
-            <a:ext cx="2825496" cy="201168"/>
+            <a:ext cx="2825496" cy="256032"/>
           </a:xfrm>
           <a:prstGeom prst="rect">
             <a:avLst/>
@@ -5792,7 +5970,7 @@
               <a:buNone/>
             </a:pPr>
             <a:r>
-              <a:rPr lang="en-US" sz="950" b="1" dirty="0">
+              <a:rPr lang="en-US" sz="1300" b="1" dirty="0">
                 <a:solidFill>
                   <a:srgbClr val="0068B7"/>
                 </a:solidFill>
@@ -5802,20 +5980,20 @@
               </a:rPr>
               <a:t>Use this for</a:t>
             </a:r>
-            <a:endParaRPr lang="en-US" sz="950" dirty="0"/>
-          </a:p>
-        </p:txBody>
-      </p:sp>
-      <p:sp>
-        <p:nvSpPr>
-          <p:cNvPr id="16" name="Text 14"/>
-          <p:cNvSpPr/>
-          <p:nvPr/>
-        </p:nvSpPr>
-        <p:spPr>
-          <a:xfrm>
-            <a:off x="8074152" y="3959352"/>
-            <a:ext cx="2825496" cy="1170432"/>
+            <a:endParaRPr lang="en-US" sz="1300" dirty="0"/>
+          </a:p>
+        </p:txBody>
+      </p:sp>
+      <p:sp>
+        <p:nvSpPr>
+          <p:cNvPr id="17" name="Text 15"/>
+          <p:cNvSpPr/>
+          <p:nvPr/>
+        </p:nvSpPr>
+        <p:spPr>
+          <a:xfrm>
+            <a:off x="8074152" y="4023360"/>
+            <a:ext cx="2825496" cy="1097280"/>
           </a:xfrm>
           <a:prstGeom prst="rect">
             <a:avLst/>
@@ -5833,7 +6011,7 @@
               <a:buNone/>
             </a:pPr>
             <a:r>
-              <a:rPr lang="en-US" sz="1250" dirty="0">
+              <a:rPr lang="en-US" sz="1550" dirty="0">
                 <a:solidFill>
                   <a:srgbClr val="17364A"/>
                 </a:solidFill>
@@ -5843,7 +6021,7 @@
               </a:rPr>
               <a:t>Connect the concept to public health decisions, safeguards, documentation, or implementation work.</a:t>
             </a:r>
-            <a:endParaRPr lang="en-US" sz="1250" dirty="0"/>
+            <a:endParaRPr lang="en-US" sz="1550" dirty="0"/>
           </a:p>
         </p:txBody>
       </p:sp>
@@ -6040,7 +6218,7 @@
                 <a:ea typeface="Aptos" pitchFamily="34" charset="-122"/>
                 <a:cs typeface="Aptos" pitchFamily="34" charset="-120"/>
               </a:rPr>
-              <a:t>© Paula Soper</a:t>
+              <a:t>Â© Paula Soper</a:t>
             </a:r>
             <a:endParaRPr lang="en-US" sz="800" dirty="0"/>
           </a:p>
@@ -6048,7 +6226,46 @@
       </p:sp>
       <p:sp>
         <p:nvSpPr>
-          <p:cNvPr id="7" name="Shape 5"/>
+          <p:cNvPr id="7" name="Text 5"/>
+          <p:cNvSpPr/>
+          <p:nvPr/>
+        </p:nvSpPr>
+        <p:spPr>
+          <a:xfrm>
+            <a:off x="11137392" y="6510528"/>
+            <a:ext cx="411480" cy="201168"/>
+          </a:xfrm>
+          <a:prstGeom prst="rect">
+            <a:avLst/>
+          </a:prstGeom>
+          <a:noFill/>
+          <a:ln/>
+        </p:spPr>
+        <p:txBody>
+          <a:bodyPr wrap="square" lIns="0" tIns="0" rIns="0" bIns="0" rtlCol="0" anchor="ctr"/>
+          <a:lstStyle/>
+          <a:p>
+            <a:pPr algn="r" indent="0" marL="0">
+              <a:buNone/>
+            </a:pPr>
+            <a:r>
+              <a:rPr lang="en-US" sz="900" dirty="0">
+                <a:solidFill>
+                  <a:srgbClr val="5F7181"/>
+                </a:solidFill>
+                <a:latin typeface="Aptos" pitchFamily="34" charset="0"/>
+                <a:ea typeface="Aptos" pitchFamily="34" charset="-122"/>
+                <a:cs typeface="Aptos" pitchFamily="34" charset="-120"/>
+              </a:rPr>
+              <a:t>15</a:t>
+            </a:r>
+            <a:endParaRPr lang="en-US" sz="900" dirty="0"/>
+          </a:p>
+        </p:txBody>
+      </p:sp>
+      <p:sp>
+        <p:nvSpPr>
+          <p:cNvPr id="8" name="Shape 6"/>
           <p:cNvSpPr/>
           <p:nvPr/>
         </p:nvSpPr>
@@ -6073,7 +6290,7 @@
       </p:sp>
       <p:sp>
         <p:nvSpPr>
-          <p:cNvPr id="8" name="Text 6"/>
+          <p:cNvPr id="9" name="Text 7"/>
           <p:cNvSpPr/>
           <p:nvPr/>
         </p:nvSpPr>
@@ -6112,14 +6329,14 @@
       </p:sp>
       <p:sp>
         <p:nvSpPr>
-          <p:cNvPr id="9" name="Text 7"/>
+          <p:cNvPr id="10" name="Text 8"/>
           <p:cNvSpPr/>
           <p:nvPr/>
         </p:nvSpPr>
         <p:spPr>
           <a:xfrm>
             <a:off x="640080" y="621792"/>
-            <a:ext cx="10881360" cy="566928"/>
+            <a:ext cx="10881360" cy="713232"/>
           </a:xfrm>
           <a:prstGeom prst="rect">
             <a:avLst/>
@@ -6137,7 +6354,7 @@
               <a:buNone/>
             </a:pPr>
             <a:r>
-              <a:rPr lang="en-US" sz="2700" b="1" dirty="0">
+              <a:rPr lang="en-US" sz="3400" b="1" dirty="0">
                 <a:solidFill>
                   <a:srgbClr val="003A63"/>
                 </a:solidFill>
@@ -6147,20 +6364,20 @@
               </a:rPr>
               <a:t>Reflection Questions</a:t>
             </a:r>
-            <a:endParaRPr lang="en-US" sz="2700" dirty="0"/>
-          </a:p>
-        </p:txBody>
-      </p:sp>
-      <p:sp>
-        <p:nvSpPr>
-          <p:cNvPr id="10" name="Text 8"/>
-          <p:cNvSpPr/>
-          <p:nvPr/>
-        </p:nvSpPr>
-        <p:spPr>
-          <a:xfrm>
-            <a:off x="868680" y="1417320"/>
-            <a:ext cx="6675120" cy="4434840"/>
+            <a:endParaRPr lang="en-US" sz="3400" dirty="0"/>
+          </a:p>
+        </p:txBody>
+      </p:sp>
+      <p:sp>
+        <p:nvSpPr>
+          <p:cNvPr id="11" name="Text 9"/>
+          <p:cNvSpPr/>
+          <p:nvPr/>
+        </p:nvSpPr>
+        <p:spPr>
+          <a:xfrm>
+            <a:off x="868680" y="1508760"/>
+            <a:ext cx="6537960" cy="4160520"/>
           </a:xfrm>
           <a:prstGeom prst="rect">
             <a:avLst/>
@@ -6175,7 +6392,7 @@
           <a:lstStyle/>
           <a:p>
             <a:r>
-              <a:rPr lang="en-US" sz="1700" dirty="0">
+              <a:rPr lang="en-US" sz="2100" dirty="0">
                 <a:solidFill>
                   <a:srgbClr val="17364A"/>
                 </a:solidFill>
@@ -6185,11 +6402,11 @@
               </a:rPr>
               <a:t>What goal would the agent pursue, and how narrowly can it be defined?</a:t>
             </a:r>
-            <a:endParaRPr lang="en-US" sz="1700" dirty="0"/>
-          </a:p>
-          <a:p>
-            <a:r>
-              <a:rPr lang="en-US" sz="1700" dirty="0">
+            <a:endParaRPr lang="en-US" sz="2100" dirty="0"/>
+          </a:p>
+          <a:p>
+            <a:r>
+              <a:rPr lang="en-US" sz="2100" dirty="0">
                 <a:solidFill>
                   <a:srgbClr val="17364A"/>
                 </a:solidFill>
@@ -6199,11 +6416,11 @@
               </a:rPr>
               <a:t>Which tools or systems would the agent access?</a:t>
             </a:r>
-            <a:endParaRPr lang="en-US" sz="1700" dirty="0"/>
-          </a:p>
-          <a:p>
-            <a:r>
-              <a:rPr lang="en-US" sz="1700" dirty="0">
+            <a:endParaRPr lang="en-US" sz="2100" dirty="0"/>
+          </a:p>
+          <a:p>
+            <a:r>
+              <a:rPr lang="en-US" sz="2100" dirty="0">
                 <a:solidFill>
                   <a:srgbClr val="17364A"/>
                 </a:solidFill>
@@ -6213,13 +6430,13 @@
               </a:rPr>
               <a:t>Which actions are allowed, prohibited, or require human approval?</a:t>
             </a:r>
-            <a:endParaRPr lang="en-US" sz="1700" dirty="0"/>
-          </a:p>
-        </p:txBody>
-      </p:sp>
-      <p:sp>
-        <p:nvSpPr>
-          <p:cNvPr id="11" name="Shape 9"/>
+            <a:endParaRPr lang="en-US" sz="2100" dirty="0"/>
+          </a:p>
+        </p:txBody>
+      </p:sp>
+      <p:sp>
+        <p:nvSpPr>
+          <p:cNvPr id="12" name="Shape 10"/>
           <p:cNvSpPr/>
           <p:nvPr/>
         </p:nvSpPr>
@@ -6246,14 +6463,14 @@
       </p:sp>
       <p:sp>
         <p:nvSpPr>
-          <p:cNvPr id="12" name="Text 10"/>
+          <p:cNvPr id="13" name="Text 11"/>
           <p:cNvSpPr/>
           <p:nvPr/>
         </p:nvSpPr>
         <p:spPr>
           <a:xfrm>
             <a:off x="8074152" y="1563624"/>
-            <a:ext cx="2825496" cy="201168"/>
+            <a:ext cx="2825496" cy="256032"/>
           </a:xfrm>
           <a:prstGeom prst="rect">
             <a:avLst/>
@@ -6269,7 +6486,7 @@
               <a:buNone/>
             </a:pPr>
             <a:r>
-              <a:rPr lang="en-US" sz="950" b="1" dirty="0">
+              <a:rPr lang="en-US" sz="1300" b="1" dirty="0">
                 <a:solidFill>
                   <a:srgbClr val="0068B7"/>
                 </a:solidFill>
@@ -6279,20 +6496,20 @@
               </a:rPr>
               <a:t>Key idea</a:t>
             </a:r>
-            <a:endParaRPr lang="en-US" sz="950" dirty="0"/>
-          </a:p>
-        </p:txBody>
-      </p:sp>
-      <p:sp>
-        <p:nvSpPr>
-          <p:cNvPr id="13" name="Text 11"/>
-          <p:cNvSpPr/>
-          <p:nvPr/>
-        </p:nvSpPr>
-        <p:spPr>
-          <a:xfrm>
-            <a:off x="8074152" y="1856232"/>
-            <a:ext cx="2825496" cy="1261872"/>
+            <a:endParaRPr lang="en-US" sz="1300" dirty="0"/>
+          </a:p>
+        </p:txBody>
+      </p:sp>
+      <p:sp>
+        <p:nvSpPr>
+          <p:cNvPr id="14" name="Text 12"/>
+          <p:cNvSpPr/>
+          <p:nvPr/>
+        </p:nvSpPr>
+        <p:spPr>
+          <a:xfrm>
+            <a:off x="8074152" y="1920240"/>
+            <a:ext cx="2825496" cy="1188720"/>
           </a:xfrm>
           <a:prstGeom prst="rect">
             <a:avLst/>
@@ -6310,7 +6527,7 @@
               <a:buNone/>
             </a:pPr>
             <a:r>
-              <a:rPr lang="en-US" sz="1250" dirty="0">
+              <a:rPr lang="en-US" sz="1550" dirty="0">
                 <a:solidFill>
                   <a:srgbClr val="17364A"/>
                 </a:solidFill>
@@ -6320,13 +6537,13 @@
               </a:rPr>
               <a:t>What goal would the agent pursue, and how narrowly can it be defined?</a:t>
             </a:r>
-            <a:endParaRPr lang="en-US" sz="1250" dirty="0"/>
-          </a:p>
-        </p:txBody>
-      </p:sp>
-      <p:sp>
-        <p:nvSpPr>
-          <p:cNvPr id="14" name="Shape 12"/>
+            <a:endParaRPr lang="en-US" sz="1550" dirty="0"/>
+          </a:p>
+        </p:txBody>
+      </p:sp>
+      <p:sp>
+        <p:nvSpPr>
+          <p:cNvPr id="15" name="Shape 13"/>
           <p:cNvSpPr/>
           <p:nvPr/>
         </p:nvSpPr>
@@ -6353,14 +6570,14 @@
       </p:sp>
       <p:sp>
         <p:nvSpPr>
-          <p:cNvPr id="15" name="Text 13"/>
+          <p:cNvPr id="16" name="Text 14"/>
           <p:cNvSpPr/>
           <p:nvPr/>
         </p:nvSpPr>
         <p:spPr>
           <a:xfrm>
             <a:off x="8074152" y="3666744"/>
-            <a:ext cx="2825496" cy="201168"/>
+            <a:ext cx="2825496" cy="256032"/>
           </a:xfrm>
           <a:prstGeom prst="rect">
             <a:avLst/>
@@ -6376,7 +6593,7 @@
               <a:buNone/>
             </a:pPr>
             <a:r>
-              <a:rPr lang="en-US" sz="950" b="1" dirty="0">
+              <a:rPr lang="en-US" sz="1300" b="1" dirty="0">
                 <a:solidFill>
                   <a:srgbClr val="0068B7"/>
                 </a:solidFill>
@@ -6386,20 +6603,20 @@
               </a:rPr>
               <a:t>Use this for</a:t>
             </a:r>
-            <a:endParaRPr lang="en-US" sz="950" dirty="0"/>
-          </a:p>
-        </p:txBody>
-      </p:sp>
-      <p:sp>
-        <p:nvSpPr>
-          <p:cNvPr id="16" name="Text 14"/>
-          <p:cNvSpPr/>
-          <p:nvPr/>
-        </p:nvSpPr>
-        <p:spPr>
-          <a:xfrm>
-            <a:off x="8074152" y="3959352"/>
-            <a:ext cx="2825496" cy="1170432"/>
+            <a:endParaRPr lang="en-US" sz="1300" dirty="0"/>
+          </a:p>
+        </p:txBody>
+      </p:sp>
+      <p:sp>
+        <p:nvSpPr>
+          <p:cNvPr id="17" name="Text 15"/>
+          <p:cNvSpPr/>
+          <p:nvPr/>
+        </p:nvSpPr>
+        <p:spPr>
+          <a:xfrm>
+            <a:off x="8074152" y="4023360"/>
+            <a:ext cx="2825496" cy="1097280"/>
           </a:xfrm>
           <a:prstGeom prst="rect">
             <a:avLst/>
@@ -6417,7 +6634,7 @@
               <a:buNone/>
             </a:pPr>
             <a:r>
-              <a:rPr lang="en-US" sz="1250" dirty="0">
+              <a:rPr lang="en-US" sz="1550" dirty="0">
                 <a:solidFill>
                   <a:srgbClr val="17364A"/>
                 </a:solidFill>
@@ -6427,7 +6644,7 @@
               </a:rPr>
               <a:t>Connect the concept to public health decisions, safeguards, documentation, or implementation work.</a:t>
             </a:r>
-            <a:endParaRPr lang="en-US" sz="1250" dirty="0"/>
+            <a:endParaRPr lang="en-US" sz="1550" dirty="0"/>
           </a:p>
         </p:txBody>
       </p:sp>
@@ -6624,7 +6841,7 @@
                 <a:ea typeface="Aptos" pitchFamily="34" charset="-122"/>
                 <a:cs typeface="Aptos" pitchFamily="34" charset="-120"/>
               </a:rPr>
-              <a:t>© Paula Soper</a:t>
+              <a:t>Â© Paula Soper</a:t>
             </a:r>
             <a:endParaRPr lang="en-US" sz="800" dirty="0"/>
           </a:p>
@@ -6638,8 +6855,47 @@
         </p:nvSpPr>
         <p:spPr>
           <a:xfrm>
+            <a:off x="11137392" y="6510528"/>
+            <a:ext cx="411480" cy="201168"/>
+          </a:xfrm>
+          <a:prstGeom prst="rect">
+            <a:avLst/>
+          </a:prstGeom>
+          <a:noFill/>
+          <a:ln/>
+        </p:spPr>
+        <p:txBody>
+          <a:bodyPr wrap="square" lIns="0" tIns="0" rIns="0" bIns="0" rtlCol="0" anchor="ctr"/>
+          <a:lstStyle/>
+          <a:p>
+            <a:pPr algn="r" indent="0" marL="0">
+              <a:buNone/>
+            </a:pPr>
+            <a:r>
+              <a:rPr lang="en-US" sz="900" dirty="0">
+                <a:solidFill>
+                  <a:srgbClr val="5F7181"/>
+                </a:solidFill>
+                <a:latin typeface="Aptos" pitchFamily="34" charset="0"/>
+                <a:ea typeface="Aptos" pitchFamily="34" charset="-122"/>
+                <a:cs typeface="Aptos" pitchFamily="34" charset="-120"/>
+              </a:rPr>
+              <a:t>16</a:t>
+            </a:r>
+            <a:endParaRPr lang="en-US" sz="900" dirty="0"/>
+          </a:p>
+        </p:txBody>
+      </p:sp>
+      <p:sp>
+        <p:nvSpPr>
+          <p:cNvPr id="8" name="Text 6"/>
+          <p:cNvSpPr/>
+          <p:nvPr/>
+        </p:nvSpPr>
+        <p:spPr>
+          <a:xfrm>
             <a:off x="640080" y="658368"/>
-            <a:ext cx="10881360" cy="566928"/>
+            <a:ext cx="10881360" cy="713232"/>
           </a:xfrm>
           <a:prstGeom prst="rect">
             <a:avLst/>
@@ -6657,7 +6913,7 @@
               <a:buNone/>
             </a:pPr>
             <a:r>
-              <a:rPr lang="en-US" sz="2700" b="1" dirty="0">
+              <a:rPr lang="en-US" sz="3400" b="1" dirty="0">
                 <a:solidFill>
                   <a:srgbClr val="003A63"/>
                 </a:solidFill>
@@ -6667,20 +6923,20 @@
               </a:rPr>
               <a:t>Reflection Questions Continued</a:t>
             </a:r>
-            <a:endParaRPr lang="en-US" sz="2700" dirty="0"/>
-          </a:p>
-        </p:txBody>
-      </p:sp>
-      <p:sp>
-        <p:nvSpPr>
-          <p:cNvPr id="8" name="Text 6"/>
-          <p:cNvSpPr/>
-          <p:nvPr/>
-        </p:nvSpPr>
-        <p:spPr>
-          <a:xfrm>
-            <a:off x="868680" y="1417320"/>
-            <a:ext cx="6675120" cy="4434840"/>
+            <a:endParaRPr lang="en-US" sz="3400" dirty="0"/>
+          </a:p>
+        </p:txBody>
+      </p:sp>
+      <p:sp>
+        <p:nvSpPr>
+          <p:cNvPr id="9" name="Text 7"/>
+          <p:cNvSpPr/>
+          <p:nvPr/>
+        </p:nvSpPr>
+        <p:spPr>
+          <a:xfrm>
+            <a:off x="868680" y="1508760"/>
+            <a:ext cx="6537960" cy="4160520"/>
           </a:xfrm>
           <a:prstGeom prst="rect">
             <a:avLst/>
@@ -6695,7 +6951,7 @@
           <a:lstStyle/>
           <a:p>
             <a:r>
-              <a:rPr lang="en-US" sz="1700" dirty="0">
+              <a:rPr lang="en-US" sz="2100" dirty="0">
                 <a:solidFill>
                   <a:srgbClr val="17364A"/>
                 </a:solidFill>
@@ -6705,11 +6961,11 @@
               </a:rPr>
               <a:t>What logs are needed to reconstruct agent behavior?</a:t>
             </a:r>
-            <a:endParaRPr lang="en-US" sz="1700" dirty="0"/>
-          </a:p>
-          <a:p>
-            <a:r>
-              <a:rPr lang="en-US" sz="1700" dirty="0">
+            <a:endParaRPr lang="en-US" sz="2100" dirty="0"/>
+          </a:p>
+          <a:p>
+            <a:r>
+              <a:rPr lang="en-US" sz="2100" dirty="0">
                 <a:solidFill>
                   <a:srgbClr val="17364A"/>
                 </a:solidFill>
@@ -6719,13 +6975,13 @@
               </a:rPr>
               <a:t>What rollback or correction process is needed if the agent makes an error?</a:t>
             </a:r>
-            <a:endParaRPr lang="en-US" sz="1700" dirty="0"/>
-          </a:p>
-        </p:txBody>
-      </p:sp>
-      <p:sp>
-        <p:nvSpPr>
-          <p:cNvPr id="9" name="Shape 7"/>
+            <a:endParaRPr lang="en-US" sz="2100" dirty="0"/>
+          </a:p>
+        </p:txBody>
+      </p:sp>
+      <p:sp>
+        <p:nvSpPr>
+          <p:cNvPr id="10" name="Shape 8"/>
           <p:cNvSpPr/>
           <p:nvPr/>
         </p:nvSpPr>
@@ -6752,14 +7008,14 @@
       </p:sp>
       <p:sp>
         <p:nvSpPr>
-          <p:cNvPr id="10" name="Text 8"/>
+          <p:cNvPr id="11" name="Text 9"/>
           <p:cNvSpPr/>
           <p:nvPr/>
         </p:nvSpPr>
         <p:spPr>
           <a:xfrm>
             <a:off x="8074152" y="1563624"/>
-            <a:ext cx="2825496" cy="201168"/>
+            <a:ext cx="2825496" cy="256032"/>
           </a:xfrm>
           <a:prstGeom prst="rect">
             <a:avLst/>
@@ -6775,7 +7031,7 @@
               <a:buNone/>
             </a:pPr>
             <a:r>
-              <a:rPr lang="en-US" sz="950" b="1" dirty="0">
+              <a:rPr lang="en-US" sz="1300" b="1" dirty="0">
                 <a:solidFill>
                   <a:srgbClr val="0068B7"/>
                 </a:solidFill>
@@ -6785,20 +7041,20 @@
               </a:rPr>
               <a:t>Key idea</a:t>
             </a:r>
-            <a:endParaRPr lang="en-US" sz="950" dirty="0"/>
-          </a:p>
-        </p:txBody>
-      </p:sp>
-      <p:sp>
-        <p:nvSpPr>
-          <p:cNvPr id="11" name="Text 9"/>
-          <p:cNvSpPr/>
-          <p:nvPr/>
-        </p:nvSpPr>
-        <p:spPr>
-          <a:xfrm>
-            <a:off x="8074152" y="1856232"/>
-            <a:ext cx="2825496" cy="1261872"/>
+            <a:endParaRPr lang="en-US" sz="1300" dirty="0"/>
+          </a:p>
+        </p:txBody>
+      </p:sp>
+      <p:sp>
+        <p:nvSpPr>
+          <p:cNvPr id="12" name="Text 10"/>
+          <p:cNvSpPr/>
+          <p:nvPr/>
+        </p:nvSpPr>
+        <p:spPr>
+          <a:xfrm>
+            <a:off x="8074152" y="1920240"/>
+            <a:ext cx="2825496" cy="1188720"/>
           </a:xfrm>
           <a:prstGeom prst="rect">
             <a:avLst/>
@@ -6816,7 +7072,7 @@
               <a:buNone/>
             </a:pPr>
             <a:r>
-              <a:rPr lang="en-US" sz="1250" dirty="0">
+              <a:rPr lang="en-US" sz="1550" dirty="0">
                 <a:solidFill>
                   <a:srgbClr val="17364A"/>
                 </a:solidFill>
@@ -6826,13 +7082,13 @@
               </a:rPr>
               <a:t>What logs are needed to reconstruct agent behavior?</a:t>
             </a:r>
-            <a:endParaRPr lang="en-US" sz="1250" dirty="0"/>
-          </a:p>
-        </p:txBody>
-      </p:sp>
-      <p:sp>
-        <p:nvSpPr>
-          <p:cNvPr id="12" name="Shape 10"/>
+            <a:endParaRPr lang="en-US" sz="1550" dirty="0"/>
+          </a:p>
+        </p:txBody>
+      </p:sp>
+      <p:sp>
+        <p:nvSpPr>
+          <p:cNvPr id="13" name="Shape 11"/>
           <p:cNvSpPr/>
           <p:nvPr/>
         </p:nvSpPr>
@@ -6859,14 +7115,14 @@
       </p:sp>
       <p:sp>
         <p:nvSpPr>
-          <p:cNvPr id="13" name="Text 11"/>
+          <p:cNvPr id="14" name="Text 12"/>
           <p:cNvSpPr/>
           <p:nvPr/>
         </p:nvSpPr>
         <p:spPr>
           <a:xfrm>
             <a:off x="8074152" y="3666744"/>
-            <a:ext cx="2825496" cy="201168"/>
+            <a:ext cx="2825496" cy="256032"/>
           </a:xfrm>
           <a:prstGeom prst="rect">
             <a:avLst/>
@@ -6882,7 +7138,7 @@
               <a:buNone/>
             </a:pPr>
             <a:r>
-              <a:rPr lang="en-US" sz="950" b="1" dirty="0">
+              <a:rPr lang="en-US" sz="1300" b="1" dirty="0">
                 <a:solidFill>
                   <a:srgbClr val="0068B7"/>
                 </a:solidFill>
@@ -6892,20 +7148,20 @@
               </a:rPr>
               <a:t>Use this for</a:t>
             </a:r>
-            <a:endParaRPr lang="en-US" sz="950" dirty="0"/>
-          </a:p>
-        </p:txBody>
-      </p:sp>
-      <p:sp>
-        <p:nvSpPr>
-          <p:cNvPr id="14" name="Text 12"/>
-          <p:cNvSpPr/>
-          <p:nvPr/>
-        </p:nvSpPr>
-        <p:spPr>
-          <a:xfrm>
-            <a:off x="8074152" y="3959352"/>
-            <a:ext cx="2825496" cy="1170432"/>
+            <a:endParaRPr lang="en-US" sz="1300" dirty="0"/>
+          </a:p>
+        </p:txBody>
+      </p:sp>
+      <p:sp>
+        <p:nvSpPr>
+          <p:cNvPr id="15" name="Text 13"/>
+          <p:cNvSpPr/>
+          <p:nvPr/>
+        </p:nvSpPr>
+        <p:spPr>
+          <a:xfrm>
+            <a:off x="8074152" y="4023360"/>
+            <a:ext cx="2825496" cy="1097280"/>
           </a:xfrm>
           <a:prstGeom prst="rect">
             <a:avLst/>
@@ -6923,7 +7179,7 @@
               <a:buNone/>
             </a:pPr>
             <a:r>
-              <a:rPr lang="en-US" sz="1250" dirty="0">
+              <a:rPr lang="en-US" sz="1550" dirty="0">
                 <a:solidFill>
                   <a:srgbClr val="17364A"/>
                 </a:solidFill>
@@ -6933,7 +7189,7 @@
               </a:rPr>
               <a:t>Connect the concept to public health decisions, safeguards, documentation, or implementation work.</a:t>
             </a:r>
-            <a:endParaRPr lang="en-US" sz="1250" dirty="0"/>
+            <a:endParaRPr lang="en-US" sz="1550" dirty="0"/>
           </a:p>
         </p:txBody>
       </p:sp>
@@ -7130,7 +7386,7 @@
                 <a:ea typeface="Aptos" pitchFamily="34" charset="-122"/>
                 <a:cs typeface="Aptos" pitchFamily="34" charset="-120"/>
               </a:rPr>
-              <a:t>© Paula Soper</a:t>
+              <a:t>Â© Paula Soper</a:t>
             </a:r>
             <a:endParaRPr lang="en-US" sz="800" dirty="0"/>
           </a:p>
@@ -7138,7 +7394,46 @@
       </p:sp>
       <p:sp>
         <p:nvSpPr>
-          <p:cNvPr id="7" name="Shape 5"/>
+          <p:cNvPr id="7" name="Text 5"/>
+          <p:cNvSpPr/>
+          <p:nvPr/>
+        </p:nvSpPr>
+        <p:spPr>
+          <a:xfrm>
+            <a:off x="11137392" y="6510528"/>
+            <a:ext cx="411480" cy="201168"/>
+          </a:xfrm>
+          <a:prstGeom prst="rect">
+            <a:avLst/>
+          </a:prstGeom>
+          <a:noFill/>
+          <a:ln/>
+        </p:spPr>
+        <p:txBody>
+          <a:bodyPr wrap="square" lIns="0" tIns="0" rIns="0" bIns="0" rtlCol="0" anchor="ctr"/>
+          <a:lstStyle/>
+          <a:p>
+            <a:pPr algn="r" indent="0" marL="0">
+              <a:buNone/>
+            </a:pPr>
+            <a:r>
+              <a:rPr lang="en-US" sz="900" dirty="0">
+                <a:solidFill>
+                  <a:srgbClr val="5F7181"/>
+                </a:solidFill>
+                <a:latin typeface="Aptos" pitchFamily="34" charset="0"/>
+                <a:ea typeface="Aptos" pitchFamily="34" charset="-122"/>
+                <a:cs typeface="Aptos" pitchFamily="34" charset="-120"/>
+              </a:rPr>
+              <a:t>17</a:t>
+            </a:r>
+            <a:endParaRPr lang="en-US" sz="900" dirty="0"/>
+          </a:p>
+        </p:txBody>
+      </p:sp>
+      <p:sp>
+        <p:nvSpPr>
+          <p:cNvPr id="8" name="Shape 6"/>
           <p:cNvSpPr/>
           <p:nvPr/>
         </p:nvSpPr>
@@ -7163,7 +7458,7 @@
       </p:sp>
       <p:sp>
         <p:nvSpPr>
-          <p:cNvPr id="8" name="Text 6"/>
+          <p:cNvPr id="9" name="Text 7"/>
           <p:cNvSpPr/>
           <p:nvPr/>
         </p:nvSpPr>
@@ -7202,14 +7497,14 @@
       </p:sp>
       <p:sp>
         <p:nvSpPr>
-          <p:cNvPr id="9" name="Text 7"/>
+          <p:cNvPr id="10" name="Text 8"/>
           <p:cNvSpPr/>
           <p:nvPr/>
         </p:nvSpPr>
         <p:spPr>
           <a:xfrm>
             <a:off x="640080" y="621792"/>
-            <a:ext cx="10881360" cy="566928"/>
+            <a:ext cx="10881360" cy="713232"/>
           </a:xfrm>
           <a:prstGeom prst="rect">
             <a:avLst/>
@@ -7227,7 +7522,7 @@
               <a:buNone/>
             </a:pPr>
             <a:r>
-              <a:rPr lang="en-US" sz="2700" b="1" dirty="0">
+              <a:rPr lang="en-US" sz="3400" b="1" dirty="0">
                 <a:solidFill>
                   <a:srgbClr val="003A63"/>
                 </a:solidFill>
@@ -7237,20 +7532,20 @@
               </a:rPr>
               <a:t>Practical Exercise</a:t>
             </a:r>
-            <a:endParaRPr lang="en-US" sz="2700" dirty="0"/>
-          </a:p>
-        </p:txBody>
-      </p:sp>
-      <p:sp>
-        <p:nvSpPr>
-          <p:cNvPr id="10" name="Text 8"/>
-          <p:cNvSpPr/>
-          <p:nvPr/>
-        </p:nvSpPr>
-        <p:spPr>
-          <a:xfrm>
-            <a:off x="868680" y="1417320"/>
-            <a:ext cx="6675120" cy="4434840"/>
+            <a:endParaRPr lang="en-US" sz="3400" dirty="0"/>
+          </a:p>
+        </p:txBody>
+      </p:sp>
+      <p:sp>
+        <p:nvSpPr>
+          <p:cNvPr id="11" name="Text 9"/>
+          <p:cNvSpPr/>
+          <p:nvPr/>
+        </p:nvSpPr>
+        <p:spPr>
+          <a:xfrm>
+            <a:off x="868680" y="1508760"/>
+            <a:ext cx="6537960" cy="4160520"/>
           </a:xfrm>
           <a:prstGeom prst="rect">
             <a:avLst/>
@@ -7265,7 +7560,7 @@
           <a:lstStyle/>
           <a:p>
             <a:r>
-              <a:rPr lang="en-US" sz="1700" dirty="0">
+              <a:rPr lang="en-US" sz="2100" dirty="0">
                 <a:solidFill>
                   <a:srgbClr val="17364A"/>
                 </a:solidFill>
@@ -7275,11 +7570,11 @@
               </a:rPr>
               <a:t>Create an agentic workflow control plan.</a:t>
             </a:r>
-            <a:endParaRPr lang="en-US" sz="1700" dirty="0"/>
-          </a:p>
-          <a:p>
-            <a:r>
-              <a:rPr lang="en-US" sz="1700" dirty="0">
+            <a:endParaRPr lang="en-US" sz="2100" dirty="0"/>
+          </a:p>
+          <a:p>
+            <a:r>
+              <a:rPr lang="en-US" sz="2100" dirty="0">
                 <a:solidFill>
                   <a:srgbClr val="17364A"/>
                 </a:solidFill>
@@ -7287,13 +7582,13 @@
                 <a:ea typeface="Aptos" pitchFamily="34" charset="-122"/>
                 <a:cs typeface="Aptos" pitchFamily="34" charset="-120"/>
               </a:rPr>
-              <a:t>Include the goal, trigger, data sources, tools, allowed actions, prohibited actions, approval points, memory rules, logs,.</a:t>
-            </a:r>
-            <a:endParaRPr lang="en-US" sz="1700" dirty="0"/>
-          </a:p>
-          <a:p>
-            <a:r>
-              <a:rPr lang="en-US" sz="1700" dirty="0">
+              <a:t>Include the goal, trigger, data sources, tools, allowed actions, prohibited actions, approval points,.</a:t>
+            </a:r>
+            <a:endParaRPr lang="en-US" sz="2100" dirty="0"/>
+          </a:p>
+          <a:p>
+            <a:r>
+              <a:rPr lang="en-US" sz="2100" dirty="0">
                 <a:solidFill>
                   <a:srgbClr val="17364A"/>
                 </a:solidFill>
@@ -7301,15 +7596,15 @@
                 <a:ea typeface="Aptos" pitchFamily="34" charset="-122"/>
                 <a:cs typeface="Aptos" pitchFamily="34" charset="-120"/>
               </a:rPr>
-              <a:t>The plan should identify at least one low-risk pilot boundary and one condition that would require pausing the workflow.</a:t>
-            </a:r>
-            <a:endParaRPr lang="en-US" sz="1700" dirty="0"/>
-          </a:p>
-        </p:txBody>
-      </p:sp>
-      <p:sp>
-        <p:nvSpPr>
-          <p:cNvPr id="11" name="Shape 9"/>
+              <a:t>The plan should identify at least one low-risk pilot boundary and one condition that would require.</a:t>
+            </a:r>
+            <a:endParaRPr lang="en-US" sz="2100" dirty="0"/>
+          </a:p>
+        </p:txBody>
+      </p:sp>
+      <p:sp>
+        <p:nvSpPr>
+          <p:cNvPr id="12" name="Shape 10"/>
           <p:cNvSpPr/>
           <p:nvPr/>
         </p:nvSpPr>
@@ -7336,14 +7631,14 @@
       </p:sp>
       <p:sp>
         <p:nvSpPr>
-          <p:cNvPr id="12" name="Text 10"/>
+          <p:cNvPr id="13" name="Text 11"/>
           <p:cNvSpPr/>
           <p:nvPr/>
         </p:nvSpPr>
         <p:spPr>
           <a:xfrm>
             <a:off x="8074152" y="1563624"/>
-            <a:ext cx="2825496" cy="201168"/>
+            <a:ext cx="2825496" cy="256032"/>
           </a:xfrm>
           <a:prstGeom prst="rect">
             <a:avLst/>
@@ -7359,7 +7654,7 @@
               <a:buNone/>
             </a:pPr>
             <a:r>
-              <a:rPr lang="en-US" sz="950" b="1" dirty="0">
+              <a:rPr lang="en-US" sz="1300" b="1" dirty="0">
                 <a:solidFill>
                   <a:srgbClr val="0068B7"/>
                 </a:solidFill>
@@ -7369,20 +7664,20 @@
               </a:rPr>
               <a:t>Key idea</a:t>
             </a:r>
-            <a:endParaRPr lang="en-US" sz="950" dirty="0"/>
-          </a:p>
-        </p:txBody>
-      </p:sp>
-      <p:sp>
-        <p:nvSpPr>
-          <p:cNvPr id="13" name="Text 11"/>
-          <p:cNvSpPr/>
-          <p:nvPr/>
-        </p:nvSpPr>
-        <p:spPr>
-          <a:xfrm>
-            <a:off x="8074152" y="1856232"/>
-            <a:ext cx="2825496" cy="1261872"/>
+            <a:endParaRPr lang="en-US" sz="1300" dirty="0"/>
+          </a:p>
+        </p:txBody>
+      </p:sp>
+      <p:sp>
+        <p:nvSpPr>
+          <p:cNvPr id="14" name="Text 12"/>
+          <p:cNvSpPr/>
+          <p:nvPr/>
+        </p:nvSpPr>
+        <p:spPr>
+          <a:xfrm>
+            <a:off x="8074152" y="1920240"/>
+            <a:ext cx="2825496" cy="1188720"/>
           </a:xfrm>
           <a:prstGeom prst="rect">
             <a:avLst/>
@@ -7400,7 +7695,7 @@
               <a:buNone/>
             </a:pPr>
             <a:r>
-              <a:rPr lang="en-US" sz="1250" dirty="0">
+              <a:rPr lang="en-US" sz="1550" dirty="0">
                 <a:solidFill>
                   <a:srgbClr val="17364A"/>
                 </a:solidFill>
@@ -7410,13 +7705,13 @@
               </a:rPr>
               <a:t>Create an agentic workflow control plan.</a:t>
             </a:r>
-            <a:endParaRPr lang="en-US" sz="1250" dirty="0"/>
-          </a:p>
-        </p:txBody>
-      </p:sp>
-      <p:sp>
-        <p:nvSpPr>
-          <p:cNvPr id="14" name="Shape 12"/>
+            <a:endParaRPr lang="en-US" sz="1550" dirty="0"/>
+          </a:p>
+        </p:txBody>
+      </p:sp>
+      <p:sp>
+        <p:nvSpPr>
+          <p:cNvPr id="15" name="Shape 13"/>
           <p:cNvSpPr/>
           <p:nvPr/>
         </p:nvSpPr>
@@ -7443,14 +7738,14 @@
       </p:sp>
       <p:sp>
         <p:nvSpPr>
-          <p:cNvPr id="15" name="Text 13"/>
+          <p:cNvPr id="16" name="Text 14"/>
           <p:cNvSpPr/>
           <p:nvPr/>
         </p:nvSpPr>
         <p:spPr>
           <a:xfrm>
             <a:off x="8074152" y="3666744"/>
-            <a:ext cx="2825496" cy="201168"/>
+            <a:ext cx="2825496" cy="256032"/>
           </a:xfrm>
           <a:prstGeom prst="rect">
             <a:avLst/>
@@ -7466,7 +7761,7 @@
               <a:buNone/>
             </a:pPr>
             <a:r>
-              <a:rPr lang="en-US" sz="950" b="1" dirty="0">
+              <a:rPr lang="en-US" sz="1300" b="1" dirty="0">
                 <a:solidFill>
                   <a:srgbClr val="0068B7"/>
                 </a:solidFill>
@@ -7476,20 +7771,20 @@
               </a:rPr>
               <a:t>Use this for</a:t>
             </a:r>
-            <a:endParaRPr lang="en-US" sz="950" dirty="0"/>
-          </a:p>
-        </p:txBody>
-      </p:sp>
-      <p:sp>
-        <p:nvSpPr>
-          <p:cNvPr id="16" name="Text 14"/>
-          <p:cNvSpPr/>
-          <p:nvPr/>
-        </p:nvSpPr>
-        <p:spPr>
-          <a:xfrm>
-            <a:off x="8074152" y="3959352"/>
-            <a:ext cx="2825496" cy="1170432"/>
+            <a:endParaRPr lang="en-US" sz="1300" dirty="0"/>
+          </a:p>
+        </p:txBody>
+      </p:sp>
+      <p:sp>
+        <p:nvSpPr>
+          <p:cNvPr id="17" name="Text 15"/>
+          <p:cNvSpPr/>
+          <p:nvPr/>
+        </p:nvSpPr>
+        <p:spPr>
+          <a:xfrm>
+            <a:off x="8074152" y="4023360"/>
+            <a:ext cx="2825496" cy="1097280"/>
           </a:xfrm>
           <a:prstGeom prst="rect">
             <a:avLst/>
@@ -7507,7 +7802,7 @@
               <a:buNone/>
             </a:pPr>
             <a:r>
-              <a:rPr lang="en-US" sz="1250" dirty="0">
+              <a:rPr lang="en-US" sz="1550" dirty="0">
                 <a:solidFill>
                   <a:srgbClr val="17364A"/>
                 </a:solidFill>
@@ -7517,7 +7812,7 @@
               </a:rPr>
               <a:t>Connect the concept to public health decisions, safeguards, documentation, or implementation work.</a:t>
             </a:r>
-            <a:endParaRPr lang="en-US" sz="1250" dirty="0"/>
+            <a:endParaRPr lang="en-US" sz="1550" dirty="0"/>
           </a:p>
         </p:txBody>
       </p:sp>
@@ -7714,7 +8009,7 @@
                 <a:ea typeface="Aptos" pitchFamily="34" charset="-122"/>
                 <a:cs typeface="Aptos" pitchFamily="34" charset="-120"/>
               </a:rPr>
-              <a:t>© Paula Soper</a:t>
+              <a:t>Â© Paula Soper</a:t>
             </a:r>
             <a:endParaRPr lang="en-US" sz="800" dirty="0"/>
           </a:p>
@@ -7722,7 +8017,46 @@
       </p:sp>
       <p:sp>
         <p:nvSpPr>
-          <p:cNvPr id="7" name="Shape 5"/>
+          <p:cNvPr id="7" name="Text 5"/>
+          <p:cNvSpPr/>
+          <p:nvPr/>
+        </p:nvSpPr>
+        <p:spPr>
+          <a:xfrm>
+            <a:off x="11137392" y="6510528"/>
+            <a:ext cx="411480" cy="201168"/>
+          </a:xfrm>
+          <a:prstGeom prst="rect">
+            <a:avLst/>
+          </a:prstGeom>
+          <a:noFill/>
+          <a:ln/>
+        </p:spPr>
+        <p:txBody>
+          <a:bodyPr wrap="square" lIns="0" tIns="0" rIns="0" bIns="0" rtlCol="0" anchor="ctr"/>
+          <a:lstStyle/>
+          <a:p>
+            <a:pPr algn="r" indent="0" marL="0">
+              <a:buNone/>
+            </a:pPr>
+            <a:r>
+              <a:rPr lang="en-US" sz="900" dirty="0">
+                <a:solidFill>
+                  <a:srgbClr val="5F7181"/>
+                </a:solidFill>
+                <a:latin typeface="Aptos" pitchFamily="34" charset="0"/>
+                <a:ea typeface="Aptos" pitchFamily="34" charset="-122"/>
+                <a:cs typeface="Aptos" pitchFamily="34" charset="-120"/>
+              </a:rPr>
+              <a:t>18</a:t>
+            </a:r>
+            <a:endParaRPr lang="en-US" sz="900" dirty="0"/>
+          </a:p>
+        </p:txBody>
+      </p:sp>
+      <p:sp>
+        <p:nvSpPr>
+          <p:cNvPr id="8" name="Shape 6"/>
           <p:cNvSpPr/>
           <p:nvPr/>
         </p:nvSpPr>
@@ -7747,7 +8081,7 @@
       </p:sp>
       <p:sp>
         <p:nvSpPr>
-          <p:cNvPr id="8" name="Text 6"/>
+          <p:cNvPr id="9" name="Text 7"/>
           <p:cNvSpPr/>
           <p:nvPr/>
         </p:nvSpPr>
@@ -7786,14 +8120,14 @@
       </p:sp>
       <p:sp>
         <p:nvSpPr>
-          <p:cNvPr id="9" name="Text 7"/>
+          <p:cNvPr id="10" name="Text 8"/>
           <p:cNvSpPr/>
           <p:nvPr/>
         </p:nvSpPr>
         <p:spPr>
           <a:xfrm>
             <a:off x="640080" y="621792"/>
-            <a:ext cx="10881360" cy="566928"/>
+            <a:ext cx="10881360" cy="713232"/>
           </a:xfrm>
           <a:prstGeom prst="rect">
             <a:avLst/>
@@ -7811,7 +8145,7 @@
               <a:buNone/>
             </a:pPr>
             <a:r>
-              <a:rPr lang="en-US" sz="2700" b="1" dirty="0">
+              <a:rPr lang="en-US" sz="3400" b="1" dirty="0">
                 <a:solidFill>
                   <a:srgbClr val="003A63"/>
                 </a:solidFill>
@@ -7821,20 +8155,20 @@
               </a:rPr>
               <a:t>Expected Artifact or Evidence</a:t>
             </a:r>
-            <a:endParaRPr lang="en-US" sz="2700" dirty="0"/>
-          </a:p>
-        </p:txBody>
-      </p:sp>
-      <p:sp>
-        <p:nvSpPr>
-          <p:cNvPr id="10" name="Text 8"/>
-          <p:cNvSpPr/>
-          <p:nvPr/>
-        </p:nvSpPr>
-        <p:spPr>
-          <a:xfrm>
-            <a:off x="868680" y="1417320"/>
-            <a:ext cx="6675120" cy="4434840"/>
+            <a:endParaRPr lang="en-US" sz="3400" dirty="0"/>
+          </a:p>
+        </p:txBody>
+      </p:sp>
+      <p:sp>
+        <p:nvSpPr>
+          <p:cNvPr id="11" name="Text 9"/>
+          <p:cNvSpPr/>
+          <p:nvPr/>
+        </p:nvSpPr>
+        <p:spPr>
+          <a:xfrm>
+            <a:off x="868680" y="1508760"/>
+            <a:ext cx="6537960" cy="4160520"/>
           </a:xfrm>
           <a:prstGeom prst="rect">
             <a:avLst/>
@@ -7849,7 +8183,7 @@
           <a:lstStyle/>
           <a:p>
             <a:r>
-              <a:rPr lang="en-US" sz="1700" dirty="0">
+              <a:rPr lang="en-US" sz="2100" dirty="0">
                 <a:solidFill>
                   <a:srgbClr val="17364A"/>
                 </a:solidFill>
@@ -7859,11 +8193,11 @@
               </a:rPr>
               <a:t>Agentic workflow control plan</a:t>
             </a:r>
-            <a:endParaRPr lang="en-US" sz="1700" dirty="0"/>
-          </a:p>
-          <a:p>
-            <a:r>
-              <a:rPr lang="en-US" sz="1700" dirty="0">
+            <a:endParaRPr lang="en-US" sz="2100" dirty="0"/>
+          </a:p>
+          <a:p>
+            <a:r>
+              <a:rPr lang="en-US" sz="2100" dirty="0">
                 <a:solidFill>
                   <a:srgbClr val="17364A"/>
                 </a:solidFill>
@@ -7873,11 +8207,11 @@
               </a:rPr>
               <a:t>Allowed/prohibited action list</a:t>
             </a:r>
-            <a:endParaRPr lang="en-US" sz="1700" dirty="0"/>
-          </a:p>
-          <a:p>
-            <a:r>
-              <a:rPr lang="en-US" sz="1700" dirty="0">
+            <a:endParaRPr lang="en-US" sz="2100" dirty="0"/>
+          </a:p>
+          <a:p>
+            <a:r>
+              <a:rPr lang="en-US" sz="2100" dirty="0">
                 <a:solidFill>
                   <a:srgbClr val="17364A"/>
                 </a:solidFill>
@@ -7887,13 +8221,13 @@
               </a:rPr>
               <a:t>Human approval and escalation map</a:t>
             </a:r>
-            <a:endParaRPr lang="en-US" sz="1700" dirty="0"/>
-          </a:p>
-        </p:txBody>
-      </p:sp>
-      <p:sp>
-        <p:nvSpPr>
-          <p:cNvPr id="11" name="Shape 9"/>
+            <a:endParaRPr lang="en-US" sz="2100" dirty="0"/>
+          </a:p>
+        </p:txBody>
+      </p:sp>
+      <p:sp>
+        <p:nvSpPr>
+          <p:cNvPr id="12" name="Shape 10"/>
           <p:cNvSpPr/>
           <p:nvPr/>
         </p:nvSpPr>
@@ -7920,14 +8254,14 @@
       </p:sp>
       <p:sp>
         <p:nvSpPr>
-          <p:cNvPr id="12" name="Text 10"/>
+          <p:cNvPr id="13" name="Text 11"/>
           <p:cNvSpPr/>
           <p:nvPr/>
         </p:nvSpPr>
         <p:spPr>
           <a:xfrm>
             <a:off x="8074152" y="1563624"/>
-            <a:ext cx="2825496" cy="201168"/>
+            <a:ext cx="2825496" cy="256032"/>
           </a:xfrm>
           <a:prstGeom prst="rect">
             <a:avLst/>
@@ -7943,7 +8277,7 @@
               <a:buNone/>
             </a:pPr>
             <a:r>
-              <a:rPr lang="en-US" sz="950" b="1" dirty="0">
+              <a:rPr lang="en-US" sz="1300" b="1" dirty="0">
                 <a:solidFill>
                   <a:srgbClr val="0068B7"/>
                 </a:solidFill>
@@ -7953,20 +8287,20 @@
               </a:rPr>
               <a:t>Key idea</a:t>
             </a:r>
-            <a:endParaRPr lang="en-US" sz="950" dirty="0"/>
-          </a:p>
-        </p:txBody>
-      </p:sp>
-      <p:sp>
-        <p:nvSpPr>
-          <p:cNvPr id="13" name="Text 11"/>
-          <p:cNvSpPr/>
-          <p:nvPr/>
-        </p:nvSpPr>
-        <p:spPr>
-          <a:xfrm>
-            <a:off x="8074152" y="1856232"/>
-            <a:ext cx="2825496" cy="1261872"/>
+            <a:endParaRPr lang="en-US" sz="1300" dirty="0"/>
+          </a:p>
+        </p:txBody>
+      </p:sp>
+      <p:sp>
+        <p:nvSpPr>
+          <p:cNvPr id="14" name="Text 12"/>
+          <p:cNvSpPr/>
+          <p:nvPr/>
+        </p:nvSpPr>
+        <p:spPr>
+          <a:xfrm>
+            <a:off x="8074152" y="1920240"/>
+            <a:ext cx="2825496" cy="1188720"/>
           </a:xfrm>
           <a:prstGeom prst="rect">
             <a:avLst/>
@@ -7984,7 +8318,7 @@
               <a:buNone/>
             </a:pPr>
             <a:r>
-              <a:rPr lang="en-US" sz="1250" dirty="0">
+              <a:rPr lang="en-US" sz="1550" dirty="0">
                 <a:solidFill>
                   <a:srgbClr val="17364A"/>
                 </a:solidFill>
@@ -7994,13 +8328,13 @@
               </a:rPr>
               <a:t>Agentic workflow control plan</a:t>
             </a:r>
-            <a:endParaRPr lang="en-US" sz="1250" dirty="0"/>
-          </a:p>
-        </p:txBody>
-      </p:sp>
-      <p:sp>
-        <p:nvSpPr>
-          <p:cNvPr id="14" name="Shape 12"/>
+            <a:endParaRPr lang="en-US" sz="1550" dirty="0"/>
+          </a:p>
+        </p:txBody>
+      </p:sp>
+      <p:sp>
+        <p:nvSpPr>
+          <p:cNvPr id="15" name="Shape 13"/>
           <p:cNvSpPr/>
           <p:nvPr/>
         </p:nvSpPr>
@@ -8027,14 +8361,14 @@
       </p:sp>
       <p:sp>
         <p:nvSpPr>
-          <p:cNvPr id="15" name="Text 13"/>
+          <p:cNvPr id="16" name="Text 14"/>
           <p:cNvSpPr/>
           <p:nvPr/>
         </p:nvSpPr>
         <p:spPr>
           <a:xfrm>
             <a:off x="8074152" y="3666744"/>
-            <a:ext cx="2825496" cy="201168"/>
+            <a:ext cx="2825496" cy="256032"/>
           </a:xfrm>
           <a:prstGeom prst="rect">
             <a:avLst/>
@@ -8050,7 +8384,7 @@
               <a:buNone/>
             </a:pPr>
             <a:r>
-              <a:rPr lang="en-US" sz="950" b="1" dirty="0">
+              <a:rPr lang="en-US" sz="1300" b="1" dirty="0">
                 <a:solidFill>
                   <a:srgbClr val="0068B7"/>
                 </a:solidFill>
@@ -8060,20 +8394,20 @@
               </a:rPr>
               <a:t>Use this for</a:t>
             </a:r>
-            <a:endParaRPr lang="en-US" sz="950" dirty="0"/>
-          </a:p>
-        </p:txBody>
-      </p:sp>
-      <p:sp>
-        <p:nvSpPr>
-          <p:cNvPr id="16" name="Text 14"/>
-          <p:cNvSpPr/>
-          <p:nvPr/>
-        </p:nvSpPr>
-        <p:spPr>
-          <a:xfrm>
-            <a:off x="8074152" y="3959352"/>
-            <a:ext cx="2825496" cy="1170432"/>
+            <a:endParaRPr lang="en-US" sz="1300" dirty="0"/>
+          </a:p>
+        </p:txBody>
+      </p:sp>
+      <p:sp>
+        <p:nvSpPr>
+          <p:cNvPr id="17" name="Text 15"/>
+          <p:cNvSpPr/>
+          <p:nvPr/>
+        </p:nvSpPr>
+        <p:spPr>
+          <a:xfrm>
+            <a:off x="8074152" y="4023360"/>
+            <a:ext cx="2825496" cy="1097280"/>
           </a:xfrm>
           <a:prstGeom prst="rect">
             <a:avLst/>
@@ -8091,7 +8425,7 @@
               <a:buNone/>
             </a:pPr>
             <a:r>
-              <a:rPr lang="en-US" sz="1250" dirty="0">
+              <a:rPr lang="en-US" sz="1550" dirty="0">
                 <a:solidFill>
                   <a:srgbClr val="17364A"/>
                 </a:solidFill>
@@ -8101,7 +8435,7 @@
               </a:rPr>
               <a:t>Connect the concept to public health decisions, safeguards, documentation, or implementation work.</a:t>
             </a:r>
-            <a:endParaRPr lang="en-US" sz="1250" dirty="0"/>
+            <a:endParaRPr lang="en-US" sz="1550" dirty="0"/>
           </a:p>
         </p:txBody>
       </p:sp>
@@ -8298,7 +8632,7 @@
                 <a:ea typeface="Aptos" pitchFamily="34" charset="-122"/>
                 <a:cs typeface="Aptos" pitchFamily="34" charset="-120"/>
               </a:rPr>
-              <a:t>© Paula Soper</a:t>
+              <a:t>Â© Paula Soper</a:t>
             </a:r>
             <a:endParaRPr lang="en-US" sz="800" dirty="0"/>
           </a:p>
@@ -8312,8 +8646,47 @@
         </p:nvSpPr>
         <p:spPr>
           <a:xfrm>
+            <a:off x="11137392" y="6510528"/>
+            <a:ext cx="411480" cy="201168"/>
+          </a:xfrm>
+          <a:prstGeom prst="rect">
+            <a:avLst/>
+          </a:prstGeom>
+          <a:noFill/>
+          <a:ln/>
+        </p:spPr>
+        <p:txBody>
+          <a:bodyPr wrap="square" lIns="0" tIns="0" rIns="0" bIns="0" rtlCol="0" anchor="ctr"/>
+          <a:lstStyle/>
+          <a:p>
+            <a:pPr algn="r" indent="0" marL="0">
+              <a:buNone/>
+            </a:pPr>
+            <a:r>
+              <a:rPr lang="en-US" sz="900" dirty="0">
+                <a:solidFill>
+                  <a:srgbClr val="5F7181"/>
+                </a:solidFill>
+                <a:latin typeface="Aptos" pitchFamily="34" charset="0"/>
+                <a:ea typeface="Aptos" pitchFamily="34" charset="-122"/>
+                <a:cs typeface="Aptos" pitchFamily="34" charset="-120"/>
+              </a:rPr>
+              <a:t>19</a:t>
+            </a:r>
+            <a:endParaRPr lang="en-US" sz="900" dirty="0"/>
+          </a:p>
+        </p:txBody>
+      </p:sp>
+      <p:sp>
+        <p:nvSpPr>
+          <p:cNvPr id="8" name="Text 6"/>
+          <p:cNvSpPr/>
+          <p:nvPr/>
+        </p:nvSpPr>
+        <p:spPr>
+          <a:xfrm>
             <a:off x="640080" y="658368"/>
-            <a:ext cx="10881360" cy="566928"/>
+            <a:ext cx="10881360" cy="713232"/>
           </a:xfrm>
           <a:prstGeom prst="rect">
             <a:avLst/>
@@ -8331,7 +8704,7 @@
               <a:buNone/>
             </a:pPr>
             <a:r>
-              <a:rPr lang="en-US" sz="2700" b="1" dirty="0">
+              <a:rPr lang="en-US" sz="3400" b="1" dirty="0">
                 <a:solidFill>
                   <a:srgbClr val="003A63"/>
                 </a:solidFill>
@@ -8341,20 +8714,20 @@
               </a:rPr>
               <a:t>Expected Artifact or Evidence Continued</a:t>
             </a:r>
-            <a:endParaRPr lang="en-US" sz="2700" dirty="0"/>
-          </a:p>
-        </p:txBody>
-      </p:sp>
-      <p:sp>
-        <p:nvSpPr>
-          <p:cNvPr id="8" name="Text 6"/>
-          <p:cNvSpPr/>
-          <p:nvPr/>
-        </p:nvSpPr>
-        <p:spPr>
-          <a:xfrm>
-            <a:off x="868680" y="1417320"/>
-            <a:ext cx="6675120" cy="4434840"/>
+            <a:endParaRPr lang="en-US" sz="3400" dirty="0"/>
+          </a:p>
+        </p:txBody>
+      </p:sp>
+      <p:sp>
+        <p:nvSpPr>
+          <p:cNvPr id="9" name="Text 7"/>
+          <p:cNvSpPr/>
+          <p:nvPr/>
+        </p:nvSpPr>
+        <p:spPr>
+          <a:xfrm>
+            <a:off x="868680" y="1508760"/>
+            <a:ext cx="6537960" cy="4160520"/>
           </a:xfrm>
           <a:prstGeom prst="rect">
             <a:avLst/>
@@ -8369,7 +8742,7 @@
           <a:lstStyle/>
           <a:p>
             <a:r>
-              <a:rPr lang="en-US" sz="1700" dirty="0">
+              <a:rPr lang="en-US" sz="2100" dirty="0">
                 <a:solidFill>
                   <a:srgbClr val="17364A"/>
                 </a:solidFill>
@@ -8379,13 +8752,13 @@
               </a:rPr>
               <a:t>Tool-call logging requirements</a:t>
             </a:r>
-            <a:endParaRPr lang="en-US" sz="1700" dirty="0"/>
-          </a:p>
-        </p:txBody>
-      </p:sp>
-      <p:sp>
-        <p:nvSpPr>
-          <p:cNvPr id="9" name="Shape 7"/>
+            <a:endParaRPr lang="en-US" sz="2100" dirty="0"/>
+          </a:p>
+        </p:txBody>
+      </p:sp>
+      <p:sp>
+        <p:nvSpPr>
+          <p:cNvPr id="10" name="Shape 8"/>
           <p:cNvSpPr/>
           <p:nvPr/>
         </p:nvSpPr>
@@ -8412,14 +8785,14 @@
       </p:sp>
       <p:sp>
         <p:nvSpPr>
-          <p:cNvPr id="10" name="Text 8"/>
+          <p:cNvPr id="11" name="Text 9"/>
           <p:cNvSpPr/>
           <p:nvPr/>
         </p:nvSpPr>
         <p:spPr>
           <a:xfrm>
             <a:off x="8074152" y="1563624"/>
-            <a:ext cx="2825496" cy="201168"/>
+            <a:ext cx="2825496" cy="256032"/>
           </a:xfrm>
           <a:prstGeom prst="rect">
             <a:avLst/>
@@ -8435,7 +8808,7 @@
               <a:buNone/>
             </a:pPr>
             <a:r>
-              <a:rPr lang="en-US" sz="950" b="1" dirty="0">
+              <a:rPr lang="en-US" sz="1300" b="1" dirty="0">
                 <a:solidFill>
                   <a:srgbClr val="0068B7"/>
                 </a:solidFill>
@@ -8445,20 +8818,20 @@
               </a:rPr>
               <a:t>Key idea</a:t>
             </a:r>
-            <a:endParaRPr lang="en-US" sz="950" dirty="0"/>
-          </a:p>
-        </p:txBody>
-      </p:sp>
-      <p:sp>
-        <p:nvSpPr>
-          <p:cNvPr id="11" name="Text 9"/>
-          <p:cNvSpPr/>
-          <p:nvPr/>
-        </p:nvSpPr>
-        <p:spPr>
-          <a:xfrm>
-            <a:off x="8074152" y="1856232"/>
-            <a:ext cx="2825496" cy="1261872"/>
+            <a:endParaRPr lang="en-US" sz="1300" dirty="0"/>
+          </a:p>
+        </p:txBody>
+      </p:sp>
+      <p:sp>
+        <p:nvSpPr>
+          <p:cNvPr id="12" name="Text 10"/>
+          <p:cNvSpPr/>
+          <p:nvPr/>
+        </p:nvSpPr>
+        <p:spPr>
+          <a:xfrm>
+            <a:off x="8074152" y="1920240"/>
+            <a:ext cx="2825496" cy="1188720"/>
           </a:xfrm>
           <a:prstGeom prst="rect">
             <a:avLst/>
@@ -8476,7 +8849,7 @@
               <a:buNone/>
             </a:pPr>
             <a:r>
-              <a:rPr lang="en-US" sz="1250" dirty="0">
+              <a:rPr lang="en-US" sz="1550" dirty="0">
                 <a:solidFill>
                   <a:srgbClr val="17364A"/>
                 </a:solidFill>
@@ -8486,13 +8859,13 @@
               </a:rPr>
               <a:t>Tool-call logging requirements</a:t>
             </a:r>
-            <a:endParaRPr lang="en-US" sz="1250" dirty="0"/>
-          </a:p>
-        </p:txBody>
-      </p:sp>
-      <p:sp>
-        <p:nvSpPr>
-          <p:cNvPr id="12" name="Shape 10"/>
+            <a:endParaRPr lang="en-US" sz="1550" dirty="0"/>
+          </a:p>
+        </p:txBody>
+      </p:sp>
+      <p:sp>
+        <p:nvSpPr>
+          <p:cNvPr id="13" name="Shape 11"/>
           <p:cNvSpPr/>
           <p:nvPr/>
         </p:nvSpPr>
@@ -8519,14 +8892,14 @@
       </p:sp>
       <p:sp>
         <p:nvSpPr>
-          <p:cNvPr id="13" name="Text 11"/>
+          <p:cNvPr id="14" name="Text 12"/>
           <p:cNvSpPr/>
           <p:nvPr/>
         </p:nvSpPr>
         <p:spPr>
           <a:xfrm>
             <a:off x="8074152" y="3666744"/>
-            <a:ext cx="2825496" cy="201168"/>
+            <a:ext cx="2825496" cy="256032"/>
           </a:xfrm>
           <a:prstGeom prst="rect">
             <a:avLst/>
@@ -8542,7 +8915,7 @@
               <a:buNone/>
             </a:pPr>
             <a:r>
-              <a:rPr lang="en-US" sz="950" b="1" dirty="0">
+              <a:rPr lang="en-US" sz="1300" b="1" dirty="0">
                 <a:solidFill>
                   <a:srgbClr val="0068B7"/>
                 </a:solidFill>
@@ -8552,20 +8925,20 @@
               </a:rPr>
               <a:t>Use this for</a:t>
             </a:r>
-            <a:endParaRPr lang="en-US" sz="950" dirty="0"/>
-          </a:p>
-        </p:txBody>
-      </p:sp>
-      <p:sp>
-        <p:nvSpPr>
-          <p:cNvPr id="14" name="Text 12"/>
-          <p:cNvSpPr/>
-          <p:nvPr/>
-        </p:nvSpPr>
-        <p:spPr>
-          <a:xfrm>
-            <a:off x="8074152" y="3959352"/>
-            <a:ext cx="2825496" cy="1170432"/>
+            <a:endParaRPr lang="en-US" sz="1300" dirty="0"/>
+          </a:p>
+        </p:txBody>
+      </p:sp>
+      <p:sp>
+        <p:nvSpPr>
+          <p:cNvPr id="15" name="Text 13"/>
+          <p:cNvSpPr/>
+          <p:nvPr/>
+        </p:nvSpPr>
+        <p:spPr>
+          <a:xfrm>
+            <a:off x="8074152" y="4023360"/>
+            <a:ext cx="2825496" cy="1097280"/>
           </a:xfrm>
           <a:prstGeom prst="rect">
             <a:avLst/>
@@ -8583,7 +8956,7 @@
               <a:buNone/>
             </a:pPr>
             <a:r>
-              <a:rPr lang="en-US" sz="1250" dirty="0">
+              <a:rPr lang="en-US" sz="1550" dirty="0">
                 <a:solidFill>
                   <a:srgbClr val="17364A"/>
                 </a:solidFill>
@@ -8593,7 +8966,7 @@
               </a:rPr>
               <a:t>Connect the concept to public health decisions, safeguards, documentation, or implementation work.</a:t>
             </a:r>
-            <a:endParaRPr lang="en-US" sz="1250" dirty="0"/>
+            <a:endParaRPr lang="en-US" sz="1550" dirty="0"/>
           </a:p>
         </p:txBody>
       </p:sp>
@@ -8790,7 +9163,7 @@
                 <a:ea typeface="Aptos" pitchFamily="34" charset="-122"/>
                 <a:cs typeface="Aptos" pitchFamily="34" charset="-120"/>
               </a:rPr>
-              <a:t>© Paula Soper</a:t>
+              <a:t>Â© Paula Soper</a:t>
             </a:r>
             <a:endParaRPr lang="en-US" sz="800" dirty="0"/>
           </a:p>
@@ -8804,8 +9177,47 @@
         </p:nvSpPr>
         <p:spPr>
           <a:xfrm>
+            <a:off x="11137392" y="6510528"/>
+            <a:ext cx="411480" cy="201168"/>
+          </a:xfrm>
+          <a:prstGeom prst="rect">
+            <a:avLst/>
+          </a:prstGeom>
+          <a:noFill/>
+          <a:ln/>
+        </p:spPr>
+        <p:txBody>
+          <a:bodyPr wrap="square" lIns="0" tIns="0" rIns="0" bIns="0" rtlCol="0" anchor="ctr"/>
+          <a:lstStyle/>
+          <a:p>
+            <a:pPr algn="r" indent="0" marL="0">
+              <a:buNone/>
+            </a:pPr>
+            <a:r>
+              <a:rPr lang="en-US" sz="900" dirty="0">
+                <a:solidFill>
+                  <a:srgbClr val="5F7181"/>
+                </a:solidFill>
+                <a:latin typeface="Aptos" pitchFamily="34" charset="0"/>
+                <a:ea typeface="Aptos" pitchFamily="34" charset="-122"/>
+                <a:cs typeface="Aptos" pitchFamily="34" charset="-120"/>
+              </a:rPr>
+              <a:t>2</a:t>
+            </a:r>
+            <a:endParaRPr lang="en-US" sz="900" dirty="0"/>
+          </a:p>
+        </p:txBody>
+      </p:sp>
+      <p:sp>
+        <p:nvSpPr>
+          <p:cNvPr id="8" name="Text 6"/>
+          <p:cNvSpPr/>
+          <p:nvPr/>
+        </p:nvSpPr>
+        <p:spPr>
+          <a:xfrm>
             <a:off x="640080" y="658368"/>
-            <a:ext cx="10881360" cy="566928"/>
+            <a:ext cx="10881360" cy="713232"/>
           </a:xfrm>
           <a:prstGeom prst="rect">
             <a:avLst/>
@@ -8823,7 +9235,7 @@
               <a:buNone/>
             </a:pPr>
             <a:r>
-              <a:rPr lang="en-US" sz="2700" b="1" dirty="0">
+              <a:rPr lang="en-US" sz="3400" b="1" dirty="0">
                 <a:solidFill>
                   <a:srgbClr val="003A63"/>
                 </a:solidFill>
@@ -8833,20 +9245,20 @@
               </a:rPr>
               <a:t>What this module helps you do</a:t>
             </a:r>
-            <a:endParaRPr lang="en-US" sz="2700" dirty="0"/>
-          </a:p>
-        </p:txBody>
-      </p:sp>
-      <p:sp>
-        <p:nvSpPr>
-          <p:cNvPr id="8" name="Text 6"/>
-          <p:cNvSpPr/>
-          <p:nvPr/>
-        </p:nvSpPr>
-        <p:spPr>
-          <a:xfrm>
-            <a:off x="868680" y="1417320"/>
-            <a:ext cx="6675120" cy="3291840"/>
+            <a:endParaRPr lang="en-US" sz="3400" dirty="0"/>
+          </a:p>
+        </p:txBody>
+      </p:sp>
+      <p:sp>
+        <p:nvSpPr>
+          <p:cNvPr id="9" name="Text 7"/>
+          <p:cNvSpPr/>
+          <p:nvPr/>
+        </p:nvSpPr>
+        <p:spPr>
+          <a:xfrm>
+            <a:off x="868680" y="1508760"/>
+            <a:ext cx="6446520" cy="2926080"/>
           </a:xfrm>
           <a:prstGeom prst="rect">
             <a:avLst/>
@@ -8861,7 +9273,7 @@
           <a:lstStyle/>
           <a:p>
             <a:r>
-              <a:rPr lang="en-US" sz="1700" dirty="0">
+              <a:rPr lang="en-US" sz="2100" dirty="0">
                 <a:solidFill>
                   <a:srgbClr val="17364A"/>
                 </a:solidFill>
@@ -8869,13 +9281,13 @@
                 <a:ea typeface="Aptos" pitchFamily="34" charset="-122"/>
                 <a:cs typeface="Aptos" pitchFamily="34" charset="-120"/>
               </a:rPr>
-              <a:t>Agentic AI refers to AI systems configured to pursue a goal through multiple steps, often by using tools, calling APIs, retrieving information,.</a:t>
-            </a:r>
-            <a:endParaRPr lang="en-US" sz="1700" dirty="0"/>
-          </a:p>
-          <a:p>
-            <a:r>
-              <a:rPr lang="en-US" sz="1700" dirty="0">
+              <a:t>Agentic AI refers to AI systems configured to pursue a goal through multiple steps, often by using tools, calling.</a:t>
+            </a:r>
+            <a:endParaRPr lang="en-US" sz="2100" dirty="0"/>
+          </a:p>
+          <a:p>
+            <a:r>
+              <a:rPr lang="en-US" sz="2100" dirty="0">
                 <a:solidFill>
                   <a:srgbClr val="17364A"/>
                 </a:solidFill>
@@ -8883,13 +9295,13 @@
                 <a:ea typeface="Aptos" pitchFamily="34" charset="-122"/>
                 <a:cs typeface="Aptos" pitchFamily="34" charset="-120"/>
               </a:rPr>
-              <a:t>In public health, agentic workflows may eventually support intake triage, document routing, surveillance review, resource referral, emergency.</a:t>
-            </a:r>
-            <a:endParaRPr lang="en-US" sz="1700" dirty="0"/>
-          </a:p>
-          <a:p>
-            <a:r>
-              <a:rPr lang="en-US" sz="1700" dirty="0">
+              <a:t>In public health, agentic workflows may eventually support intake triage, document routing, surveillance review,.</a:t>
+            </a:r>
+            <a:endParaRPr lang="en-US" sz="2100" dirty="0"/>
+          </a:p>
+          <a:p>
+            <a:r>
+              <a:rPr lang="en-US" sz="2100" dirty="0">
                 <a:solidFill>
                   <a:srgbClr val="17364A"/>
                 </a:solidFill>
@@ -8899,27 +9311,13 @@
               </a:rPr>
               <a:t>These uses require stronger controls than simple drafting or summarization.</a:t>
             </a:r>
-            <a:endParaRPr lang="en-US" sz="1700" dirty="0"/>
-          </a:p>
-          <a:p>
-            <a:r>
-              <a:rPr lang="en-US" sz="1700" dirty="0">
-                <a:solidFill>
-                  <a:srgbClr val="17364A"/>
-                </a:solidFill>
-                <a:latin typeface="Aptos" pitchFamily="34" charset="0"/>
-                <a:ea typeface="Aptos" pitchFamily="34" charset="-122"/>
-                <a:cs typeface="Aptos" pitchFamily="34" charset="-120"/>
-              </a:rPr>
-              <a:t>This module teaches learners how to design agentic workflows with clear boundaries.</a:t>
-            </a:r>
-            <a:endParaRPr lang="en-US" sz="1700" dirty="0"/>
-          </a:p>
-        </p:txBody>
-      </p:sp>
-      <p:sp>
-        <p:nvSpPr>
-          <p:cNvPr id="9" name="Shape 7"/>
+            <a:endParaRPr lang="en-US" sz="2100" dirty="0"/>
+          </a:p>
+        </p:txBody>
+      </p:sp>
+      <p:sp>
+        <p:nvSpPr>
+          <p:cNvPr id="10" name="Shape 8"/>
           <p:cNvSpPr/>
           <p:nvPr/>
         </p:nvSpPr>
@@ -8946,14 +9344,14 @@
       </p:sp>
       <p:sp>
         <p:nvSpPr>
-          <p:cNvPr id="10" name="Text 8"/>
+          <p:cNvPr id="11" name="Text 9"/>
           <p:cNvSpPr/>
           <p:nvPr/>
         </p:nvSpPr>
         <p:spPr>
           <a:xfrm>
             <a:off x="8074152" y="1563624"/>
-            <a:ext cx="2825496" cy="201168"/>
+            <a:ext cx="2825496" cy="256032"/>
           </a:xfrm>
           <a:prstGeom prst="rect">
             <a:avLst/>
@@ -8969,7 +9367,7 @@
               <a:buNone/>
             </a:pPr>
             <a:r>
-              <a:rPr lang="en-US" sz="950" b="1" dirty="0">
+              <a:rPr lang="en-US" sz="1300" b="1" dirty="0">
                 <a:solidFill>
                   <a:srgbClr val="0068B7"/>
                 </a:solidFill>
@@ -8979,20 +9377,20 @@
               </a:rPr>
               <a:t>Module details</a:t>
             </a:r>
-            <a:endParaRPr lang="en-US" sz="950" dirty="0"/>
-          </a:p>
-        </p:txBody>
-      </p:sp>
-      <p:sp>
-        <p:nvSpPr>
-          <p:cNvPr id="11" name="Text 9"/>
-          <p:cNvSpPr/>
-          <p:nvPr/>
-        </p:nvSpPr>
-        <p:spPr>
-          <a:xfrm>
-            <a:off x="8074152" y="1856232"/>
-            <a:ext cx="2825496" cy="1353312"/>
+            <a:endParaRPr lang="en-US" sz="1300" dirty="0"/>
+          </a:p>
+        </p:txBody>
+      </p:sp>
+      <p:sp>
+        <p:nvSpPr>
+          <p:cNvPr id="12" name="Text 10"/>
+          <p:cNvSpPr/>
+          <p:nvPr/>
+        </p:nvSpPr>
+        <p:spPr>
+          <a:xfrm>
+            <a:off x="8074152" y="1920240"/>
+            <a:ext cx="2825496" cy="1280160"/>
           </a:xfrm>
           <a:prstGeom prst="rect">
             <a:avLst/>
@@ -9010,7 +9408,7 @@
               <a:buNone/>
             </a:pPr>
             <a:r>
-              <a:rPr lang="en-US" sz="1250" dirty="0">
+              <a:rPr lang="en-US" sz="1550" dirty="0">
                 <a:solidFill>
                   <a:srgbClr val="17364A"/>
                 </a:solidFill>
@@ -9020,14 +9418,14 @@
               </a:rPr>
               <a:t>Level: intermediate/practitioner</a:t>
             </a:r>
-            <a:endParaRPr lang="en-US" sz="1250" dirty="0"/>
+            <a:endParaRPr lang="en-US" sz="1550" dirty="0"/>
           </a:p>
           <a:p>
             <a:pPr indent="0" marL="0">
               <a:buNone/>
             </a:pPr>
             <a:r>
-              <a:rPr lang="en-US" sz="1250" dirty="0">
+              <a:rPr lang="en-US" sz="1550" dirty="0">
                 <a:solidFill>
                   <a:srgbClr val="17364A"/>
                 </a:solidFill>
@@ -9037,14 +9435,14 @@
               </a:rPr>
               <a:t>Primary track: Technical Architecture Track</a:t>
             </a:r>
-            <a:endParaRPr lang="en-US" sz="1250" dirty="0"/>
+            <a:endParaRPr lang="en-US" sz="1550" dirty="0"/>
           </a:p>
           <a:p>
             <a:pPr indent="0" marL="0">
               <a:buNone/>
             </a:pPr>
             <a:r>
-              <a:rPr lang="en-US" sz="1250" dirty="0">
+              <a:rPr lang="en-US" sz="1550" dirty="0">
                 <a:solidFill>
                   <a:srgbClr val="17364A"/>
                 </a:solidFill>
@@ -9054,32 +9452,32 @@
               </a:rPr>
               <a:t>Appears in tracks: analytics-modeling</a:t>
             </a:r>
-            <a:endParaRPr lang="en-US" sz="1250" dirty="0"/>
-          </a:p>
-        </p:txBody>
-      </p:sp>
-      <p:sp>
-        <p:nvSpPr>
-          <p:cNvPr id="12" name="Shape 10"/>
-          <p:cNvSpPr/>
-          <p:nvPr/>
-        </p:nvSpPr>
-        <p:spPr>
-          <a:xfrm>
-            <a:off x="7909560" y="3611880"/>
-            <a:ext cx="3154680" cy="1783080"/>
+            <a:endParaRPr lang="en-US" sz="1550" dirty="0"/>
+          </a:p>
+        </p:txBody>
+      </p:sp>
+      <p:sp>
+        <p:nvSpPr>
+          <p:cNvPr id="13" name="Shape 11"/>
+          <p:cNvSpPr/>
+          <p:nvPr/>
+        </p:nvSpPr>
+        <p:spPr>
+          <a:xfrm>
+            <a:off x="7635240" y="3730752"/>
+            <a:ext cx="1033272" cy="749808"/>
           </a:xfrm>
           <a:prstGeom prst="roundRect">
             <a:avLst>
-              <a:gd name="adj" fmla="val 6154"/>
+              <a:gd name="adj" fmla="val 14634"/>
             </a:avLst>
           </a:prstGeom>
           <a:solidFill>
-            <a:srgbClr val="EEF8ED"/>
+            <a:srgbClr val="0068B7"/>
           </a:solidFill>
           <a:ln w="12700">
             <a:solidFill>
-              <a:srgbClr val="B9D7E6"/>
+              <a:srgbClr val="0068B7"/>
             </a:solidFill>
             <a:prstDash val="solid"/>
           </a:ln>
@@ -9087,81 +9485,256 @@
       </p:sp>
       <p:sp>
         <p:nvSpPr>
-          <p:cNvPr id="13" name="Text 11"/>
-          <p:cNvSpPr/>
-          <p:nvPr/>
-        </p:nvSpPr>
-        <p:spPr>
-          <a:xfrm>
-            <a:off x="8074152" y="3758184"/>
-            <a:ext cx="2825496" cy="201168"/>
-          </a:xfrm>
-          <a:prstGeom prst="rect">
-            <a:avLst/>
-          </a:prstGeom>
-          <a:noFill/>
-          <a:ln/>
-        </p:spPr>
-        <p:txBody>
-          <a:bodyPr wrap="square" lIns="0" tIns="0" rIns="0" bIns="0" rtlCol="0" anchor="ctr"/>
-          <a:lstStyle/>
-          <a:p>
-            <a:pPr indent="0" marL="0">
-              <a:buNone/>
-            </a:pPr>
-            <a:r>
-              <a:rPr lang="en-US" sz="950" b="1" dirty="0">
-                <a:solidFill>
-                  <a:srgbClr val="0068B7"/>
-                </a:solidFill>
-                <a:latin typeface="Aptos" pitchFamily="34" charset="0"/>
-                <a:ea typeface="Aptos" pitchFamily="34" charset="-122"/>
-                <a:cs typeface="Aptos" pitchFamily="34" charset="-120"/>
-              </a:rPr>
-              <a:t>Learning approach</a:t>
-            </a:r>
-            <a:endParaRPr lang="en-US" sz="950" dirty="0"/>
-          </a:p>
-        </p:txBody>
-      </p:sp>
-      <p:sp>
-        <p:nvSpPr>
           <p:cNvPr id="14" name="Text 12"/>
           <p:cNvSpPr/>
           <p:nvPr/>
         </p:nvSpPr>
         <p:spPr>
           <a:xfrm>
-            <a:off x="8074152" y="4050792"/>
-            <a:ext cx="2825496" cy="1216152"/>
-          </a:xfrm>
-          <a:prstGeom prst="rect">
-            <a:avLst/>
-          </a:prstGeom>
-          <a:noFill/>
-          <a:ln/>
-        </p:spPr>
-        <p:txBody>
-          <a:bodyPr wrap="square" lIns="0" tIns="0" rIns="0" bIns="0" rtlCol="0" anchor="t">
+            <a:off x="7708392" y="3922776"/>
+            <a:ext cx="886968" cy="310896"/>
+          </a:xfrm>
+          <a:prstGeom prst="rect">
+            <a:avLst/>
+          </a:prstGeom>
+          <a:noFill/>
+          <a:ln/>
+        </p:spPr>
+        <p:txBody>
+          <a:bodyPr wrap="square" lIns="0" tIns="0" rIns="0" bIns="0" rtlCol="0" anchor="ctr">
             <a:normAutofit/>
           </a:bodyPr>
           <a:lstStyle/>
           <a:p>
-            <a:pPr indent="0" marL="0">
-              <a:buNone/>
-            </a:pPr>
-            <a:r>
-              <a:rPr lang="en-US" sz="1250" dirty="0">
-                <a:solidFill>
-                  <a:srgbClr val="17364A"/>
-                </a:solidFill>
-                <a:latin typeface="Aptos" pitchFamily="34" charset="0"/>
-                <a:ea typeface="Aptos" pitchFamily="34" charset="-122"/>
-                <a:cs typeface="Aptos" pitchFamily="34" charset="-120"/>
-              </a:rPr>
-              <a:t>Review the core ideas, complete the practical exercise, check your understanding, and use the related plays and tools to apply the lesson.</a:t>
-            </a:r>
-            <a:endParaRPr lang="en-US" sz="1250" dirty="0"/>
+            <a:pPr algn="ctr" indent="0" marL="0">
+              <a:buNone/>
+            </a:pPr>
+            <a:r>
+              <a:rPr lang="en-US" sz="1500" b="1" dirty="0">
+                <a:solidFill>
+                  <a:srgbClr val="FFFFFF"/>
+                </a:solidFill>
+                <a:latin typeface="Aptos" pitchFamily="34" charset="0"/>
+                <a:ea typeface="Aptos" pitchFamily="34" charset="-122"/>
+                <a:cs typeface="Aptos" pitchFamily="34" charset="-120"/>
+              </a:rPr>
+              <a:t>Learn</a:t>
+            </a:r>
+            <a:endParaRPr lang="en-US" sz="1500" dirty="0"/>
+          </a:p>
+        </p:txBody>
+      </p:sp>
+      <p:sp>
+        <p:nvSpPr>
+          <p:cNvPr id="15" name="Text 13"/>
+          <p:cNvSpPr/>
+          <p:nvPr/>
+        </p:nvSpPr>
+        <p:spPr>
+          <a:xfrm>
+            <a:off x="8695944" y="3941064"/>
+            <a:ext cx="201168" cy="256032"/>
+          </a:xfrm>
+          <a:prstGeom prst="rect">
+            <a:avLst/>
+          </a:prstGeom>
+          <a:noFill/>
+          <a:ln/>
+        </p:spPr>
+        <p:txBody>
+          <a:bodyPr wrap="square" lIns="0" tIns="0" rIns="0" bIns="0" rtlCol="0" anchor="ctr"/>
+          <a:lstStyle/>
+          <a:p>
+            <a:pPr algn="ctr" indent="0" marL="0">
+              <a:buNone/>
+            </a:pPr>
+            <a:r>
+              <a:rPr lang="en-US" sz="1800" b="1" dirty="0">
+                <a:solidFill>
+                  <a:srgbClr val="0068B7"/>
+                </a:solidFill>
+                <a:latin typeface="Aptos" pitchFamily="34" charset="0"/>
+                <a:ea typeface="Aptos" pitchFamily="34" charset="-122"/>
+                <a:cs typeface="Aptos" pitchFamily="34" charset="-120"/>
+              </a:rPr>
+              <a:t>â†’</a:t>
+            </a:r>
+            <a:endParaRPr lang="en-US" sz="1800" dirty="0"/>
+          </a:p>
+        </p:txBody>
+      </p:sp>
+      <p:sp>
+        <p:nvSpPr>
+          <p:cNvPr id="16" name="Shape 14"/>
+          <p:cNvSpPr/>
+          <p:nvPr/>
+        </p:nvSpPr>
+        <p:spPr>
+          <a:xfrm>
+            <a:off x="8924544" y="3730752"/>
+            <a:ext cx="1033272" cy="749808"/>
+          </a:xfrm>
+          <a:prstGeom prst="roundRect">
+            <a:avLst>
+              <a:gd name="adj" fmla="val 14634"/>
+            </a:avLst>
+          </a:prstGeom>
+          <a:solidFill>
+            <a:srgbClr val="2F8A28"/>
+          </a:solidFill>
+          <a:ln w="12700">
+            <a:solidFill>
+              <a:srgbClr val="2F8A28"/>
+            </a:solidFill>
+            <a:prstDash val="solid"/>
+          </a:ln>
+        </p:spPr>
+      </p:sp>
+      <p:sp>
+        <p:nvSpPr>
+          <p:cNvPr id="17" name="Text 15"/>
+          <p:cNvSpPr/>
+          <p:nvPr/>
+        </p:nvSpPr>
+        <p:spPr>
+          <a:xfrm>
+            <a:off x="8997696" y="3922776"/>
+            <a:ext cx="886968" cy="310896"/>
+          </a:xfrm>
+          <a:prstGeom prst="rect">
+            <a:avLst/>
+          </a:prstGeom>
+          <a:noFill/>
+          <a:ln/>
+        </p:spPr>
+        <p:txBody>
+          <a:bodyPr wrap="square" lIns="0" tIns="0" rIns="0" bIns="0" rtlCol="0" anchor="ctr">
+            <a:normAutofit/>
+          </a:bodyPr>
+          <a:lstStyle/>
+          <a:p>
+            <a:pPr algn="ctr" indent="0" marL="0">
+              <a:buNone/>
+            </a:pPr>
+            <a:r>
+              <a:rPr lang="en-US" sz="1500" b="1" dirty="0">
+                <a:solidFill>
+                  <a:srgbClr val="FFFFFF"/>
+                </a:solidFill>
+                <a:latin typeface="Aptos" pitchFamily="34" charset="0"/>
+                <a:ea typeface="Aptos" pitchFamily="34" charset="-122"/>
+                <a:cs typeface="Aptos" pitchFamily="34" charset="-120"/>
+              </a:rPr>
+              <a:t>Apply</a:t>
+            </a:r>
+            <a:endParaRPr lang="en-US" sz="1500" dirty="0"/>
+          </a:p>
+        </p:txBody>
+      </p:sp>
+      <p:sp>
+        <p:nvSpPr>
+          <p:cNvPr id="18" name="Text 16"/>
+          <p:cNvSpPr/>
+          <p:nvPr/>
+        </p:nvSpPr>
+        <p:spPr>
+          <a:xfrm>
+            <a:off x="9985248" y="3941064"/>
+            <a:ext cx="201168" cy="256032"/>
+          </a:xfrm>
+          <a:prstGeom prst="rect">
+            <a:avLst/>
+          </a:prstGeom>
+          <a:noFill/>
+          <a:ln/>
+        </p:spPr>
+        <p:txBody>
+          <a:bodyPr wrap="square" lIns="0" tIns="0" rIns="0" bIns="0" rtlCol="0" anchor="ctr"/>
+          <a:lstStyle/>
+          <a:p>
+            <a:pPr algn="ctr" indent="0" marL="0">
+              <a:buNone/>
+            </a:pPr>
+            <a:r>
+              <a:rPr lang="en-US" sz="1800" b="1" dirty="0">
+                <a:solidFill>
+                  <a:srgbClr val="0068B7"/>
+                </a:solidFill>
+                <a:latin typeface="Aptos" pitchFamily="34" charset="0"/>
+                <a:ea typeface="Aptos" pitchFamily="34" charset="-122"/>
+                <a:cs typeface="Aptos" pitchFamily="34" charset="-120"/>
+              </a:rPr>
+              <a:t>â†’</a:t>
+            </a:r>
+            <a:endParaRPr lang="en-US" sz="1800" dirty="0"/>
+          </a:p>
+        </p:txBody>
+      </p:sp>
+      <p:sp>
+        <p:nvSpPr>
+          <p:cNvPr id="19" name="Shape 17"/>
+          <p:cNvSpPr/>
+          <p:nvPr/>
+        </p:nvSpPr>
+        <p:spPr>
+          <a:xfrm>
+            <a:off x="10213848" y="3730752"/>
+            <a:ext cx="1033272" cy="749808"/>
+          </a:xfrm>
+          <a:prstGeom prst="roundRect">
+            <a:avLst>
+              <a:gd name="adj" fmla="val 14634"/>
+            </a:avLst>
+          </a:prstGeom>
+          <a:solidFill>
+            <a:srgbClr val="6A4CA3"/>
+          </a:solidFill>
+          <a:ln w="12700">
+            <a:solidFill>
+              <a:srgbClr val="6A4CA3"/>
+            </a:solidFill>
+            <a:prstDash val="solid"/>
+          </a:ln>
+        </p:spPr>
+      </p:sp>
+      <p:sp>
+        <p:nvSpPr>
+          <p:cNvPr id="20" name="Text 18"/>
+          <p:cNvSpPr/>
+          <p:nvPr/>
+        </p:nvSpPr>
+        <p:spPr>
+          <a:xfrm>
+            <a:off x="10287000" y="3922776"/>
+            <a:ext cx="886968" cy="310896"/>
+          </a:xfrm>
+          <a:prstGeom prst="rect">
+            <a:avLst/>
+          </a:prstGeom>
+          <a:noFill/>
+          <a:ln/>
+        </p:spPr>
+        <p:txBody>
+          <a:bodyPr wrap="square" lIns="0" tIns="0" rIns="0" bIns="0" rtlCol="0" anchor="ctr">
+            <a:normAutofit/>
+          </a:bodyPr>
+          <a:lstStyle/>
+          <a:p>
+            <a:pPr algn="ctr" indent="0" marL="0">
+              <a:buNone/>
+            </a:pPr>
+            <a:r>
+              <a:rPr lang="en-US" sz="1500" b="1" dirty="0">
+                <a:solidFill>
+                  <a:srgbClr val="FFFFFF"/>
+                </a:solidFill>
+                <a:latin typeface="Aptos" pitchFamily="34" charset="0"/>
+                <a:ea typeface="Aptos" pitchFamily="34" charset="-122"/>
+                <a:cs typeface="Aptos" pitchFamily="34" charset="-120"/>
+              </a:rPr>
+              <a:t>Document</a:t>
+            </a:r>
+            <a:endParaRPr lang="en-US" sz="1500" dirty="0"/>
           </a:p>
         </p:txBody>
       </p:sp>
@@ -9358,7 +9931,7 @@
                 <a:ea typeface="Aptos" pitchFamily="34" charset="-122"/>
                 <a:cs typeface="Aptos" pitchFamily="34" charset="-120"/>
               </a:rPr>
-              <a:t>© Paula Soper</a:t>
+              <a:t>Â© Paula Soper</a:t>
             </a:r>
             <a:endParaRPr lang="en-US" sz="800" dirty="0"/>
           </a:p>
@@ -9366,7 +9939,46 @@
       </p:sp>
       <p:sp>
         <p:nvSpPr>
-          <p:cNvPr id="7" name="Shape 5"/>
+          <p:cNvPr id="7" name="Text 5"/>
+          <p:cNvSpPr/>
+          <p:nvPr/>
+        </p:nvSpPr>
+        <p:spPr>
+          <a:xfrm>
+            <a:off x="11137392" y="6510528"/>
+            <a:ext cx="411480" cy="201168"/>
+          </a:xfrm>
+          <a:prstGeom prst="rect">
+            <a:avLst/>
+          </a:prstGeom>
+          <a:noFill/>
+          <a:ln/>
+        </p:spPr>
+        <p:txBody>
+          <a:bodyPr wrap="square" lIns="0" tIns="0" rIns="0" bIns="0" rtlCol="0" anchor="ctr"/>
+          <a:lstStyle/>
+          <a:p>
+            <a:pPr algn="r" indent="0" marL="0">
+              <a:buNone/>
+            </a:pPr>
+            <a:r>
+              <a:rPr lang="en-US" sz="900" dirty="0">
+                <a:solidFill>
+                  <a:srgbClr val="5F7181"/>
+                </a:solidFill>
+                <a:latin typeface="Aptos" pitchFamily="34" charset="0"/>
+                <a:ea typeface="Aptos" pitchFamily="34" charset="-122"/>
+                <a:cs typeface="Aptos" pitchFamily="34" charset="-120"/>
+              </a:rPr>
+              <a:t>20</a:t>
+            </a:r>
+            <a:endParaRPr lang="en-US" sz="900" dirty="0"/>
+          </a:p>
+        </p:txBody>
+      </p:sp>
+      <p:sp>
+        <p:nvSpPr>
+          <p:cNvPr id="8" name="Shape 6"/>
           <p:cNvSpPr/>
           <p:nvPr/>
         </p:nvSpPr>
@@ -9391,7 +10003,7 @@
       </p:sp>
       <p:sp>
         <p:nvSpPr>
-          <p:cNvPr id="8" name="Text 6"/>
+          <p:cNvPr id="9" name="Text 7"/>
           <p:cNvSpPr/>
           <p:nvPr/>
         </p:nvSpPr>
@@ -9430,14 +10042,14 @@
       </p:sp>
       <p:sp>
         <p:nvSpPr>
-          <p:cNvPr id="9" name="Text 7"/>
+          <p:cNvPr id="10" name="Text 8"/>
           <p:cNvSpPr/>
           <p:nvPr/>
         </p:nvSpPr>
         <p:spPr>
           <a:xfrm>
             <a:off x="640080" y="621792"/>
-            <a:ext cx="10881360" cy="566928"/>
+            <a:ext cx="10881360" cy="713232"/>
           </a:xfrm>
           <a:prstGeom prst="rect">
             <a:avLst/>
@@ -9455,7 +10067,7 @@
               <a:buNone/>
             </a:pPr>
             <a:r>
-              <a:rPr lang="en-US" sz="2700" b="1" dirty="0">
+              <a:rPr lang="en-US" sz="3400" b="1" dirty="0">
                 <a:solidFill>
                   <a:srgbClr val="003A63"/>
                 </a:solidFill>
@@ -9465,20 +10077,20 @@
               </a:rPr>
               <a:t>Expected Assignment</a:t>
             </a:r>
-            <a:endParaRPr lang="en-US" sz="2700" dirty="0"/>
-          </a:p>
-        </p:txBody>
-      </p:sp>
-      <p:sp>
-        <p:nvSpPr>
-          <p:cNvPr id="10" name="Text 8"/>
-          <p:cNvSpPr/>
-          <p:nvPr/>
-        </p:nvSpPr>
-        <p:spPr>
-          <a:xfrm>
-            <a:off x="868680" y="1417320"/>
-            <a:ext cx="6675120" cy="4434840"/>
+            <a:endParaRPr lang="en-US" sz="3400" dirty="0"/>
+          </a:p>
+        </p:txBody>
+      </p:sp>
+      <p:sp>
+        <p:nvSpPr>
+          <p:cNvPr id="11" name="Text 9"/>
+          <p:cNvSpPr/>
+          <p:nvPr/>
+        </p:nvSpPr>
+        <p:spPr>
+          <a:xfrm>
+            <a:off x="868680" y="1508760"/>
+            <a:ext cx="6537960" cy="4160520"/>
           </a:xfrm>
           <a:prstGeom prst="rect">
             <a:avLst/>
@@ -9493,7 +10105,7 @@
           <a:lstStyle/>
           <a:p>
             <a:r>
-              <a:rPr lang="en-US" sz="1700" dirty="0">
+              <a:rPr lang="en-US" sz="2100" dirty="0">
                 <a:solidFill>
                   <a:srgbClr val="17364A"/>
                 </a:solidFill>
@@ -9503,11 +10115,11 @@
               </a:rPr>
               <a:t>Agentic workflow control plan</a:t>
             </a:r>
-            <a:endParaRPr lang="en-US" sz="1700" dirty="0"/>
-          </a:p>
-          <a:p>
-            <a:r>
-              <a:rPr lang="en-US" sz="1700" dirty="0">
+            <a:endParaRPr lang="en-US" sz="2100" dirty="0"/>
+          </a:p>
+          <a:p>
+            <a:r>
+              <a:rPr lang="en-US" sz="2100" dirty="0">
                 <a:solidFill>
                   <a:srgbClr val="17364A"/>
                 </a:solidFill>
@@ -9517,11 +10129,11 @@
               </a:rPr>
               <a:t>Allowed/prohibited action list</a:t>
             </a:r>
-            <a:endParaRPr lang="en-US" sz="1700" dirty="0"/>
-          </a:p>
-          <a:p>
-            <a:r>
-              <a:rPr lang="en-US" sz="1700" dirty="0">
+            <a:endParaRPr lang="en-US" sz="2100" dirty="0"/>
+          </a:p>
+          <a:p>
+            <a:r>
+              <a:rPr lang="en-US" sz="2100" dirty="0">
                 <a:solidFill>
                   <a:srgbClr val="17364A"/>
                 </a:solidFill>
@@ -9531,27 +10143,13 @@
               </a:rPr>
               <a:t>Human approval and escalation map</a:t>
             </a:r>
-            <a:endParaRPr lang="en-US" sz="1700" dirty="0"/>
-          </a:p>
-          <a:p>
-            <a:r>
-              <a:rPr lang="en-US" sz="1700" dirty="0">
-                <a:solidFill>
-                  <a:srgbClr val="17364A"/>
-                </a:solidFill>
-                <a:latin typeface="Aptos" pitchFamily="34" charset="0"/>
-                <a:ea typeface="Aptos" pitchFamily="34" charset="-122"/>
-                <a:cs typeface="Aptos" pitchFamily="34" charset="-120"/>
-              </a:rPr>
-              <a:t>Tool-call logging requirements</a:t>
-            </a:r>
-            <a:endParaRPr lang="en-US" sz="1700" dirty="0"/>
-          </a:p>
-        </p:txBody>
-      </p:sp>
-      <p:sp>
-        <p:nvSpPr>
-          <p:cNvPr id="11" name="Shape 9"/>
+            <a:endParaRPr lang="en-US" sz="2100" dirty="0"/>
+          </a:p>
+        </p:txBody>
+      </p:sp>
+      <p:sp>
+        <p:nvSpPr>
+          <p:cNvPr id="12" name="Shape 10"/>
           <p:cNvSpPr/>
           <p:nvPr/>
         </p:nvSpPr>
@@ -9578,14 +10176,14 @@
       </p:sp>
       <p:sp>
         <p:nvSpPr>
-          <p:cNvPr id="12" name="Text 10"/>
+          <p:cNvPr id="13" name="Text 11"/>
           <p:cNvSpPr/>
           <p:nvPr/>
         </p:nvSpPr>
         <p:spPr>
           <a:xfrm>
             <a:off x="8074152" y="1563624"/>
-            <a:ext cx="2825496" cy="201168"/>
+            <a:ext cx="2825496" cy="256032"/>
           </a:xfrm>
           <a:prstGeom prst="rect">
             <a:avLst/>
@@ -9601,7 +10199,7 @@
               <a:buNone/>
             </a:pPr>
             <a:r>
-              <a:rPr lang="en-US" sz="950" b="1" dirty="0">
+              <a:rPr lang="en-US" sz="1300" b="1" dirty="0">
                 <a:solidFill>
                   <a:srgbClr val="0068B7"/>
                 </a:solidFill>
@@ -9611,20 +10209,20 @@
               </a:rPr>
               <a:t>Key idea</a:t>
             </a:r>
-            <a:endParaRPr lang="en-US" sz="950" dirty="0"/>
-          </a:p>
-        </p:txBody>
-      </p:sp>
-      <p:sp>
-        <p:nvSpPr>
-          <p:cNvPr id="13" name="Text 11"/>
-          <p:cNvSpPr/>
-          <p:nvPr/>
-        </p:nvSpPr>
-        <p:spPr>
-          <a:xfrm>
-            <a:off x="8074152" y="1856232"/>
-            <a:ext cx="2825496" cy="1261872"/>
+            <a:endParaRPr lang="en-US" sz="1300" dirty="0"/>
+          </a:p>
+        </p:txBody>
+      </p:sp>
+      <p:sp>
+        <p:nvSpPr>
+          <p:cNvPr id="14" name="Text 12"/>
+          <p:cNvSpPr/>
+          <p:nvPr/>
+        </p:nvSpPr>
+        <p:spPr>
+          <a:xfrm>
+            <a:off x="8074152" y="1920240"/>
+            <a:ext cx="2825496" cy="1188720"/>
           </a:xfrm>
           <a:prstGeom prst="rect">
             <a:avLst/>
@@ -9642,7 +10240,7 @@
               <a:buNone/>
             </a:pPr>
             <a:r>
-              <a:rPr lang="en-US" sz="1250" dirty="0">
+              <a:rPr lang="en-US" sz="1550" dirty="0">
                 <a:solidFill>
                   <a:srgbClr val="17364A"/>
                 </a:solidFill>
@@ -9652,13 +10250,13 @@
               </a:rPr>
               <a:t>Agentic workflow control plan</a:t>
             </a:r>
-            <a:endParaRPr lang="en-US" sz="1250" dirty="0"/>
-          </a:p>
-        </p:txBody>
-      </p:sp>
-      <p:sp>
-        <p:nvSpPr>
-          <p:cNvPr id="14" name="Shape 12"/>
+            <a:endParaRPr lang="en-US" sz="1550" dirty="0"/>
+          </a:p>
+        </p:txBody>
+      </p:sp>
+      <p:sp>
+        <p:nvSpPr>
+          <p:cNvPr id="15" name="Shape 13"/>
           <p:cNvSpPr/>
           <p:nvPr/>
         </p:nvSpPr>
@@ -9685,14 +10283,14 @@
       </p:sp>
       <p:sp>
         <p:nvSpPr>
-          <p:cNvPr id="15" name="Text 13"/>
+          <p:cNvPr id="16" name="Text 14"/>
           <p:cNvSpPr/>
           <p:nvPr/>
         </p:nvSpPr>
         <p:spPr>
           <a:xfrm>
             <a:off x="8074152" y="3666744"/>
-            <a:ext cx="2825496" cy="201168"/>
+            <a:ext cx="2825496" cy="256032"/>
           </a:xfrm>
           <a:prstGeom prst="rect">
             <a:avLst/>
@@ -9708,7 +10306,7 @@
               <a:buNone/>
             </a:pPr>
             <a:r>
-              <a:rPr lang="en-US" sz="950" b="1" dirty="0">
+              <a:rPr lang="en-US" sz="1300" b="1" dirty="0">
                 <a:solidFill>
                   <a:srgbClr val="0068B7"/>
                 </a:solidFill>
@@ -9718,20 +10316,20 @@
               </a:rPr>
               <a:t>Use this for</a:t>
             </a:r>
-            <a:endParaRPr lang="en-US" sz="950" dirty="0"/>
-          </a:p>
-        </p:txBody>
-      </p:sp>
-      <p:sp>
-        <p:nvSpPr>
-          <p:cNvPr id="16" name="Text 14"/>
-          <p:cNvSpPr/>
-          <p:nvPr/>
-        </p:nvSpPr>
-        <p:spPr>
-          <a:xfrm>
-            <a:off x="8074152" y="3959352"/>
-            <a:ext cx="2825496" cy="1170432"/>
+            <a:endParaRPr lang="en-US" sz="1300" dirty="0"/>
+          </a:p>
+        </p:txBody>
+      </p:sp>
+      <p:sp>
+        <p:nvSpPr>
+          <p:cNvPr id="17" name="Text 15"/>
+          <p:cNvSpPr/>
+          <p:nvPr/>
+        </p:nvSpPr>
+        <p:spPr>
+          <a:xfrm>
+            <a:off x="8074152" y="4023360"/>
+            <a:ext cx="2825496" cy="1097280"/>
           </a:xfrm>
           <a:prstGeom prst="rect">
             <a:avLst/>
@@ -9749,7 +10347,7 @@
               <a:buNone/>
             </a:pPr>
             <a:r>
-              <a:rPr lang="en-US" sz="1250" dirty="0">
+              <a:rPr lang="en-US" sz="1550" dirty="0">
                 <a:solidFill>
                   <a:srgbClr val="17364A"/>
                 </a:solidFill>
@@ -9759,7 +10357,7 @@
               </a:rPr>
               <a:t>Connect the concept to public health decisions, safeguards, documentation, or implementation work.</a:t>
             </a:r>
-            <a:endParaRPr lang="en-US" sz="1250" dirty="0"/>
+            <a:endParaRPr lang="en-US" sz="1550" dirty="0"/>
           </a:p>
         </p:txBody>
       </p:sp>
@@ -9956,7 +10554,7 @@
                 <a:ea typeface="Aptos" pitchFamily="34" charset="-122"/>
                 <a:cs typeface="Aptos" pitchFamily="34" charset="-120"/>
               </a:rPr>
-              <a:t>© Paula Soper</a:t>
+              <a:t>Â© Paula Soper</a:t>
             </a:r>
             <a:endParaRPr lang="en-US" sz="800" dirty="0"/>
           </a:p>
@@ -9964,7 +10562,46 @@
       </p:sp>
       <p:sp>
         <p:nvSpPr>
-          <p:cNvPr id="7" name="Shape 5"/>
+          <p:cNvPr id="7" name="Text 5"/>
+          <p:cNvSpPr/>
+          <p:nvPr/>
+        </p:nvSpPr>
+        <p:spPr>
+          <a:xfrm>
+            <a:off x="11137392" y="6510528"/>
+            <a:ext cx="411480" cy="201168"/>
+          </a:xfrm>
+          <a:prstGeom prst="rect">
+            <a:avLst/>
+          </a:prstGeom>
+          <a:noFill/>
+          <a:ln/>
+        </p:spPr>
+        <p:txBody>
+          <a:bodyPr wrap="square" lIns="0" tIns="0" rIns="0" bIns="0" rtlCol="0" anchor="ctr"/>
+          <a:lstStyle/>
+          <a:p>
+            <a:pPr algn="r" indent="0" marL="0">
+              <a:buNone/>
+            </a:pPr>
+            <a:r>
+              <a:rPr lang="en-US" sz="900" dirty="0">
+                <a:solidFill>
+                  <a:srgbClr val="5F7181"/>
+                </a:solidFill>
+                <a:latin typeface="Aptos" pitchFamily="34" charset="0"/>
+                <a:ea typeface="Aptos" pitchFamily="34" charset="-122"/>
+                <a:cs typeface="Aptos" pitchFamily="34" charset="-120"/>
+              </a:rPr>
+              <a:t>21</a:t>
+            </a:r>
+            <a:endParaRPr lang="en-US" sz="900" dirty="0"/>
+          </a:p>
+        </p:txBody>
+      </p:sp>
+      <p:sp>
+        <p:nvSpPr>
+          <p:cNvPr id="8" name="Shape 6"/>
           <p:cNvSpPr/>
           <p:nvPr/>
         </p:nvSpPr>
@@ -9989,7 +10626,7 @@
       </p:sp>
       <p:sp>
         <p:nvSpPr>
-          <p:cNvPr id="8" name="Text 6"/>
+          <p:cNvPr id="9" name="Text 7"/>
           <p:cNvSpPr/>
           <p:nvPr/>
         </p:nvSpPr>
@@ -10028,14 +10665,14 @@
       </p:sp>
       <p:sp>
         <p:nvSpPr>
-          <p:cNvPr id="9" name="Text 7"/>
+          <p:cNvPr id="10" name="Text 8"/>
           <p:cNvSpPr/>
           <p:nvPr/>
         </p:nvSpPr>
         <p:spPr>
           <a:xfrm>
             <a:off x="640080" y="621792"/>
-            <a:ext cx="10881360" cy="566928"/>
+            <a:ext cx="10881360" cy="713232"/>
           </a:xfrm>
           <a:prstGeom prst="rect">
             <a:avLst/>
@@ -10053,7 +10690,7 @@
               <a:buNone/>
             </a:pPr>
             <a:r>
-              <a:rPr lang="en-US" sz="2700" b="1" dirty="0">
+              <a:rPr lang="en-US" sz="3400" b="1" dirty="0">
                 <a:solidFill>
                   <a:srgbClr val="003A63"/>
                 </a:solidFill>
@@ -10063,20 +10700,20 @@
               </a:rPr>
               <a:t>Knowledge Check</a:t>
             </a:r>
-            <a:endParaRPr lang="en-US" sz="2700" dirty="0"/>
-          </a:p>
-        </p:txBody>
-      </p:sp>
-      <p:sp>
-        <p:nvSpPr>
-          <p:cNvPr id="10" name="Text 8"/>
-          <p:cNvSpPr/>
-          <p:nvPr/>
-        </p:nvSpPr>
-        <p:spPr>
-          <a:xfrm>
-            <a:off x="868680" y="1417320"/>
-            <a:ext cx="6675120" cy="4434840"/>
+            <a:endParaRPr lang="en-US" sz="3400" dirty="0"/>
+          </a:p>
+        </p:txBody>
+      </p:sp>
+      <p:sp>
+        <p:nvSpPr>
+          <p:cNvPr id="11" name="Text 9"/>
+          <p:cNvSpPr/>
+          <p:nvPr/>
+        </p:nvSpPr>
+        <p:spPr>
+          <a:xfrm>
+            <a:off x="868680" y="1508760"/>
+            <a:ext cx="6537960" cy="4160520"/>
           </a:xfrm>
           <a:prstGeom prst="rect">
             <a:avLst/>
@@ -10091,7 +10728,7 @@
           <a:lstStyle/>
           <a:p>
             <a:r>
-              <a:rPr lang="en-US" sz="1700" dirty="0">
+              <a:rPr lang="en-US" sz="2100" dirty="0">
                 <a:solidFill>
                   <a:srgbClr val="17364A"/>
                 </a:solidFill>
@@ -10101,11 +10738,11 @@
               </a:rPr>
               <a:t>1. What makes agentic AI different from simple drafting support?</a:t>
             </a:r>
-            <a:endParaRPr lang="en-US" sz="1700" dirty="0"/>
-          </a:p>
-          <a:p>
-            <a:r>
-              <a:rPr lang="en-US" sz="1700" dirty="0">
+            <a:endParaRPr lang="en-US" sz="2100" dirty="0"/>
+          </a:p>
+          <a:p>
+            <a:r>
+              <a:rPr lang="en-US" sz="2100" dirty="0">
                 <a:solidFill>
                   <a:srgbClr val="17364A"/>
                 </a:solidFill>
@@ -10115,11 +10752,11 @@
               </a:rPr>
               <a:t>2. Which action usually requires stronger oversight?</a:t>
             </a:r>
-            <a:endParaRPr lang="en-US" sz="1700" dirty="0"/>
-          </a:p>
-          <a:p>
-            <a:r>
-              <a:rPr lang="en-US" sz="1700" dirty="0">
+            <a:endParaRPr lang="en-US" sz="2100" dirty="0"/>
+          </a:p>
+          <a:p>
+            <a:r>
+              <a:rPr lang="en-US" sz="2100" dirty="0">
                 <a:solidFill>
                   <a:srgbClr val="17364A"/>
                 </a:solidFill>
@@ -10129,27 +10766,13 @@
               </a:rPr>
               <a:t>3. What is orchestration?</a:t>
             </a:r>
-            <a:endParaRPr lang="en-US" sz="1700" dirty="0"/>
-          </a:p>
-          <a:p>
-            <a:r>
-              <a:rPr lang="en-US" sz="1700" dirty="0">
-                <a:solidFill>
-                  <a:srgbClr val="17364A"/>
-                </a:solidFill>
-                <a:latin typeface="Aptos" pitchFamily="34" charset="0"/>
-                <a:ea typeface="Aptos" pitchFamily="34" charset="-122"/>
-                <a:cs typeface="Aptos" pitchFamily="34" charset="-120"/>
-              </a:rPr>
-              <a:t>4. What should happen when an agent encounters an out-of-scope request?</a:t>
-            </a:r>
-            <a:endParaRPr lang="en-US" sz="1700" dirty="0"/>
-          </a:p>
-        </p:txBody>
-      </p:sp>
-      <p:sp>
-        <p:nvSpPr>
-          <p:cNvPr id="11" name="Shape 9"/>
+            <a:endParaRPr lang="en-US" sz="2100" dirty="0"/>
+          </a:p>
+        </p:txBody>
+      </p:sp>
+      <p:sp>
+        <p:nvSpPr>
+          <p:cNvPr id="12" name="Shape 10"/>
           <p:cNvSpPr/>
           <p:nvPr/>
         </p:nvSpPr>
@@ -10176,14 +10799,14 @@
       </p:sp>
       <p:sp>
         <p:nvSpPr>
-          <p:cNvPr id="12" name="Text 10"/>
+          <p:cNvPr id="13" name="Text 11"/>
           <p:cNvSpPr/>
           <p:nvPr/>
         </p:nvSpPr>
         <p:spPr>
           <a:xfrm>
             <a:off x="8074152" y="1563624"/>
-            <a:ext cx="2825496" cy="201168"/>
+            <a:ext cx="2825496" cy="256032"/>
           </a:xfrm>
           <a:prstGeom prst="rect">
             <a:avLst/>
@@ -10199,7 +10822,7 @@
               <a:buNone/>
             </a:pPr>
             <a:r>
-              <a:rPr lang="en-US" sz="950" b="1" dirty="0">
+              <a:rPr lang="en-US" sz="1300" b="1" dirty="0">
                 <a:solidFill>
                   <a:srgbClr val="0068B7"/>
                 </a:solidFill>
@@ -10209,20 +10832,20 @@
               </a:rPr>
               <a:t>Key idea</a:t>
             </a:r>
-            <a:endParaRPr lang="en-US" sz="950" dirty="0"/>
-          </a:p>
-        </p:txBody>
-      </p:sp>
-      <p:sp>
-        <p:nvSpPr>
-          <p:cNvPr id="13" name="Text 11"/>
-          <p:cNvSpPr/>
-          <p:nvPr/>
-        </p:nvSpPr>
-        <p:spPr>
-          <a:xfrm>
-            <a:off x="8074152" y="1856232"/>
-            <a:ext cx="2825496" cy="1261872"/>
+            <a:endParaRPr lang="en-US" sz="1300" dirty="0"/>
+          </a:p>
+        </p:txBody>
+      </p:sp>
+      <p:sp>
+        <p:nvSpPr>
+          <p:cNvPr id="14" name="Text 12"/>
+          <p:cNvSpPr/>
+          <p:nvPr/>
+        </p:nvSpPr>
+        <p:spPr>
+          <a:xfrm>
+            <a:off x="8074152" y="1920240"/>
+            <a:ext cx="2825496" cy="1188720"/>
           </a:xfrm>
           <a:prstGeom prst="rect">
             <a:avLst/>
@@ -10240,7 +10863,7 @@
               <a:buNone/>
             </a:pPr>
             <a:r>
-              <a:rPr lang="en-US" sz="1250" dirty="0">
+              <a:rPr lang="en-US" sz="1550" dirty="0">
                 <a:solidFill>
                   <a:srgbClr val="17364A"/>
                 </a:solidFill>
@@ -10250,13 +10873,13 @@
               </a:rPr>
               <a:t>1. What makes agentic AI different from simple drafting support?</a:t>
             </a:r>
-            <a:endParaRPr lang="en-US" sz="1250" dirty="0"/>
-          </a:p>
-        </p:txBody>
-      </p:sp>
-      <p:sp>
-        <p:nvSpPr>
-          <p:cNvPr id="14" name="Shape 12"/>
+            <a:endParaRPr lang="en-US" sz="1550" dirty="0"/>
+          </a:p>
+        </p:txBody>
+      </p:sp>
+      <p:sp>
+        <p:nvSpPr>
+          <p:cNvPr id="15" name="Shape 13"/>
           <p:cNvSpPr/>
           <p:nvPr/>
         </p:nvSpPr>
@@ -10283,14 +10906,14 @@
       </p:sp>
       <p:sp>
         <p:nvSpPr>
-          <p:cNvPr id="15" name="Text 13"/>
+          <p:cNvPr id="16" name="Text 14"/>
           <p:cNvSpPr/>
           <p:nvPr/>
         </p:nvSpPr>
         <p:spPr>
           <a:xfrm>
             <a:off x="8074152" y="3666744"/>
-            <a:ext cx="2825496" cy="201168"/>
+            <a:ext cx="2825496" cy="256032"/>
           </a:xfrm>
           <a:prstGeom prst="rect">
             <a:avLst/>
@@ -10306,7 +10929,7 @@
               <a:buNone/>
             </a:pPr>
             <a:r>
-              <a:rPr lang="en-US" sz="950" b="1" dirty="0">
+              <a:rPr lang="en-US" sz="1300" b="1" dirty="0">
                 <a:solidFill>
                   <a:srgbClr val="0068B7"/>
                 </a:solidFill>
@@ -10316,20 +10939,20 @@
               </a:rPr>
               <a:t>Use this for</a:t>
             </a:r>
-            <a:endParaRPr lang="en-US" sz="950" dirty="0"/>
-          </a:p>
-        </p:txBody>
-      </p:sp>
-      <p:sp>
-        <p:nvSpPr>
-          <p:cNvPr id="16" name="Text 14"/>
-          <p:cNvSpPr/>
-          <p:nvPr/>
-        </p:nvSpPr>
-        <p:spPr>
-          <a:xfrm>
-            <a:off x="8074152" y="3959352"/>
-            <a:ext cx="2825496" cy="1170432"/>
+            <a:endParaRPr lang="en-US" sz="1300" dirty="0"/>
+          </a:p>
+        </p:txBody>
+      </p:sp>
+      <p:sp>
+        <p:nvSpPr>
+          <p:cNvPr id="17" name="Text 15"/>
+          <p:cNvSpPr/>
+          <p:nvPr/>
+        </p:nvSpPr>
+        <p:spPr>
+          <a:xfrm>
+            <a:off x="8074152" y="4023360"/>
+            <a:ext cx="2825496" cy="1097280"/>
           </a:xfrm>
           <a:prstGeom prst="rect">
             <a:avLst/>
@@ -10347,7 +10970,7 @@
               <a:buNone/>
             </a:pPr>
             <a:r>
-              <a:rPr lang="en-US" sz="1250" dirty="0">
+              <a:rPr lang="en-US" sz="1550" dirty="0">
                 <a:solidFill>
                   <a:srgbClr val="17364A"/>
                 </a:solidFill>
@@ -10357,7 +10980,7 @@
               </a:rPr>
               <a:t>Connect the concept to public health decisions, safeguards, documentation, or implementation work.</a:t>
             </a:r>
-            <a:endParaRPr lang="en-US" sz="1250" dirty="0"/>
+            <a:endParaRPr lang="en-US" sz="1550" dirty="0"/>
           </a:p>
         </p:txBody>
       </p:sp>
@@ -10554,7 +11177,7 @@
                 <a:ea typeface="Aptos" pitchFamily="34" charset="-122"/>
                 <a:cs typeface="Aptos" pitchFamily="34" charset="-120"/>
               </a:rPr>
-              <a:t>© Paula Soper</a:t>
+              <a:t>Â© Paula Soper</a:t>
             </a:r>
             <a:endParaRPr lang="en-US" sz="800" dirty="0"/>
           </a:p>
@@ -10562,7 +11185,46 @@
       </p:sp>
       <p:sp>
         <p:nvSpPr>
-          <p:cNvPr id="7" name="Shape 5"/>
+          <p:cNvPr id="7" name="Text 5"/>
+          <p:cNvSpPr/>
+          <p:nvPr/>
+        </p:nvSpPr>
+        <p:spPr>
+          <a:xfrm>
+            <a:off x="11137392" y="6510528"/>
+            <a:ext cx="411480" cy="201168"/>
+          </a:xfrm>
+          <a:prstGeom prst="rect">
+            <a:avLst/>
+          </a:prstGeom>
+          <a:noFill/>
+          <a:ln/>
+        </p:spPr>
+        <p:txBody>
+          <a:bodyPr wrap="square" lIns="0" tIns="0" rIns="0" bIns="0" rtlCol="0" anchor="ctr"/>
+          <a:lstStyle/>
+          <a:p>
+            <a:pPr algn="r" indent="0" marL="0">
+              <a:buNone/>
+            </a:pPr>
+            <a:r>
+              <a:rPr lang="en-US" sz="900" dirty="0">
+                <a:solidFill>
+                  <a:srgbClr val="5F7181"/>
+                </a:solidFill>
+                <a:latin typeface="Aptos" pitchFamily="34" charset="0"/>
+                <a:ea typeface="Aptos" pitchFamily="34" charset="-122"/>
+                <a:cs typeface="Aptos" pitchFamily="34" charset="-120"/>
+              </a:rPr>
+              <a:t>22</a:t>
+            </a:r>
+            <a:endParaRPr lang="en-US" sz="900" dirty="0"/>
+          </a:p>
+        </p:txBody>
+      </p:sp>
+      <p:sp>
+        <p:nvSpPr>
+          <p:cNvPr id="8" name="Shape 6"/>
           <p:cNvSpPr/>
           <p:nvPr/>
         </p:nvSpPr>
@@ -10587,7 +11249,7 @@
       </p:sp>
       <p:sp>
         <p:nvSpPr>
-          <p:cNvPr id="8" name="Text 6"/>
+          <p:cNvPr id="9" name="Text 7"/>
           <p:cNvSpPr/>
           <p:nvPr/>
         </p:nvSpPr>
@@ -10626,14 +11288,14 @@
       </p:sp>
       <p:sp>
         <p:nvSpPr>
-          <p:cNvPr id="9" name="Text 7"/>
+          <p:cNvPr id="10" name="Text 8"/>
           <p:cNvSpPr/>
           <p:nvPr/>
         </p:nvSpPr>
         <p:spPr>
           <a:xfrm>
             <a:off x="640080" y="621792"/>
-            <a:ext cx="10881360" cy="566928"/>
+            <a:ext cx="10881360" cy="713232"/>
           </a:xfrm>
           <a:prstGeom prst="rect">
             <a:avLst/>
@@ -10651,7 +11313,7 @@
               <a:buNone/>
             </a:pPr>
             <a:r>
-              <a:rPr lang="en-US" sz="2700" b="1" dirty="0">
+              <a:rPr lang="en-US" sz="3400" b="1" dirty="0">
                 <a:solidFill>
                   <a:srgbClr val="003A63"/>
                 </a:solidFill>
@@ -10661,20 +11323,20 @@
               </a:rPr>
               <a:t>References and Resources</a:t>
             </a:r>
-            <a:endParaRPr lang="en-US" sz="2700" dirty="0"/>
-          </a:p>
-        </p:txBody>
-      </p:sp>
-      <p:sp>
-        <p:nvSpPr>
-          <p:cNvPr id="10" name="Text 8"/>
-          <p:cNvSpPr/>
-          <p:nvPr/>
-        </p:nvSpPr>
-        <p:spPr>
-          <a:xfrm>
-            <a:off x="868680" y="1417320"/>
-            <a:ext cx="6675120" cy="4434840"/>
+            <a:endParaRPr lang="en-US" sz="3400" dirty="0"/>
+          </a:p>
+        </p:txBody>
+      </p:sp>
+      <p:sp>
+        <p:nvSpPr>
+          <p:cNvPr id="11" name="Text 9"/>
+          <p:cNvSpPr/>
+          <p:nvPr/>
+        </p:nvSpPr>
+        <p:spPr>
+          <a:xfrm>
+            <a:off x="868680" y="1508760"/>
+            <a:ext cx="6537960" cy="4160520"/>
           </a:xfrm>
           <a:prstGeom prst="rect">
             <a:avLst/>
@@ -10689,7 +11351,7 @@
           <a:lstStyle/>
           <a:p>
             <a:r>
-              <a:rPr lang="en-US" sz="1700" dirty="0">
+              <a:rPr lang="en-US" sz="2100" dirty="0">
                 <a:solidFill>
                   <a:srgbClr val="17364A"/>
                 </a:solidFill>
@@ -10697,13 +11359,13 @@
                 <a:ea typeface="Aptos" pitchFamily="34" charset="-122"/>
                 <a:cs typeface="Aptos" pitchFamily="34" charset="-120"/>
               </a:rPr>
-              <a:t>OWASP Top 10 for Large Language Model Applications: https://owasp.org/www-project-top-10-for-large-language-model-applications/</a:t>
-            </a:r>
-            <a:endParaRPr lang="en-US" sz="1700" dirty="0"/>
-          </a:p>
-          <a:p>
-            <a:r>
-              <a:rPr lang="en-US" sz="1700" dirty="0">
+              <a:t>OWASP Top 10 for Large Language Model Applications:.</a:t>
+            </a:r>
+            <a:endParaRPr lang="en-US" sz="2100" dirty="0"/>
+          </a:p>
+          <a:p>
+            <a:r>
+              <a:rPr lang="en-US" sz="2100" dirty="0">
                 <a:solidFill>
                   <a:srgbClr val="17364A"/>
                 </a:solidFill>
@@ -10713,11 +11375,11 @@
               </a:rPr>
               <a:t>NIST AI RMF Generative AI Profile:.</a:t>
             </a:r>
-            <a:endParaRPr lang="en-US" sz="1700" dirty="0"/>
-          </a:p>
-          <a:p>
-            <a:r>
-              <a:rPr lang="en-US" sz="1700" dirty="0">
+            <a:endParaRPr lang="en-US" sz="2100" dirty="0"/>
+          </a:p>
+          <a:p>
+            <a:r>
+              <a:rPr lang="en-US" sz="2100" dirty="0">
                 <a:solidFill>
                   <a:srgbClr val="17364A"/>
                 </a:solidFill>
@@ -10725,29 +11387,15 @@
                 <a:ea typeface="Aptos" pitchFamily="34" charset="-122"/>
                 <a:cs typeface="Aptos" pitchFamily="34" charset="-120"/>
               </a:rPr>
-              <a:t>NIST Artificial Intelligence Risk Management Framework: https://www.nist.gov/itl/ai-risk-management-framework</a:t>
-            </a:r>
-            <a:endParaRPr lang="en-US" sz="1700" dirty="0"/>
-          </a:p>
-          <a:p>
-            <a:r>
-              <a:rPr lang="en-US" sz="1700" dirty="0">
-                <a:solidFill>
-                  <a:srgbClr val="17364A"/>
-                </a:solidFill>
-                <a:latin typeface="Aptos" pitchFamily="34" charset="0"/>
-                <a:ea typeface="Aptos" pitchFamily="34" charset="-122"/>
-                <a:cs typeface="Aptos" pitchFamily="34" charset="-120"/>
-              </a:rPr>
-              <a:t>NIST Privacy Framework: https://www.nist.gov/privacy-framework</a:t>
-            </a:r>
-            <a:endParaRPr lang="en-US" sz="1700" dirty="0"/>
-          </a:p>
-        </p:txBody>
-      </p:sp>
-      <p:sp>
-        <p:nvSpPr>
-          <p:cNvPr id="11" name="Shape 9"/>
+              <a:t>NIST Artificial Intelligence Risk Management Framework:.</a:t>
+            </a:r>
+            <a:endParaRPr lang="en-US" sz="2100" dirty="0"/>
+          </a:p>
+        </p:txBody>
+      </p:sp>
+      <p:sp>
+        <p:nvSpPr>
+          <p:cNvPr id="12" name="Shape 10"/>
           <p:cNvSpPr/>
           <p:nvPr/>
         </p:nvSpPr>
@@ -10774,14 +11422,14 @@
       </p:sp>
       <p:sp>
         <p:nvSpPr>
-          <p:cNvPr id="12" name="Text 10"/>
+          <p:cNvPr id="13" name="Text 11"/>
           <p:cNvSpPr/>
           <p:nvPr/>
         </p:nvSpPr>
         <p:spPr>
           <a:xfrm>
             <a:off x="8074152" y="1563624"/>
-            <a:ext cx="2825496" cy="201168"/>
+            <a:ext cx="2825496" cy="256032"/>
           </a:xfrm>
           <a:prstGeom prst="rect">
             <a:avLst/>
@@ -10797,7 +11445,7 @@
               <a:buNone/>
             </a:pPr>
             <a:r>
-              <a:rPr lang="en-US" sz="950" b="1" dirty="0">
+              <a:rPr lang="en-US" sz="1300" b="1" dirty="0">
                 <a:solidFill>
                   <a:srgbClr val="0068B7"/>
                 </a:solidFill>
@@ -10807,20 +11455,20 @@
               </a:rPr>
               <a:t>Key idea</a:t>
             </a:r>
-            <a:endParaRPr lang="en-US" sz="950" dirty="0"/>
-          </a:p>
-        </p:txBody>
-      </p:sp>
-      <p:sp>
-        <p:nvSpPr>
-          <p:cNvPr id="13" name="Text 11"/>
-          <p:cNvSpPr/>
-          <p:nvPr/>
-        </p:nvSpPr>
-        <p:spPr>
-          <a:xfrm>
-            <a:off x="8074152" y="1856232"/>
-            <a:ext cx="2825496" cy="1261872"/>
+            <a:endParaRPr lang="en-US" sz="1300" dirty="0"/>
+          </a:p>
+        </p:txBody>
+      </p:sp>
+      <p:sp>
+        <p:nvSpPr>
+          <p:cNvPr id="14" name="Text 12"/>
+          <p:cNvSpPr/>
+          <p:nvPr/>
+        </p:nvSpPr>
+        <p:spPr>
+          <a:xfrm>
+            <a:off x="8074152" y="1920240"/>
+            <a:ext cx="2825496" cy="1188720"/>
           </a:xfrm>
           <a:prstGeom prst="rect">
             <a:avLst/>
@@ -10838,7 +11486,7 @@
               <a:buNone/>
             </a:pPr>
             <a:r>
-              <a:rPr lang="en-US" sz="1250" dirty="0">
+              <a:rPr lang="en-US" sz="1550" dirty="0">
                 <a:solidFill>
                   <a:srgbClr val="17364A"/>
                 </a:solidFill>
@@ -10846,15 +11494,15 @@
                 <a:ea typeface="Aptos" pitchFamily="34" charset="-122"/>
                 <a:cs typeface="Aptos" pitchFamily="34" charset="-120"/>
               </a:rPr>
-              <a:t>OWASP Top 10 for Large Language Model Applications: https://owasp.org/www-project-top-10-for-large-language-model-applications/</a:t>
-            </a:r>
-            <a:endParaRPr lang="en-US" sz="1250" dirty="0"/>
-          </a:p>
-        </p:txBody>
-      </p:sp>
-      <p:sp>
-        <p:nvSpPr>
-          <p:cNvPr id="14" name="Shape 12"/>
+              <a:t>OWASP Top 10 for Large Language Model Applications:.</a:t>
+            </a:r>
+            <a:endParaRPr lang="en-US" sz="1550" dirty="0"/>
+          </a:p>
+        </p:txBody>
+      </p:sp>
+      <p:sp>
+        <p:nvSpPr>
+          <p:cNvPr id="15" name="Shape 13"/>
           <p:cNvSpPr/>
           <p:nvPr/>
         </p:nvSpPr>
@@ -10881,14 +11529,14 @@
       </p:sp>
       <p:sp>
         <p:nvSpPr>
-          <p:cNvPr id="15" name="Text 13"/>
+          <p:cNvPr id="16" name="Text 14"/>
           <p:cNvSpPr/>
           <p:nvPr/>
         </p:nvSpPr>
         <p:spPr>
           <a:xfrm>
             <a:off x="8074152" y="3666744"/>
-            <a:ext cx="2825496" cy="201168"/>
+            <a:ext cx="2825496" cy="256032"/>
           </a:xfrm>
           <a:prstGeom prst="rect">
             <a:avLst/>
@@ -10904,7 +11552,7 @@
               <a:buNone/>
             </a:pPr>
             <a:r>
-              <a:rPr lang="en-US" sz="950" b="1" dirty="0">
+              <a:rPr lang="en-US" sz="1300" b="1" dirty="0">
                 <a:solidFill>
                   <a:srgbClr val="0068B7"/>
                 </a:solidFill>
@@ -10914,20 +11562,20 @@
               </a:rPr>
               <a:t>Use this for</a:t>
             </a:r>
-            <a:endParaRPr lang="en-US" sz="950" dirty="0"/>
-          </a:p>
-        </p:txBody>
-      </p:sp>
-      <p:sp>
-        <p:nvSpPr>
-          <p:cNvPr id="16" name="Text 14"/>
-          <p:cNvSpPr/>
-          <p:nvPr/>
-        </p:nvSpPr>
-        <p:spPr>
-          <a:xfrm>
-            <a:off x="8074152" y="3959352"/>
-            <a:ext cx="2825496" cy="1170432"/>
+            <a:endParaRPr lang="en-US" sz="1300" dirty="0"/>
+          </a:p>
+        </p:txBody>
+      </p:sp>
+      <p:sp>
+        <p:nvSpPr>
+          <p:cNvPr id="17" name="Text 15"/>
+          <p:cNvSpPr/>
+          <p:nvPr/>
+        </p:nvSpPr>
+        <p:spPr>
+          <a:xfrm>
+            <a:off x="8074152" y="4023360"/>
+            <a:ext cx="2825496" cy="1097280"/>
           </a:xfrm>
           <a:prstGeom prst="rect">
             <a:avLst/>
@@ -10945,7 +11593,7 @@
               <a:buNone/>
             </a:pPr>
             <a:r>
-              <a:rPr lang="en-US" sz="1250" dirty="0">
+              <a:rPr lang="en-US" sz="1550" dirty="0">
                 <a:solidFill>
                   <a:srgbClr val="17364A"/>
                 </a:solidFill>
@@ -10955,7 +11603,7 @@
               </a:rPr>
               <a:t>Connect the concept to public health decisions, safeguards, documentation, or implementation work.</a:t>
             </a:r>
-            <a:endParaRPr lang="en-US" sz="1250" dirty="0"/>
+            <a:endParaRPr lang="en-US" sz="1550" dirty="0"/>
           </a:p>
         </p:txBody>
       </p:sp>
@@ -11152,7 +11800,7 @@
                 <a:ea typeface="Aptos" pitchFamily="34" charset="-122"/>
                 <a:cs typeface="Aptos" pitchFamily="34" charset="-120"/>
               </a:rPr>
-              <a:t>© Paula Soper</a:t>
+              <a:t>Â© Paula Soper</a:t>
             </a:r>
             <a:endParaRPr lang="en-US" sz="800" dirty="0"/>
           </a:p>
@@ -11166,8 +11814,47 @@
         </p:nvSpPr>
         <p:spPr>
           <a:xfrm>
+            <a:off x="11137392" y="6510528"/>
+            <a:ext cx="411480" cy="201168"/>
+          </a:xfrm>
+          <a:prstGeom prst="rect">
+            <a:avLst/>
+          </a:prstGeom>
+          <a:noFill/>
+          <a:ln/>
+        </p:spPr>
+        <p:txBody>
+          <a:bodyPr wrap="square" lIns="0" tIns="0" rIns="0" bIns="0" rtlCol="0" anchor="ctr"/>
+          <a:lstStyle/>
+          <a:p>
+            <a:pPr algn="r" indent="0" marL="0">
+              <a:buNone/>
+            </a:pPr>
+            <a:r>
+              <a:rPr lang="en-US" sz="900" dirty="0">
+                <a:solidFill>
+                  <a:srgbClr val="5F7181"/>
+                </a:solidFill>
+                <a:latin typeface="Aptos" pitchFamily="34" charset="0"/>
+                <a:ea typeface="Aptos" pitchFamily="34" charset="-122"/>
+                <a:cs typeface="Aptos" pitchFamily="34" charset="-120"/>
+              </a:rPr>
+              <a:t>3</a:t>
+            </a:r>
+            <a:endParaRPr lang="en-US" sz="900" dirty="0"/>
+          </a:p>
+        </p:txBody>
+      </p:sp>
+      <p:sp>
+        <p:nvSpPr>
+          <p:cNvPr id="8" name="Text 6"/>
+          <p:cNvSpPr/>
+          <p:nvPr/>
+        </p:nvSpPr>
+        <p:spPr>
+          <a:xfrm>
             <a:off x="640080" y="658368"/>
-            <a:ext cx="10881360" cy="566928"/>
+            <a:ext cx="10881360" cy="713232"/>
           </a:xfrm>
           <a:prstGeom prst="rect">
             <a:avLst/>
@@ -11185,7 +11872,7 @@
               <a:buNone/>
             </a:pPr>
             <a:r>
-              <a:rPr lang="en-US" sz="2700" b="1" dirty="0">
+              <a:rPr lang="en-US" sz="3400" b="1" dirty="0">
                 <a:solidFill>
                   <a:srgbClr val="003A63"/>
                 </a:solidFill>
@@ -11195,20 +11882,20 @@
               </a:rPr>
               <a:t>How this module connects to the playbook</a:t>
             </a:r>
-            <a:endParaRPr lang="en-US" sz="2700" dirty="0"/>
-          </a:p>
-        </p:txBody>
-      </p:sp>
-      <p:sp>
-        <p:nvSpPr>
-          <p:cNvPr id="8" name="Text 6"/>
-          <p:cNvSpPr/>
-          <p:nvPr/>
-        </p:nvSpPr>
-        <p:spPr>
-          <a:xfrm>
-            <a:off x="868680" y="1417320"/>
-            <a:ext cx="6903720" cy="4480560"/>
+            <a:endParaRPr lang="en-US" sz="3400" dirty="0"/>
+          </a:p>
+        </p:txBody>
+      </p:sp>
+      <p:sp>
+        <p:nvSpPr>
+          <p:cNvPr id="9" name="Text 7"/>
+          <p:cNvSpPr/>
+          <p:nvPr/>
+        </p:nvSpPr>
+        <p:spPr>
+          <a:xfrm>
+            <a:off x="868680" y="1508760"/>
+            <a:ext cx="6812280" cy="3977640"/>
           </a:xfrm>
           <a:prstGeom prst="rect">
             <a:avLst/>
@@ -11223,7 +11910,7 @@
           <a:lstStyle/>
           <a:p>
             <a:r>
-              <a:rPr lang="en-US" sz="1540" dirty="0">
+              <a:rPr lang="en-US" sz="1900" dirty="0">
                 <a:solidFill>
                   <a:srgbClr val="17364A"/>
                 </a:solidFill>
@@ -11231,13 +11918,13 @@
                 <a:ea typeface="Aptos" pitchFamily="34" charset="-122"/>
                 <a:cs typeface="Aptos" pitchFamily="34" charset="-120"/>
               </a:rPr>
-              <a:t>Play 11: Build and Deploy AI Solutions - This lesson informs Play 11 by helping learners connect the lesson topic to build and deploy.</a:t>
-            </a:r>
-            <a:endParaRPr lang="en-US" sz="1540" dirty="0"/>
-          </a:p>
-          <a:p>
-            <a:r>
-              <a:rPr lang="en-US" sz="1540" dirty="0">
+              <a:t>Play 11: Build and Deploy AI Solutions - This lesson informs Play 11 by helping learners connect the lesson.</a:t>
+            </a:r>
+            <a:endParaRPr lang="en-US" sz="1900" dirty="0"/>
+          </a:p>
+          <a:p>
+            <a:r>
+              <a:rPr lang="en-US" sz="1900" dirty="0">
                 <a:solidFill>
                   <a:srgbClr val="17364A"/>
                 </a:solidFill>
@@ -11245,13 +11932,13 @@
                 <a:ea typeface="Aptos" pitchFamily="34" charset="-122"/>
                 <a:cs typeface="Aptos" pitchFamily="34" charset="-120"/>
               </a:rPr>
-              <a:t>Play 3: Establish AI Governance - This lesson informs Play 3 by helping learners connect the lesson topic to establish ai governance.</a:t>
-            </a:r>
-            <a:endParaRPr lang="en-US" sz="1540" dirty="0"/>
-          </a:p>
-          <a:p>
-            <a:r>
-              <a:rPr lang="en-US" sz="1540" dirty="0">
+              <a:t>Play 3: Establish AI Governance - This lesson informs Play 3 by helping learners connect the lesson topic to.</a:t>
+            </a:r>
+            <a:endParaRPr lang="en-US" sz="1900" dirty="0"/>
+          </a:p>
+          <a:p>
+            <a:r>
+              <a:rPr lang="en-US" sz="1900" dirty="0">
                 <a:solidFill>
                   <a:srgbClr val="17364A"/>
                 </a:solidFill>
@@ -11259,13 +11946,13 @@
                 <a:ea typeface="Aptos" pitchFamily="34" charset="-122"/>
                 <a:cs typeface="Aptos" pitchFamily="34" charset="-120"/>
               </a:rPr>
-              <a:t>Play 12: Execute Governance and Oversight - This lesson informs Play 12 by helping learners connect the lesson topic to execute.</a:t>
-            </a:r>
-            <a:endParaRPr lang="en-US" sz="1540" dirty="0"/>
-          </a:p>
-          <a:p>
-            <a:r>
-              <a:rPr lang="en-US" sz="1540" dirty="0">
+              <a:t>Play 12: Execute Governance and Oversight - This lesson informs Play 12 by helping learners connect the.</a:t>
+            </a:r>
+            <a:endParaRPr lang="en-US" sz="1900" dirty="0"/>
+          </a:p>
+          <a:p>
+            <a:r>
+              <a:rPr lang="en-US" sz="1900" dirty="0">
                 <a:solidFill>
                   <a:srgbClr val="17364A"/>
                 </a:solidFill>
@@ -11273,15 +11960,15 @@
                 <a:ea typeface="Aptos" pitchFamily="34" charset="-122"/>
                 <a:cs typeface="Aptos" pitchFamily="34" charset="-120"/>
               </a:rPr>
-              <a:t>Play 4: Engage Stakeholders - This lesson informs Play 4 by helping learners connect the lesson topic to engage stakeholders work in.</a:t>
-            </a:r>
-            <a:endParaRPr lang="en-US" sz="1540" dirty="0"/>
-          </a:p>
-        </p:txBody>
-      </p:sp>
-      <p:sp>
-        <p:nvSpPr>
-          <p:cNvPr id="9" name="Shape 7"/>
+              <a:t>Play 4: Engage Stakeholders - This lesson informs Play 4 by helping learners connect the lesson topic to.</a:t>
+            </a:r>
+            <a:endParaRPr lang="en-US" sz="1900" dirty="0"/>
+          </a:p>
+        </p:txBody>
+      </p:sp>
+      <p:sp>
+        <p:nvSpPr>
+          <p:cNvPr id="10" name="Shape 8"/>
           <p:cNvSpPr/>
           <p:nvPr/>
         </p:nvSpPr>
@@ -11308,14 +11995,14 @@
       </p:sp>
       <p:sp>
         <p:nvSpPr>
-          <p:cNvPr id="10" name="Text 8"/>
+          <p:cNvPr id="11" name="Text 9"/>
           <p:cNvSpPr/>
           <p:nvPr/>
         </p:nvSpPr>
         <p:spPr>
           <a:xfrm>
             <a:off x="8211312" y="1563624"/>
-            <a:ext cx="2734056" cy="201168"/>
+            <a:ext cx="2734056" cy="256032"/>
           </a:xfrm>
           <a:prstGeom prst="rect">
             <a:avLst/>
@@ -11331,7 +12018,7 @@
               <a:buNone/>
             </a:pPr>
             <a:r>
-              <a:rPr lang="en-US" sz="950" b="1" dirty="0">
+              <a:rPr lang="en-US" sz="1300" b="1" dirty="0">
                 <a:solidFill>
                   <a:srgbClr val="0068B7"/>
                 </a:solidFill>
@@ -11341,20 +12028,20 @@
               </a:rPr>
               <a:t>Apply the lesson</a:t>
             </a:r>
-            <a:endParaRPr lang="en-US" sz="950" dirty="0"/>
-          </a:p>
-        </p:txBody>
-      </p:sp>
-      <p:sp>
-        <p:nvSpPr>
-          <p:cNvPr id="11" name="Text 9"/>
-          <p:cNvSpPr/>
-          <p:nvPr/>
-        </p:nvSpPr>
-        <p:spPr>
-          <a:xfrm>
-            <a:off x="8211312" y="1856232"/>
-            <a:ext cx="2734056" cy="1536192"/>
+            <a:endParaRPr lang="en-US" sz="1300" dirty="0"/>
+          </a:p>
+        </p:txBody>
+      </p:sp>
+      <p:sp>
+        <p:nvSpPr>
+          <p:cNvPr id="12" name="Text 10"/>
+          <p:cNvSpPr/>
+          <p:nvPr/>
+        </p:nvSpPr>
+        <p:spPr>
+          <a:xfrm>
+            <a:off x="8211312" y="1920240"/>
+            <a:ext cx="2734056" cy="1463040"/>
           </a:xfrm>
           <a:prstGeom prst="rect">
             <a:avLst/>
@@ -11372,7 +12059,7 @@
               <a:buNone/>
             </a:pPr>
             <a:r>
-              <a:rPr lang="en-US" sz="1250" dirty="0">
+              <a:rPr lang="en-US" sz="1550" dirty="0">
                 <a:solidFill>
                   <a:srgbClr val="17364A"/>
                 </a:solidFill>
@@ -11382,32 +12069,32 @@
               </a:rPr>
               <a:t>Use the related plays to identify decisions, participants, timing, approvals, and documentation needed for responsible implementation.</a:t>
             </a:r>
-            <a:endParaRPr lang="en-US" sz="1250" dirty="0"/>
-          </a:p>
-        </p:txBody>
-      </p:sp>
-      <p:sp>
-        <p:nvSpPr>
-          <p:cNvPr id="12" name="Shape 10"/>
-          <p:cNvSpPr/>
-          <p:nvPr/>
-        </p:nvSpPr>
-        <p:spPr>
-          <a:xfrm>
-            <a:off x="8046720" y="3794760"/>
-            <a:ext cx="3063240" cy="1508760"/>
+            <a:endParaRPr lang="en-US" sz="1550" dirty="0"/>
+          </a:p>
+        </p:txBody>
+      </p:sp>
+      <p:sp>
+        <p:nvSpPr>
+          <p:cNvPr id="13" name="Shape 11"/>
+          <p:cNvSpPr/>
+          <p:nvPr/>
+        </p:nvSpPr>
+        <p:spPr>
+          <a:xfrm>
+            <a:off x="7818120" y="3977640"/>
+            <a:ext cx="972312" cy="749808"/>
           </a:xfrm>
           <a:prstGeom prst="roundRect">
             <a:avLst>
-              <a:gd name="adj" fmla="val 7273"/>
+              <a:gd name="adj" fmla="val 14634"/>
             </a:avLst>
           </a:prstGeom>
           <a:solidFill>
-            <a:srgbClr val="FFF4D9"/>
+            <a:srgbClr val="0068B7"/>
           </a:solidFill>
           <a:ln w="12700">
             <a:solidFill>
-              <a:srgbClr val="B9D7E6"/>
+              <a:srgbClr val="0068B7"/>
             </a:solidFill>
             <a:prstDash val="solid"/>
           </a:ln>
@@ -11415,81 +12102,256 @@
       </p:sp>
       <p:sp>
         <p:nvSpPr>
-          <p:cNvPr id="13" name="Text 11"/>
-          <p:cNvSpPr/>
-          <p:nvPr/>
-        </p:nvSpPr>
-        <p:spPr>
-          <a:xfrm>
-            <a:off x="8211312" y="3941064"/>
-            <a:ext cx="2734056" cy="201168"/>
-          </a:xfrm>
-          <a:prstGeom prst="rect">
-            <a:avLst/>
-          </a:prstGeom>
-          <a:noFill/>
-          <a:ln/>
-        </p:spPr>
-        <p:txBody>
-          <a:bodyPr wrap="square" lIns="0" tIns="0" rIns="0" bIns="0" rtlCol="0" anchor="ctr"/>
-          <a:lstStyle/>
-          <a:p>
-            <a:pPr indent="0" marL="0">
-              <a:buNone/>
-            </a:pPr>
-            <a:r>
-              <a:rPr lang="en-US" sz="950" b="1" dirty="0">
-                <a:solidFill>
-                  <a:srgbClr val="0068B7"/>
-                </a:solidFill>
-                <a:latin typeface="Aptos" pitchFamily="34" charset="0"/>
-                <a:ea typeface="Aptos" pitchFamily="34" charset="-122"/>
-                <a:cs typeface="Aptos" pitchFamily="34" charset="-120"/>
-              </a:rPr>
-              <a:t>Keep in mind</a:t>
-            </a:r>
-            <a:endParaRPr lang="en-US" sz="950" dirty="0"/>
-          </a:p>
-        </p:txBody>
-      </p:sp>
-      <p:sp>
-        <p:nvSpPr>
           <p:cNvPr id="14" name="Text 12"/>
           <p:cNvSpPr/>
           <p:nvPr/>
         </p:nvSpPr>
         <p:spPr>
           <a:xfrm>
-            <a:off x="8211312" y="4233672"/>
-            <a:ext cx="2734056" cy="941832"/>
-          </a:xfrm>
-          <a:prstGeom prst="rect">
-            <a:avLst/>
-          </a:prstGeom>
-          <a:noFill/>
-          <a:ln/>
-        </p:spPr>
-        <p:txBody>
-          <a:bodyPr wrap="square" lIns="0" tIns="0" rIns="0" bIns="0" rtlCol="0" anchor="t">
+            <a:off x="7891272" y="4169664"/>
+            <a:ext cx="826008" cy="310896"/>
+          </a:xfrm>
+          <a:prstGeom prst="rect">
+            <a:avLst/>
+          </a:prstGeom>
+          <a:noFill/>
+          <a:ln/>
+        </p:spPr>
+        <p:txBody>
+          <a:bodyPr wrap="square" lIns="0" tIns="0" rIns="0" bIns="0" rtlCol="0" anchor="ctr">
             <a:normAutofit/>
           </a:bodyPr>
           <a:lstStyle/>
           <a:p>
-            <a:pPr indent="0" marL="0">
-              <a:buNone/>
-            </a:pPr>
-            <a:r>
-              <a:rPr lang="en-US" sz="1250" dirty="0">
-                <a:solidFill>
-                  <a:srgbClr val="17364A"/>
-                </a:solidFill>
-                <a:latin typeface="Aptos" pitchFamily="34" charset="0"/>
-                <a:ea typeface="Aptos" pitchFamily="34" charset="-122"/>
-                <a:cs typeface="Aptos" pitchFamily="34" charset="-120"/>
-              </a:rPr>
-              <a:t>The playbook connection helps turn training into agency work, not just individual knowledge.</a:t>
-            </a:r>
-            <a:endParaRPr lang="en-US" sz="1250" dirty="0"/>
+            <a:pPr algn="ctr" indent="0" marL="0">
+              <a:buNone/>
+            </a:pPr>
+            <a:r>
+              <a:rPr lang="en-US" sz="1500" b="1" dirty="0">
+                <a:solidFill>
+                  <a:srgbClr val="FFFFFF"/>
+                </a:solidFill>
+                <a:latin typeface="Aptos" pitchFamily="34" charset="0"/>
+                <a:ea typeface="Aptos" pitchFamily="34" charset="-122"/>
+                <a:cs typeface="Aptos" pitchFamily="34" charset="-120"/>
+              </a:rPr>
+              <a:t>Lesson</a:t>
+            </a:r>
+            <a:endParaRPr lang="en-US" sz="1500" dirty="0"/>
+          </a:p>
+        </p:txBody>
+      </p:sp>
+      <p:sp>
+        <p:nvSpPr>
+          <p:cNvPr id="15" name="Text 13"/>
+          <p:cNvSpPr/>
+          <p:nvPr/>
+        </p:nvSpPr>
+        <p:spPr>
+          <a:xfrm>
+            <a:off x="8817864" y="4187952"/>
+            <a:ext cx="201168" cy="256032"/>
+          </a:xfrm>
+          <a:prstGeom prst="rect">
+            <a:avLst/>
+          </a:prstGeom>
+          <a:noFill/>
+          <a:ln/>
+        </p:spPr>
+        <p:txBody>
+          <a:bodyPr wrap="square" lIns="0" tIns="0" rIns="0" bIns="0" rtlCol="0" anchor="ctr"/>
+          <a:lstStyle/>
+          <a:p>
+            <a:pPr algn="ctr" indent="0" marL="0">
+              <a:buNone/>
+            </a:pPr>
+            <a:r>
+              <a:rPr lang="en-US" sz="1800" b="1" dirty="0">
+                <a:solidFill>
+                  <a:srgbClr val="0068B7"/>
+                </a:solidFill>
+                <a:latin typeface="Aptos" pitchFamily="34" charset="0"/>
+                <a:ea typeface="Aptos" pitchFamily="34" charset="-122"/>
+                <a:cs typeface="Aptos" pitchFamily="34" charset="-120"/>
+              </a:rPr>
+              <a:t>â†’</a:t>
+            </a:r>
+            <a:endParaRPr lang="en-US" sz="1800" dirty="0"/>
+          </a:p>
+        </p:txBody>
+      </p:sp>
+      <p:sp>
+        <p:nvSpPr>
+          <p:cNvPr id="16" name="Shape 14"/>
+          <p:cNvSpPr/>
+          <p:nvPr/>
+        </p:nvSpPr>
+        <p:spPr>
+          <a:xfrm>
+            <a:off x="9046464" y="3977640"/>
+            <a:ext cx="972312" cy="749808"/>
+          </a:xfrm>
+          <a:prstGeom prst="roundRect">
+            <a:avLst>
+              <a:gd name="adj" fmla="val 14634"/>
+            </a:avLst>
+          </a:prstGeom>
+          <a:solidFill>
+            <a:srgbClr val="2F8A28"/>
+          </a:solidFill>
+          <a:ln w="12700">
+            <a:solidFill>
+              <a:srgbClr val="2F8A28"/>
+            </a:solidFill>
+            <a:prstDash val="solid"/>
+          </a:ln>
+        </p:spPr>
+      </p:sp>
+      <p:sp>
+        <p:nvSpPr>
+          <p:cNvPr id="17" name="Text 15"/>
+          <p:cNvSpPr/>
+          <p:nvPr/>
+        </p:nvSpPr>
+        <p:spPr>
+          <a:xfrm>
+            <a:off x="9119616" y="4169664"/>
+            <a:ext cx="826008" cy="310896"/>
+          </a:xfrm>
+          <a:prstGeom prst="rect">
+            <a:avLst/>
+          </a:prstGeom>
+          <a:noFill/>
+          <a:ln/>
+        </p:spPr>
+        <p:txBody>
+          <a:bodyPr wrap="square" lIns="0" tIns="0" rIns="0" bIns="0" rtlCol="0" anchor="ctr">
+            <a:normAutofit/>
+          </a:bodyPr>
+          <a:lstStyle/>
+          <a:p>
+            <a:pPr algn="ctr" indent="0" marL="0">
+              <a:buNone/>
+            </a:pPr>
+            <a:r>
+              <a:rPr lang="en-US" sz="1500" b="1" dirty="0">
+                <a:solidFill>
+                  <a:srgbClr val="FFFFFF"/>
+                </a:solidFill>
+                <a:latin typeface="Aptos" pitchFamily="34" charset="0"/>
+                <a:ea typeface="Aptos" pitchFamily="34" charset="-122"/>
+                <a:cs typeface="Aptos" pitchFamily="34" charset="-120"/>
+              </a:rPr>
+              <a:t>Plays</a:t>
+            </a:r>
+            <a:endParaRPr lang="en-US" sz="1500" dirty="0"/>
+          </a:p>
+        </p:txBody>
+      </p:sp>
+      <p:sp>
+        <p:nvSpPr>
+          <p:cNvPr id="18" name="Text 16"/>
+          <p:cNvSpPr/>
+          <p:nvPr/>
+        </p:nvSpPr>
+        <p:spPr>
+          <a:xfrm>
+            <a:off x="10046208" y="4187952"/>
+            <a:ext cx="201168" cy="256032"/>
+          </a:xfrm>
+          <a:prstGeom prst="rect">
+            <a:avLst/>
+          </a:prstGeom>
+          <a:noFill/>
+          <a:ln/>
+        </p:spPr>
+        <p:txBody>
+          <a:bodyPr wrap="square" lIns="0" tIns="0" rIns="0" bIns="0" rtlCol="0" anchor="ctr"/>
+          <a:lstStyle/>
+          <a:p>
+            <a:pPr algn="ctr" indent="0" marL="0">
+              <a:buNone/>
+            </a:pPr>
+            <a:r>
+              <a:rPr lang="en-US" sz="1800" b="1" dirty="0">
+                <a:solidFill>
+                  <a:srgbClr val="0068B7"/>
+                </a:solidFill>
+                <a:latin typeface="Aptos" pitchFamily="34" charset="0"/>
+                <a:ea typeface="Aptos" pitchFamily="34" charset="-122"/>
+                <a:cs typeface="Aptos" pitchFamily="34" charset="-120"/>
+              </a:rPr>
+              <a:t>â†’</a:t>
+            </a:r>
+            <a:endParaRPr lang="en-US" sz="1800" dirty="0"/>
+          </a:p>
+        </p:txBody>
+      </p:sp>
+      <p:sp>
+        <p:nvSpPr>
+          <p:cNvPr id="19" name="Shape 17"/>
+          <p:cNvSpPr/>
+          <p:nvPr/>
+        </p:nvSpPr>
+        <p:spPr>
+          <a:xfrm>
+            <a:off x="10274808" y="3977640"/>
+            <a:ext cx="972312" cy="749808"/>
+          </a:xfrm>
+          <a:prstGeom prst="roundRect">
+            <a:avLst>
+              <a:gd name="adj" fmla="val 14634"/>
+            </a:avLst>
+          </a:prstGeom>
+          <a:solidFill>
+            <a:srgbClr val="6A4CA3"/>
+          </a:solidFill>
+          <a:ln w="12700">
+            <a:solidFill>
+              <a:srgbClr val="6A4CA3"/>
+            </a:solidFill>
+            <a:prstDash val="solid"/>
+          </a:ln>
+        </p:spPr>
+      </p:sp>
+      <p:sp>
+        <p:nvSpPr>
+          <p:cNvPr id="20" name="Text 18"/>
+          <p:cNvSpPr/>
+          <p:nvPr/>
+        </p:nvSpPr>
+        <p:spPr>
+          <a:xfrm>
+            <a:off x="10347960" y="4169664"/>
+            <a:ext cx="826008" cy="310896"/>
+          </a:xfrm>
+          <a:prstGeom prst="rect">
+            <a:avLst/>
+          </a:prstGeom>
+          <a:noFill/>
+          <a:ln/>
+        </p:spPr>
+        <p:txBody>
+          <a:bodyPr wrap="square" lIns="0" tIns="0" rIns="0" bIns="0" rtlCol="0" anchor="ctr">
+            <a:normAutofit/>
+          </a:bodyPr>
+          <a:lstStyle/>
+          <a:p>
+            <a:pPr algn="ctr" indent="0" marL="0">
+              <a:buNone/>
+            </a:pPr>
+            <a:r>
+              <a:rPr lang="en-US" sz="1500" b="1" dirty="0">
+                <a:solidFill>
+                  <a:srgbClr val="FFFFFF"/>
+                </a:solidFill>
+                <a:latin typeface="Aptos" pitchFamily="34" charset="0"/>
+                <a:ea typeface="Aptos" pitchFamily="34" charset="-122"/>
+                <a:cs typeface="Aptos" pitchFamily="34" charset="-120"/>
+              </a:rPr>
+              <a:t>Action</a:t>
+            </a:r>
+            <a:endParaRPr lang="en-US" sz="1500" dirty="0"/>
           </a:p>
         </p:txBody>
       </p:sp>
@@ -11686,7 +12548,7 @@
                 <a:ea typeface="Aptos" pitchFamily="34" charset="-122"/>
                 <a:cs typeface="Aptos" pitchFamily="34" charset="-120"/>
               </a:rPr>
-              <a:t>© Paula Soper</a:t>
+              <a:t>Â© Paula Soper</a:t>
             </a:r>
             <a:endParaRPr lang="en-US" sz="800" dirty="0"/>
           </a:p>
@@ -11700,8 +12562,47 @@
         </p:nvSpPr>
         <p:spPr>
           <a:xfrm>
+            <a:off x="11137392" y="6510528"/>
+            <a:ext cx="411480" cy="201168"/>
+          </a:xfrm>
+          <a:prstGeom prst="rect">
+            <a:avLst/>
+          </a:prstGeom>
+          <a:noFill/>
+          <a:ln/>
+        </p:spPr>
+        <p:txBody>
+          <a:bodyPr wrap="square" lIns="0" tIns="0" rIns="0" bIns="0" rtlCol="0" anchor="ctr"/>
+          <a:lstStyle/>
+          <a:p>
+            <a:pPr algn="r" indent="0" marL="0">
+              <a:buNone/>
+            </a:pPr>
+            <a:r>
+              <a:rPr lang="en-US" sz="900" dirty="0">
+                <a:solidFill>
+                  <a:srgbClr val="5F7181"/>
+                </a:solidFill>
+                <a:latin typeface="Aptos" pitchFamily="34" charset="0"/>
+                <a:ea typeface="Aptos" pitchFamily="34" charset="-122"/>
+                <a:cs typeface="Aptos" pitchFamily="34" charset="-120"/>
+              </a:rPr>
+              <a:t>4</a:t>
+            </a:r>
+            <a:endParaRPr lang="en-US" sz="900" dirty="0"/>
+          </a:p>
+        </p:txBody>
+      </p:sp>
+      <p:sp>
+        <p:nvSpPr>
+          <p:cNvPr id="8" name="Text 6"/>
+          <p:cNvSpPr/>
+          <p:nvPr/>
+        </p:nvSpPr>
+        <p:spPr>
+          <a:xfrm>
             <a:off x="640080" y="658368"/>
-            <a:ext cx="10881360" cy="566928"/>
+            <a:ext cx="10881360" cy="713232"/>
           </a:xfrm>
           <a:prstGeom prst="rect">
             <a:avLst/>
@@ -11719,7 +12620,7 @@
               <a:buNone/>
             </a:pPr>
             <a:r>
-              <a:rPr lang="en-US" sz="2700" b="1" dirty="0">
+              <a:rPr lang="en-US" sz="3400" b="1" dirty="0">
                 <a:solidFill>
                   <a:srgbClr val="003A63"/>
                 </a:solidFill>
@@ -11729,20 +12630,20 @@
               </a:rPr>
               <a:t>Related toolkit resources</a:t>
             </a:r>
-            <a:endParaRPr lang="en-US" sz="2700" dirty="0"/>
-          </a:p>
-        </p:txBody>
-      </p:sp>
-      <p:sp>
-        <p:nvSpPr>
-          <p:cNvPr id="8" name="Text 6"/>
-          <p:cNvSpPr/>
-          <p:nvPr/>
-        </p:nvSpPr>
-        <p:spPr>
-          <a:xfrm>
-            <a:off x="868680" y="1417320"/>
-            <a:ext cx="6903720" cy="4480560"/>
+            <a:endParaRPr lang="en-US" sz="3400" dirty="0"/>
+          </a:p>
+        </p:txBody>
+      </p:sp>
+      <p:sp>
+        <p:nvSpPr>
+          <p:cNvPr id="9" name="Text 7"/>
+          <p:cNvSpPr/>
+          <p:nvPr/>
+        </p:nvSpPr>
+        <p:spPr>
+          <a:xfrm>
+            <a:off x="868680" y="1508760"/>
+            <a:ext cx="6812280" cy="3977640"/>
           </a:xfrm>
           <a:prstGeom prst="rect">
             <a:avLst/>
@@ -11757,7 +12658,7 @@
           <a:lstStyle/>
           <a:p>
             <a:r>
-              <a:rPr lang="en-US" sz="1460" dirty="0">
+              <a:rPr lang="en-US" sz="1850" dirty="0">
                 <a:solidFill>
                   <a:srgbClr val="17364A"/>
                 </a:solidFill>
@@ -11765,13 +12666,13 @@
                 <a:ea typeface="Aptos" pitchFamily="34" charset="-122"/>
                 <a:cs typeface="Aptos" pitchFamily="34" charset="-120"/>
               </a:rPr>
-              <a:t>Tool 16: Incident Response Checklist (Checklist) - Use Incident Response Checklist to translate this lesson into a documented public.</a:t>
-            </a:r>
-            <a:endParaRPr lang="en-US" sz="1460" dirty="0"/>
-          </a:p>
-          <a:p>
-            <a:r>
-              <a:rPr lang="en-US" sz="1460" dirty="0">
+              <a:t>Tool 16: Incident Response Checklist (Checklist) - Use Incident Response Checklist to translate this lesson.</a:t>
+            </a:r>
+            <a:endParaRPr lang="en-US" sz="1850" dirty="0"/>
+          </a:p>
+          <a:p>
+            <a:r>
+              <a:rPr lang="en-US" sz="1850" dirty="0">
                 <a:solidFill>
                   <a:srgbClr val="17364A"/>
                 </a:solidFill>
@@ -11779,13 +12680,13 @@
                 <a:ea typeface="Aptos" pitchFamily="34" charset="-122"/>
                 <a:cs typeface="Aptos" pitchFamily="34" charset="-120"/>
               </a:rPr>
-              <a:t>Tool 17: Compliance Audit Checklist (Checklist) - Use Compliance Audit Checklist to translate this lesson into a documented public.</a:t>
-            </a:r>
-            <a:endParaRPr lang="en-US" sz="1460" dirty="0"/>
-          </a:p>
-          <a:p>
-            <a:r>
-              <a:rPr lang="en-US" sz="1460" dirty="0">
+              <a:t>Tool 17: Compliance Audit Checklist (Checklist) - Use Compliance Audit Checklist to translate this lesson.</a:t>
+            </a:r>
+            <a:endParaRPr lang="en-US" sz="1850" dirty="0"/>
+          </a:p>
+          <a:p>
+            <a:r>
+              <a:rPr lang="en-US" sz="1850" dirty="0">
                 <a:solidFill>
                   <a:srgbClr val="17364A"/>
                 </a:solidFill>
@@ -11793,13 +12694,13 @@
                 <a:ea typeface="Aptos" pitchFamily="34" charset="-122"/>
                 <a:cs typeface="Aptos" pitchFamily="34" charset="-120"/>
               </a:rPr>
-              <a:t>Tool 18: Policy Update &amp; Version Control Log (Log) - Use this tool to complete or strengthen the practical exercise for the module.</a:t>
-            </a:r>
-            <a:endParaRPr lang="en-US" sz="1460" dirty="0"/>
-          </a:p>
-          <a:p>
-            <a:r>
-              <a:rPr lang="en-US" sz="1460" dirty="0">
+              <a:t>Tool 18: Policy Update &amp; Version Control Log (Log) - Use this tool to complete or strengthen the practical.</a:t>
+            </a:r>
+            <a:endParaRPr lang="en-US" sz="1850" dirty="0"/>
+          </a:p>
+          <a:p>
+            <a:r>
+              <a:rPr lang="en-US" sz="1850" dirty="0">
                 <a:solidFill>
                   <a:srgbClr val="17364A"/>
                 </a:solidFill>
@@ -11807,29 +12708,15 @@
                 <a:ea typeface="Aptos" pitchFamily="34" charset="-122"/>
                 <a:cs typeface="Aptos" pitchFamily="34" charset="-120"/>
               </a:rPr>
-              <a:t>Tool 19: Plain-Language AI Public Notice Template (Template) - Use Plain-Language AI Public Notice Template to translate this lesson.</a:t>
-            </a:r>
-            <a:endParaRPr lang="en-US" sz="1460" dirty="0"/>
-          </a:p>
-          <a:p>
-            <a:r>
-              <a:rPr lang="en-US" sz="1460" dirty="0">
-                <a:solidFill>
-                  <a:srgbClr val="17364A"/>
-                </a:solidFill>
-                <a:latin typeface="Aptos" pitchFamily="34" charset="0"/>
-                <a:ea typeface="Aptos" pitchFamily="34" charset="-122"/>
-                <a:cs typeface="Aptos" pitchFamily="34" charset="-120"/>
-              </a:rPr>
-              <a:t>Tool 32: Vendor Evaluation Checklist (Checklist) - Use this tool to complete or strengthen the practical exercise for the module.</a:t>
-            </a:r>
-            <a:endParaRPr lang="en-US" sz="1460" dirty="0"/>
-          </a:p>
-        </p:txBody>
-      </p:sp>
-      <p:sp>
-        <p:nvSpPr>
-          <p:cNvPr id="9" name="Shape 7"/>
+              <a:t>Tool 19: Plain-Language AI Public Notice Template (Template) - Use Plain-Language AI Public Notice Template.</a:t>
+            </a:r>
+            <a:endParaRPr lang="en-US" sz="1850" dirty="0"/>
+          </a:p>
+        </p:txBody>
+      </p:sp>
+      <p:sp>
+        <p:nvSpPr>
+          <p:cNvPr id="10" name="Shape 8"/>
           <p:cNvSpPr/>
           <p:nvPr/>
         </p:nvSpPr>
@@ -11856,14 +12743,14 @@
       </p:sp>
       <p:sp>
         <p:nvSpPr>
-          <p:cNvPr id="10" name="Text 8"/>
+          <p:cNvPr id="11" name="Text 9"/>
           <p:cNvSpPr/>
           <p:nvPr/>
         </p:nvSpPr>
         <p:spPr>
           <a:xfrm>
             <a:off x="8211312" y="1563624"/>
-            <a:ext cx="2734056" cy="201168"/>
+            <a:ext cx="2734056" cy="256032"/>
           </a:xfrm>
           <a:prstGeom prst="rect">
             <a:avLst/>
@@ -11879,7 +12766,7 @@
               <a:buNone/>
             </a:pPr>
             <a:r>
-              <a:rPr lang="en-US" sz="950" b="1" dirty="0">
+              <a:rPr lang="en-US" sz="1300" b="1" dirty="0">
                 <a:solidFill>
                   <a:srgbClr val="0068B7"/>
                 </a:solidFill>
@@ -11889,20 +12776,20 @@
               </a:rPr>
               <a:t>Use the tools</a:t>
             </a:r>
-            <a:endParaRPr lang="en-US" sz="950" dirty="0"/>
-          </a:p>
-        </p:txBody>
-      </p:sp>
-      <p:sp>
-        <p:nvSpPr>
-          <p:cNvPr id="11" name="Text 9"/>
-          <p:cNvSpPr/>
-          <p:nvPr/>
-        </p:nvSpPr>
-        <p:spPr>
-          <a:xfrm>
-            <a:off x="8211312" y="1856232"/>
-            <a:ext cx="2734056" cy="1536192"/>
+            <a:endParaRPr lang="en-US" sz="1300" dirty="0"/>
+          </a:p>
+        </p:txBody>
+      </p:sp>
+      <p:sp>
+        <p:nvSpPr>
+          <p:cNvPr id="12" name="Text 10"/>
+          <p:cNvSpPr/>
+          <p:nvPr/>
+        </p:nvSpPr>
+        <p:spPr>
+          <a:xfrm>
+            <a:off x="8211312" y="1920240"/>
+            <a:ext cx="2734056" cy="1463040"/>
           </a:xfrm>
           <a:prstGeom prst="rect">
             <a:avLst/>
@@ -11920,7 +12807,7 @@
               <a:buNone/>
             </a:pPr>
             <a:r>
-              <a:rPr lang="en-US" sz="1250" dirty="0">
+              <a:rPr lang="en-US" sz="1550" dirty="0">
                 <a:solidFill>
                   <a:srgbClr val="17364A"/>
                 </a:solidFill>
@@ -11930,32 +12817,32 @@
               </a:rPr>
               <a:t>Use linked tools when your department needs a structured worksheet, template, checklist, review process, or documentation artifact.</a:t>
             </a:r>
-            <a:endParaRPr lang="en-US" sz="1250" dirty="0"/>
-          </a:p>
-        </p:txBody>
-      </p:sp>
-      <p:sp>
-        <p:nvSpPr>
-          <p:cNvPr id="12" name="Shape 10"/>
-          <p:cNvSpPr/>
-          <p:nvPr/>
-        </p:nvSpPr>
-        <p:spPr>
-          <a:xfrm>
-            <a:off x="8046720" y="3794760"/>
-            <a:ext cx="3063240" cy="1508760"/>
+            <a:endParaRPr lang="en-US" sz="1550" dirty="0"/>
+          </a:p>
+        </p:txBody>
+      </p:sp>
+      <p:sp>
+        <p:nvSpPr>
+          <p:cNvPr id="13" name="Shape 11"/>
+          <p:cNvSpPr/>
+          <p:nvPr/>
+        </p:nvSpPr>
+        <p:spPr>
+          <a:xfrm>
+            <a:off x="7818120" y="3977640"/>
+            <a:ext cx="972312" cy="749808"/>
           </a:xfrm>
           <a:prstGeom prst="roundRect">
             <a:avLst>
-              <a:gd name="adj" fmla="val 7273"/>
+              <a:gd name="adj" fmla="val 14634"/>
             </a:avLst>
           </a:prstGeom>
           <a:solidFill>
-            <a:srgbClr val="EEF8ED"/>
+            <a:srgbClr val="0068B7"/>
           </a:solidFill>
           <a:ln w="12700">
             <a:solidFill>
-              <a:srgbClr val="B9D7E6"/>
+              <a:srgbClr val="0068B7"/>
             </a:solidFill>
             <a:prstDash val="solid"/>
           </a:ln>
@@ -11963,81 +12850,256 @@
       </p:sp>
       <p:sp>
         <p:nvSpPr>
-          <p:cNvPr id="13" name="Text 11"/>
-          <p:cNvSpPr/>
-          <p:nvPr/>
-        </p:nvSpPr>
-        <p:spPr>
-          <a:xfrm>
-            <a:off x="8211312" y="3941064"/>
-            <a:ext cx="2734056" cy="201168"/>
-          </a:xfrm>
-          <a:prstGeom prst="rect">
-            <a:avLst/>
-          </a:prstGeom>
-          <a:noFill/>
-          <a:ln/>
-        </p:spPr>
-        <p:txBody>
-          <a:bodyPr wrap="square" lIns="0" tIns="0" rIns="0" bIns="0" rtlCol="0" anchor="ctr"/>
-          <a:lstStyle/>
-          <a:p>
-            <a:pPr indent="0" marL="0">
-              <a:buNone/>
-            </a:pPr>
-            <a:r>
-              <a:rPr lang="en-US" sz="950" b="1" dirty="0">
-                <a:solidFill>
-                  <a:srgbClr val="0068B7"/>
-                </a:solidFill>
-                <a:latin typeface="Aptos" pitchFamily="34" charset="0"/>
-                <a:ea typeface="Aptos" pitchFamily="34" charset="-122"/>
-                <a:cs typeface="Aptos" pitchFamily="34" charset="-120"/>
-              </a:rPr>
-              <a:t>Avoid duplication</a:t>
-            </a:r>
-            <a:endParaRPr lang="en-US" sz="950" dirty="0"/>
-          </a:p>
-        </p:txBody>
-      </p:sp>
-      <p:sp>
-        <p:nvSpPr>
           <p:cNvPr id="14" name="Text 12"/>
           <p:cNvSpPr/>
           <p:nvPr/>
         </p:nvSpPr>
         <p:spPr>
           <a:xfrm>
-            <a:off x="8211312" y="4233672"/>
-            <a:ext cx="2734056" cy="941832"/>
-          </a:xfrm>
-          <a:prstGeom prst="rect">
-            <a:avLst/>
-          </a:prstGeom>
-          <a:noFill/>
-          <a:ln/>
-        </p:spPr>
-        <p:txBody>
-          <a:bodyPr wrap="square" lIns="0" tIns="0" rIns="0" bIns="0" rtlCol="0" anchor="t">
+            <a:off x="7891272" y="4169664"/>
+            <a:ext cx="826008" cy="310896"/>
+          </a:xfrm>
+          <a:prstGeom prst="rect">
+            <a:avLst/>
+          </a:prstGeom>
+          <a:noFill/>
+          <a:ln/>
+        </p:spPr>
+        <p:txBody>
+          <a:bodyPr wrap="square" lIns="0" tIns="0" rIns="0" bIns="0" rtlCol="0" anchor="ctr">
             <a:normAutofit/>
           </a:bodyPr>
           <a:lstStyle/>
           <a:p>
-            <a:pPr indent="0" marL="0">
-              <a:buNone/>
-            </a:pPr>
-            <a:r>
-              <a:rPr lang="en-US" sz="1250" dirty="0">
-                <a:solidFill>
-                  <a:srgbClr val="17364A"/>
-                </a:solidFill>
-                <a:latin typeface="Aptos" pitchFamily="34" charset="0"/>
-                <a:ea typeface="Aptos" pitchFamily="34" charset="-122"/>
-                <a:cs typeface="Aptos" pitchFamily="34" charset="-120"/>
-              </a:rPr>
-              <a:t>If your department already has a strong equivalent tool, adapt or use the existing process instead of recreating it.</a:t>
-            </a:r>
-            <a:endParaRPr lang="en-US" sz="1250" dirty="0"/>
+            <a:pPr algn="ctr" indent="0" marL="0">
+              <a:buNone/>
+            </a:pPr>
+            <a:r>
+              <a:rPr lang="en-US" sz="1500" b="1" dirty="0">
+                <a:solidFill>
+                  <a:srgbClr val="FFFFFF"/>
+                </a:solidFill>
+                <a:latin typeface="Aptos" pitchFamily="34" charset="0"/>
+                <a:ea typeface="Aptos" pitchFamily="34" charset="-122"/>
+                <a:cs typeface="Aptos" pitchFamily="34" charset="-120"/>
+              </a:rPr>
+              <a:t>Concept</a:t>
+            </a:r>
+            <a:endParaRPr lang="en-US" sz="1500" dirty="0"/>
+          </a:p>
+        </p:txBody>
+      </p:sp>
+      <p:sp>
+        <p:nvSpPr>
+          <p:cNvPr id="15" name="Text 13"/>
+          <p:cNvSpPr/>
+          <p:nvPr/>
+        </p:nvSpPr>
+        <p:spPr>
+          <a:xfrm>
+            <a:off x="8817864" y="4187952"/>
+            <a:ext cx="201168" cy="256032"/>
+          </a:xfrm>
+          <a:prstGeom prst="rect">
+            <a:avLst/>
+          </a:prstGeom>
+          <a:noFill/>
+          <a:ln/>
+        </p:spPr>
+        <p:txBody>
+          <a:bodyPr wrap="square" lIns="0" tIns="0" rIns="0" bIns="0" rtlCol="0" anchor="ctr"/>
+          <a:lstStyle/>
+          <a:p>
+            <a:pPr algn="ctr" indent="0" marL="0">
+              <a:buNone/>
+            </a:pPr>
+            <a:r>
+              <a:rPr lang="en-US" sz="1800" b="1" dirty="0">
+                <a:solidFill>
+                  <a:srgbClr val="0068B7"/>
+                </a:solidFill>
+                <a:latin typeface="Aptos" pitchFamily="34" charset="0"/>
+                <a:ea typeface="Aptos" pitchFamily="34" charset="-122"/>
+                <a:cs typeface="Aptos" pitchFamily="34" charset="-120"/>
+              </a:rPr>
+              <a:t>â†’</a:t>
+            </a:r>
+            <a:endParaRPr lang="en-US" sz="1800" dirty="0"/>
+          </a:p>
+        </p:txBody>
+      </p:sp>
+      <p:sp>
+        <p:nvSpPr>
+          <p:cNvPr id="16" name="Shape 14"/>
+          <p:cNvSpPr/>
+          <p:nvPr/>
+        </p:nvSpPr>
+        <p:spPr>
+          <a:xfrm>
+            <a:off x="9046464" y="3977640"/>
+            <a:ext cx="972312" cy="749808"/>
+          </a:xfrm>
+          <a:prstGeom prst="roundRect">
+            <a:avLst>
+              <a:gd name="adj" fmla="val 14634"/>
+            </a:avLst>
+          </a:prstGeom>
+          <a:solidFill>
+            <a:srgbClr val="2F8A28"/>
+          </a:solidFill>
+          <a:ln w="12700">
+            <a:solidFill>
+              <a:srgbClr val="2F8A28"/>
+            </a:solidFill>
+            <a:prstDash val="solid"/>
+          </a:ln>
+        </p:spPr>
+      </p:sp>
+      <p:sp>
+        <p:nvSpPr>
+          <p:cNvPr id="17" name="Text 15"/>
+          <p:cNvSpPr/>
+          <p:nvPr/>
+        </p:nvSpPr>
+        <p:spPr>
+          <a:xfrm>
+            <a:off x="9119616" y="4169664"/>
+            <a:ext cx="826008" cy="310896"/>
+          </a:xfrm>
+          <a:prstGeom prst="rect">
+            <a:avLst/>
+          </a:prstGeom>
+          <a:noFill/>
+          <a:ln/>
+        </p:spPr>
+        <p:txBody>
+          <a:bodyPr wrap="square" lIns="0" tIns="0" rIns="0" bIns="0" rtlCol="0" anchor="ctr">
+            <a:normAutofit/>
+          </a:bodyPr>
+          <a:lstStyle/>
+          <a:p>
+            <a:pPr algn="ctr" indent="0" marL="0">
+              <a:buNone/>
+            </a:pPr>
+            <a:r>
+              <a:rPr lang="en-US" sz="1500" b="1" dirty="0">
+                <a:solidFill>
+                  <a:srgbClr val="FFFFFF"/>
+                </a:solidFill>
+                <a:latin typeface="Aptos" pitchFamily="34" charset="0"/>
+                <a:ea typeface="Aptos" pitchFamily="34" charset="-122"/>
+                <a:cs typeface="Aptos" pitchFamily="34" charset="-120"/>
+              </a:rPr>
+              <a:t>Tool</a:t>
+            </a:r>
+            <a:endParaRPr lang="en-US" sz="1500" dirty="0"/>
+          </a:p>
+        </p:txBody>
+      </p:sp>
+      <p:sp>
+        <p:nvSpPr>
+          <p:cNvPr id="18" name="Text 16"/>
+          <p:cNvSpPr/>
+          <p:nvPr/>
+        </p:nvSpPr>
+        <p:spPr>
+          <a:xfrm>
+            <a:off x="10046208" y="4187952"/>
+            <a:ext cx="201168" cy="256032"/>
+          </a:xfrm>
+          <a:prstGeom prst="rect">
+            <a:avLst/>
+          </a:prstGeom>
+          <a:noFill/>
+          <a:ln/>
+        </p:spPr>
+        <p:txBody>
+          <a:bodyPr wrap="square" lIns="0" tIns="0" rIns="0" bIns="0" rtlCol="0" anchor="ctr"/>
+          <a:lstStyle/>
+          <a:p>
+            <a:pPr algn="ctr" indent="0" marL="0">
+              <a:buNone/>
+            </a:pPr>
+            <a:r>
+              <a:rPr lang="en-US" sz="1800" b="1" dirty="0">
+                <a:solidFill>
+                  <a:srgbClr val="0068B7"/>
+                </a:solidFill>
+                <a:latin typeface="Aptos" pitchFamily="34" charset="0"/>
+                <a:ea typeface="Aptos" pitchFamily="34" charset="-122"/>
+                <a:cs typeface="Aptos" pitchFamily="34" charset="-120"/>
+              </a:rPr>
+              <a:t>â†’</a:t>
+            </a:r>
+            <a:endParaRPr lang="en-US" sz="1800" dirty="0"/>
+          </a:p>
+        </p:txBody>
+      </p:sp>
+      <p:sp>
+        <p:nvSpPr>
+          <p:cNvPr id="19" name="Shape 17"/>
+          <p:cNvSpPr/>
+          <p:nvPr/>
+        </p:nvSpPr>
+        <p:spPr>
+          <a:xfrm>
+            <a:off x="10274808" y="3977640"/>
+            <a:ext cx="972312" cy="749808"/>
+          </a:xfrm>
+          <a:prstGeom prst="roundRect">
+            <a:avLst>
+              <a:gd name="adj" fmla="val 14634"/>
+            </a:avLst>
+          </a:prstGeom>
+          <a:solidFill>
+            <a:srgbClr val="D69A2D"/>
+          </a:solidFill>
+          <a:ln w="12700">
+            <a:solidFill>
+              <a:srgbClr val="D69A2D"/>
+            </a:solidFill>
+            <a:prstDash val="solid"/>
+          </a:ln>
+        </p:spPr>
+      </p:sp>
+      <p:sp>
+        <p:nvSpPr>
+          <p:cNvPr id="20" name="Text 18"/>
+          <p:cNvSpPr/>
+          <p:nvPr/>
+        </p:nvSpPr>
+        <p:spPr>
+          <a:xfrm>
+            <a:off x="10347960" y="4169664"/>
+            <a:ext cx="826008" cy="310896"/>
+          </a:xfrm>
+          <a:prstGeom prst="rect">
+            <a:avLst/>
+          </a:prstGeom>
+          <a:noFill/>
+          <a:ln/>
+        </p:spPr>
+        <p:txBody>
+          <a:bodyPr wrap="square" lIns="0" tIns="0" rIns="0" bIns="0" rtlCol="0" anchor="ctr">
+            <a:normAutofit/>
+          </a:bodyPr>
+          <a:lstStyle/>
+          <a:p>
+            <a:pPr algn="ctr" indent="0" marL="0">
+              <a:buNone/>
+            </a:pPr>
+            <a:r>
+              <a:rPr lang="en-US" sz="1500" b="1" dirty="0">
+                <a:solidFill>
+                  <a:srgbClr val="FFFFFF"/>
+                </a:solidFill>
+                <a:latin typeface="Aptos" pitchFamily="34" charset="0"/>
+                <a:ea typeface="Aptos" pitchFamily="34" charset="-122"/>
+                <a:cs typeface="Aptos" pitchFamily="34" charset="-120"/>
+              </a:rPr>
+              <a:t>Artifact</a:t>
+            </a:r>
+            <a:endParaRPr lang="en-US" sz="1500" dirty="0"/>
           </a:p>
         </p:txBody>
       </p:sp>
@@ -12234,7 +13296,7 @@
                 <a:ea typeface="Aptos" pitchFamily="34" charset="-122"/>
                 <a:cs typeface="Aptos" pitchFamily="34" charset="-120"/>
               </a:rPr>
-              <a:t>© Paula Soper</a:t>
+              <a:t>Â© Paula Soper</a:t>
             </a:r>
             <a:endParaRPr lang="en-US" sz="800" dirty="0"/>
           </a:p>
@@ -12242,7 +13304,46 @@
       </p:sp>
       <p:sp>
         <p:nvSpPr>
-          <p:cNvPr id="7" name="Shape 5"/>
+          <p:cNvPr id="7" name="Text 5"/>
+          <p:cNvSpPr/>
+          <p:nvPr/>
+        </p:nvSpPr>
+        <p:spPr>
+          <a:xfrm>
+            <a:off x="11137392" y="6510528"/>
+            <a:ext cx="411480" cy="201168"/>
+          </a:xfrm>
+          <a:prstGeom prst="rect">
+            <a:avLst/>
+          </a:prstGeom>
+          <a:noFill/>
+          <a:ln/>
+        </p:spPr>
+        <p:txBody>
+          <a:bodyPr wrap="square" lIns="0" tIns="0" rIns="0" bIns="0" rtlCol="0" anchor="ctr"/>
+          <a:lstStyle/>
+          <a:p>
+            <a:pPr algn="r" indent="0" marL="0">
+              <a:buNone/>
+            </a:pPr>
+            <a:r>
+              <a:rPr lang="en-US" sz="900" dirty="0">
+                <a:solidFill>
+                  <a:srgbClr val="5F7181"/>
+                </a:solidFill>
+                <a:latin typeface="Aptos" pitchFamily="34" charset="0"/>
+                <a:ea typeface="Aptos" pitchFamily="34" charset="-122"/>
+                <a:cs typeface="Aptos" pitchFamily="34" charset="-120"/>
+              </a:rPr>
+              <a:t>5</a:t>
+            </a:r>
+            <a:endParaRPr lang="en-US" sz="900" dirty="0"/>
+          </a:p>
+        </p:txBody>
+      </p:sp>
+      <p:sp>
+        <p:nvSpPr>
+          <p:cNvPr id="8" name="Shape 6"/>
           <p:cNvSpPr/>
           <p:nvPr/>
         </p:nvSpPr>
@@ -12267,7 +13368,7 @@
       </p:sp>
       <p:sp>
         <p:nvSpPr>
-          <p:cNvPr id="8" name="Text 6"/>
+          <p:cNvPr id="9" name="Text 7"/>
           <p:cNvSpPr/>
           <p:nvPr/>
         </p:nvSpPr>
@@ -12306,14 +13407,14 @@
       </p:sp>
       <p:sp>
         <p:nvSpPr>
-          <p:cNvPr id="9" name="Text 7"/>
+          <p:cNvPr id="10" name="Text 8"/>
           <p:cNvSpPr/>
           <p:nvPr/>
         </p:nvSpPr>
         <p:spPr>
           <a:xfrm>
             <a:off x="640080" y="621792"/>
-            <a:ext cx="10881360" cy="566928"/>
+            <a:ext cx="10881360" cy="713232"/>
           </a:xfrm>
           <a:prstGeom prst="rect">
             <a:avLst/>
@@ -12331,7 +13432,7 @@
               <a:buNone/>
             </a:pPr>
             <a:r>
-              <a:rPr lang="en-US" sz="2700" b="1" dirty="0">
+              <a:rPr lang="en-US" sz="3400" b="1" dirty="0">
                 <a:solidFill>
                   <a:srgbClr val="003A63"/>
                 </a:solidFill>
@@ -12341,20 +13442,20 @@
               </a:rPr>
               <a:t>Learning Objectives</a:t>
             </a:r>
-            <a:endParaRPr lang="en-US" sz="2700" dirty="0"/>
-          </a:p>
-        </p:txBody>
-      </p:sp>
-      <p:sp>
-        <p:nvSpPr>
-          <p:cNvPr id="10" name="Text 8"/>
-          <p:cNvSpPr/>
-          <p:nvPr/>
-        </p:nvSpPr>
-        <p:spPr>
-          <a:xfrm>
-            <a:off x="868680" y="1417320"/>
-            <a:ext cx="6675120" cy="4434840"/>
+            <a:endParaRPr lang="en-US" sz="3400" dirty="0"/>
+          </a:p>
+        </p:txBody>
+      </p:sp>
+      <p:sp>
+        <p:nvSpPr>
+          <p:cNvPr id="11" name="Text 9"/>
+          <p:cNvSpPr/>
+          <p:nvPr/>
+        </p:nvSpPr>
+        <p:spPr>
+          <a:xfrm>
+            <a:off x="868680" y="1508760"/>
+            <a:ext cx="6537960" cy="4160520"/>
           </a:xfrm>
           <a:prstGeom prst="rect">
             <a:avLst/>
@@ -12369,7 +13470,7 @@
           <a:lstStyle/>
           <a:p>
             <a:r>
-              <a:rPr lang="en-US" sz="1700" dirty="0">
+              <a:rPr lang="en-US" sz="2100" dirty="0">
                 <a:solidFill>
                   <a:srgbClr val="17364A"/>
                 </a:solidFill>
@@ -12379,11 +13480,11 @@
               </a:rPr>
               <a:t>Define agentic AI and orchestration in public health terms.</a:t>
             </a:r>
-            <a:endParaRPr lang="en-US" sz="1700" dirty="0"/>
-          </a:p>
-          <a:p>
-            <a:r>
-              <a:rPr lang="en-US" sz="1700" dirty="0">
+            <a:endParaRPr lang="en-US" sz="2100" dirty="0"/>
+          </a:p>
+          <a:p>
+            <a:r>
+              <a:rPr lang="en-US" sz="2100" dirty="0">
                 <a:solidFill>
                   <a:srgbClr val="17364A"/>
                 </a:solidFill>
@@ -12393,11 +13494,11 @@
               </a:rPr>
               <a:t>Distinguish advisory outputs from tool-using or action-taking AI workflows.</a:t>
             </a:r>
-            <a:endParaRPr lang="en-US" sz="1700" dirty="0"/>
-          </a:p>
-          <a:p>
-            <a:r>
-              <a:rPr lang="en-US" sz="1700" dirty="0">
+            <a:endParaRPr lang="en-US" sz="2100" dirty="0"/>
+          </a:p>
+          <a:p>
+            <a:r>
+              <a:rPr lang="en-US" sz="2100" dirty="0">
                 <a:solidFill>
                   <a:srgbClr val="17364A"/>
                 </a:solidFill>
@@ -12405,29 +13506,15 @@
                 <a:ea typeface="Aptos" pitchFamily="34" charset="-122"/>
                 <a:cs typeface="Aptos" pitchFamily="34" charset="-120"/>
               </a:rPr>
-              <a:t>Identify the components of an agentic workflow, including goals, tools, permissions, memory, planning, human approval, logs,.</a:t>
-            </a:r>
-            <a:endParaRPr lang="en-US" sz="1700" dirty="0"/>
-          </a:p>
-          <a:p>
-            <a:r>
-              <a:rPr lang="en-US" sz="1700" dirty="0">
-                <a:solidFill>
-                  <a:srgbClr val="17364A"/>
-                </a:solidFill>
-                <a:latin typeface="Aptos" pitchFamily="34" charset="0"/>
-                <a:ea typeface="Aptos" pitchFamily="34" charset="-122"/>
-                <a:cs typeface="Aptos" pitchFamily="34" charset="-120"/>
-              </a:rPr>
-              <a:t>Assess risks from excessive agency, unauthorized actions, error propagation, prompt injection, and unclear accountability.</a:t>
-            </a:r>
-            <a:endParaRPr lang="en-US" sz="1700" dirty="0"/>
-          </a:p>
-        </p:txBody>
-      </p:sp>
-      <p:sp>
-        <p:nvSpPr>
-          <p:cNvPr id="11" name="Shape 9"/>
+              <a:t>Identify the components of an agentic workflow, including goals, tools, permissions, memory, planning,.</a:t>
+            </a:r>
+            <a:endParaRPr lang="en-US" sz="2100" dirty="0"/>
+          </a:p>
+        </p:txBody>
+      </p:sp>
+      <p:sp>
+        <p:nvSpPr>
+          <p:cNvPr id="12" name="Shape 10"/>
           <p:cNvSpPr/>
           <p:nvPr/>
         </p:nvSpPr>
@@ -12454,14 +13541,14 @@
       </p:sp>
       <p:sp>
         <p:nvSpPr>
-          <p:cNvPr id="12" name="Text 10"/>
+          <p:cNvPr id="13" name="Text 11"/>
           <p:cNvSpPr/>
           <p:nvPr/>
         </p:nvSpPr>
         <p:spPr>
           <a:xfrm>
             <a:off x="8074152" y="1563624"/>
-            <a:ext cx="2825496" cy="201168"/>
+            <a:ext cx="2825496" cy="256032"/>
           </a:xfrm>
           <a:prstGeom prst="rect">
             <a:avLst/>
@@ -12477,7 +13564,7 @@
               <a:buNone/>
             </a:pPr>
             <a:r>
-              <a:rPr lang="en-US" sz="950" b="1" dirty="0">
+              <a:rPr lang="en-US" sz="1300" b="1" dirty="0">
                 <a:solidFill>
                   <a:srgbClr val="0068B7"/>
                 </a:solidFill>
@@ -12487,20 +13574,20 @@
               </a:rPr>
               <a:t>Key idea</a:t>
             </a:r>
-            <a:endParaRPr lang="en-US" sz="950" dirty="0"/>
-          </a:p>
-        </p:txBody>
-      </p:sp>
-      <p:sp>
-        <p:nvSpPr>
-          <p:cNvPr id="13" name="Text 11"/>
-          <p:cNvSpPr/>
-          <p:nvPr/>
-        </p:nvSpPr>
-        <p:spPr>
-          <a:xfrm>
-            <a:off x="8074152" y="1856232"/>
-            <a:ext cx="2825496" cy="1261872"/>
+            <a:endParaRPr lang="en-US" sz="1300" dirty="0"/>
+          </a:p>
+        </p:txBody>
+      </p:sp>
+      <p:sp>
+        <p:nvSpPr>
+          <p:cNvPr id="14" name="Text 12"/>
+          <p:cNvSpPr/>
+          <p:nvPr/>
+        </p:nvSpPr>
+        <p:spPr>
+          <a:xfrm>
+            <a:off x="8074152" y="1920240"/>
+            <a:ext cx="2825496" cy="1188720"/>
           </a:xfrm>
           <a:prstGeom prst="rect">
             <a:avLst/>
@@ -12518,7 +13605,7 @@
               <a:buNone/>
             </a:pPr>
             <a:r>
-              <a:rPr lang="en-US" sz="1250" dirty="0">
+              <a:rPr lang="en-US" sz="1550" dirty="0">
                 <a:solidFill>
                   <a:srgbClr val="17364A"/>
                 </a:solidFill>
@@ -12528,13 +13615,13 @@
               </a:rPr>
               <a:t>Define agentic AI and orchestration in public health terms.</a:t>
             </a:r>
-            <a:endParaRPr lang="en-US" sz="1250" dirty="0"/>
-          </a:p>
-        </p:txBody>
-      </p:sp>
-      <p:sp>
-        <p:nvSpPr>
-          <p:cNvPr id="14" name="Shape 12"/>
+            <a:endParaRPr lang="en-US" sz="1550" dirty="0"/>
+          </a:p>
+        </p:txBody>
+      </p:sp>
+      <p:sp>
+        <p:nvSpPr>
+          <p:cNvPr id="15" name="Shape 13"/>
           <p:cNvSpPr/>
           <p:nvPr/>
         </p:nvSpPr>
@@ -12561,14 +13648,14 @@
       </p:sp>
       <p:sp>
         <p:nvSpPr>
-          <p:cNvPr id="15" name="Text 13"/>
+          <p:cNvPr id="16" name="Text 14"/>
           <p:cNvSpPr/>
           <p:nvPr/>
         </p:nvSpPr>
         <p:spPr>
           <a:xfrm>
             <a:off x="8074152" y="3666744"/>
-            <a:ext cx="2825496" cy="201168"/>
+            <a:ext cx="2825496" cy="256032"/>
           </a:xfrm>
           <a:prstGeom prst="rect">
             <a:avLst/>
@@ -12584,7 +13671,7 @@
               <a:buNone/>
             </a:pPr>
             <a:r>
-              <a:rPr lang="en-US" sz="950" b="1" dirty="0">
+              <a:rPr lang="en-US" sz="1300" b="1" dirty="0">
                 <a:solidFill>
                   <a:srgbClr val="0068B7"/>
                 </a:solidFill>
@@ -12594,20 +13681,20 @@
               </a:rPr>
               <a:t>Use this for</a:t>
             </a:r>
-            <a:endParaRPr lang="en-US" sz="950" dirty="0"/>
-          </a:p>
-        </p:txBody>
-      </p:sp>
-      <p:sp>
-        <p:nvSpPr>
-          <p:cNvPr id="16" name="Text 14"/>
-          <p:cNvSpPr/>
-          <p:nvPr/>
-        </p:nvSpPr>
-        <p:spPr>
-          <a:xfrm>
-            <a:off x="8074152" y="3959352"/>
-            <a:ext cx="2825496" cy="1170432"/>
+            <a:endParaRPr lang="en-US" sz="1300" dirty="0"/>
+          </a:p>
+        </p:txBody>
+      </p:sp>
+      <p:sp>
+        <p:nvSpPr>
+          <p:cNvPr id="17" name="Text 15"/>
+          <p:cNvSpPr/>
+          <p:nvPr/>
+        </p:nvSpPr>
+        <p:spPr>
+          <a:xfrm>
+            <a:off x="8074152" y="4023360"/>
+            <a:ext cx="2825496" cy="1097280"/>
           </a:xfrm>
           <a:prstGeom prst="rect">
             <a:avLst/>
@@ -12625,7 +13712,7 @@
               <a:buNone/>
             </a:pPr>
             <a:r>
-              <a:rPr lang="en-US" sz="1250" dirty="0">
+              <a:rPr lang="en-US" sz="1550" dirty="0">
                 <a:solidFill>
                   <a:srgbClr val="17364A"/>
                 </a:solidFill>
@@ -12635,7 +13722,7 @@
               </a:rPr>
               <a:t>Connect the concept to public health decisions, safeguards, documentation, or implementation work.</a:t>
             </a:r>
-            <a:endParaRPr lang="en-US" sz="1250" dirty="0"/>
+            <a:endParaRPr lang="en-US" sz="1550" dirty="0"/>
           </a:p>
         </p:txBody>
       </p:sp>
@@ -12832,7 +13919,7 @@
                 <a:ea typeface="Aptos" pitchFamily="34" charset="-122"/>
                 <a:cs typeface="Aptos" pitchFamily="34" charset="-120"/>
               </a:rPr>
-              <a:t>© Paula Soper</a:t>
+              <a:t>Â© Paula Soper</a:t>
             </a:r>
             <a:endParaRPr lang="en-US" sz="800" dirty="0"/>
           </a:p>
@@ -12846,8 +13933,47 @@
         </p:nvSpPr>
         <p:spPr>
           <a:xfrm>
+            <a:off x="11137392" y="6510528"/>
+            <a:ext cx="411480" cy="201168"/>
+          </a:xfrm>
+          <a:prstGeom prst="rect">
+            <a:avLst/>
+          </a:prstGeom>
+          <a:noFill/>
+          <a:ln/>
+        </p:spPr>
+        <p:txBody>
+          <a:bodyPr wrap="square" lIns="0" tIns="0" rIns="0" bIns="0" rtlCol="0" anchor="ctr"/>
+          <a:lstStyle/>
+          <a:p>
+            <a:pPr algn="r" indent="0" marL="0">
+              <a:buNone/>
+            </a:pPr>
+            <a:r>
+              <a:rPr lang="en-US" sz="900" dirty="0">
+                <a:solidFill>
+                  <a:srgbClr val="5F7181"/>
+                </a:solidFill>
+                <a:latin typeface="Aptos" pitchFamily="34" charset="0"/>
+                <a:ea typeface="Aptos" pitchFamily="34" charset="-122"/>
+                <a:cs typeface="Aptos" pitchFamily="34" charset="-120"/>
+              </a:rPr>
+              <a:t>6</a:t>
+            </a:r>
+            <a:endParaRPr lang="en-US" sz="900" dirty="0"/>
+          </a:p>
+        </p:txBody>
+      </p:sp>
+      <p:sp>
+        <p:nvSpPr>
+          <p:cNvPr id="8" name="Text 6"/>
+          <p:cNvSpPr/>
+          <p:nvPr/>
+        </p:nvSpPr>
+        <p:spPr>
+          <a:xfrm>
             <a:off x="640080" y="658368"/>
-            <a:ext cx="10881360" cy="566928"/>
+            <a:ext cx="10881360" cy="713232"/>
           </a:xfrm>
           <a:prstGeom prst="rect">
             <a:avLst/>
@@ -12865,7 +13991,7 @@
               <a:buNone/>
             </a:pPr>
             <a:r>
-              <a:rPr lang="en-US" sz="2700" b="1" dirty="0">
+              <a:rPr lang="en-US" sz="3400" b="1" dirty="0">
                 <a:solidFill>
                   <a:srgbClr val="003A63"/>
                 </a:solidFill>
@@ -12875,20 +14001,20 @@
               </a:rPr>
               <a:t>Learning Objectives Continued</a:t>
             </a:r>
-            <a:endParaRPr lang="en-US" sz="2700" dirty="0"/>
-          </a:p>
-        </p:txBody>
-      </p:sp>
-      <p:sp>
-        <p:nvSpPr>
-          <p:cNvPr id="8" name="Text 6"/>
-          <p:cNvSpPr/>
-          <p:nvPr/>
-        </p:nvSpPr>
-        <p:spPr>
-          <a:xfrm>
-            <a:off x="868680" y="1417320"/>
-            <a:ext cx="6675120" cy="4434840"/>
+            <a:endParaRPr lang="en-US" sz="3400" dirty="0"/>
+          </a:p>
+        </p:txBody>
+      </p:sp>
+      <p:sp>
+        <p:nvSpPr>
+          <p:cNvPr id="9" name="Text 7"/>
+          <p:cNvSpPr/>
+          <p:nvPr/>
+        </p:nvSpPr>
+        <p:spPr>
+          <a:xfrm>
+            <a:off x="868680" y="1508760"/>
+            <a:ext cx="6537960" cy="4160520"/>
           </a:xfrm>
           <a:prstGeom prst="rect">
             <a:avLst/>
@@ -12903,7 +14029,7 @@
           <a:lstStyle/>
           <a:p>
             <a:r>
-              <a:rPr lang="en-US" sz="1700" dirty="0">
+              <a:rPr lang="en-US" sz="2100" dirty="0">
                 <a:solidFill>
                   <a:srgbClr val="17364A"/>
                 </a:solidFill>
@@ -12913,13 +14039,13 @@
               </a:rPr>
               <a:t>Produce an agentic workflow control plan.</a:t>
             </a:r>
-            <a:endParaRPr lang="en-US" sz="1700" dirty="0"/>
-          </a:p>
-        </p:txBody>
-      </p:sp>
-      <p:sp>
-        <p:nvSpPr>
-          <p:cNvPr id="9" name="Shape 7"/>
+            <a:endParaRPr lang="en-US" sz="2100" dirty="0"/>
+          </a:p>
+        </p:txBody>
+      </p:sp>
+      <p:sp>
+        <p:nvSpPr>
+          <p:cNvPr id="10" name="Shape 8"/>
           <p:cNvSpPr/>
           <p:nvPr/>
         </p:nvSpPr>
@@ -12946,14 +14072,14 @@
       </p:sp>
       <p:sp>
         <p:nvSpPr>
-          <p:cNvPr id="10" name="Text 8"/>
+          <p:cNvPr id="11" name="Text 9"/>
           <p:cNvSpPr/>
           <p:nvPr/>
         </p:nvSpPr>
         <p:spPr>
           <a:xfrm>
             <a:off x="8074152" y="1563624"/>
-            <a:ext cx="2825496" cy="201168"/>
+            <a:ext cx="2825496" cy="256032"/>
           </a:xfrm>
           <a:prstGeom prst="rect">
             <a:avLst/>
@@ -12969,7 +14095,7 @@
               <a:buNone/>
             </a:pPr>
             <a:r>
-              <a:rPr lang="en-US" sz="950" b="1" dirty="0">
+              <a:rPr lang="en-US" sz="1300" b="1" dirty="0">
                 <a:solidFill>
                   <a:srgbClr val="0068B7"/>
                 </a:solidFill>
@@ -12979,20 +14105,20 @@
               </a:rPr>
               <a:t>Key idea</a:t>
             </a:r>
-            <a:endParaRPr lang="en-US" sz="950" dirty="0"/>
-          </a:p>
-        </p:txBody>
-      </p:sp>
-      <p:sp>
-        <p:nvSpPr>
-          <p:cNvPr id="11" name="Text 9"/>
-          <p:cNvSpPr/>
-          <p:nvPr/>
-        </p:nvSpPr>
-        <p:spPr>
-          <a:xfrm>
-            <a:off x="8074152" y="1856232"/>
-            <a:ext cx="2825496" cy="1261872"/>
+            <a:endParaRPr lang="en-US" sz="1300" dirty="0"/>
+          </a:p>
+        </p:txBody>
+      </p:sp>
+      <p:sp>
+        <p:nvSpPr>
+          <p:cNvPr id="12" name="Text 10"/>
+          <p:cNvSpPr/>
+          <p:nvPr/>
+        </p:nvSpPr>
+        <p:spPr>
+          <a:xfrm>
+            <a:off x="8074152" y="1920240"/>
+            <a:ext cx="2825496" cy="1188720"/>
           </a:xfrm>
           <a:prstGeom prst="rect">
             <a:avLst/>
@@ -13010,7 +14136,7 @@
               <a:buNone/>
             </a:pPr>
             <a:r>
-              <a:rPr lang="en-US" sz="1250" dirty="0">
+              <a:rPr lang="en-US" sz="1550" dirty="0">
                 <a:solidFill>
                   <a:srgbClr val="17364A"/>
                 </a:solidFill>
@@ -13020,13 +14146,13 @@
               </a:rPr>
               <a:t>Produce an agentic workflow control plan.</a:t>
             </a:r>
-            <a:endParaRPr lang="en-US" sz="1250" dirty="0"/>
-          </a:p>
-        </p:txBody>
-      </p:sp>
-      <p:sp>
-        <p:nvSpPr>
-          <p:cNvPr id="12" name="Shape 10"/>
+            <a:endParaRPr lang="en-US" sz="1550" dirty="0"/>
+          </a:p>
+        </p:txBody>
+      </p:sp>
+      <p:sp>
+        <p:nvSpPr>
+          <p:cNvPr id="13" name="Shape 11"/>
           <p:cNvSpPr/>
           <p:nvPr/>
         </p:nvSpPr>
@@ -13053,14 +14179,14 @@
       </p:sp>
       <p:sp>
         <p:nvSpPr>
-          <p:cNvPr id="13" name="Text 11"/>
+          <p:cNvPr id="14" name="Text 12"/>
           <p:cNvSpPr/>
           <p:nvPr/>
         </p:nvSpPr>
         <p:spPr>
           <a:xfrm>
             <a:off x="8074152" y="3666744"/>
-            <a:ext cx="2825496" cy="201168"/>
+            <a:ext cx="2825496" cy="256032"/>
           </a:xfrm>
           <a:prstGeom prst="rect">
             <a:avLst/>
@@ -13076,7 +14202,7 @@
               <a:buNone/>
             </a:pPr>
             <a:r>
-              <a:rPr lang="en-US" sz="950" b="1" dirty="0">
+              <a:rPr lang="en-US" sz="1300" b="1" dirty="0">
                 <a:solidFill>
                   <a:srgbClr val="0068B7"/>
                 </a:solidFill>
@@ -13086,20 +14212,20 @@
               </a:rPr>
               <a:t>Use this for</a:t>
             </a:r>
-            <a:endParaRPr lang="en-US" sz="950" dirty="0"/>
-          </a:p>
-        </p:txBody>
-      </p:sp>
-      <p:sp>
-        <p:nvSpPr>
-          <p:cNvPr id="14" name="Text 12"/>
-          <p:cNvSpPr/>
-          <p:nvPr/>
-        </p:nvSpPr>
-        <p:spPr>
-          <a:xfrm>
-            <a:off x="8074152" y="3959352"/>
-            <a:ext cx="2825496" cy="1170432"/>
+            <a:endParaRPr lang="en-US" sz="1300" dirty="0"/>
+          </a:p>
+        </p:txBody>
+      </p:sp>
+      <p:sp>
+        <p:nvSpPr>
+          <p:cNvPr id="15" name="Text 13"/>
+          <p:cNvSpPr/>
+          <p:nvPr/>
+        </p:nvSpPr>
+        <p:spPr>
+          <a:xfrm>
+            <a:off x="8074152" y="4023360"/>
+            <a:ext cx="2825496" cy="1097280"/>
           </a:xfrm>
           <a:prstGeom prst="rect">
             <a:avLst/>
@@ -13117,7 +14243,7 @@
               <a:buNone/>
             </a:pPr>
             <a:r>
-              <a:rPr lang="en-US" sz="1250" dirty="0">
+              <a:rPr lang="en-US" sz="1550" dirty="0">
                 <a:solidFill>
                   <a:srgbClr val="17364A"/>
                 </a:solidFill>
@@ -13127,7 +14253,7 @@
               </a:rPr>
               <a:t>Connect the concept to public health decisions, safeguards, documentation, or implementation work.</a:t>
             </a:r>
-            <a:endParaRPr lang="en-US" sz="1250" dirty="0"/>
+            <a:endParaRPr lang="en-US" sz="1550" dirty="0"/>
           </a:p>
         </p:txBody>
       </p:sp>
@@ -13324,7 +14450,7 @@
                 <a:ea typeface="Aptos" pitchFamily="34" charset="-122"/>
                 <a:cs typeface="Aptos" pitchFamily="34" charset="-120"/>
               </a:rPr>
-              <a:t>© Paula Soper</a:t>
+              <a:t>Â© Paula Soper</a:t>
             </a:r>
             <a:endParaRPr lang="en-US" sz="800" dirty="0"/>
           </a:p>
@@ -13332,7 +14458,46 @@
       </p:sp>
       <p:sp>
         <p:nvSpPr>
-          <p:cNvPr id="7" name="Shape 5"/>
+          <p:cNvPr id="7" name="Text 5"/>
+          <p:cNvSpPr/>
+          <p:nvPr/>
+        </p:nvSpPr>
+        <p:spPr>
+          <a:xfrm>
+            <a:off x="11137392" y="6510528"/>
+            <a:ext cx="411480" cy="201168"/>
+          </a:xfrm>
+          <a:prstGeom prst="rect">
+            <a:avLst/>
+          </a:prstGeom>
+          <a:noFill/>
+          <a:ln/>
+        </p:spPr>
+        <p:txBody>
+          <a:bodyPr wrap="square" lIns="0" tIns="0" rIns="0" bIns="0" rtlCol="0" anchor="ctr"/>
+          <a:lstStyle/>
+          <a:p>
+            <a:pPr algn="r" indent="0" marL="0">
+              <a:buNone/>
+            </a:pPr>
+            <a:r>
+              <a:rPr lang="en-US" sz="900" dirty="0">
+                <a:solidFill>
+                  <a:srgbClr val="5F7181"/>
+                </a:solidFill>
+                <a:latin typeface="Aptos" pitchFamily="34" charset="0"/>
+                <a:ea typeface="Aptos" pitchFamily="34" charset="-122"/>
+                <a:cs typeface="Aptos" pitchFamily="34" charset="-120"/>
+              </a:rPr>
+              <a:t>7</a:t>
+            </a:r>
+            <a:endParaRPr lang="en-US" sz="900" dirty="0"/>
+          </a:p>
+        </p:txBody>
+      </p:sp>
+      <p:sp>
+        <p:nvSpPr>
+          <p:cNvPr id="8" name="Shape 6"/>
           <p:cNvSpPr/>
           <p:nvPr/>
         </p:nvSpPr>
@@ -13357,7 +14522,7 @@
       </p:sp>
       <p:sp>
         <p:nvSpPr>
-          <p:cNvPr id="8" name="Text 6"/>
+          <p:cNvPr id="9" name="Text 7"/>
           <p:cNvSpPr/>
           <p:nvPr/>
         </p:nvSpPr>
@@ -13396,14 +14561,14 @@
       </p:sp>
       <p:sp>
         <p:nvSpPr>
-          <p:cNvPr id="9" name="Text 7"/>
+          <p:cNvPr id="10" name="Text 8"/>
           <p:cNvSpPr/>
           <p:nvPr/>
         </p:nvSpPr>
         <p:spPr>
           <a:xfrm>
             <a:off x="640080" y="621792"/>
-            <a:ext cx="10881360" cy="566928"/>
+            <a:ext cx="10881360" cy="713232"/>
           </a:xfrm>
           <a:prstGeom prst="rect">
             <a:avLst/>
@@ -13421,7 +14586,7 @@
               <a:buNone/>
             </a:pPr>
             <a:r>
-              <a:rPr lang="en-US" sz="2700" b="1" dirty="0">
+              <a:rPr lang="en-US" sz="3400" b="1" dirty="0">
                 <a:solidFill>
                   <a:srgbClr val="003A63"/>
                 </a:solidFill>
@@ -13431,20 +14596,20 @@
               </a:rPr>
               <a:t>Module Overview</a:t>
             </a:r>
-            <a:endParaRPr lang="en-US" sz="2700" dirty="0"/>
-          </a:p>
-        </p:txBody>
-      </p:sp>
-      <p:sp>
-        <p:nvSpPr>
-          <p:cNvPr id="10" name="Text 8"/>
-          <p:cNvSpPr/>
-          <p:nvPr/>
-        </p:nvSpPr>
-        <p:spPr>
-          <a:xfrm>
-            <a:off x="868680" y="1417320"/>
-            <a:ext cx="6675120" cy="4434840"/>
+            <a:endParaRPr lang="en-US" sz="3400" dirty="0"/>
+          </a:p>
+        </p:txBody>
+      </p:sp>
+      <p:sp>
+        <p:nvSpPr>
+          <p:cNvPr id="11" name="Text 9"/>
+          <p:cNvSpPr/>
+          <p:nvPr/>
+        </p:nvSpPr>
+        <p:spPr>
+          <a:xfrm>
+            <a:off x="868680" y="1508760"/>
+            <a:ext cx="6537960" cy="4160520"/>
           </a:xfrm>
           <a:prstGeom prst="rect">
             <a:avLst/>
@@ -13459,7 +14624,7 @@
           <a:lstStyle/>
           <a:p>
             <a:r>
-              <a:rPr lang="en-US" sz="1700" dirty="0">
+              <a:rPr lang="en-US" sz="2100" dirty="0">
                 <a:solidFill>
                   <a:srgbClr val="17364A"/>
                 </a:solidFill>
@@ -13467,13 +14632,13 @@
                 <a:ea typeface="Aptos" pitchFamily="34" charset="-122"/>
                 <a:cs typeface="Aptos" pitchFamily="34" charset="-120"/>
               </a:rPr>
-              <a:t>Agentic AI refers to AI systems configured to pursue a goal through multiple steps, often by using tools, calling APIs,.</a:t>
-            </a:r>
-            <a:endParaRPr lang="en-US" sz="1700" dirty="0"/>
-          </a:p>
-          <a:p>
-            <a:r>
-              <a:rPr lang="en-US" sz="1700" dirty="0">
+              <a:t>Agentic AI refers to AI systems configured to pursue a goal through multiple steps, often by using.</a:t>
+            </a:r>
+            <a:endParaRPr lang="en-US" sz="2100" dirty="0"/>
+          </a:p>
+          <a:p>
+            <a:r>
+              <a:rPr lang="en-US" sz="2100" dirty="0">
                 <a:solidFill>
                   <a:srgbClr val="17364A"/>
                 </a:solidFill>
@@ -13481,13 +14646,13 @@
                 <a:ea typeface="Aptos" pitchFamily="34" charset="-122"/>
                 <a:cs typeface="Aptos" pitchFamily="34" charset="-120"/>
               </a:rPr>
-              <a:t>In public health, agentic workflows may eventually support intake triage, document routing, surveillance review, resource.</a:t>
-            </a:r>
-            <a:endParaRPr lang="en-US" sz="1700" dirty="0"/>
-          </a:p>
-          <a:p>
-            <a:r>
-              <a:rPr lang="en-US" sz="1700" dirty="0">
+              <a:t>In public health, agentic workflows may eventually support intake triage, document routing,.</a:t>
+            </a:r>
+            <a:endParaRPr lang="en-US" sz="2100" dirty="0"/>
+          </a:p>
+          <a:p>
+            <a:r>
+              <a:rPr lang="en-US" sz="2100" dirty="0">
                 <a:solidFill>
                   <a:srgbClr val="17364A"/>
                 </a:solidFill>
@@ -13497,27 +14662,13 @@
               </a:rPr>
               <a:t>These uses require stronger controls than simple drafting or summarization.</a:t>
             </a:r>
-            <a:endParaRPr lang="en-US" sz="1700" dirty="0"/>
-          </a:p>
-          <a:p>
-            <a:r>
-              <a:rPr lang="en-US" sz="1700" dirty="0">
-                <a:solidFill>
-                  <a:srgbClr val="17364A"/>
-                </a:solidFill>
-                <a:latin typeface="Aptos" pitchFamily="34" charset="0"/>
-                <a:ea typeface="Aptos" pitchFamily="34" charset="-122"/>
-                <a:cs typeface="Aptos" pitchFamily="34" charset="-120"/>
-              </a:rPr>
-              <a:t>This module teaches learners how to design agentic workflows with clear boundaries.</a:t>
-            </a:r>
-            <a:endParaRPr lang="en-US" sz="1700" dirty="0"/>
-          </a:p>
-        </p:txBody>
-      </p:sp>
-      <p:sp>
-        <p:nvSpPr>
-          <p:cNvPr id="11" name="Shape 9"/>
+            <a:endParaRPr lang="en-US" sz="2100" dirty="0"/>
+          </a:p>
+        </p:txBody>
+      </p:sp>
+      <p:sp>
+        <p:nvSpPr>
+          <p:cNvPr id="12" name="Shape 10"/>
           <p:cNvSpPr/>
           <p:nvPr/>
         </p:nvSpPr>
@@ -13544,14 +14695,14 @@
       </p:sp>
       <p:sp>
         <p:nvSpPr>
-          <p:cNvPr id="12" name="Text 10"/>
+          <p:cNvPr id="13" name="Text 11"/>
           <p:cNvSpPr/>
           <p:nvPr/>
         </p:nvSpPr>
         <p:spPr>
           <a:xfrm>
             <a:off x="8074152" y="1563624"/>
-            <a:ext cx="2825496" cy="201168"/>
+            <a:ext cx="2825496" cy="256032"/>
           </a:xfrm>
           <a:prstGeom prst="rect">
             <a:avLst/>
@@ -13567,7 +14718,7 @@
               <a:buNone/>
             </a:pPr>
             <a:r>
-              <a:rPr lang="en-US" sz="950" b="1" dirty="0">
+              <a:rPr lang="en-US" sz="1300" b="1" dirty="0">
                 <a:solidFill>
                   <a:srgbClr val="0068B7"/>
                 </a:solidFill>
@@ -13577,20 +14728,20 @@
               </a:rPr>
               <a:t>Key idea</a:t>
             </a:r>
-            <a:endParaRPr lang="en-US" sz="950" dirty="0"/>
-          </a:p>
-        </p:txBody>
-      </p:sp>
-      <p:sp>
-        <p:nvSpPr>
-          <p:cNvPr id="13" name="Text 11"/>
-          <p:cNvSpPr/>
-          <p:nvPr/>
-        </p:nvSpPr>
-        <p:spPr>
-          <a:xfrm>
-            <a:off x="8074152" y="1856232"/>
-            <a:ext cx="2825496" cy="1261872"/>
+            <a:endParaRPr lang="en-US" sz="1300" dirty="0"/>
+          </a:p>
+        </p:txBody>
+      </p:sp>
+      <p:sp>
+        <p:nvSpPr>
+          <p:cNvPr id="14" name="Text 12"/>
+          <p:cNvSpPr/>
+          <p:nvPr/>
+        </p:nvSpPr>
+        <p:spPr>
+          <a:xfrm>
+            <a:off x="8074152" y="1920240"/>
+            <a:ext cx="2825496" cy="1188720"/>
           </a:xfrm>
           <a:prstGeom prst="rect">
             <a:avLst/>
@@ -13608,7 +14759,7 @@
               <a:buNone/>
             </a:pPr>
             <a:r>
-              <a:rPr lang="en-US" sz="1250" dirty="0">
+              <a:rPr lang="en-US" sz="1550" dirty="0">
                 <a:solidFill>
                   <a:srgbClr val="17364A"/>
                 </a:solidFill>
@@ -13616,15 +14767,15 @@
                 <a:ea typeface="Aptos" pitchFamily="34" charset="-122"/>
                 <a:cs typeface="Aptos" pitchFamily="34" charset="-120"/>
               </a:rPr>
-              <a:t>Agentic AI refers to AI systems configured to pursue a goal through multiple steps, often by using tools, calling APIs,.</a:t>
-            </a:r>
-            <a:endParaRPr lang="en-US" sz="1250" dirty="0"/>
-          </a:p>
-        </p:txBody>
-      </p:sp>
-      <p:sp>
-        <p:nvSpPr>
-          <p:cNvPr id="14" name="Shape 12"/>
+              <a:t>Agentic AI refers to AI systems configured to pursue a goal through multiple steps, often by using.</a:t>
+            </a:r>
+            <a:endParaRPr lang="en-US" sz="1550" dirty="0"/>
+          </a:p>
+        </p:txBody>
+      </p:sp>
+      <p:sp>
+        <p:nvSpPr>
+          <p:cNvPr id="15" name="Shape 13"/>
           <p:cNvSpPr/>
           <p:nvPr/>
         </p:nvSpPr>
@@ -13651,14 +14802,14 @@
       </p:sp>
       <p:sp>
         <p:nvSpPr>
-          <p:cNvPr id="15" name="Text 13"/>
+          <p:cNvPr id="16" name="Text 14"/>
           <p:cNvSpPr/>
           <p:nvPr/>
         </p:nvSpPr>
         <p:spPr>
           <a:xfrm>
             <a:off x="8074152" y="3666744"/>
-            <a:ext cx="2825496" cy="201168"/>
+            <a:ext cx="2825496" cy="256032"/>
           </a:xfrm>
           <a:prstGeom prst="rect">
             <a:avLst/>
@@ -13674,7 +14825,7 @@
               <a:buNone/>
             </a:pPr>
             <a:r>
-              <a:rPr lang="en-US" sz="950" b="1" dirty="0">
+              <a:rPr lang="en-US" sz="1300" b="1" dirty="0">
                 <a:solidFill>
                   <a:srgbClr val="0068B7"/>
                 </a:solidFill>
@@ -13684,20 +14835,20 @@
               </a:rPr>
               <a:t>Use this for</a:t>
             </a:r>
-            <a:endParaRPr lang="en-US" sz="950" dirty="0"/>
-          </a:p>
-        </p:txBody>
-      </p:sp>
-      <p:sp>
-        <p:nvSpPr>
-          <p:cNvPr id="16" name="Text 14"/>
-          <p:cNvSpPr/>
-          <p:nvPr/>
-        </p:nvSpPr>
-        <p:spPr>
-          <a:xfrm>
-            <a:off x="8074152" y="3959352"/>
-            <a:ext cx="2825496" cy="1170432"/>
+            <a:endParaRPr lang="en-US" sz="1300" dirty="0"/>
+          </a:p>
+        </p:txBody>
+      </p:sp>
+      <p:sp>
+        <p:nvSpPr>
+          <p:cNvPr id="17" name="Text 15"/>
+          <p:cNvSpPr/>
+          <p:nvPr/>
+        </p:nvSpPr>
+        <p:spPr>
+          <a:xfrm>
+            <a:off x="8074152" y="4023360"/>
+            <a:ext cx="2825496" cy="1097280"/>
           </a:xfrm>
           <a:prstGeom prst="rect">
             <a:avLst/>
@@ -13715,7 +14866,7 @@
               <a:buNone/>
             </a:pPr>
             <a:r>
-              <a:rPr lang="en-US" sz="1250" dirty="0">
+              <a:rPr lang="en-US" sz="1550" dirty="0">
                 <a:solidFill>
                   <a:srgbClr val="17364A"/>
                 </a:solidFill>
@@ -13725,7 +14876,7 @@
               </a:rPr>
               <a:t>Connect the concept to public health decisions, safeguards, documentation, or implementation work.</a:t>
             </a:r>
-            <a:endParaRPr lang="en-US" sz="1250" dirty="0"/>
+            <a:endParaRPr lang="en-US" sz="1550" dirty="0"/>
           </a:p>
         </p:txBody>
       </p:sp>
@@ -13922,7 +15073,7 @@
                 <a:ea typeface="Aptos" pitchFamily="34" charset="-122"/>
                 <a:cs typeface="Aptos" pitchFamily="34" charset="-120"/>
               </a:rPr>
-              <a:t>© Paula Soper</a:t>
+              <a:t>Â© Paula Soper</a:t>
             </a:r>
             <a:endParaRPr lang="en-US" sz="800" dirty="0"/>
           </a:p>
@@ -13930,7 +15081,46 @@
       </p:sp>
       <p:sp>
         <p:nvSpPr>
-          <p:cNvPr id="7" name="Shape 5"/>
+          <p:cNvPr id="7" name="Text 5"/>
+          <p:cNvSpPr/>
+          <p:nvPr/>
+        </p:nvSpPr>
+        <p:spPr>
+          <a:xfrm>
+            <a:off x="11137392" y="6510528"/>
+            <a:ext cx="411480" cy="201168"/>
+          </a:xfrm>
+          <a:prstGeom prst="rect">
+            <a:avLst/>
+          </a:prstGeom>
+          <a:noFill/>
+          <a:ln/>
+        </p:spPr>
+        <p:txBody>
+          <a:bodyPr wrap="square" lIns="0" tIns="0" rIns="0" bIns="0" rtlCol="0" anchor="ctr"/>
+          <a:lstStyle/>
+          <a:p>
+            <a:pPr algn="r" indent="0" marL="0">
+              <a:buNone/>
+            </a:pPr>
+            <a:r>
+              <a:rPr lang="en-US" sz="900" dirty="0">
+                <a:solidFill>
+                  <a:srgbClr val="5F7181"/>
+                </a:solidFill>
+                <a:latin typeface="Aptos" pitchFamily="34" charset="0"/>
+                <a:ea typeface="Aptos" pitchFamily="34" charset="-122"/>
+                <a:cs typeface="Aptos" pitchFamily="34" charset="-120"/>
+              </a:rPr>
+              <a:t>8</a:t>
+            </a:r>
+            <a:endParaRPr lang="en-US" sz="900" dirty="0"/>
+          </a:p>
+        </p:txBody>
+      </p:sp>
+      <p:sp>
+        <p:nvSpPr>
+          <p:cNvPr id="8" name="Shape 6"/>
           <p:cNvSpPr/>
           <p:nvPr/>
         </p:nvSpPr>
@@ -13955,7 +15145,7 @@
       </p:sp>
       <p:sp>
         <p:nvSpPr>
-          <p:cNvPr id="8" name="Text 6"/>
+          <p:cNvPr id="9" name="Text 7"/>
           <p:cNvSpPr/>
           <p:nvPr/>
         </p:nvSpPr>
@@ -13994,14 +15184,14 @@
       </p:sp>
       <p:sp>
         <p:nvSpPr>
-          <p:cNvPr id="9" name="Text 7"/>
+          <p:cNvPr id="10" name="Text 8"/>
           <p:cNvSpPr/>
           <p:nvPr/>
         </p:nvSpPr>
         <p:spPr>
           <a:xfrm>
             <a:off x="640080" y="621792"/>
-            <a:ext cx="10881360" cy="566928"/>
+            <a:ext cx="10881360" cy="713232"/>
           </a:xfrm>
           <a:prstGeom prst="rect">
             <a:avLst/>
@@ -14019,7 +15209,7 @@
               <a:buNone/>
             </a:pPr>
             <a:r>
-              <a:rPr lang="en-US" sz="2700" b="1" dirty="0">
+              <a:rPr lang="en-US" sz="3400" b="1" dirty="0">
                 <a:solidFill>
                   <a:srgbClr val="003A63"/>
                 </a:solidFill>
@@ -14029,20 +15219,20 @@
               </a:rPr>
               <a:t>Why This Topic Matters for Public Health AI</a:t>
             </a:r>
-            <a:endParaRPr lang="en-US" sz="2700" dirty="0"/>
-          </a:p>
-        </p:txBody>
-      </p:sp>
-      <p:sp>
-        <p:nvSpPr>
-          <p:cNvPr id="10" name="Text 8"/>
-          <p:cNvSpPr/>
-          <p:nvPr/>
-        </p:nvSpPr>
-        <p:spPr>
-          <a:xfrm>
-            <a:off x="868680" y="1417320"/>
-            <a:ext cx="6675120" cy="4434840"/>
+            <a:endParaRPr lang="en-US" sz="3400" dirty="0"/>
+          </a:p>
+        </p:txBody>
+      </p:sp>
+      <p:sp>
+        <p:nvSpPr>
+          <p:cNvPr id="11" name="Text 9"/>
+          <p:cNvSpPr/>
+          <p:nvPr/>
+        </p:nvSpPr>
+        <p:spPr>
+          <a:xfrm>
+            <a:off x="868680" y="1508760"/>
+            <a:ext cx="6537960" cy="4160520"/>
           </a:xfrm>
           <a:prstGeom prst="rect">
             <a:avLst/>
@@ -14057,7 +15247,7 @@
           <a:lstStyle/>
           <a:p>
             <a:r>
-              <a:rPr lang="en-US" sz="1700" dirty="0">
+              <a:rPr lang="en-US" sz="2100" dirty="0">
                 <a:solidFill>
                   <a:srgbClr val="17364A"/>
                 </a:solidFill>
@@ -14067,11 +15257,11 @@
               </a:rPr>
               <a:t>Agentic AI matters because it shifts AI from generating outputs to participating in workflows.</a:t>
             </a:r>
-            <a:endParaRPr lang="en-US" sz="1700" dirty="0"/>
-          </a:p>
-          <a:p>
-            <a:r>
-              <a:rPr lang="en-US" sz="1700" dirty="0">
+            <a:endParaRPr lang="en-US" sz="2100" dirty="0"/>
+          </a:p>
+          <a:p>
+            <a:r>
+              <a:rPr lang="en-US" sz="2100" dirty="0">
                 <a:solidFill>
                   <a:srgbClr val="17364A"/>
                 </a:solidFill>
@@ -14081,11 +15271,11 @@
               </a:rPr>
               <a:t>A chatbot that drafts a message is one level of risk.</a:t>
             </a:r>
-            <a:endParaRPr lang="en-US" sz="1700" dirty="0"/>
-          </a:p>
-          <a:p>
-            <a:r>
-              <a:rPr lang="en-US" sz="1700" dirty="0">
+            <a:endParaRPr lang="en-US" sz="2100" dirty="0"/>
+          </a:p>
+          <a:p>
+            <a:r>
+              <a:rPr lang="en-US" sz="2100" dirty="0">
                 <a:solidFill>
                   <a:srgbClr val="17364A"/>
                 </a:solidFill>
@@ -14093,29 +15283,15 @@
                 <a:ea typeface="Aptos" pitchFamily="34" charset="-122"/>
                 <a:cs typeface="Aptos" pitchFamily="34" charset="-120"/>
               </a:rPr>
-              <a:t>An agent that sends the message, updates a case record, creates a task, or notifies a partner is a different level of risk.</a:t>
-            </a:r>
-            <a:endParaRPr lang="en-US" sz="1700" dirty="0"/>
-          </a:p>
-          <a:p>
-            <a:r>
-              <a:rPr lang="en-US" sz="1700" dirty="0">
-                <a:solidFill>
-                  <a:srgbClr val="17364A"/>
-                </a:solidFill>
-                <a:latin typeface="Aptos" pitchFamily="34" charset="0"/>
-                <a:ea typeface="Aptos" pitchFamily="34" charset="-122"/>
-                <a:cs typeface="Aptos" pitchFamily="34" charset="-120"/>
-              </a:rPr>
-              <a:t>Action-taking systems require explicit governance because errors can propagate quickly.</a:t>
-            </a:r>
-            <a:endParaRPr lang="en-US" sz="1700" dirty="0"/>
-          </a:p>
-        </p:txBody>
-      </p:sp>
-      <p:sp>
-        <p:nvSpPr>
-          <p:cNvPr id="11" name="Shape 9"/>
+              <a:t>An agent that sends the message, updates a case record, creates a task, or notifies a partner is a.</a:t>
+            </a:r>
+            <a:endParaRPr lang="en-US" sz="2100" dirty="0"/>
+          </a:p>
+        </p:txBody>
+      </p:sp>
+      <p:sp>
+        <p:nvSpPr>
+          <p:cNvPr id="12" name="Shape 10"/>
           <p:cNvSpPr/>
           <p:nvPr/>
         </p:nvSpPr>
@@ -14142,14 +15318,14 @@
       </p:sp>
       <p:sp>
         <p:nvSpPr>
-          <p:cNvPr id="12" name="Text 10"/>
+          <p:cNvPr id="13" name="Text 11"/>
           <p:cNvSpPr/>
           <p:nvPr/>
         </p:nvSpPr>
         <p:spPr>
           <a:xfrm>
             <a:off x="8074152" y="1563624"/>
-            <a:ext cx="2825496" cy="201168"/>
+            <a:ext cx="2825496" cy="256032"/>
           </a:xfrm>
           <a:prstGeom prst="rect">
             <a:avLst/>
@@ -14165,7 +15341,7 @@
               <a:buNone/>
             </a:pPr>
             <a:r>
-              <a:rPr lang="en-US" sz="950" b="1" dirty="0">
+              <a:rPr lang="en-US" sz="1300" b="1" dirty="0">
                 <a:solidFill>
                   <a:srgbClr val="0068B7"/>
                 </a:solidFill>
@@ -14175,20 +15351,20 @@
               </a:rPr>
               <a:t>Key idea</a:t>
             </a:r>
-            <a:endParaRPr lang="en-US" sz="950" dirty="0"/>
-          </a:p>
-        </p:txBody>
-      </p:sp>
-      <p:sp>
-        <p:nvSpPr>
-          <p:cNvPr id="13" name="Text 11"/>
-          <p:cNvSpPr/>
-          <p:nvPr/>
-        </p:nvSpPr>
-        <p:spPr>
-          <a:xfrm>
-            <a:off x="8074152" y="1856232"/>
-            <a:ext cx="2825496" cy="1261872"/>
+            <a:endParaRPr lang="en-US" sz="1300" dirty="0"/>
+          </a:p>
+        </p:txBody>
+      </p:sp>
+      <p:sp>
+        <p:nvSpPr>
+          <p:cNvPr id="14" name="Text 12"/>
+          <p:cNvSpPr/>
+          <p:nvPr/>
+        </p:nvSpPr>
+        <p:spPr>
+          <a:xfrm>
+            <a:off x="8074152" y="1920240"/>
+            <a:ext cx="2825496" cy="1188720"/>
           </a:xfrm>
           <a:prstGeom prst="rect">
             <a:avLst/>
@@ -14206,7 +15382,7 @@
               <a:buNone/>
             </a:pPr>
             <a:r>
-              <a:rPr lang="en-US" sz="1250" dirty="0">
+              <a:rPr lang="en-US" sz="1550" dirty="0">
                 <a:solidFill>
                   <a:srgbClr val="17364A"/>
                 </a:solidFill>
@@ -14216,13 +15392,13 @@
               </a:rPr>
               <a:t>Agentic AI matters because it shifts AI from generating outputs to participating in workflows.</a:t>
             </a:r>
-            <a:endParaRPr lang="en-US" sz="1250" dirty="0"/>
-          </a:p>
-        </p:txBody>
-      </p:sp>
-      <p:sp>
-        <p:nvSpPr>
-          <p:cNvPr id="14" name="Shape 12"/>
+            <a:endParaRPr lang="en-US" sz="1550" dirty="0"/>
+          </a:p>
+        </p:txBody>
+      </p:sp>
+      <p:sp>
+        <p:nvSpPr>
+          <p:cNvPr id="15" name="Shape 13"/>
           <p:cNvSpPr/>
           <p:nvPr/>
         </p:nvSpPr>
@@ -14249,14 +15425,14 @@
       </p:sp>
       <p:sp>
         <p:nvSpPr>
-          <p:cNvPr id="15" name="Text 13"/>
+          <p:cNvPr id="16" name="Text 14"/>
           <p:cNvSpPr/>
           <p:nvPr/>
         </p:nvSpPr>
         <p:spPr>
           <a:xfrm>
             <a:off x="8074152" y="3666744"/>
-            <a:ext cx="2825496" cy="201168"/>
+            <a:ext cx="2825496" cy="256032"/>
           </a:xfrm>
           <a:prstGeom prst="rect">
             <a:avLst/>
@@ -14272,7 +15448,7 @@
               <a:buNone/>
             </a:pPr>
             <a:r>
-              <a:rPr lang="en-US" sz="950" b="1" dirty="0">
+              <a:rPr lang="en-US" sz="1300" b="1" dirty="0">
                 <a:solidFill>
                   <a:srgbClr val="0068B7"/>
                 </a:solidFill>
@@ -14282,20 +15458,20 @@
               </a:rPr>
               <a:t>Use this for</a:t>
             </a:r>
-            <a:endParaRPr lang="en-US" sz="950" dirty="0"/>
-          </a:p>
-        </p:txBody>
-      </p:sp>
-      <p:sp>
-        <p:nvSpPr>
-          <p:cNvPr id="16" name="Text 14"/>
-          <p:cNvSpPr/>
-          <p:nvPr/>
-        </p:nvSpPr>
-        <p:spPr>
-          <a:xfrm>
-            <a:off x="8074152" y="3959352"/>
-            <a:ext cx="2825496" cy="1170432"/>
+            <a:endParaRPr lang="en-US" sz="1300" dirty="0"/>
+          </a:p>
+        </p:txBody>
+      </p:sp>
+      <p:sp>
+        <p:nvSpPr>
+          <p:cNvPr id="17" name="Text 15"/>
+          <p:cNvSpPr/>
+          <p:nvPr/>
+        </p:nvSpPr>
+        <p:spPr>
+          <a:xfrm>
+            <a:off x="8074152" y="4023360"/>
+            <a:ext cx="2825496" cy="1097280"/>
           </a:xfrm>
           <a:prstGeom prst="rect">
             <a:avLst/>
@@ -14313,7 +15489,7 @@
               <a:buNone/>
             </a:pPr>
             <a:r>
-              <a:rPr lang="en-US" sz="1250" dirty="0">
+              <a:rPr lang="en-US" sz="1550" dirty="0">
                 <a:solidFill>
                   <a:srgbClr val="17364A"/>
                 </a:solidFill>
@@ -14323,7 +15499,7 @@
               </a:rPr>
               <a:t>Connect the concept to public health decisions, safeguards, documentation, or implementation work.</a:t>
             </a:r>
-            <a:endParaRPr lang="en-US" sz="1250" dirty="0"/>
+            <a:endParaRPr lang="en-US" sz="1550" dirty="0"/>
           </a:p>
         </p:txBody>
       </p:sp>
@@ -14520,7 +15696,7 @@
                 <a:ea typeface="Aptos" pitchFamily="34" charset="-122"/>
                 <a:cs typeface="Aptos" pitchFamily="34" charset="-120"/>
               </a:rPr>
-              <a:t>© Paula Soper</a:t>
+              <a:t>Â© Paula Soper</a:t>
             </a:r>
             <a:endParaRPr lang="en-US" sz="800" dirty="0"/>
           </a:p>
@@ -14528,7 +15704,46 @@
       </p:sp>
       <p:sp>
         <p:nvSpPr>
-          <p:cNvPr id="7" name="Shape 5"/>
+          <p:cNvPr id="7" name="Text 5"/>
+          <p:cNvSpPr/>
+          <p:nvPr/>
+        </p:nvSpPr>
+        <p:spPr>
+          <a:xfrm>
+            <a:off x="11137392" y="6510528"/>
+            <a:ext cx="411480" cy="201168"/>
+          </a:xfrm>
+          <a:prstGeom prst="rect">
+            <a:avLst/>
+          </a:prstGeom>
+          <a:noFill/>
+          <a:ln/>
+        </p:spPr>
+        <p:txBody>
+          <a:bodyPr wrap="square" lIns="0" tIns="0" rIns="0" bIns="0" rtlCol="0" anchor="ctr"/>
+          <a:lstStyle/>
+          <a:p>
+            <a:pPr algn="r" indent="0" marL="0">
+              <a:buNone/>
+            </a:pPr>
+            <a:r>
+              <a:rPr lang="en-US" sz="900" dirty="0">
+                <a:solidFill>
+                  <a:srgbClr val="5F7181"/>
+                </a:solidFill>
+                <a:latin typeface="Aptos" pitchFamily="34" charset="0"/>
+                <a:ea typeface="Aptos" pitchFamily="34" charset="-122"/>
+                <a:cs typeface="Aptos" pitchFamily="34" charset="-120"/>
+              </a:rPr>
+              <a:t>9</a:t>
+            </a:r>
+            <a:endParaRPr lang="en-US" sz="900" dirty="0"/>
+          </a:p>
+        </p:txBody>
+      </p:sp>
+      <p:sp>
+        <p:nvSpPr>
+          <p:cNvPr id="8" name="Shape 6"/>
           <p:cNvSpPr/>
           <p:nvPr/>
         </p:nvSpPr>
@@ -14553,7 +15768,7 @@
       </p:sp>
       <p:sp>
         <p:nvSpPr>
-          <p:cNvPr id="8" name="Text 6"/>
+          <p:cNvPr id="9" name="Text 7"/>
           <p:cNvSpPr/>
           <p:nvPr/>
         </p:nvSpPr>
@@ -14592,14 +15807,14 @@
       </p:sp>
       <p:sp>
         <p:nvSpPr>
-          <p:cNvPr id="9" name="Text 7"/>
+          <p:cNvPr id="10" name="Text 8"/>
           <p:cNvSpPr/>
           <p:nvPr/>
         </p:nvSpPr>
         <p:spPr>
           <a:xfrm>
             <a:off x="640080" y="621792"/>
-            <a:ext cx="10881360" cy="566928"/>
+            <a:ext cx="10881360" cy="713232"/>
           </a:xfrm>
           <a:prstGeom prst="rect">
             <a:avLst/>
@@ -14617,7 +15832,7 @@
               <a:buNone/>
             </a:pPr>
             <a:r>
-              <a:rPr lang="en-US" sz="2700" b="1" dirty="0">
+              <a:rPr lang="en-US" sz="3400" b="1" dirty="0">
                 <a:solidFill>
                   <a:srgbClr val="003A63"/>
                 </a:solidFill>
@@ -14627,20 +15842,20 @@
               </a:rPr>
               <a:t>Public Health Example</a:t>
             </a:r>
-            <a:endParaRPr lang="en-US" sz="2700" dirty="0"/>
-          </a:p>
-        </p:txBody>
-      </p:sp>
-      <p:sp>
-        <p:nvSpPr>
-          <p:cNvPr id="10" name="Text 8"/>
-          <p:cNvSpPr/>
-          <p:nvPr/>
-        </p:nvSpPr>
-        <p:spPr>
-          <a:xfrm>
-            <a:off x="868680" y="1417320"/>
-            <a:ext cx="6675120" cy="4434840"/>
+            <a:endParaRPr lang="en-US" sz="3400" dirty="0"/>
+          </a:p>
+        </p:txBody>
+      </p:sp>
+      <p:sp>
+        <p:nvSpPr>
+          <p:cNvPr id="11" name="Text 9"/>
+          <p:cNvSpPr/>
+          <p:nvPr/>
+        </p:nvSpPr>
+        <p:spPr>
+          <a:xfrm>
+            <a:off x="868680" y="1508760"/>
+            <a:ext cx="6537960" cy="4160520"/>
           </a:xfrm>
           <a:prstGeom prst="rect">
             <a:avLst/>
@@ -14655,7 +15870,7 @@
           <a:lstStyle/>
           <a:p>
             <a:r>
-              <a:rPr lang="en-US" sz="1700" dirty="0">
+              <a:rPr lang="en-US" sz="2100" dirty="0">
                 <a:solidFill>
                   <a:srgbClr val="17364A"/>
                 </a:solidFill>
@@ -14665,11 +15880,11 @@
               </a:rPr>
               <a:t>A health department may consider an agentic workflow for incoming public health inquiries.</a:t>
             </a:r>
-            <a:endParaRPr lang="en-US" sz="1700" dirty="0"/>
-          </a:p>
-          <a:p>
-            <a:r>
-              <a:rPr lang="en-US" sz="1700" dirty="0">
+            <a:endParaRPr lang="en-US" sz="2100" dirty="0"/>
+          </a:p>
+          <a:p>
+            <a:r>
+              <a:rPr lang="en-US" sz="2100" dirty="0">
                 <a:solidFill>
                   <a:srgbClr val="17364A"/>
                 </a:solidFill>
@@ -14677,13 +15892,13 @@
                 <a:ea typeface="Aptos" pitchFamily="34" charset="-122"/>
                 <a:cs typeface="Aptos" pitchFamily="34" charset="-120"/>
               </a:rPr>
-              <a:t>The agent could classify the inquiry, retrieve relevant approved guidance, draft a response, create a ticket, and route the.</a:t>
-            </a:r>
-            <a:endParaRPr lang="en-US" sz="1700" dirty="0"/>
-          </a:p>
-          <a:p>
-            <a:r>
-              <a:rPr lang="en-US" sz="1700" dirty="0">
+              <a:t>The agent could classify the inquiry, retrieve relevant approved guidance, draft a response, create a.</a:t>
+            </a:r>
+            <a:endParaRPr lang="en-US" sz="2100" dirty="0"/>
+          </a:p>
+          <a:p>
+            <a:r>
+              <a:rPr lang="en-US" sz="2100" dirty="0">
                 <a:solidFill>
                   <a:srgbClr val="17364A"/>
                 </a:solidFill>
@@ -14693,27 +15908,13 @@
               </a:rPr>
               <a:t>For low-risk general information, the agent might prepare a draft for staff review.</a:t>
             </a:r>
-            <a:endParaRPr lang="en-US" sz="1700" dirty="0"/>
-          </a:p>
-          <a:p>
-            <a:r>
-              <a:rPr lang="en-US" sz="1700" dirty="0">
-                <a:solidFill>
-                  <a:srgbClr val="17364A"/>
-                </a:solidFill>
-                <a:latin typeface="Aptos" pitchFamily="34" charset="0"/>
-                <a:ea typeface="Aptos" pitchFamily="34" charset="-122"/>
-                <a:cs typeface="Aptos" pitchFamily="34" charset="-120"/>
-              </a:rPr>
-              <a:t>For sensitive complaints, reportable disease concerns, media inquiries, or legal issues, the agent should escalate rather.</a:t>
-            </a:r>
-            <a:endParaRPr lang="en-US" sz="1700" dirty="0"/>
-          </a:p>
-        </p:txBody>
-      </p:sp>
-      <p:sp>
-        <p:nvSpPr>
-          <p:cNvPr id="11" name="Shape 9"/>
+            <a:endParaRPr lang="en-US" sz="2100" dirty="0"/>
+          </a:p>
+        </p:txBody>
+      </p:sp>
+      <p:sp>
+        <p:nvSpPr>
+          <p:cNvPr id="12" name="Shape 10"/>
           <p:cNvSpPr/>
           <p:nvPr/>
         </p:nvSpPr>
@@ -14740,14 +15941,14 @@
       </p:sp>
       <p:sp>
         <p:nvSpPr>
-          <p:cNvPr id="12" name="Text 10"/>
+          <p:cNvPr id="13" name="Text 11"/>
           <p:cNvSpPr/>
           <p:nvPr/>
         </p:nvSpPr>
         <p:spPr>
           <a:xfrm>
             <a:off x="8074152" y="1563624"/>
-            <a:ext cx="2825496" cy="201168"/>
+            <a:ext cx="2825496" cy="256032"/>
           </a:xfrm>
           <a:prstGeom prst="rect">
             <a:avLst/>
@@ -14763,7 +15964,7 @@
               <a:buNone/>
             </a:pPr>
             <a:r>
-              <a:rPr lang="en-US" sz="950" b="1" dirty="0">
+              <a:rPr lang="en-US" sz="1300" b="1" dirty="0">
                 <a:solidFill>
                   <a:srgbClr val="0068B7"/>
                 </a:solidFill>
@@ -14773,20 +15974,20 @@
               </a:rPr>
               <a:t>Key idea</a:t>
             </a:r>
-            <a:endParaRPr lang="en-US" sz="950" dirty="0"/>
-          </a:p>
-        </p:txBody>
-      </p:sp>
-      <p:sp>
-        <p:nvSpPr>
-          <p:cNvPr id="13" name="Text 11"/>
-          <p:cNvSpPr/>
-          <p:nvPr/>
-        </p:nvSpPr>
-        <p:spPr>
-          <a:xfrm>
-            <a:off x="8074152" y="1856232"/>
-            <a:ext cx="2825496" cy="1261872"/>
+            <a:endParaRPr lang="en-US" sz="1300" dirty="0"/>
+          </a:p>
+        </p:txBody>
+      </p:sp>
+      <p:sp>
+        <p:nvSpPr>
+          <p:cNvPr id="14" name="Text 12"/>
+          <p:cNvSpPr/>
+          <p:nvPr/>
+        </p:nvSpPr>
+        <p:spPr>
+          <a:xfrm>
+            <a:off x="8074152" y="1920240"/>
+            <a:ext cx="2825496" cy="1188720"/>
           </a:xfrm>
           <a:prstGeom prst="rect">
             <a:avLst/>
@@ -14804,7 +16005,7 @@
               <a:buNone/>
             </a:pPr>
             <a:r>
-              <a:rPr lang="en-US" sz="1250" dirty="0">
+              <a:rPr lang="en-US" sz="1550" dirty="0">
                 <a:solidFill>
                   <a:srgbClr val="17364A"/>
                 </a:solidFill>
@@ -14814,13 +16015,13 @@
               </a:rPr>
               <a:t>A health department may consider an agentic workflow for incoming public health inquiries.</a:t>
             </a:r>
-            <a:endParaRPr lang="en-US" sz="1250" dirty="0"/>
-          </a:p>
-        </p:txBody>
-      </p:sp>
-      <p:sp>
-        <p:nvSpPr>
-          <p:cNvPr id="14" name="Shape 12"/>
+            <a:endParaRPr lang="en-US" sz="1550" dirty="0"/>
+          </a:p>
+        </p:txBody>
+      </p:sp>
+      <p:sp>
+        <p:nvSpPr>
+          <p:cNvPr id="15" name="Shape 13"/>
           <p:cNvSpPr/>
           <p:nvPr/>
         </p:nvSpPr>
@@ -14847,14 +16048,14 @@
       </p:sp>
       <p:sp>
         <p:nvSpPr>
-          <p:cNvPr id="15" name="Text 13"/>
+          <p:cNvPr id="16" name="Text 14"/>
           <p:cNvSpPr/>
           <p:nvPr/>
         </p:nvSpPr>
         <p:spPr>
           <a:xfrm>
             <a:off x="8074152" y="3666744"/>
-            <a:ext cx="2825496" cy="201168"/>
+            <a:ext cx="2825496" cy="256032"/>
           </a:xfrm>
           <a:prstGeom prst="rect">
             <a:avLst/>
@@ -14870,7 +16071,7 @@
               <a:buNone/>
             </a:pPr>
             <a:r>
-              <a:rPr lang="en-US" sz="950" b="1" dirty="0">
+              <a:rPr lang="en-US" sz="1300" b="1" dirty="0">
                 <a:solidFill>
                   <a:srgbClr val="0068B7"/>
                 </a:solidFill>
@@ -14880,20 +16081,20 @@
               </a:rPr>
               <a:t>Use this for</a:t>
             </a:r>
-            <a:endParaRPr lang="en-US" sz="950" dirty="0"/>
-          </a:p>
-        </p:txBody>
-      </p:sp>
-      <p:sp>
-        <p:nvSpPr>
-          <p:cNvPr id="16" name="Text 14"/>
-          <p:cNvSpPr/>
-          <p:nvPr/>
-        </p:nvSpPr>
-        <p:spPr>
-          <a:xfrm>
-            <a:off x="8074152" y="3959352"/>
-            <a:ext cx="2825496" cy="1170432"/>
+            <a:endParaRPr lang="en-US" sz="1300" dirty="0"/>
+          </a:p>
+        </p:txBody>
+      </p:sp>
+      <p:sp>
+        <p:nvSpPr>
+          <p:cNvPr id="17" name="Text 15"/>
+          <p:cNvSpPr/>
+          <p:nvPr/>
+        </p:nvSpPr>
+        <p:spPr>
+          <a:xfrm>
+            <a:off x="8074152" y="4023360"/>
+            <a:ext cx="2825496" cy="1097280"/>
           </a:xfrm>
           <a:prstGeom prst="rect">
             <a:avLst/>
@@ -14911,7 +16112,7 @@
               <a:buNone/>
             </a:pPr>
             <a:r>
-              <a:rPr lang="en-US" sz="1250" dirty="0">
+              <a:rPr lang="en-US" sz="1550" dirty="0">
                 <a:solidFill>
                   <a:srgbClr val="17364A"/>
                 </a:solidFill>
@@ -14921,7 +16122,7 @@
               </a:rPr>
               <a:t>Connect the concept to public health decisions, safeguards, documentation, or implementation work.</a:t>
             </a:r>
-            <a:endParaRPr lang="en-US" sz="1250" dirty="0"/>
+            <a:endParaRPr lang="en-US" sz="1550" dirty="0"/>
           </a:p>
         </p:txBody>
       </p:sp>
